--- a/presentations/helpdesk-project.pptx
+++ b/presentations/helpdesk-project.pptx
@@ -1,34 +1,129 @@
 
 <file path=ppt/presentation.xml><?xml version="1.0" encoding="utf-8"?>
-<p:presentation xmlns:p="http://schemas.openxmlformats.org/presentationml/2006/main">
+<p:presentation xmlns:a="http://schemas.openxmlformats.org/drawingml/2006/main" xmlns:r="http://schemas.openxmlformats.org/officeDocument/2006/relationships" xmlns:p="http://schemas.openxmlformats.org/presentationml/2006/main">
   <p:sldMasterIdLst>
-    <p:sldMasterId xmlns:r="http://schemas.openxmlformats.org/officeDocument/2006/relationships" id="2147483648" r:id="R6b93ddf4d53e419b"/>
+    <p:sldMasterId id="2147483648" r:id="rId1"/>
   </p:sldMasterIdLst>
   <p:notesMasterIdLst>
-    <p:notesMasterId xmlns:r="http://schemas.openxmlformats.org/officeDocument/2006/relationships" r:id="R4f0b2315a8f140ea"/>
+    <p:notesMasterId r:id="rId11"/>
   </p:notesMasterIdLst>
   <p:sldIdLst>
-    <p:sldId xmlns:r="http://schemas.openxmlformats.org/officeDocument/2006/relationships" id="256" r:id="R79db0f2ddb854b5b"/>
-    <p:sldId xmlns:r="http://schemas.openxmlformats.org/officeDocument/2006/relationships" id="257" r:id="Rc8164102fbfd4bd2"/>
-    <p:sldId xmlns:r="http://schemas.openxmlformats.org/officeDocument/2006/relationships" id="258" r:id="R7259f6a202df4328"/>
-    <p:sldId xmlns:r="http://schemas.openxmlformats.org/officeDocument/2006/relationships" id="259" r:id="Reb289eac3ec540ee"/>
-    <p:sldId xmlns:r="http://schemas.openxmlformats.org/officeDocument/2006/relationships" id="260" r:id="Rfbf029bd229b4673"/>
-    <p:sldId xmlns:r="http://schemas.openxmlformats.org/officeDocument/2006/relationships" id="261" r:id="Rfc6e543f31b94adb"/>
-    <p:sldId xmlns:r="http://schemas.openxmlformats.org/officeDocument/2006/relationships" id="262" r:id="Rd4a6d2112e264080"/>
-    <p:sldId xmlns:r="http://schemas.openxmlformats.org/officeDocument/2006/relationships" id="263" r:id="R869590b309204bc9"/>
-    <p:sldId xmlns:r="http://schemas.openxmlformats.org/officeDocument/2006/relationships" id="264" r:id="R8d7a35d12ac94a9e"/>
+    <p:sldId id="256" r:id="rId2"/>
+    <p:sldId id="257" r:id="rId3"/>
+    <p:sldId id="258" r:id="rId4"/>
+    <p:sldId id="259" r:id="rId5"/>
+    <p:sldId id="265" r:id="rId6"/>
+    <p:sldId id="261" r:id="rId7"/>
+    <p:sldId id="262" r:id="rId8"/>
+    <p:sldId id="263" r:id="rId9"/>
+    <p:sldId id="264" r:id="rId10"/>
   </p:sldIdLst>
   <p:sldSz cx="12192000" cy="6858000"/>
   <p:notesSz cx="6858000" cy="9144000"/>
+  <p:defaultTextStyle>
+    <a:defPPr>
+      <a:defRPr lang="ru-RU"/>
+    </a:defPPr>
+    <a:lvl1pPr marL="0" algn="l" defTabSz="914400" rtl="0" eaLnBrk="1" latinLnBrk="0" hangingPunct="1">
+      <a:defRPr sz="1800" kern="1200">
+        <a:solidFill>
+          <a:schemeClr val="tx1"/>
+        </a:solidFill>
+        <a:latin typeface="+mn-lt"/>
+        <a:ea typeface="+mn-ea"/>
+        <a:cs typeface="+mn-cs"/>
+      </a:defRPr>
+    </a:lvl1pPr>
+    <a:lvl2pPr marL="457200" algn="l" defTabSz="914400" rtl="0" eaLnBrk="1" latinLnBrk="0" hangingPunct="1">
+      <a:defRPr sz="1800" kern="1200">
+        <a:solidFill>
+          <a:schemeClr val="tx1"/>
+        </a:solidFill>
+        <a:latin typeface="+mn-lt"/>
+        <a:ea typeface="+mn-ea"/>
+        <a:cs typeface="+mn-cs"/>
+      </a:defRPr>
+    </a:lvl2pPr>
+    <a:lvl3pPr marL="914400" algn="l" defTabSz="914400" rtl="0" eaLnBrk="1" latinLnBrk="0" hangingPunct="1">
+      <a:defRPr sz="1800" kern="1200">
+        <a:solidFill>
+          <a:schemeClr val="tx1"/>
+        </a:solidFill>
+        <a:latin typeface="+mn-lt"/>
+        <a:ea typeface="+mn-ea"/>
+        <a:cs typeface="+mn-cs"/>
+      </a:defRPr>
+    </a:lvl3pPr>
+    <a:lvl4pPr marL="1371600" algn="l" defTabSz="914400" rtl="0" eaLnBrk="1" latinLnBrk="0" hangingPunct="1">
+      <a:defRPr sz="1800" kern="1200">
+        <a:solidFill>
+          <a:schemeClr val="tx1"/>
+        </a:solidFill>
+        <a:latin typeface="+mn-lt"/>
+        <a:ea typeface="+mn-ea"/>
+        <a:cs typeface="+mn-cs"/>
+      </a:defRPr>
+    </a:lvl4pPr>
+    <a:lvl5pPr marL="1828800" algn="l" defTabSz="914400" rtl="0" eaLnBrk="1" latinLnBrk="0" hangingPunct="1">
+      <a:defRPr sz="1800" kern="1200">
+        <a:solidFill>
+          <a:schemeClr val="tx1"/>
+        </a:solidFill>
+        <a:latin typeface="+mn-lt"/>
+        <a:ea typeface="+mn-ea"/>
+        <a:cs typeface="+mn-cs"/>
+      </a:defRPr>
+    </a:lvl5pPr>
+    <a:lvl6pPr marL="2286000" algn="l" defTabSz="914400" rtl="0" eaLnBrk="1" latinLnBrk="0" hangingPunct="1">
+      <a:defRPr sz="1800" kern="1200">
+        <a:solidFill>
+          <a:schemeClr val="tx1"/>
+        </a:solidFill>
+        <a:latin typeface="+mn-lt"/>
+        <a:ea typeface="+mn-ea"/>
+        <a:cs typeface="+mn-cs"/>
+      </a:defRPr>
+    </a:lvl6pPr>
+    <a:lvl7pPr marL="2743200" algn="l" defTabSz="914400" rtl="0" eaLnBrk="1" latinLnBrk="0" hangingPunct="1">
+      <a:defRPr sz="1800" kern="1200">
+        <a:solidFill>
+          <a:schemeClr val="tx1"/>
+        </a:solidFill>
+        <a:latin typeface="+mn-lt"/>
+        <a:ea typeface="+mn-ea"/>
+        <a:cs typeface="+mn-cs"/>
+      </a:defRPr>
+    </a:lvl7pPr>
+    <a:lvl8pPr marL="3200400" algn="l" defTabSz="914400" rtl="0" eaLnBrk="1" latinLnBrk="0" hangingPunct="1">
+      <a:defRPr sz="1800" kern="1200">
+        <a:solidFill>
+          <a:schemeClr val="tx1"/>
+        </a:solidFill>
+        <a:latin typeface="+mn-lt"/>
+        <a:ea typeface="+mn-ea"/>
+        <a:cs typeface="+mn-cs"/>
+      </a:defRPr>
+    </a:lvl8pPr>
+    <a:lvl9pPr marL="3657600" algn="l" defTabSz="914400" rtl="0" eaLnBrk="1" latinLnBrk="0" hangingPunct="1">
+      <a:defRPr sz="1800" kern="1200">
+        <a:solidFill>
+          <a:schemeClr val="tx1"/>
+        </a:solidFill>
+        <a:latin typeface="+mn-lt"/>
+        <a:ea typeface="+mn-ea"/>
+        <a:cs typeface="+mn-cs"/>
+      </a:defRPr>
+    </a:lvl9pPr>
+  </p:defaultTextStyle>
 </p:presentation>
 </file>
 
 <file path=ppt/notesMasters/notesMaster1.xml><?xml version="1.0" encoding="utf-8"?>
-<p:notesMaster xmlns:p="http://schemas.openxmlformats.org/presentationml/2006/main">
+<p:notesMaster xmlns:a="http://schemas.openxmlformats.org/drawingml/2006/main" xmlns:r="http://schemas.openxmlformats.org/officeDocument/2006/relationships" xmlns:p="http://schemas.openxmlformats.org/presentationml/2006/main">
   <p:cSld>
     <p:bg>
       <p:bgRef idx="1001">
-        <a:schemeClr xmlns:a="http://schemas.openxmlformats.org/drawingml/2006/main" val="bg1"/>
+        <a:schemeClr val="bg1"/>
       </p:bgRef>
     </p:bg>
     <p:spTree>
@@ -38,380 +133,164 @@
         <p:nvPr/>
       </p:nvGrpSpPr>
       <p:grpSpPr>
-        <a:xfrm xmlns:a="http://schemas.openxmlformats.org/drawingml/2006/main"/>
+        <a:xfrm>
+          <a:off x="0" y="0"/>
+          <a:ext cx="0" cy="0"/>
+          <a:chOff x="0" y="0"/>
+          <a:chExt cx="0" cy="0"/>
+        </a:xfrm>
       </p:grpSpPr>
       <p:sp>
         <p:nvSpPr>
           <p:cNvPr id="2" name="Header Placeholder"/>
-          <p:cNvSpPr/>
+          <p:cNvSpPr>
+            <a:spLocks noGrp="1"/>
+          </p:cNvSpPr>
           <p:nvPr>
             <p:ph type="hdr" sz="quarter"/>
           </p:nvPr>
         </p:nvSpPr>
         <p:spPr>
-          <a:prstGeom xmlns:a="http://schemas.openxmlformats.org/drawingml/2006/main" prst="rect">
+          <a:prstGeom prst="rect">
             <a:avLst/>
           </a:prstGeom>
         </p:spPr>
         <p:txBody>
-          <a:bodyPr xmlns:a="http://schemas.openxmlformats.org/drawingml/2006/main"/>
-          <a:lstStyle xmlns:a="http://schemas.openxmlformats.org/drawingml/2006/main"/>
-          <a:p xmlns:a="http://schemas.openxmlformats.org/drawingml/2006/main"/>
+          <a:bodyPr/>
+          <a:lstStyle/>
+          <a:p>
+            <a:endParaRPr/>
+          </a:p>
         </p:txBody>
       </p:sp>
       <p:sp>
         <p:nvSpPr>
           <p:cNvPr id="3" name="Date Placeholder"/>
-          <p:cNvSpPr/>
+          <p:cNvSpPr>
+            <a:spLocks noGrp="1"/>
+          </p:cNvSpPr>
           <p:nvPr>
             <p:ph type="dt" sz="quarter" idx="1"/>
           </p:nvPr>
         </p:nvSpPr>
         <p:spPr>
-          <a:prstGeom xmlns:a="http://schemas.openxmlformats.org/drawingml/2006/main" prst="rect">
+          <a:prstGeom prst="rect">
             <a:avLst/>
           </a:prstGeom>
         </p:spPr>
         <p:txBody>
-          <a:bodyPr xmlns:a="http://schemas.openxmlformats.org/drawingml/2006/main"/>
-          <a:lstStyle xmlns:a="http://schemas.openxmlformats.org/drawingml/2006/main"/>
-          <a:p xmlns:a="http://schemas.openxmlformats.org/drawingml/2006/main"/>
+          <a:bodyPr/>
+          <a:lstStyle/>
+          <a:p>
+            <a:endParaRPr/>
+          </a:p>
         </p:txBody>
       </p:sp>
       <p:sp>
         <p:nvSpPr>
           <p:cNvPr id="4" name="Slide Image Placeholder"/>
-          <p:cNvSpPr/>
+          <p:cNvSpPr>
+            <a:spLocks noGrp="1" noRot="1" noChangeAspect="1"/>
+          </p:cNvSpPr>
           <p:nvPr>
             <p:ph type="sldImg" idx="2"/>
           </p:nvPr>
         </p:nvSpPr>
         <p:spPr>
-          <a:prstGeom xmlns:a="http://schemas.openxmlformats.org/drawingml/2006/main" prst="rect">
+          <a:prstGeom prst="rect">
             <a:avLst/>
           </a:prstGeom>
         </p:spPr>
         <p:txBody>
-          <a:bodyPr xmlns:a="http://schemas.openxmlformats.org/drawingml/2006/main"/>
-          <a:lstStyle xmlns:a="http://schemas.openxmlformats.org/drawingml/2006/main"/>
-          <a:p xmlns:a="http://schemas.openxmlformats.org/drawingml/2006/main"/>
+          <a:bodyPr/>
+          <a:lstStyle/>
+          <a:p>
+            <a:endParaRPr/>
+          </a:p>
         </p:txBody>
       </p:sp>
       <p:sp>
         <p:nvSpPr>
           <p:cNvPr id="5" name="Notes Placeholder"/>
-          <p:cNvSpPr/>
+          <p:cNvSpPr>
+            <a:spLocks noGrp="1"/>
+          </p:cNvSpPr>
           <p:nvPr>
             <p:ph type="body" sz="quarter" idx="3"/>
           </p:nvPr>
         </p:nvSpPr>
         <p:spPr>
-          <a:prstGeom xmlns:a="http://schemas.openxmlformats.org/drawingml/2006/main" prst="rect">
+          <a:prstGeom prst="rect">
             <a:avLst/>
           </a:prstGeom>
         </p:spPr>
         <p:txBody>
-          <a:bodyPr xmlns:a="http://schemas.openxmlformats.org/drawingml/2006/main"/>
-          <a:lstStyle xmlns:a="http://schemas.openxmlformats.org/drawingml/2006/main"/>
-          <a:p xmlns:a="http://schemas.openxmlformats.org/drawingml/2006/main"/>
+          <a:bodyPr/>
+          <a:lstStyle/>
+          <a:p>
+            <a:endParaRPr/>
+          </a:p>
         </p:txBody>
       </p:sp>
       <p:sp>
         <p:nvSpPr>
           <p:cNvPr id="6" name="Footer Placeholder"/>
-          <p:cNvSpPr/>
+          <p:cNvSpPr>
+            <a:spLocks noGrp="1"/>
+          </p:cNvSpPr>
           <p:nvPr>
             <p:ph type="ftr" sz="quarter" idx="4"/>
           </p:nvPr>
         </p:nvSpPr>
         <p:spPr>
-          <a:prstGeom xmlns:a="http://schemas.openxmlformats.org/drawingml/2006/main" prst="rect">
+          <a:prstGeom prst="rect">
             <a:avLst/>
           </a:prstGeom>
         </p:spPr>
         <p:txBody>
-          <a:bodyPr xmlns:a="http://schemas.openxmlformats.org/drawingml/2006/main"/>
-          <a:lstStyle xmlns:a="http://schemas.openxmlformats.org/drawingml/2006/main"/>
-          <a:p xmlns:a="http://schemas.openxmlformats.org/drawingml/2006/main"/>
+          <a:bodyPr/>
+          <a:lstStyle/>
+          <a:p>
+            <a:endParaRPr/>
+          </a:p>
         </p:txBody>
       </p:sp>
       <p:sp>
         <p:nvSpPr>
           <p:cNvPr id="7" name="Slide Number Placeholder"/>
-          <p:cNvSpPr/>
+          <p:cNvSpPr>
+            <a:spLocks noGrp="1"/>
+          </p:cNvSpPr>
           <p:nvPr>
             <p:ph type="sldNum" sz="quarter" idx="5"/>
           </p:nvPr>
         </p:nvSpPr>
         <p:spPr>
-          <a:prstGeom xmlns:a="http://schemas.openxmlformats.org/drawingml/2006/main" prst="rect">
+          <a:prstGeom prst="rect">
             <a:avLst/>
           </a:prstGeom>
         </p:spPr>
         <p:txBody>
-          <a:bodyPr xmlns:a="http://schemas.openxmlformats.org/drawingml/2006/main"/>
-          <a:lstStyle xmlns:a="http://schemas.openxmlformats.org/drawingml/2006/main"/>
-          <a:p xmlns:a="http://schemas.openxmlformats.org/drawingml/2006/main"/>
+          <a:bodyPr/>
+          <a:lstStyle/>
+          <a:p>
+            <a:endParaRPr/>
+          </a:p>
         </p:txBody>
       </p:sp>
     </p:spTree>
   </p:cSld>
   <p:clrMap bg1="lt1" tx1="dk1" bg2="lt2" tx2="dk2" accent1="accent1" accent2="accent2" accent3="accent3" accent4="accent4" accent5="accent5" accent6="accent6" hlink="hlink" folHlink="folHlink"/>
   <p:notesStyle>
-    <a:lvl1pPr xmlns:a="http://schemas.openxmlformats.org/drawingml/2006/main" marL="0" algn="l" defTabSz="914400" rtl="0" eaLnBrk="1" latinLnBrk="0" hangingPunct="1">
+    <a:lvl1pPr marL="0" algn="l" defTabSz="914400" rtl="0" eaLnBrk="1" latinLnBrk="0" hangingPunct="1">
       <a:defRPr sz="1200" kern="1200"/>
     </a:lvl1pPr>
   </p:notesStyle>
 </p:notesMaster>
 </file>
 
-<file path=ppt/notesMasters/theme/theme3.xml><?xml version="1.0" encoding="utf-8"?>
-<a:theme xmlns:a="http://schemas.openxmlformats.org/drawingml/2006/main" name="ChatGPT">
-  <a:themeElements>
-    <a:clrScheme name="ChatGPT">
-      <a:dk1>
-        <a:srgbClr val="000000"/>
-      </a:dk1>
-      <a:lt1>
-        <a:srgbClr val="FFFFFF"/>
-      </a:lt1>
-      <a:dk2>
-        <a:srgbClr val="0E2841"/>
-      </a:dk2>
-      <a:lt2>
-        <a:srgbClr val="E8E8E8"/>
-      </a:lt2>
-      <a:accent1>
-        <a:srgbClr val="156082"/>
-      </a:accent1>
-      <a:accent2>
-        <a:srgbClr val="E97132"/>
-      </a:accent2>
-      <a:accent3>
-        <a:srgbClr val="196B24"/>
-      </a:accent3>
-      <a:accent4>
-        <a:srgbClr val="0F9ED5"/>
-      </a:accent4>
-      <a:accent5>
-        <a:srgbClr val="A02B93"/>
-      </a:accent5>
-      <a:accent6>
-        <a:srgbClr val="4EA72E"/>
-      </a:accent6>
-      <a:hlink>
-        <a:srgbClr val="467886"/>
-      </a:hlink>
-      <a:folHlink>
-        <a:srgbClr val="96607D"/>
-      </a:folHlink>
-    </a:clrScheme>
-    <a:fontScheme name="">
-      <a:majorFont>
-        <a:latin typeface="Aptos"/>
-        <a:ea typeface=""/>
-        <a:cs typeface=""/>
-      </a:majorFont>
-      <a:minorFont>
-        <a:latin typeface="Aptos"/>
-        <a:ea typeface=""/>
-        <a:cs typeface=""/>
-      </a:minorFont>
-    </a:fontScheme>
-    <a:fmtScheme name="ChatGPT">
-      <a:fillStyleLst>
-        <a:solidFill>
-          <a:schemeClr val="phClr"/>
-        </a:solidFill>
-        <a:gradFill>
-          <a:gsLst>
-            <a:gs pos="0">
-              <a:schemeClr val="phClr">
-                <a:tint val="67000"/>
-                <a:lumMod val="110000"/>
-                <a:satMod val="105000"/>
-              </a:schemeClr>
-            </a:gs>
-            <a:gs pos="50000">
-              <a:schemeClr val="phClr">
-                <a:tint val="73000"/>
-                <a:lumMod val="105000"/>
-                <a:satMod val="103000"/>
-              </a:schemeClr>
-            </a:gs>
-            <a:gs pos="100000">
-              <a:schemeClr val="phClr">
-                <a:tint val="81000"/>
-                <a:lumMod val="105000"/>
-                <a:satMod val="109000"/>
-              </a:schemeClr>
-            </a:gs>
-          </a:gsLst>
-          <a:lin ang="5400000" scaled="0"/>
-        </a:gradFill>
-        <a:gradFill>
-          <a:gsLst>
-            <a:gs pos="0">
-              <a:schemeClr val="phClr">
-                <a:tint val="94000"/>
-                <a:lumMod val="102000"/>
-                <a:satMod val="103000"/>
-              </a:schemeClr>
-            </a:gs>
-            <a:gs pos="50000">
-              <a:schemeClr val="phClr">
-                <a:shade val="100000"/>
-                <a:lumMod val="100000"/>
-                <a:satMod val="110000"/>
-              </a:schemeClr>
-            </a:gs>
-            <a:gs pos="100000">
-              <a:schemeClr val="phClr">
-                <a:shade val="78000"/>
-                <a:lumMod val="99000"/>
-                <a:satMod val="120000"/>
-              </a:schemeClr>
-            </a:gs>
-          </a:gsLst>
-          <a:lin ang="5400000" scaled="0"/>
-        </a:gradFill>
-      </a:fillStyleLst>
-      <a:lnStyleLst>
-        <a:ln w="12700">
-          <a:solidFill>
-            <a:schemeClr val="phClr"/>
-          </a:solidFill>
-          <a:prstDash val="solid"/>
-        </a:ln>
-        <a:ln w="19050">
-          <a:solidFill>
-            <a:schemeClr val="phClr"/>
-          </a:solidFill>
-          <a:prstDash val="solid"/>
-        </a:ln>
-        <a:ln w="25400">
-          <a:solidFill>
-            <a:schemeClr val="phClr"/>
-          </a:solidFill>
-          <a:prstDash val="solid"/>
-        </a:ln>
-      </a:lnStyleLst>
-      <a:effectStyleLst>
-        <a:effectStyle>
-          <a:effectLst/>
-        </a:effectStyle>
-        <a:effectStyle>
-          <a:effectLst/>
-        </a:effectStyle>
-        <a:effectStyle>
-          <a:effectLst>
-            <a:outerShdw blurRad="57150" dist="19050" dir="5400000">
-              <a:srgbClr val="000000">
-                <a:alpha val="16000"/>
-              </a:srgbClr>
-            </a:outerShdw>
-          </a:effectLst>
-        </a:effectStyle>
-        <a:effectStyle>
-          <a:effectLst>
-            <a:outerShdw blurRad="19050" dist="9525" dir="5400000">
-              <a:srgbClr val="000000">
-                <a:alpha val="6000"/>
-              </a:srgbClr>
-            </a:outerShdw>
-          </a:effectLst>
-        </a:effectStyle>
-        <a:effectStyle>
-          <a:effectLst>
-            <a:outerShdw blurRad="28575" dist="9525" dir="5400000">
-              <a:srgbClr val="000000">
-                <a:alpha val="8000"/>
-              </a:srgbClr>
-            </a:outerShdw>
-          </a:effectLst>
-        </a:effectStyle>
-        <a:effectStyle>
-          <a:effectLst>
-            <a:outerShdw blurRad="57150" dist="19050" dir="5400000">
-              <a:srgbClr val="000000">
-                <a:alpha val="10000"/>
-              </a:srgbClr>
-            </a:outerShdw>
-          </a:effectLst>
-        </a:effectStyle>
-        <a:effectStyle>
-          <a:effectLst>
-            <a:outerShdw blurRad="114300" dist="38100" dir="5400000">
-              <a:srgbClr val="000000">
-                <a:alpha val="12000"/>
-              </a:srgbClr>
-            </a:outerShdw>
-          </a:effectLst>
-        </a:effectStyle>
-        <a:effectStyle>
-          <a:effectLst>
-            <a:outerShdw blurRad="171450" dist="57150" dir="5400000">
-              <a:srgbClr val="000000">
-                <a:alpha val="16000"/>
-              </a:srgbClr>
-            </a:outerShdw>
-          </a:effectLst>
-        </a:effectStyle>
-        <a:effectStyle>
-          <a:effectLst>
-            <a:outerShdw blurRad="266700" dist="95250" dir="5400000">
-              <a:srgbClr val="000000">
-                <a:alpha val="24000"/>
-              </a:srgbClr>
-            </a:outerShdw>
-          </a:effectLst>
-        </a:effectStyle>
-      </a:effectStyleLst>
-      <a:bgFillStyleLst>
-        <a:solidFill>
-          <a:schemeClr val="phClr"/>
-        </a:solidFill>
-        <a:solidFill>
-          <a:schemeClr val="phClr">
-            <a:tint val="95000"/>
-            <a:satMod val="170000"/>
-          </a:schemeClr>
-        </a:solidFill>
-        <a:gradFill>
-          <a:gsLst>
-            <a:gs pos="0">
-              <a:schemeClr val="phClr">
-                <a:tint val="93000"/>
-                <a:shade val="98000"/>
-                <a:lumMod val="102000"/>
-                <a:satMod val="150000"/>
-              </a:schemeClr>
-            </a:gs>
-            <a:gs pos="50000">
-              <a:schemeClr val="phClr">
-                <a:tint val="98000"/>
-                <a:shade val="90000"/>
-                <a:lumMod val="103000"/>
-                <a:satMod val="130000"/>
-              </a:schemeClr>
-            </a:gs>
-            <a:gs pos="100000">
-              <a:schemeClr val="phClr">
-                <a:shade val="63000"/>
-                <a:satMod val="120000"/>
-              </a:schemeClr>
-            </a:gs>
-          </a:gsLst>
-          <a:lin ang="5400000" scaled="0"/>
-        </a:gradFill>
-      </a:bgFillStyleLst>
-    </a:fmtScheme>
-  </a:themeElements>
-</a:theme>
-</file>
-
 <file path=ppt/notesSlides/notesSlide1.xml><?xml version="1.0" encoding="utf-8"?>
-<p:notes xmlns:p="http://schemas.openxmlformats.org/presentationml/2006/main">
+<p:notes xmlns:a="http://schemas.openxmlformats.org/drawingml/2006/main" xmlns:r="http://schemas.openxmlformats.org/officeDocument/2006/relationships" xmlns:p="http://schemas.openxmlformats.org/presentationml/2006/main">
   <p:cSld>
     <p:spTree>
       <p:nvGrpSpPr>
@@ -420,16 +299,21 @@
         <p:nvPr/>
       </p:nvGrpSpPr>
       <p:grpSpPr>
-        <a:xfrm xmlns:a="http://schemas.openxmlformats.org/drawingml/2006/main"/>
+        <a:xfrm>
+          <a:off x="0" y="0"/>
+          <a:ext cx="0" cy="0"/>
+          <a:chOff x="0" y="0"/>
+          <a:chExt cx="0" cy="0"/>
+        </a:xfrm>
       </p:grpSpPr>
       <p:sp>
         <p:nvSpPr>
           <p:cNvPr id="2" name="Slide Image Placeholder 1"/>
           <p:cNvSpPr>
-            <a:spLocks xmlns:a="http://schemas.openxmlformats.org/drawingml/2006/main" noGrp="1"/>
+            <a:spLocks noGrp="1" noRot="1" noChangeAspect="1"/>
           </p:cNvSpPr>
           <p:nvPr>
-            <p:ph type="sldImg" idx="0"/>
+            <p:ph type="sldImg"/>
           </p:nvPr>
         </p:nvSpPr>
         <p:spPr/>
@@ -438,7 +322,7 @@
         <p:nvSpPr>
           <p:cNvPr id="3" name="Notes Placeholder 2"/>
           <p:cNvSpPr>
-            <a:spLocks xmlns:a="http://schemas.openxmlformats.org/drawingml/2006/main" noGrp="1"/>
+            <a:spLocks noGrp="1"/>
           </p:cNvSpPr>
           <p:nvPr>
             <p:ph type="body" idx="1"/>
@@ -446,9 +330,9 @@
         </p:nvSpPr>
         <p:spPr/>
         <p:txBody>
-          <a:bodyPr xmlns:a="http://schemas.openxmlformats.org/drawingml/2006/main"/>
-          <a:lstStyle xmlns:a="http://schemas.openxmlformats.org/drawingml/2006/main"/>
-          <a:p xmlns:a="http://schemas.openxmlformats.org/drawingml/2006/main">
+          <a:bodyPr/>
+          <a:lstStyle/>
+          <a:p>
             <a:r>
               <a:t>Источники проекта: README.md, acceptance.txt</a:t>
             </a:r>
@@ -459,7 +343,7 @@
         <p:nvSpPr>
           <p:cNvPr id="4" name="Slide Number Placeholder 3"/>
           <p:cNvSpPr>
-            <a:spLocks xmlns:a="http://schemas.openxmlformats.org/drawingml/2006/main" noGrp="1"/>
+            <a:spLocks noGrp="1"/>
           </p:cNvSpPr>
           <p:nvPr>
             <p:ph type="sldNum" idx="5"/>
@@ -467,21 +351,23 @@
         </p:nvSpPr>
         <p:spPr/>
         <p:txBody>
-          <a:bodyPr xmlns:a="http://schemas.openxmlformats.org/drawingml/2006/main"/>
-          <a:lstStyle xmlns:a="http://schemas.openxmlformats.org/drawingml/2006/main"/>
-          <a:p xmlns:a="http://schemas.openxmlformats.org/drawingml/2006/main"/>
+          <a:bodyPr/>
+          <a:lstStyle/>
+          <a:p>
+            <a:endParaRPr/>
+          </a:p>
         </p:txBody>
       </p:sp>
     </p:spTree>
   </p:cSld>
   <p:clrMapOvr>
-    <a:masterClrMapping xmlns:a="http://schemas.openxmlformats.org/drawingml/2006/main"/>
+    <a:masterClrMapping/>
   </p:clrMapOvr>
 </p:notes>
 </file>
 
 <file path=ppt/notesSlides/notesSlide2.xml><?xml version="1.0" encoding="utf-8"?>
-<p:notes xmlns:p="http://schemas.openxmlformats.org/presentationml/2006/main">
+<p:notes xmlns:a="http://schemas.openxmlformats.org/drawingml/2006/main" xmlns:r="http://schemas.openxmlformats.org/officeDocument/2006/relationships" xmlns:p="http://schemas.openxmlformats.org/presentationml/2006/main">
   <p:cSld>
     <p:spTree>
       <p:nvGrpSpPr>
@@ -490,16 +376,21 @@
         <p:nvPr/>
       </p:nvGrpSpPr>
       <p:grpSpPr>
-        <a:xfrm xmlns:a="http://schemas.openxmlformats.org/drawingml/2006/main"/>
+        <a:xfrm>
+          <a:off x="0" y="0"/>
+          <a:ext cx="0" cy="0"/>
+          <a:chOff x="0" y="0"/>
+          <a:chExt cx="0" cy="0"/>
+        </a:xfrm>
       </p:grpSpPr>
       <p:sp>
         <p:nvSpPr>
           <p:cNvPr id="2" name="Slide Image Placeholder 1"/>
           <p:cNvSpPr>
-            <a:spLocks xmlns:a="http://schemas.openxmlformats.org/drawingml/2006/main" noGrp="1"/>
+            <a:spLocks noGrp="1" noRot="1" noChangeAspect="1"/>
           </p:cNvSpPr>
           <p:nvPr>
-            <p:ph type="sldImg" idx="0"/>
+            <p:ph type="sldImg"/>
           </p:nvPr>
         </p:nvSpPr>
         <p:spPr/>
@@ -508,7 +399,7 @@
         <p:nvSpPr>
           <p:cNvPr id="3" name="Notes Placeholder 2"/>
           <p:cNvSpPr>
-            <a:spLocks xmlns:a="http://schemas.openxmlformats.org/drawingml/2006/main" noGrp="1"/>
+            <a:spLocks noGrp="1"/>
           </p:cNvSpPr>
           <p:nvPr>
             <p:ph type="body" idx="1"/>
@@ -516,12 +407,13 @@
         </p:nvSpPr>
         <p:spPr/>
         <p:txBody>
-          <a:bodyPr xmlns:a="http://schemas.openxmlformats.org/drawingml/2006/main"/>
-          <a:lstStyle xmlns:a="http://schemas.openxmlformats.org/drawingml/2006/main"/>
-          <a:p xmlns:a="http://schemas.openxmlformats.org/drawingml/2006/main">
-            <a:r>
-              <a:t>Источники проекта: README.md, docs/01-developer-1.md, docs/02-developer-2.md, история Git</a:t>
-            </a:r>
+          <a:bodyPr/>
+          <a:lstStyle/>
+          <a:p>
+            <a:endParaRPr lang="en-US" dirty="0"/>
+          </a:p>
+          <a:p>
+            <a:endParaRPr dirty="0"/>
           </a:p>
         </p:txBody>
       </p:sp>
@@ -529,7 +421,7 @@
         <p:nvSpPr>
           <p:cNvPr id="4" name="Slide Number Placeholder 3"/>
           <p:cNvSpPr>
-            <a:spLocks xmlns:a="http://schemas.openxmlformats.org/drawingml/2006/main" noGrp="1"/>
+            <a:spLocks noGrp="1"/>
           </p:cNvSpPr>
           <p:nvPr>
             <p:ph type="sldNum" idx="5"/>
@@ -537,21 +429,23 @@
         </p:nvSpPr>
         <p:spPr/>
         <p:txBody>
-          <a:bodyPr xmlns:a="http://schemas.openxmlformats.org/drawingml/2006/main"/>
-          <a:lstStyle xmlns:a="http://schemas.openxmlformats.org/drawingml/2006/main"/>
-          <a:p xmlns:a="http://schemas.openxmlformats.org/drawingml/2006/main"/>
+          <a:bodyPr/>
+          <a:lstStyle/>
+          <a:p>
+            <a:endParaRPr/>
+          </a:p>
         </p:txBody>
       </p:sp>
     </p:spTree>
   </p:cSld>
   <p:clrMapOvr>
-    <a:masterClrMapping xmlns:a="http://schemas.openxmlformats.org/drawingml/2006/main"/>
+    <a:masterClrMapping/>
   </p:clrMapOvr>
 </p:notes>
 </file>
 
 <file path=ppt/notesSlides/notesSlide3.xml><?xml version="1.0" encoding="utf-8"?>
-<p:notes xmlns:p="http://schemas.openxmlformats.org/presentationml/2006/main">
+<p:notes xmlns:a="http://schemas.openxmlformats.org/drawingml/2006/main" xmlns:r="http://schemas.openxmlformats.org/officeDocument/2006/relationships" xmlns:p="http://schemas.openxmlformats.org/presentationml/2006/main">
   <p:cSld>
     <p:spTree>
       <p:nvGrpSpPr>
@@ -560,16 +454,21 @@
         <p:nvPr/>
       </p:nvGrpSpPr>
       <p:grpSpPr>
-        <a:xfrm xmlns:a="http://schemas.openxmlformats.org/drawingml/2006/main"/>
+        <a:xfrm>
+          <a:off x="0" y="0"/>
+          <a:ext cx="0" cy="0"/>
+          <a:chOff x="0" y="0"/>
+          <a:chExt cx="0" cy="0"/>
+        </a:xfrm>
       </p:grpSpPr>
       <p:sp>
         <p:nvSpPr>
           <p:cNvPr id="2" name="Slide Image Placeholder 1"/>
           <p:cNvSpPr>
-            <a:spLocks xmlns:a="http://schemas.openxmlformats.org/drawingml/2006/main" noGrp="1"/>
+            <a:spLocks noGrp="1" noRot="1" noChangeAspect="1"/>
           </p:cNvSpPr>
           <p:nvPr>
-            <p:ph type="sldImg" idx="0"/>
+            <p:ph type="sldImg"/>
           </p:nvPr>
         </p:nvSpPr>
         <p:spPr/>
@@ -578,7 +477,7 @@
         <p:nvSpPr>
           <p:cNvPr id="3" name="Notes Placeholder 2"/>
           <p:cNvSpPr>
-            <a:spLocks xmlns:a="http://schemas.openxmlformats.org/drawingml/2006/main" noGrp="1"/>
+            <a:spLocks noGrp="1"/>
           </p:cNvSpPr>
           <p:nvPr>
             <p:ph type="body" idx="1"/>
@@ -586,12 +485,10 @@
         </p:nvSpPr>
         <p:spPr/>
         <p:txBody>
-          <a:bodyPr xmlns:a="http://schemas.openxmlformats.org/drawingml/2006/main"/>
-          <a:lstStyle xmlns:a="http://schemas.openxmlformats.org/drawingml/2006/main"/>
-          <a:p xmlns:a="http://schemas.openxmlformats.org/drawingml/2006/main">
-            <a:r>
-              <a:t>Источники проекта: scripts/20-layout.sh, access-matrix.md</a:t>
-            </a:r>
+          <a:bodyPr/>
+          <a:lstStyle/>
+          <a:p>
+            <a:endParaRPr dirty="0"/>
           </a:p>
         </p:txBody>
       </p:sp>
@@ -599,7 +496,7 @@
         <p:nvSpPr>
           <p:cNvPr id="4" name="Slide Number Placeholder 3"/>
           <p:cNvSpPr>
-            <a:spLocks xmlns:a="http://schemas.openxmlformats.org/drawingml/2006/main" noGrp="1"/>
+            <a:spLocks noGrp="1"/>
           </p:cNvSpPr>
           <p:nvPr>
             <p:ph type="sldNum" idx="5"/>
@@ -607,21 +504,23 @@
         </p:nvSpPr>
         <p:spPr/>
         <p:txBody>
-          <a:bodyPr xmlns:a="http://schemas.openxmlformats.org/drawingml/2006/main"/>
-          <a:lstStyle xmlns:a="http://schemas.openxmlformats.org/drawingml/2006/main"/>
-          <a:p xmlns:a="http://schemas.openxmlformats.org/drawingml/2006/main"/>
+          <a:bodyPr/>
+          <a:lstStyle/>
+          <a:p>
+            <a:endParaRPr/>
+          </a:p>
         </p:txBody>
       </p:sp>
     </p:spTree>
   </p:cSld>
   <p:clrMapOvr>
-    <a:masterClrMapping xmlns:a="http://schemas.openxmlformats.org/drawingml/2006/main"/>
+    <a:masterClrMapping/>
   </p:clrMapOvr>
 </p:notes>
 </file>
 
 <file path=ppt/notesSlides/notesSlide4.xml><?xml version="1.0" encoding="utf-8"?>
-<p:notes xmlns:p="http://schemas.openxmlformats.org/presentationml/2006/main">
+<p:notes xmlns:a="http://schemas.openxmlformats.org/drawingml/2006/main" xmlns:r="http://schemas.openxmlformats.org/officeDocument/2006/relationships" xmlns:p="http://schemas.openxmlformats.org/presentationml/2006/main">
   <p:cSld>
     <p:spTree>
       <p:nvGrpSpPr>
@@ -630,16 +529,21 @@
         <p:nvPr/>
       </p:nvGrpSpPr>
       <p:grpSpPr>
-        <a:xfrm xmlns:a="http://schemas.openxmlformats.org/drawingml/2006/main"/>
+        <a:xfrm>
+          <a:off x="0" y="0"/>
+          <a:ext cx="0" cy="0"/>
+          <a:chOff x="0" y="0"/>
+          <a:chExt cx="0" cy="0"/>
+        </a:xfrm>
       </p:grpSpPr>
       <p:sp>
         <p:nvSpPr>
           <p:cNvPr id="2" name="Slide Image Placeholder 1"/>
           <p:cNvSpPr>
-            <a:spLocks xmlns:a="http://schemas.openxmlformats.org/drawingml/2006/main" noGrp="1"/>
+            <a:spLocks noGrp="1" noRot="1" noChangeAspect="1"/>
           </p:cNvSpPr>
           <p:nvPr>
-            <p:ph type="sldImg" idx="0"/>
+            <p:ph type="sldImg"/>
           </p:nvPr>
         </p:nvSpPr>
         <p:spPr/>
@@ -648,7 +552,7 @@
         <p:nvSpPr>
           <p:cNvPr id="3" name="Notes Placeholder 2"/>
           <p:cNvSpPr>
-            <a:spLocks xmlns:a="http://schemas.openxmlformats.org/drawingml/2006/main" noGrp="1"/>
+            <a:spLocks noGrp="1"/>
           </p:cNvSpPr>
           <p:nvPr>
             <p:ph type="body" idx="1"/>
@@ -656,12 +560,10 @@
         </p:nvSpPr>
         <p:spPr/>
         <p:txBody>
-          <a:bodyPr xmlns:a="http://schemas.openxmlformats.org/drawingml/2006/main"/>
-          <a:lstStyle xmlns:a="http://schemas.openxmlformats.org/drawingml/2006/main"/>
-          <a:p xmlns:a="http://schemas.openxmlformats.org/drawingml/2006/main">
-            <a:r>
-              <a:t>Источники проекта: scripts/10-accounts.sh, scripts/30-access.sh, scripts/40-sudoers.sh, access-matrix.md</a:t>
-            </a:r>
+          <a:bodyPr/>
+          <a:lstStyle/>
+          <a:p>
+            <a:endParaRPr dirty="0"/>
           </a:p>
         </p:txBody>
       </p:sp>
@@ -669,7 +571,7 @@
         <p:nvSpPr>
           <p:cNvPr id="4" name="Slide Number Placeholder 3"/>
           <p:cNvSpPr>
-            <a:spLocks xmlns:a="http://schemas.openxmlformats.org/drawingml/2006/main" noGrp="1"/>
+            <a:spLocks noGrp="1"/>
           </p:cNvSpPr>
           <p:nvPr>
             <p:ph type="sldNum" idx="5"/>
@@ -677,21 +579,127 @@
         </p:nvSpPr>
         <p:spPr/>
         <p:txBody>
-          <a:bodyPr xmlns:a="http://schemas.openxmlformats.org/drawingml/2006/main"/>
-          <a:lstStyle xmlns:a="http://schemas.openxmlformats.org/drawingml/2006/main"/>
-          <a:p xmlns:a="http://schemas.openxmlformats.org/drawingml/2006/main"/>
+          <a:bodyPr/>
+          <a:lstStyle/>
+          <a:p>
+            <a:endParaRPr/>
+          </a:p>
         </p:txBody>
       </p:sp>
     </p:spTree>
   </p:cSld>
   <p:clrMapOvr>
-    <a:masterClrMapping xmlns:a="http://schemas.openxmlformats.org/drawingml/2006/main"/>
+    <a:masterClrMapping/>
   </p:clrMapOvr>
 </p:notes>
 </file>
 
 <file path=ppt/notesSlides/notesSlide5.xml><?xml version="1.0" encoding="utf-8"?>
-<p:notes xmlns:p="http://schemas.openxmlformats.org/presentationml/2006/main">
+<p:notes xmlns:a="http://schemas.openxmlformats.org/drawingml/2006/main" xmlns:r="http://schemas.openxmlformats.org/officeDocument/2006/relationships" xmlns:p="http://schemas.openxmlformats.org/presentationml/2006/main">
+  <p:cSld>
+    <p:spTree>
+      <p:nvGrpSpPr>
+        <p:cNvPr id="1" name="">
+          <a:extLst>
+            <a:ext uri="{FF2B5EF4-FFF2-40B4-BE49-F238E27FC236}">
+              <a16:creationId xmlns:a16="http://schemas.microsoft.com/office/drawing/2014/main" id="{87749CF8-4686-1E9E-2788-E51E7DBDFF76}"/>
+            </a:ext>
+          </a:extLst>
+        </p:cNvPr>
+        <p:cNvGrpSpPr/>
+        <p:nvPr/>
+      </p:nvGrpSpPr>
+      <p:grpSpPr>
+        <a:xfrm>
+          <a:off x="0" y="0"/>
+          <a:ext cx="0" cy="0"/>
+          <a:chOff x="0" y="0"/>
+          <a:chExt cx="0" cy="0"/>
+        </a:xfrm>
+      </p:grpSpPr>
+      <p:sp>
+        <p:nvSpPr>
+          <p:cNvPr id="2" name="Slide Image Placeholder 1">
+            <a:extLst>
+              <a:ext uri="{FF2B5EF4-FFF2-40B4-BE49-F238E27FC236}">
+                <a16:creationId xmlns:a16="http://schemas.microsoft.com/office/drawing/2014/main" id="{330D06FB-5F17-3D42-B931-07512A800E49}"/>
+              </a:ext>
+            </a:extLst>
+          </p:cNvPr>
+          <p:cNvSpPr>
+            <a:spLocks noGrp="1" noRot="1" noChangeAspect="1"/>
+          </p:cNvSpPr>
+          <p:nvPr>
+            <p:ph type="sldImg"/>
+          </p:nvPr>
+        </p:nvSpPr>
+        <p:spPr/>
+      </p:sp>
+      <p:sp>
+        <p:nvSpPr>
+          <p:cNvPr id="3" name="Notes Placeholder 2">
+            <a:extLst>
+              <a:ext uri="{FF2B5EF4-FFF2-40B4-BE49-F238E27FC236}">
+                <a16:creationId xmlns:a16="http://schemas.microsoft.com/office/drawing/2014/main" id="{E511B5BF-8612-0347-EBF5-B1DCDA063232}"/>
+              </a:ext>
+            </a:extLst>
+          </p:cNvPr>
+          <p:cNvSpPr>
+            <a:spLocks noGrp="1"/>
+          </p:cNvSpPr>
+          <p:nvPr>
+            <p:ph type="body" idx="1"/>
+          </p:nvPr>
+        </p:nvSpPr>
+        <p:spPr/>
+        <p:txBody>
+          <a:bodyPr/>
+          <a:lstStyle/>
+          <a:p>
+            <a:endParaRPr dirty="0"/>
+          </a:p>
+        </p:txBody>
+      </p:sp>
+      <p:sp>
+        <p:nvSpPr>
+          <p:cNvPr id="4" name="Slide Number Placeholder 3">
+            <a:extLst>
+              <a:ext uri="{FF2B5EF4-FFF2-40B4-BE49-F238E27FC236}">
+                <a16:creationId xmlns:a16="http://schemas.microsoft.com/office/drawing/2014/main" id="{235EE1FA-FDEC-D721-CBE3-321E16BE9F31}"/>
+              </a:ext>
+            </a:extLst>
+          </p:cNvPr>
+          <p:cNvSpPr>
+            <a:spLocks noGrp="1"/>
+          </p:cNvSpPr>
+          <p:nvPr>
+            <p:ph type="sldNum" idx="5"/>
+          </p:nvPr>
+        </p:nvSpPr>
+        <p:spPr/>
+        <p:txBody>
+          <a:bodyPr/>
+          <a:lstStyle/>
+          <a:p>
+            <a:endParaRPr/>
+          </a:p>
+        </p:txBody>
+      </p:sp>
+    </p:spTree>
+    <p:extLst>
+      <p:ext uri="{BB962C8B-B14F-4D97-AF65-F5344CB8AC3E}">
+        <p14:creationId xmlns:p14="http://schemas.microsoft.com/office/powerpoint/2010/main" val="3916558695"/>
+      </p:ext>
+    </p:extLst>
+  </p:cSld>
+  <p:clrMapOvr>
+    <a:masterClrMapping/>
+  </p:clrMapOvr>
+</p:notes>
+</file>
+
+<file path=ppt/notesSlides/notesSlide6.xml><?xml version="1.0" encoding="utf-8"?>
+<p:notes xmlns:a="http://schemas.openxmlformats.org/drawingml/2006/main" xmlns:r="http://schemas.openxmlformats.org/officeDocument/2006/relationships" xmlns:p="http://schemas.openxmlformats.org/presentationml/2006/main">
   <p:cSld>
     <p:spTree>
       <p:nvGrpSpPr>
@@ -700,16 +708,21 @@
         <p:nvPr/>
       </p:nvGrpSpPr>
       <p:grpSpPr>
-        <a:xfrm xmlns:a="http://schemas.openxmlformats.org/drawingml/2006/main"/>
+        <a:xfrm>
+          <a:off x="0" y="0"/>
+          <a:ext cx="0" cy="0"/>
+          <a:chOff x="0" y="0"/>
+          <a:chExt cx="0" cy="0"/>
+        </a:xfrm>
       </p:grpSpPr>
       <p:sp>
         <p:nvSpPr>
           <p:cNvPr id="2" name="Slide Image Placeholder 1"/>
           <p:cNvSpPr>
-            <a:spLocks xmlns:a="http://schemas.openxmlformats.org/drawingml/2006/main" noGrp="1"/>
+            <a:spLocks noGrp="1" noRot="1" noChangeAspect="1"/>
           </p:cNvSpPr>
           <p:nvPr>
-            <p:ph type="sldImg" idx="0"/>
+            <p:ph type="sldImg"/>
           </p:nvPr>
         </p:nvSpPr>
         <p:spPr/>
@@ -718,7 +731,7 @@
         <p:nvSpPr>
           <p:cNvPr id="3" name="Notes Placeholder 2"/>
           <p:cNvSpPr>
-            <a:spLocks xmlns:a="http://schemas.openxmlformats.org/drawingml/2006/main" noGrp="1"/>
+            <a:spLocks noGrp="1"/>
           </p:cNvSpPr>
           <p:nvPr>
             <p:ph type="body" idx="1"/>
@@ -726,12 +739,10 @@
         </p:nvSpPr>
         <p:spPr/>
         <p:txBody>
-          <a:bodyPr xmlns:a="http://schemas.openxmlformats.org/drawingml/2006/main"/>
-          <a:lstStyle xmlns:a="http://schemas.openxmlformats.org/drawingml/2006/main"/>
-          <a:p xmlns:a="http://schemas.openxmlformats.org/drawingml/2006/main">
-            <a:r>
-              <a:t>Источники проекта: runbook.md, docs/02-developer-2.md</a:t>
-            </a:r>
+          <a:bodyPr/>
+          <a:lstStyle/>
+          <a:p>
+            <a:endParaRPr dirty="0"/>
           </a:p>
         </p:txBody>
       </p:sp>
@@ -739,7 +750,7 @@
         <p:nvSpPr>
           <p:cNvPr id="4" name="Slide Number Placeholder 3"/>
           <p:cNvSpPr>
-            <a:spLocks xmlns:a="http://schemas.openxmlformats.org/drawingml/2006/main" noGrp="1"/>
+            <a:spLocks noGrp="1"/>
           </p:cNvSpPr>
           <p:nvPr>
             <p:ph type="sldNum" idx="5"/>
@@ -747,21 +758,23 @@
         </p:nvSpPr>
         <p:spPr/>
         <p:txBody>
-          <a:bodyPr xmlns:a="http://schemas.openxmlformats.org/drawingml/2006/main"/>
-          <a:lstStyle xmlns:a="http://schemas.openxmlformats.org/drawingml/2006/main"/>
-          <a:p xmlns:a="http://schemas.openxmlformats.org/drawingml/2006/main"/>
+          <a:bodyPr/>
+          <a:lstStyle/>
+          <a:p>
+            <a:endParaRPr/>
+          </a:p>
         </p:txBody>
       </p:sp>
     </p:spTree>
   </p:cSld>
   <p:clrMapOvr>
-    <a:masterClrMapping xmlns:a="http://schemas.openxmlformats.org/drawingml/2006/main"/>
+    <a:masterClrMapping/>
   </p:clrMapOvr>
 </p:notes>
 </file>
 
-<file path=ppt/notesSlides/notesSlide6.xml><?xml version="1.0" encoding="utf-8"?>
-<p:notes xmlns:p="http://schemas.openxmlformats.org/presentationml/2006/main">
+<file path=ppt/notesSlides/notesSlide7.xml><?xml version="1.0" encoding="utf-8"?>
+<p:notes xmlns:a="http://schemas.openxmlformats.org/drawingml/2006/main" xmlns:r="http://schemas.openxmlformats.org/officeDocument/2006/relationships" xmlns:p="http://schemas.openxmlformats.org/presentationml/2006/main">
   <p:cSld>
     <p:spTree>
       <p:nvGrpSpPr>
@@ -770,16 +783,21 @@
         <p:nvPr/>
       </p:nvGrpSpPr>
       <p:grpSpPr>
-        <a:xfrm xmlns:a="http://schemas.openxmlformats.org/drawingml/2006/main"/>
+        <a:xfrm>
+          <a:off x="0" y="0"/>
+          <a:ext cx="0" cy="0"/>
+          <a:chOff x="0" y="0"/>
+          <a:chExt cx="0" cy="0"/>
+        </a:xfrm>
       </p:grpSpPr>
       <p:sp>
         <p:nvSpPr>
           <p:cNvPr id="2" name="Slide Image Placeholder 1"/>
           <p:cNvSpPr>
-            <a:spLocks xmlns:a="http://schemas.openxmlformats.org/drawingml/2006/main" noGrp="1"/>
+            <a:spLocks noGrp="1" noRot="1" noChangeAspect="1"/>
           </p:cNvSpPr>
           <p:nvPr>
-            <p:ph type="sldImg" idx="0"/>
+            <p:ph type="sldImg"/>
           </p:nvPr>
         </p:nvSpPr>
         <p:spPr/>
@@ -788,7 +806,7 @@
         <p:nvSpPr>
           <p:cNvPr id="3" name="Notes Placeholder 2"/>
           <p:cNvSpPr>
-            <a:spLocks xmlns:a="http://schemas.openxmlformats.org/drawingml/2006/main" noGrp="1"/>
+            <a:spLocks noGrp="1"/>
           </p:cNvSpPr>
           <p:nvPr>
             <p:ph type="body" idx="1"/>
@@ -796,79 +814,9 @@
         </p:nvSpPr>
         <p:spPr/>
         <p:txBody>
-          <a:bodyPr xmlns:a="http://schemas.openxmlformats.org/drawingml/2006/main"/>
-          <a:lstStyle xmlns:a="http://schemas.openxmlformats.org/drawingml/2006/main"/>
-          <a:p xmlns:a="http://schemas.openxmlformats.org/drawingml/2006/main">
-            <a:r>
-              <a:t>Источники проекта: screenshots/01-start-failure.png, scripts/50-service.sh</a:t>
-            </a:r>
-          </a:p>
-        </p:txBody>
-      </p:sp>
-      <p:sp>
-        <p:nvSpPr>
-          <p:cNvPr id="4" name="Slide Number Placeholder 3"/>
-          <p:cNvSpPr>
-            <a:spLocks xmlns:a="http://schemas.openxmlformats.org/drawingml/2006/main" noGrp="1"/>
-          </p:cNvSpPr>
-          <p:nvPr>
-            <p:ph type="sldNum" idx="5"/>
-          </p:nvPr>
-        </p:nvSpPr>
-        <p:spPr/>
-        <p:txBody>
-          <a:bodyPr xmlns:a="http://schemas.openxmlformats.org/drawingml/2006/main"/>
-          <a:lstStyle xmlns:a="http://schemas.openxmlformats.org/drawingml/2006/main"/>
-          <a:p xmlns:a="http://schemas.openxmlformats.org/drawingml/2006/main"/>
-        </p:txBody>
-      </p:sp>
-    </p:spTree>
-  </p:cSld>
-  <p:clrMapOvr>
-    <a:masterClrMapping xmlns:a="http://schemas.openxmlformats.org/drawingml/2006/main"/>
-  </p:clrMapOvr>
-</p:notes>
-</file>
-
-<file path=ppt/notesSlides/notesSlide7.xml><?xml version="1.0" encoding="utf-8"?>
-<p:notes xmlns:p="http://schemas.openxmlformats.org/presentationml/2006/main">
-  <p:cSld>
-    <p:spTree>
-      <p:nvGrpSpPr>
-        <p:cNvPr id="1" name=""/>
-        <p:cNvGrpSpPr/>
-        <p:nvPr/>
-      </p:nvGrpSpPr>
-      <p:grpSpPr>
-        <a:xfrm xmlns:a="http://schemas.openxmlformats.org/drawingml/2006/main"/>
-      </p:grpSpPr>
-      <p:sp>
-        <p:nvSpPr>
-          <p:cNvPr id="2" name="Slide Image Placeholder 1"/>
-          <p:cNvSpPr>
-            <a:spLocks xmlns:a="http://schemas.openxmlformats.org/drawingml/2006/main" noGrp="1"/>
-          </p:cNvSpPr>
-          <p:nvPr>
-            <p:ph type="sldImg" idx="0"/>
-          </p:nvPr>
-        </p:nvSpPr>
-        <p:spPr/>
-      </p:sp>
-      <p:sp>
-        <p:nvSpPr>
-          <p:cNvPr id="3" name="Notes Placeholder 2"/>
-          <p:cNvSpPr>
-            <a:spLocks xmlns:a="http://schemas.openxmlformats.org/drawingml/2006/main" noGrp="1"/>
-          </p:cNvSpPr>
-          <p:nvPr>
-            <p:ph type="body" idx="1"/>
-          </p:nvPr>
-        </p:nvSpPr>
-        <p:spPr/>
-        <p:txBody>
-          <a:bodyPr xmlns:a="http://schemas.openxmlformats.org/drawingml/2006/main"/>
-          <a:lstStyle xmlns:a="http://schemas.openxmlformats.org/drawingml/2006/main"/>
-          <a:p xmlns:a="http://schemas.openxmlformats.org/drawingml/2006/main">
+          <a:bodyPr/>
+          <a:lstStyle/>
+          <a:p>
             <a:r>
               <a:t>Источники проекта: scripts/40-sudoers.sh, runbook.md; снимок ошибки provision.sh из переписки</a:t>
             </a:r>
@@ -879,7 +827,7 @@
         <p:nvSpPr>
           <p:cNvPr id="4" name="Slide Number Placeholder 3"/>
           <p:cNvSpPr>
-            <a:spLocks xmlns:a="http://schemas.openxmlformats.org/drawingml/2006/main" noGrp="1"/>
+            <a:spLocks noGrp="1"/>
           </p:cNvSpPr>
           <p:nvPr>
             <p:ph type="sldNum" idx="5"/>
@@ -887,21 +835,23 @@
         </p:nvSpPr>
         <p:spPr/>
         <p:txBody>
-          <a:bodyPr xmlns:a="http://schemas.openxmlformats.org/drawingml/2006/main"/>
-          <a:lstStyle xmlns:a="http://schemas.openxmlformats.org/drawingml/2006/main"/>
-          <a:p xmlns:a="http://schemas.openxmlformats.org/drawingml/2006/main"/>
+          <a:bodyPr/>
+          <a:lstStyle/>
+          <a:p>
+            <a:endParaRPr/>
+          </a:p>
         </p:txBody>
       </p:sp>
     </p:spTree>
   </p:cSld>
   <p:clrMapOvr>
-    <a:masterClrMapping xmlns:a="http://schemas.openxmlformats.org/drawingml/2006/main"/>
+    <a:masterClrMapping/>
   </p:clrMapOvr>
 </p:notes>
 </file>
 
 <file path=ppt/notesSlides/notesSlide8.xml><?xml version="1.0" encoding="utf-8"?>
-<p:notes xmlns:p="http://schemas.openxmlformats.org/presentationml/2006/main">
+<p:notes xmlns:a="http://schemas.openxmlformats.org/drawingml/2006/main" xmlns:r="http://schemas.openxmlformats.org/officeDocument/2006/relationships" xmlns:p="http://schemas.openxmlformats.org/presentationml/2006/main">
   <p:cSld>
     <p:spTree>
       <p:nvGrpSpPr>
@@ -910,16 +860,21 @@
         <p:nvPr/>
       </p:nvGrpSpPr>
       <p:grpSpPr>
-        <a:xfrm xmlns:a="http://schemas.openxmlformats.org/drawingml/2006/main"/>
+        <a:xfrm>
+          <a:off x="0" y="0"/>
+          <a:ext cx="0" cy="0"/>
+          <a:chOff x="0" y="0"/>
+          <a:chExt cx="0" cy="0"/>
+        </a:xfrm>
       </p:grpSpPr>
       <p:sp>
         <p:nvSpPr>
           <p:cNvPr id="2" name="Slide Image Placeholder 1"/>
           <p:cNvSpPr>
-            <a:spLocks xmlns:a="http://schemas.openxmlformats.org/drawingml/2006/main" noGrp="1"/>
+            <a:spLocks noGrp="1" noRot="1" noChangeAspect="1"/>
           </p:cNvSpPr>
           <p:nvPr>
-            <p:ph type="sldImg" idx="0"/>
+            <p:ph type="sldImg"/>
           </p:nvPr>
         </p:nvSpPr>
         <p:spPr/>
@@ -928,7 +883,7 @@
         <p:nvSpPr>
           <p:cNvPr id="3" name="Notes Placeholder 2"/>
           <p:cNvSpPr>
-            <a:spLocks xmlns:a="http://schemas.openxmlformats.org/drawingml/2006/main" noGrp="1"/>
+            <a:spLocks noGrp="1"/>
           </p:cNvSpPr>
           <p:nvPr>
             <p:ph type="body" idx="1"/>
@@ -936,9 +891,9 @@
         </p:nvSpPr>
         <p:spPr/>
         <p:txBody>
-          <a:bodyPr xmlns:a="http://schemas.openxmlformats.org/drawingml/2006/main"/>
-          <a:lstStyle xmlns:a="http://schemas.openxmlformats.org/drawingml/2006/main"/>
-          <a:p xmlns:a="http://schemas.openxmlformats.org/drawingml/2006/main">
+          <a:bodyPr/>
+          <a:lstStyle/>
+          <a:p>
             <a:r>
               <a:t>Источники проекта: README.md, provision.sh</a:t>
             </a:r>
@@ -949,7 +904,7 @@
         <p:nvSpPr>
           <p:cNvPr id="4" name="Slide Number Placeholder 3"/>
           <p:cNvSpPr>
-            <a:spLocks xmlns:a="http://schemas.openxmlformats.org/drawingml/2006/main" noGrp="1"/>
+            <a:spLocks noGrp="1"/>
           </p:cNvSpPr>
           <p:nvPr>
             <p:ph type="sldNum" idx="5"/>
@@ -957,21 +912,23 @@
         </p:nvSpPr>
         <p:spPr/>
         <p:txBody>
-          <a:bodyPr xmlns:a="http://schemas.openxmlformats.org/drawingml/2006/main"/>
-          <a:lstStyle xmlns:a="http://schemas.openxmlformats.org/drawingml/2006/main"/>
-          <a:p xmlns:a="http://schemas.openxmlformats.org/drawingml/2006/main"/>
+          <a:bodyPr/>
+          <a:lstStyle/>
+          <a:p>
+            <a:endParaRPr/>
+          </a:p>
         </p:txBody>
       </p:sp>
     </p:spTree>
   </p:cSld>
   <p:clrMapOvr>
-    <a:masterClrMapping xmlns:a="http://schemas.openxmlformats.org/drawingml/2006/main"/>
+    <a:masterClrMapping/>
   </p:clrMapOvr>
 </p:notes>
 </file>
 
 <file path=ppt/notesSlides/notesSlide9.xml><?xml version="1.0" encoding="utf-8"?>
-<p:notes xmlns:p="http://schemas.openxmlformats.org/presentationml/2006/main">
+<p:notes xmlns:a="http://schemas.openxmlformats.org/drawingml/2006/main" xmlns:r="http://schemas.openxmlformats.org/officeDocument/2006/relationships" xmlns:p="http://schemas.openxmlformats.org/presentationml/2006/main">
   <p:cSld>
     <p:spTree>
       <p:nvGrpSpPr>
@@ -980,16 +937,21 @@
         <p:nvPr/>
       </p:nvGrpSpPr>
       <p:grpSpPr>
-        <a:xfrm xmlns:a="http://schemas.openxmlformats.org/drawingml/2006/main"/>
+        <a:xfrm>
+          <a:off x="0" y="0"/>
+          <a:ext cx="0" cy="0"/>
+          <a:chOff x="0" y="0"/>
+          <a:chExt cx="0" cy="0"/>
+        </a:xfrm>
       </p:grpSpPr>
       <p:sp>
         <p:nvSpPr>
           <p:cNvPr id="2" name="Slide Image Placeholder 1"/>
           <p:cNvSpPr>
-            <a:spLocks xmlns:a="http://schemas.openxmlformats.org/drawingml/2006/main" noGrp="1"/>
+            <a:spLocks noGrp="1" noRot="1" noChangeAspect="1"/>
           </p:cNvSpPr>
           <p:nvPr>
-            <p:ph type="sldImg" idx="0"/>
+            <p:ph type="sldImg"/>
           </p:nvPr>
         </p:nvSpPr>
         <p:spPr/>
@@ -998,7 +960,7 @@
         <p:nvSpPr>
           <p:cNvPr id="3" name="Notes Placeholder 2"/>
           <p:cNvSpPr>
-            <a:spLocks xmlns:a="http://schemas.openxmlformats.org/drawingml/2006/main" noGrp="1"/>
+            <a:spLocks noGrp="1"/>
           </p:cNvSpPr>
           <p:nvPr>
             <p:ph type="body" idx="1"/>
@@ -1006,9 +968,9 @@
         </p:nvSpPr>
         <p:spPr/>
         <p:txBody>
-          <a:bodyPr xmlns:a="http://schemas.openxmlformats.org/drawingml/2006/main"/>
-          <a:lstStyle xmlns:a="http://schemas.openxmlformats.org/drawingml/2006/main"/>
-          <a:p xmlns:a="http://schemas.openxmlformats.org/drawingml/2006/main">
+          <a:bodyPr/>
+          <a:lstStyle/>
+          <a:p>
             <a:r>
               <a:t>Источники проекта: acceptance.txt, screenshots/02-acceptance.png, README.md</a:t>
             </a:r>
@@ -1019,7 +981,7 @@
         <p:nvSpPr>
           <p:cNvPr id="4" name="Slide Number Placeholder 3"/>
           <p:cNvSpPr>
-            <a:spLocks xmlns:a="http://schemas.openxmlformats.org/drawingml/2006/main" noGrp="1"/>
+            <a:spLocks noGrp="1"/>
           </p:cNvSpPr>
           <p:nvPr>
             <p:ph type="sldNum" idx="5"/>
@@ -1027,21 +989,23 @@
         </p:nvSpPr>
         <p:spPr/>
         <p:txBody>
-          <a:bodyPr xmlns:a="http://schemas.openxmlformats.org/drawingml/2006/main"/>
-          <a:lstStyle xmlns:a="http://schemas.openxmlformats.org/drawingml/2006/main"/>
-          <a:p xmlns:a="http://schemas.openxmlformats.org/drawingml/2006/main"/>
+          <a:bodyPr/>
+          <a:lstStyle/>
+          <a:p>
+            <a:endParaRPr/>
+          </a:p>
         </p:txBody>
       </p:sp>
     </p:spTree>
   </p:cSld>
   <p:clrMapOvr>
-    <a:masterClrMapping xmlns:a="http://schemas.openxmlformats.org/drawingml/2006/main"/>
+    <a:masterClrMapping/>
   </p:clrMapOvr>
 </p:notes>
 </file>
 
 <file path=ppt/slideLayouts/slideLayout1.xml><?xml version="1.0" encoding="utf-8"?>
-<p:sldLayout xmlns:p="http://schemas.openxmlformats.org/presentationml/2006/main" type="title">
+<p:sldLayout xmlns:a="http://schemas.openxmlformats.org/drawingml/2006/main" xmlns:r="http://schemas.openxmlformats.org/officeDocument/2006/relationships" xmlns:p="http://schemas.openxmlformats.org/presentationml/2006/main" type="title">
   <p:cSld name="Title Slide">
     <p:spTree>
       <p:nvGrpSpPr>
@@ -1050,43 +1014,48 @@
         <p:nvPr/>
       </p:nvGrpSpPr>
       <p:grpSpPr>
-        <a:xfrm xmlns:a="http://schemas.openxmlformats.org/drawingml/2006/main"/>
+        <a:xfrm>
+          <a:off x="0" y="0"/>
+          <a:ext cx="0" cy="0"/>
+          <a:chOff x="0" y="0"/>
+          <a:chExt cx="0" cy="0"/>
+        </a:xfrm>
       </p:grpSpPr>
       <p:sp>
         <p:nvSpPr>
           <p:cNvPr id="3" name="Title">
-            <a:extLst xmlns:a="http://schemas.openxmlformats.org/drawingml/2006/main">
+            <a:extLst>
               <a:ext uri="{FF2B5EF4-FFF2-40B4-BE49-F238E27FC236}">
                 <a16:creationId xmlns:a16="http://schemas.microsoft.com/office/drawing/2014/main" id="{A672915B-ACEF-4FC2-A551-BF9A90E309AC}"/>
               </a:ext>
             </a:extLst>
           </p:cNvPr>
           <p:cNvSpPr>
-            <a:spLocks xmlns:a="http://schemas.openxmlformats.org/drawingml/2006/main" noGrp="1"/>
+            <a:spLocks noGrp="1"/>
           </p:cNvSpPr>
           <p:nvPr>
-            <p:ph type="title" idx="0"/>
+            <p:ph type="title"/>
           </p:nvPr>
         </p:nvSpPr>
         <p:spPr>
-          <a:xfrm xmlns:a="http://schemas.openxmlformats.org/drawingml/2006/main">
+          <a:xfrm>
             <a:off x="1219200" y="2590800"/>
             <a:ext cx="9753600" cy="990600"/>
           </a:xfrm>
-          <a:prstGeom xmlns:a="http://schemas.openxmlformats.org/drawingml/2006/main" prst="rect">
+          <a:prstGeom prst="rect">
             <a:avLst/>
           </a:prstGeom>
-          <a:noFill xmlns:a="http://schemas.openxmlformats.org/drawingml/2006/main"/>
-          <a:ln xmlns:a="http://schemas.openxmlformats.org/drawingml/2006/main">
+          <a:noFill/>
+          <a:ln>
             <a:noFill/>
             <a:prstDash val="solid"/>
           </a:ln>
         </p:spPr>
         <p:txBody>
-          <a:bodyPr xmlns:a="http://schemas.openxmlformats.org/drawingml/2006/main" wrap="square" lIns="0" tIns="0" rIns="0" bIns="0" anchor="ctr">
+          <a:bodyPr wrap="square" lIns="0" tIns="0" rIns="0" bIns="0" anchor="ctr">
             <a:normAutofit/>
           </a:bodyPr>
-          <a:lstStyle xmlns:a="http://schemas.openxmlformats.org/drawingml/2006/main">
+          <a:lstStyle>
             <a:defPPr algn="ctr">
               <a:defRPr sz="4800" b="1">
                 <a:solidFill>
@@ -1278,44 +1247,46 @@
               </a:defRPr>
             </a:lvl9pPr>
           </a:lstStyle>
-          <a:p xmlns:a="http://schemas.openxmlformats.org/drawingml/2006/main"/>
+          <a:p>
+            <a:endParaRPr/>
+          </a:p>
         </p:txBody>
       </p:sp>
       <p:sp>
         <p:nvSpPr>
           <p:cNvPr id="2" name="Subtitle">
-            <a:extLst xmlns:a="http://schemas.openxmlformats.org/drawingml/2006/main">
+            <a:extLst>
               <a:ext uri="{FF2B5EF4-FFF2-40B4-BE49-F238E27FC236}">
                 <a16:creationId xmlns:a16="http://schemas.microsoft.com/office/drawing/2014/main" id="{92916D7C-55DA-4911-8FD0-A414DB197C82}"/>
               </a:ext>
             </a:extLst>
           </p:cNvPr>
           <p:cNvSpPr>
-            <a:spLocks xmlns:a="http://schemas.openxmlformats.org/drawingml/2006/main" noGrp="1"/>
+            <a:spLocks noGrp="1"/>
           </p:cNvSpPr>
           <p:nvPr>
             <p:ph type="subTitle" idx="1"/>
           </p:nvPr>
         </p:nvSpPr>
         <p:spPr>
-          <a:xfrm xmlns:a="http://schemas.openxmlformats.org/drawingml/2006/main">
+          <a:xfrm>
             <a:off x="1828800" y="3771900"/>
             <a:ext cx="8534400" cy="762000"/>
           </a:xfrm>
-          <a:prstGeom xmlns:a="http://schemas.openxmlformats.org/drawingml/2006/main" prst="rect">
+          <a:prstGeom prst="rect">
             <a:avLst/>
           </a:prstGeom>
-          <a:noFill xmlns:a="http://schemas.openxmlformats.org/drawingml/2006/main"/>
-          <a:ln xmlns:a="http://schemas.openxmlformats.org/drawingml/2006/main">
+          <a:noFill/>
+          <a:ln>
             <a:noFill/>
             <a:prstDash val="solid"/>
           </a:ln>
         </p:spPr>
         <p:txBody>
-          <a:bodyPr xmlns:a="http://schemas.openxmlformats.org/drawingml/2006/main" wrap="square" lIns="0" tIns="0" rIns="0" bIns="0" anchor="ctr">
+          <a:bodyPr wrap="square" lIns="0" tIns="0" rIns="0" bIns="0" anchor="ctr">
             <a:normAutofit/>
           </a:bodyPr>
-          <a:lstStyle xmlns:a="http://schemas.openxmlformats.org/drawingml/2006/main">
+          <a:lstStyle>
             <a:defPPr algn="ctr">
               <a:defRPr sz="2100" b="0">
                 <a:solidFill>
@@ -1507,16 +1478,21 @@
               </a:defRPr>
             </a:lvl9pPr>
           </a:lstStyle>
-          <a:p xmlns:a="http://schemas.openxmlformats.org/drawingml/2006/main"/>
+          <a:p>
+            <a:endParaRPr/>
+          </a:p>
         </p:txBody>
       </p:sp>
     </p:spTree>
   </p:cSld>
+  <p:clrMapOvr>
+    <a:masterClrMapping/>
+  </p:clrMapOvr>
 </p:sldLayout>
 </file>
 
 <file path=ppt/slideLayouts/slideLayout2.xml><?xml version="1.0" encoding="utf-8"?>
-<p:sldLayout xmlns:p="http://schemas.openxmlformats.org/presentationml/2006/main">
+<p:sldLayout xmlns:a="http://schemas.openxmlformats.org/drawingml/2006/main" xmlns:r="http://schemas.openxmlformats.org/officeDocument/2006/relationships" xmlns:p="http://schemas.openxmlformats.org/presentationml/2006/main">
   <p:cSld name="Section Header">
     <p:spTree>
       <p:nvGrpSpPr>
@@ -1525,43 +1501,48 @@
         <p:nvPr/>
       </p:nvGrpSpPr>
       <p:grpSpPr>
-        <a:xfrm xmlns:a="http://schemas.openxmlformats.org/drawingml/2006/main"/>
+        <a:xfrm>
+          <a:off x="0" y="0"/>
+          <a:ext cx="0" cy="0"/>
+          <a:chOff x="0" y="0"/>
+          <a:chExt cx="0" cy="0"/>
+        </a:xfrm>
       </p:grpSpPr>
       <p:sp>
         <p:nvSpPr>
           <p:cNvPr id="2" name="Section title">
-            <a:extLst xmlns:a="http://schemas.openxmlformats.org/drawingml/2006/main">
+            <a:extLst>
               <a:ext uri="{FF2B5EF4-FFF2-40B4-BE49-F238E27FC236}">
                 <a16:creationId xmlns:a16="http://schemas.microsoft.com/office/drawing/2014/main" id="{16EC1626-5941-43E5-B18B-28F53EB952A7}"/>
               </a:ext>
             </a:extLst>
           </p:cNvPr>
           <p:cNvSpPr>
-            <a:spLocks xmlns:a="http://schemas.openxmlformats.org/drawingml/2006/main" noGrp="1"/>
+            <a:spLocks noGrp="1"/>
           </p:cNvSpPr>
           <p:nvPr>
-            <p:ph type="title" idx="0"/>
+            <p:ph type="title"/>
           </p:nvPr>
         </p:nvSpPr>
         <p:spPr>
-          <a:xfrm xmlns:a="http://schemas.openxmlformats.org/drawingml/2006/main">
+          <a:xfrm>
             <a:off x="1219200" y="2857500"/>
             <a:ext cx="9753600" cy="1143000"/>
           </a:xfrm>
-          <a:prstGeom xmlns:a="http://schemas.openxmlformats.org/drawingml/2006/main" prst="rect">
+          <a:prstGeom prst="rect">
             <a:avLst/>
           </a:prstGeom>
-          <a:noFill xmlns:a="http://schemas.openxmlformats.org/drawingml/2006/main"/>
-          <a:ln xmlns:a="http://schemas.openxmlformats.org/drawingml/2006/main">
+          <a:noFill/>
+          <a:ln>
             <a:noFill/>
             <a:prstDash val="solid"/>
           </a:ln>
         </p:spPr>
         <p:txBody>
-          <a:bodyPr xmlns:a="http://schemas.openxmlformats.org/drawingml/2006/main" wrap="square" lIns="0" tIns="0" rIns="0" bIns="0" anchor="ctr">
+          <a:bodyPr wrap="square" lIns="0" tIns="0" rIns="0" bIns="0" anchor="ctr">
             <a:normAutofit/>
           </a:bodyPr>
-          <a:lstStyle xmlns:a="http://schemas.openxmlformats.org/drawingml/2006/main">
+          <a:lstStyle>
             <a:defPPr algn="ctr">
               <a:defRPr sz="4200" b="1">
                 <a:solidFill>
@@ -1753,16 +1734,21 @@
               </a:defRPr>
             </a:lvl9pPr>
           </a:lstStyle>
-          <a:p xmlns:a="http://schemas.openxmlformats.org/drawingml/2006/main"/>
+          <a:p>
+            <a:endParaRPr/>
+          </a:p>
         </p:txBody>
       </p:sp>
     </p:spTree>
   </p:cSld>
+  <p:clrMapOvr>
+    <a:masterClrMapping/>
+  </p:clrMapOvr>
 </p:sldLayout>
 </file>
 
 <file path=ppt/slideLayouts/slideLayout3.xml><?xml version="1.0" encoding="utf-8"?>
-<p:sldLayout xmlns:p="http://schemas.openxmlformats.org/presentationml/2006/main">
+<p:sldLayout xmlns:a="http://schemas.openxmlformats.org/drawingml/2006/main" xmlns:r="http://schemas.openxmlformats.org/officeDocument/2006/relationships" xmlns:p="http://schemas.openxmlformats.org/presentationml/2006/main">
   <p:cSld name="Title and Body">
     <p:spTree>
       <p:nvGrpSpPr>
@@ -1771,43 +1757,48 @@
         <p:nvPr/>
       </p:nvGrpSpPr>
       <p:grpSpPr>
-        <a:xfrm xmlns:a="http://schemas.openxmlformats.org/drawingml/2006/main"/>
+        <a:xfrm>
+          <a:off x="0" y="0"/>
+          <a:ext cx="0" cy="0"/>
+          <a:chOff x="0" y="0"/>
+          <a:chExt cx="0" cy="0"/>
+        </a:xfrm>
       </p:grpSpPr>
       <p:sp>
         <p:nvSpPr>
           <p:cNvPr id="3" name="Title">
-            <a:extLst xmlns:a="http://schemas.openxmlformats.org/drawingml/2006/main">
+            <a:extLst>
               <a:ext uri="{FF2B5EF4-FFF2-40B4-BE49-F238E27FC236}">
                 <a16:creationId xmlns:a16="http://schemas.microsoft.com/office/drawing/2014/main" id="{42FA7F2E-2C6E-4187-BBED-F15787580347}"/>
               </a:ext>
             </a:extLst>
           </p:cNvPr>
           <p:cNvSpPr>
-            <a:spLocks xmlns:a="http://schemas.openxmlformats.org/drawingml/2006/main" noGrp="1"/>
+            <a:spLocks noGrp="1"/>
           </p:cNvSpPr>
           <p:nvPr>
-            <p:ph type="title" idx="0"/>
+            <p:ph type="title"/>
           </p:nvPr>
         </p:nvSpPr>
         <p:spPr>
-          <a:xfrm xmlns:a="http://schemas.openxmlformats.org/drawingml/2006/main">
+          <a:xfrm>
             <a:off x="685800" y="533400"/>
             <a:ext cx="10820400" cy="838200"/>
           </a:xfrm>
-          <a:prstGeom xmlns:a="http://schemas.openxmlformats.org/drawingml/2006/main" prst="rect">
+          <a:prstGeom prst="rect">
             <a:avLst/>
           </a:prstGeom>
-          <a:noFill xmlns:a="http://schemas.openxmlformats.org/drawingml/2006/main"/>
-          <a:ln xmlns:a="http://schemas.openxmlformats.org/drawingml/2006/main">
+          <a:noFill/>
+          <a:ln>
             <a:noFill/>
             <a:prstDash val="solid"/>
           </a:ln>
         </p:spPr>
         <p:txBody>
-          <a:bodyPr xmlns:a="http://schemas.openxmlformats.org/drawingml/2006/main" wrap="square" lIns="0" tIns="0" rIns="0" bIns="0" anchor="t">
+          <a:bodyPr wrap="square" lIns="0" tIns="0" rIns="0" bIns="0" anchor="t">
             <a:normAutofit/>
           </a:bodyPr>
-          <a:lstStyle xmlns:a="http://schemas.openxmlformats.org/drawingml/2006/main">
+          <a:lstStyle>
             <a:defPPr algn="l">
               <a:defRPr sz="3300" b="1">
                 <a:solidFill>
@@ -1999,44 +1990,46 @@
               </a:defRPr>
             </a:lvl9pPr>
           </a:lstStyle>
-          <a:p xmlns:a="http://schemas.openxmlformats.org/drawingml/2006/main"/>
+          <a:p>
+            <a:endParaRPr/>
+          </a:p>
         </p:txBody>
       </p:sp>
       <p:sp>
         <p:nvSpPr>
           <p:cNvPr id="2" name="Body">
-            <a:extLst xmlns:a="http://schemas.openxmlformats.org/drawingml/2006/main">
+            <a:extLst>
               <a:ext uri="{FF2B5EF4-FFF2-40B4-BE49-F238E27FC236}">
                 <a16:creationId xmlns:a16="http://schemas.microsoft.com/office/drawing/2014/main" id="{EF8A7C0B-899C-436C-AC55-D64B58914661}"/>
               </a:ext>
             </a:extLst>
           </p:cNvPr>
           <p:cNvSpPr>
-            <a:spLocks xmlns:a="http://schemas.openxmlformats.org/drawingml/2006/main" noGrp="1"/>
+            <a:spLocks noGrp="1"/>
           </p:cNvSpPr>
           <p:nvPr>
             <p:ph type="body" idx="1"/>
           </p:nvPr>
         </p:nvSpPr>
         <p:spPr>
-          <a:xfrm xmlns:a="http://schemas.openxmlformats.org/drawingml/2006/main">
+          <a:xfrm>
             <a:off x="685800" y="1905000"/>
             <a:ext cx="10820400" cy="4267200"/>
           </a:xfrm>
-          <a:prstGeom xmlns:a="http://schemas.openxmlformats.org/drawingml/2006/main" prst="rect">
+          <a:prstGeom prst="rect">
             <a:avLst/>
           </a:prstGeom>
-          <a:noFill xmlns:a="http://schemas.openxmlformats.org/drawingml/2006/main"/>
-          <a:ln xmlns:a="http://schemas.openxmlformats.org/drawingml/2006/main">
+          <a:noFill/>
+          <a:ln>
             <a:noFill/>
             <a:prstDash val="solid"/>
           </a:ln>
         </p:spPr>
         <p:txBody>
-          <a:bodyPr xmlns:a="http://schemas.openxmlformats.org/drawingml/2006/main" wrap="square" lIns="0" tIns="0" rIns="0" bIns="0" anchor="t">
+          <a:bodyPr wrap="square" lIns="0" tIns="0" rIns="0" bIns="0" anchor="t">
             <a:normAutofit/>
           </a:bodyPr>
-          <a:lstStyle xmlns:a="http://schemas.openxmlformats.org/drawingml/2006/main">
+          <a:lstStyle>
             <a:defPPr algn="l">
               <a:defRPr sz="2250" b="0">
                 <a:solidFill>
@@ -2228,16 +2221,21 @@
               </a:defRPr>
             </a:lvl9pPr>
           </a:lstStyle>
-          <a:p xmlns:a="http://schemas.openxmlformats.org/drawingml/2006/main"/>
+          <a:p>
+            <a:endParaRPr/>
+          </a:p>
         </p:txBody>
       </p:sp>
     </p:spTree>
   </p:cSld>
+  <p:clrMapOvr>
+    <a:masterClrMapping/>
+  </p:clrMapOvr>
 </p:sldLayout>
 </file>
 
 <file path=ppt/slideLayouts/slideLayout4.xml><?xml version="1.0" encoding="utf-8"?>
-<p:sldLayout xmlns:p="http://schemas.openxmlformats.org/presentationml/2006/main">
+<p:sldLayout xmlns:a="http://schemas.openxmlformats.org/drawingml/2006/main" xmlns:r="http://schemas.openxmlformats.org/officeDocument/2006/relationships" xmlns:p="http://schemas.openxmlformats.org/presentationml/2006/main">
   <p:cSld name="Title and Two Column">
     <p:spTree>
       <p:nvGrpSpPr>
@@ -2246,43 +2244,48 @@
         <p:nvPr/>
       </p:nvGrpSpPr>
       <p:grpSpPr>
-        <a:xfrm xmlns:a="http://schemas.openxmlformats.org/drawingml/2006/main"/>
+        <a:xfrm>
+          <a:off x="0" y="0"/>
+          <a:ext cx="0" cy="0"/>
+          <a:chOff x="0" y="0"/>
+          <a:chExt cx="0" cy="0"/>
+        </a:xfrm>
       </p:grpSpPr>
       <p:sp>
         <p:nvSpPr>
           <p:cNvPr id="4" name="Title">
-            <a:extLst xmlns:a="http://schemas.openxmlformats.org/drawingml/2006/main">
+            <a:extLst>
               <a:ext uri="{FF2B5EF4-FFF2-40B4-BE49-F238E27FC236}">
                 <a16:creationId xmlns:a16="http://schemas.microsoft.com/office/drawing/2014/main" id="{08007E66-546A-40D3-A868-82E5774D3100}"/>
               </a:ext>
             </a:extLst>
           </p:cNvPr>
           <p:cNvSpPr>
-            <a:spLocks xmlns:a="http://schemas.openxmlformats.org/drawingml/2006/main" noGrp="1"/>
+            <a:spLocks noGrp="1"/>
           </p:cNvSpPr>
           <p:nvPr>
-            <p:ph type="title" idx="0"/>
+            <p:ph type="title"/>
           </p:nvPr>
         </p:nvSpPr>
         <p:spPr>
-          <a:xfrm xmlns:a="http://schemas.openxmlformats.org/drawingml/2006/main">
+          <a:xfrm>
             <a:off x="685800" y="533400"/>
             <a:ext cx="10820400" cy="838200"/>
           </a:xfrm>
-          <a:prstGeom xmlns:a="http://schemas.openxmlformats.org/drawingml/2006/main" prst="rect">
+          <a:prstGeom prst="rect">
             <a:avLst/>
           </a:prstGeom>
-          <a:noFill xmlns:a="http://schemas.openxmlformats.org/drawingml/2006/main"/>
-          <a:ln xmlns:a="http://schemas.openxmlformats.org/drawingml/2006/main">
+          <a:noFill/>
+          <a:ln>
             <a:noFill/>
             <a:prstDash val="solid"/>
           </a:ln>
         </p:spPr>
         <p:txBody>
-          <a:bodyPr xmlns:a="http://schemas.openxmlformats.org/drawingml/2006/main" wrap="square" lIns="0" tIns="0" rIns="0" bIns="0" anchor="t">
+          <a:bodyPr wrap="square" lIns="0" tIns="0" rIns="0" bIns="0" anchor="t">
             <a:normAutofit/>
           </a:bodyPr>
-          <a:lstStyle xmlns:a="http://schemas.openxmlformats.org/drawingml/2006/main">
+          <a:lstStyle>
             <a:defPPr algn="l">
               <a:defRPr sz="3300" b="1">
                 <a:solidFill>
@@ -2474,44 +2477,46 @@
               </a:defRPr>
             </a:lvl9pPr>
           </a:lstStyle>
-          <a:p xmlns:a="http://schemas.openxmlformats.org/drawingml/2006/main"/>
+          <a:p>
+            <a:endParaRPr/>
+          </a:p>
         </p:txBody>
       </p:sp>
       <p:sp>
         <p:nvSpPr>
           <p:cNvPr id="2" name="Left column">
-            <a:extLst xmlns:a="http://schemas.openxmlformats.org/drawingml/2006/main">
+            <a:extLst>
               <a:ext uri="{FF2B5EF4-FFF2-40B4-BE49-F238E27FC236}">
                 <a16:creationId xmlns:a16="http://schemas.microsoft.com/office/drawing/2014/main" id="{173FB202-D470-4477-BF8F-7AF54DDFC5F0}"/>
               </a:ext>
             </a:extLst>
           </p:cNvPr>
           <p:cNvSpPr>
-            <a:spLocks xmlns:a="http://schemas.openxmlformats.org/drawingml/2006/main" noGrp="1"/>
+            <a:spLocks noGrp="1"/>
           </p:cNvSpPr>
           <p:nvPr>
             <p:ph type="body" idx="1"/>
           </p:nvPr>
         </p:nvSpPr>
         <p:spPr>
-          <a:xfrm xmlns:a="http://schemas.openxmlformats.org/drawingml/2006/main">
+          <a:xfrm>
             <a:off x="685800" y="1905000"/>
             <a:ext cx="5029200" cy="4267200"/>
           </a:xfrm>
-          <a:prstGeom xmlns:a="http://schemas.openxmlformats.org/drawingml/2006/main" prst="rect">
+          <a:prstGeom prst="rect">
             <a:avLst/>
           </a:prstGeom>
-          <a:noFill xmlns:a="http://schemas.openxmlformats.org/drawingml/2006/main"/>
-          <a:ln xmlns:a="http://schemas.openxmlformats.org/drawingml/2006/main">
+          <a:noFill/>
+          <a:ln>
             <a:noFill/>
             <a:prstDash val="solid"/>
           </a:ln>
         </p:spPr>
         <p:txBody>
-          <a:bodyPr xmlns:a="http://schemas.openxmlformats.org/drawingml/2006/main" wrap="square" lIns="0" tIns="0" rIns="0" bIns="0" anchor="t">
+          <a:bodyPr wrap="square" lIns="0" tIns="0" rIns="0" bIns="0" anchor="t">
             <a:normAutofit/>
           </a:bodyPr>
-          <a:lstStyle xmlns:a="http://schemas.openxmlformats.org/drawingml/2006/main">
+          <a:lstStyle>
             <a:defPPr algn="l">
               <a:defRPr sz="2100" b="0">
                 <a:solidFill>
@@ -2703,44 +2708,46 @@
               </a:defRPr>
             </a:lvl9pPr>
           </a:lstStyle>
-          <a:p xmlns:a="http://schemas.openxmlformats.org/drawingml/2006/main"/>
+          <a:p>
+            <a:endParaRPr/>
+          </a:p>
         </p:txBody>
       </p:sp>
       <p:sp>
         <p:nvSpPr>
           <p:cNvPr id="3" name="Right column">
-            <a:extLst xmlns:a="http://schemas.openxmlformats.org/drawingml/2006/main">
+            <a:extLst>
               <a:ext uri="{FF2B5EF4-FFF2-40B4-BE49-F238E27FC236}">
                 <a16:creationId xmlns:a16="http://schemas.microsoft.com/office/drawing/2014/main" id="{DD203A0F-69A4-4E61-98EA-76A9D8F6DB35}"/>
               </a:ext>
             </a:extLst>
           </p:cNvPr>
           <p:cNvSpPr>
-            <a:spLocks xmlns:a="http://schemas.openxmlformats.org/drawingml/2006/main" noGrp="1"/>
+            <a:spLocks noGrp="1"/>
           </p:cNvSpPr>
           <p:nvPr>
             <p:ph type="body" idx="2"/>
           </p:nvPr>
         </p:nvSpPr>
         <p:spPr>
-          <a:xfrm xmlns:a="http://schemas.openxmlformats.org/drawingml/2006/main">
+          <a:xfrm>
             <a:off x="6477000" y="1905000"/>
             <a:ext cx="5029200" cy="4267200"/>
           </a:xfrm>
-          <a:prstGeom xmlns:a="http://schemas.openxmlformats.org/drawingml/2006/main" prst="rect">
+          <a:prstGeom prst="rect">
             <a:avLst/>
           </a:prstGeom>
-          <a:noFill xmlns:a="http://schemas.openxmlformats.org/drawingml/2006/main"/>
-          <a:ln xmlns:a="http://schemas.openxmlformats.org/drawingml/2006/main">
+          <a:noFill/>
+          <a:ln>
             <a:noFill/>
             <a:prstDash val="solid"/>
           </a:ln>
         </p:spPr>
         <p:txBody>
-          <a:bodyPr xmlns:a="http://schemas.openxmlformats.org/drawingml/2006/main" wrap="square" lIns="0" tIns="0" rIns="0" bIns="0" anchor="t">
+          <a:bodyPr wrap="square" lIns="0" tIns="0" rIns="0" bIns="0" anchor="t">
             <a:normAutofit/>
           </a:bodyPr>
-          <a:lstStyle xmlns:a="http://schemas.openxmlformats.org/drawingml/2006/main">
+          <a:lstStyle>
             <a:defPPr algn="l">
               <a:defRPr sz="2100" b="0">
                 <a:solidFill>
@@ -2932,16 +2939,21 @@
               </a:defRPr>
             </a:lvl9pPr>
           </a:lstStyle>
-          <a:p xmlns:a="http://schemas.openxmlformats.org/drawingml/2006/main"/>
+          <a:p>
+            <a:endParaRPr/>
+          </a:p>
         </p:txBody>
       </p:sp>
     </p:spTree>
   </p:cSld>
+  <p:clrMapOvr>
+    <a:masterClrMapping/>
+  </p:clrMapOvr>
 </p:sldLayout>
 </file>
 
 <file path=ppt/slideLayouts/slideLayout5.xml><?xml version="1.0" encoding="utf-8"?>
-<p:sldLayout xmlns:p="http://schemas.openxmlformats.org/presentationml/2006/main">
+<p:sldLayout xmlns:a="http://schemas.openxmlformats.org/drawingml/2006/main" xmlns:r="http://schemas.openxmlformats.org/officeDocument/2006/relationships" xmlns:p="http://schemas.openxmlformats.org/presentationml/2006/main">
   <p:cSld name="Title and One Column">
     <p:spTree>
       <p:nvGrpSpPr>
@@ -2950,43 +2962,48 @@
         <p:nvPr/>
       </p:nvGrpSpPr>
       <p:grpSpPr>
-        <a:xfrm xmlns:a="http://schemas.openxmlformats.org/drawingml/2006/main"/>
+        <a:xfrm>
+          <a:off x="0" y="0"/>
+          <a:ext cx="0" cy="0"/>
+          <a:chOff x="0" y="0"/>
+          <a:chExt cx="0" cy="0"/>
+        </a:xfrm>
       </p:grpSpPr>
       <p:sp>
         <p:nvSpPr>
           <p:cNvPr id="3" name="Title">
-            <a:extLst xmlns:a="http://schemas.openxmlformats.org/drawingml/2006/main">
+            <a:extLst>
               <a:ext uri="{FF2B5EF4-FFF2-40B4-BE49-F238E27FC236}">
                 <a16:creationId xmlns:a16="http://schemas.microsoft.com/office/drawing/2014/main" id="{BB1668C6-B71E-473D-A0D5-152D0C256605}"/>
               </a:ext>
             </a:extLst>
           </p:cNvPr>
           <p:cNvSpPr>
-            <a:spLocks xmlns:a="http://schemas.openxmlformats.org/drawingml/2006/main" noGrp="1"/>
+            <a:spLocks noGrp="1"/>
           </p:cNvSpPr>
           <p:nvPr>
-            <p:ph type="title" idx="0"/>
+            <p:ph type="title"/>
           </p:nvPr>
         </p:nvSpPr>
         <p:spPr>
-          <a:xfrm xmlns:a="http://schemas.openxmlformats.org/drawingml/2006/main">
+          <a:xfrm>
             <a:off x="685800" y="533400"/>
             <a:ext cx="10820400" cy="838200"/>
           </a:xfrm>
-          <a:prstGeom xmlns:a="http://schemas.openxmlformats.org/drawingml/2006/main" prst="rect">
+          <a:prstGeom prst="rect">
             <a:avLst/>
           </a:prstGeom>
-          <a:noFill xmlns:a="http://schemas.openxmlformats.org/drawingml/2006/main"/>
-          <a:ln xmlns:a="http://schemas.openxmlformats.org/drawingml/2006/main">
+          <a:noFill/>
+          <a:ln>
             <a:noFill/>
             <a:prstDash val="solid"/>
           </a:ln>
         </p:spPr>
         <p:txBody>
-          <a:bodyPr xmlns:a="http://schemas.openxmlformats.org/drawingml/2006/main" wrap="square" lIns="0" tIns="0" rIns="0" bIns="0" anchor="t">
+          <a:bodyPr wrap="square" lIns="0" tIns="0" rIns="0" bIns="0" anchor="t">
             <a:normAutofit/>
           </a:bodyPr>
-          <a:lstStyle xmlns:a="http://schemas.openxmlformats.org/drawingml/2006/main">
+          <a:lstStyle>
             <a:defPPr algn="l">
               <a:defRPr sz="3300" b="1">
                 <a:solidFill>
@@ -3178,44 +3195,46 @@
               </a:defRPr>
             </a:lvl9pPr>
           </a:lstStyle>
-          <a:p xmlns:a="http://schemas.openxmlformats.org/drawingml/2006/main"/>
+          <a:p>
+            <a:endParaRPr/>
+          </a:p>
         </p:txBody>
       </p:sp>
       <p:sp>
         <p:nvSpPr>
           <p:cNvPr id="2" name="Left column">
-            <a:extLst xmlns:a="http://schemas.openxmlformats.org/drawingml/2006/main">
+            <a:extLst>
               <a:ext uri="{FF2B5EF4-FFF2-40B4-BE49-F238E27FC236}">
                 <a16:creationId xmlns:a16="http://schemas.microsoft.com/office/drawing/2014/main" id="{1572FC02-21D5-4DCB-848C-0AA71E3B08AF}"/>
               </a:ext>
             </a:extLst>
           </p:cNvPr>
           <p:cNvSpPr>
-            <a:spLocks xmlns:a="http://schemas.openxmlformats.org/drawingml/2006/main" noGrp="1"/>
+            <a:spLocks noGrp="1"/>
           </p:cNvSpPr>
           <p:nvPr>
             <p:ph type="body" idx="1"/>
           </p:nvPr>
         </p:nvSpPr>
         <p:spPr>
-          <a:xfrm xmlns:a="http://schemas.openxmlformats.org/drawingml/2006/main">
+          <a:xfrm>
             <a:off x="685800" y="1905000"/>
             <a:ext cx="5029200" cy="4267200"/>
           </a:xfrm>
-          <a:prstGeom xmlns:a="http://schemas.openxmlformats.org/drawingml/2006/main" prst="rect">
+          <a:prstGeom prst="rect">
             <a:avLst/>
           </a:prstGeom>
-          <a:noFill xmlns:a="http://schemas.openxmlformats.org/drawingml/2006/main"/>
-          <a:ln xmlns:a="http://schemas.openxmlformats.org/drawingml/2006/main">
+          <a:noFill/>
+          <a:ln>
             <a:noFill/>
             <a:prstDash val="solid"/>
           </a:ln>
         </p:spPr>
         <p:txBody>
-          <a:bodyPr xmlns:a="http://schemas.openxmlformats.org/drawingml/2006/main" wrap="square" lIns="0" tIns="0" rIns="0" bIns="0" anchor="t">
+          <a:bodyPr wrap="square" lIns="0" tIns="0" rIns="0" bIns="0" anchor="t">
             <a:normAutofit/>
           </a:bodyPr>
-          <a:lstStyle xmlns:a="http://schemas.openxmlformats.org/drawingml/2006/main">
+          <a:lstStyle>
             <a:defPPr algn="l">
               <a:defRPr sz="2250" b="0">
                 <a:solidFill>
@@ -3407,16 +3426,21 @@
               </a:defRPr>
             </a:lvl9pPr>
           </a:lstStyle>
-          <a:p xmlns:a="http://schemas.openxmlformats.org/drawingml/2006/main"/>
+          <a:p>
+            <a:endParaRPr/>
+          </a:p>
         </p:txBody>
       </p:sp>
     </p:spTree>
   </p:cSld>
+  <p:clrMapOvr>
+    <a:masterClrMapping/>
+  </p:clrMapOvr>
 </p:sldLayout>
 </file>
 
 <file path=ppt/slideLayouts/slideLayout6.xml><?xml version="1.0" encoding="utf-8"?>
-<p:sldLayout xmlns:p="http://schemas.openxmlformats.org/presentationml/2006/main" type="blank">
+<p:sldLayout xmlns:a="http://schemas.openxmlformats.org/drawingml/2006/main" xmlns:r="http://schemas.openxmlformats.org/officeDocument/2006/relationships" xmlns:p="http://schemas.openxmlformats.org/presentationml/2006/main" type="blank">
   <p:cSld name="Blank">
     <p:spTree>
       <p:nvGrpSpPr>
@@ -3425,19 +3449,27 @@
         <p:nvPr/>
       </p:nvGrpSpPr>
       <p:grpSpPr>
-        <a:xfrm xmlns:a="http://schemas.openxmlformats.org/drawingml/2006/main"/>
+        <a:xfrm>
+          <a:off x="0" y="0"/>
+          <a:ext cx="0" cy="0"/>
+          <a:chOff x="0" y="0"/>
+          <a:chExt cx="0" cy="0"/>
+        </a:xfrm>
       </p:grpSpPr>
     </p:spTree>
   </p:cSld>
+  <p:clrMapOvr>
+    <a:masterClrMapping/>
+  </p:clrMapOvr>
 </p:sldLayout>
 </file>
 
 <file path=ppt/slideMasters/slideMaster1.xml><?xml version="1.0" encoding="utf-8"?>
-<p:sldMaster xmlns:p="http://schemas.openxmlformats.org/presentationml/2006/main">
+<p:sldMaster xmlns:a="http://schemas.openxmlformats.org/drawingml/2006/main" xmlns:r="http://schemas.openxmlformats.org/officeDocument/2006/relationships" xmlns:p="http://schemas.openxmlformats.org/presentationml/2006/main">
   <p:cSld name="Master">
     <p:bg>
       <p:bgRef idx="1001">
-        <a:schemeClr xmlns:a="http://schemas.openxmlformats.org/drawingml/2006/main" val="bg1"/>
+        <a:schemeClr val="bg1"/>
       </p:bgRef>
     </p:bg>
     <p:spTree>
@@ -3447,22 +3479,27 @@
         <p:nvPr/>
       </p:nvGrpSpPr>
       <p:grpSpPr>
-        <a:xfrm xmlns:a="http://schemas.openxmlformats.org/drawingml/2006/main"/>
+        <a:xfrm>
+          <a:off x="0" y="0"/>
+          <a:ext cx="0" cy="0"/>
+          <a:chOff x="0" y="0"/>
+          <a:chExt cx="0" cy="0"/>
+        </a:xfrm>
       </p:grpSpPr>
     </p:spTree>
   </p:cSld>
   <p:clrMap bg1="lt1" tx1="dk1" bg2="lt2" tx2="dk2" accent1="accent1" accent2="accent2" accent3="accent3" accent4="accent4" accent5="accent5" accent6="accent6" hlink="hlink" folHlink="folHlink"/>
   <p:sldLayoutIdLst>
-    <p:sldLayoutId xmlns:r="http://schemas.openxmlformats.org/officeDocument/2006/relationships" id="2147483649" r:id="Rf6abafdb1d774b43"/>
-    <p:sldLayoutId xmlns:r="http://schemas.openxmlformats.org/officeDocument/2006/relationships" id="2147483650" r:id="R64afb40e0c2c4c2d"/>
-    <p:sldLayoutId xmlns:r="http://schemas.openxmlformats.org/officeDocument/2006/relationships" id="2147483651" r:id="R29bebe23800f4042"/>
-    <p:sldLayoutId xmlns:r="http://schemas.openxmlformats.org/officeDocument/2006/relationships" id="2147483652" r:id="R24dacc749f104300"/>
-    <p:sldLayoutId xmlns:r="http://schemas.openxmlformats.org/officeDocument/2006/relationships" id="2147483653" r:id="R39ebaf8b06454b44"/>
-    <p:sldLayoutId xmlns:r="http://schemas.openxmlformats.org/officeDocument/2006/relationships" id="2147483654" r:id="R428e3471703742b0"/>
+    <p:sldLayoutId id="2147483649" r:id="rId1"/>
+    <p:sldLayoutId id="2147483650" r:id="rId2"/>
+    <p:sldLayoutId id="2147483651" r:id="rId3"/>
+    <p:sldLayoutId id="2147483652" r:id="rId4"/>
+    <p:sldLayoutId id="2147483653" r:id="rId5"/>
+    <p:sldLayoutId id="2147483654" r:id="rId6"/>
   </p:sldLayoutIdLst>
   <p:txStyles>
     <p:titleStyle>
-      <a:lvl1pPr xmlns:a="http://schemas.openxmlformats.org/drawingml/2006/main" algn="l">
+      <a:lvl1pPr algn="l">
         <a:lnSpc>
           <a:spcPct val="90000"/>
         </a:lnSpc>
@@ -3481,7 +3518,7 @@
       </a:lvl1pPr>
     </p:titleStyle>
     <p:bodyStyle>
-      <a:lvl1pPr xmlns:a="http://schemas.openxmlformats.org/drawingml/2006/main" marL="228600" indent="-228600" algn="l">
+      <a:lvl1pPr marL="228600" indent="-228600" algn="l">
         <a:lnSpc>
           <a:spcPct val="90000"/>
         </a:lnSpc>
@@ -3498,7 +3535,7 @@
           <a:cs typeface="+mn-lt"/>
         </a:defRPr>
       </a:lvl1pPr>
-      <a:lvl2pPr xmlns:a="http://schemas.openxmlformats.org/drawingml/2006/main" marL="685800" indent="-228600" algn="l">
+      <a:lvl2pPr marL="685800" indent="-228600" algn="l">
         <a:lnSpc>
           <a:spcPct val="90000"/>
         </a:lnSpc>
@@ -3515,7 +3552,7 @@
           <a:cs typeface="+mn-lt"/>
         </a:defRPr>
       </a:lvl2pPr>
-      <a:lvl3pPr xmlns:a="http://schemas.openxmlformats.org/drawingml/2006/main" marL="1143000" indent="-228600" algn="l">
+      <a:lvl3pPr marL="1143000" indent="-228600" algn="l">
         <a:lnSpc>
           <a:spcPct val="90000"/>
         </a:lnSpc>
@@ -3532,7 +3569,7 @@
           <a:cs typeface="+mn-lt"/>
         </a:defRPr>
       </a:lvl3pPr>
-      <a:lvl4pPr xmlns:a="http://schemas.openxmlformats.org/drawingml/2006/main" marL="1600200" indent="-228600" algn="l">
+      <a:lvl4pPr marL="1600200" indent="-228600" algn="l">
         <a:lnSpc>
           <a:spcPct val="90000"/>
         </a:lnSpc>
@@ -3549,7 +3586,7 @@
           <a:cs typeface="+mn-lt"/>
         </a:defRPr>
       </a:lvl4pPr>
-      <a:lvl5pPr xmlns:a="http://schemas.openxmlformats.org/drawingml/2006/main" marL="2057400" indent="-228600" algn="l">
+      <a:lvl5pPr marL="2057400" indent="-228600" algn="l">
         <a:lnSpc>
           <a:spcPct val="90000"/>
         </a:lnSpc>
@@ -3566,7 +3603,7 @@
           <a:cs typeface="+mn-lt"/>
         </a:defRPr>
       </a:lvl5pPr>
-      <a:lvl6pPr xmlns:a="http://schemas.openxmlformats.org/drawingml/2006/main" marL="2514600" indent="-228600" algn="l">
+      <a:lvl6pPr marL="2514600" indent="-228600" algn="l">
         <a:lnSpc>
           <a:spcPct val="90000"/>
         </a:lnSpc>
@@ -3583,7 +3620,7 @@
           <a:cs typeface="+mn-lt"/>
         </a:defRPr>
       </a:lvl6pPr>
-      <a:lvl7pPr xmlns:a="http://schemas.openxmlformats.org/drawingml/2006/main" marL="2971800" indent="-228600" algn="l">
+      <a:lvl7pPr marL="2971800" indent="-228600" algn="l">
         <a:lnSpc>
           <a:spcPct val="90000"/>
         </a:lnSpc>
@@ -3600,7 +3637,7 @@
           <a:cs typeface="+mn-lt"/>
         </a:defRPr>
       </a:lvl7pPr>
-      <a:lvl8pPr xmlns:a="http://schemas.openxmlformats.org/drawingml/2006/main" marL="3429000" indent="-228600" algn="l">
+      <a:lvl8pPr marL="3429000" indent="-228600" algn="l">
         <a:lnSpc>
           <a:spcPct val="90000"/>
         </a:lnSpc>
@@ -3617,7 +3654,7 @@
           <a:cs typeface="+mn-lt"/>
         </a:defRPr>
       </a:lvl8pPr>
-      <a:lvl9pPr xmlns:a="http://schemas.openxmlformats.org/drawingml/2006/main" marL="3886200" indent="-228600" algn="l">
+      <a:lvl9pPr marL="3886200" indent="-228600" algn="l">
         <a:lnSpc>
           <a:spcPct val="90000"/>
         </a:lnSpc>
@@ -3636,7 +3673,7 @@
       </a:lvl9pPr>
     </p:bodyStyle>
     <p:otherStyle>
-      <a:lvl1pPr xmlns:a="http://schemas.openxmlformats.org/drawingml/2006/main" marL="0" algn="l">
+      <a:lvl1pPr marL="0" algn="l">
         <a:buNone/>
         <a:defRPr sz="1800">
           <a:solidFill>
@@ -3647,7 +3684,7 @@
           <a:cs typeface="+mn-lt"/>
         </a:defRPr>
       </a:lvl1pPr>
-      <a:lvl2pPr xmlns:a="http://schemas.openxmlformats.org/drawingml/2006/main" marL="457200" algn="l">
+      <a:lvl2pPr marL="457200" algn="l">
         <a:buNone/>
         <a:defRPr sz="1800">
           <a:solidFill>
@@ -3658,7 +3695,7 @@
           <a:cs typeface="+mn-lt"/>
         </a:defRPr>
       </a:lvl2pPr>
-      <a:lvl3pPr xmlns:a="http://schemas.openxmlformats.org/drawingml/2006/main" marL="914400" algn="l">
+      <a:lvl3pPr marL="914400" algn="l">
         <a:buNone/>
         <a:defRPr sz="1800">
           <a:solidFill>
@@ -3669,7 +3706,7 @@
           <a:cs typeface="+mn-lt"/>
         </a:defRPr>
       </a:lvl3pPr>
-      <a:lvl4pPr xmlns:a="http://schemas.openxmlformats.org/drawingml/2006/main" marL="1371600" algn="l">
+      <a:lvl4pPr marL="1371600" algn="l">
         <a:buNone/>
         <a:defRPr sz="1800">
           <a:solidFill>
@@ -3680,7 +3717,7 @@
           <a:cs typeface="+mn-lt"/>
         </a:defRPr>
       </a:lvl4pPr>
-      <a:lvl5pPr xmlns:a="http://schemas.openxmlformats.org/drawingml/2006/main" marL="1828800" algn="l">
+      <a:lvl5pPr marL="1828800" algn="l">
         <a:buNone/>
         <a:defRPr sz="1800">
           <a:solidFill>
@@ -3691,7 +3728,7 @@
           <a:cs typeface="+mn-lt"/>
         </a:defRPr>
       </a:lvl5pPr>
-      <a:lvl6pPr xmlns:a="http://schemas.openxmlformats.org/drawingml/2006/main" marL="2286000" algn="l">
+      <a:lvl6pPr marL="2286000" algn="l">
         <a:buNone/>
         <a:defRPr sz="1800">
           <a:solidFill>
@@ -3702,7 +3739,7 @@
           <a:cs typeface="+mn-lt"/>
         </a:defRPr>
       </a:lvl6pPr>
-      <a:lvl7pPr xmlns:a="http://schemas.openxmlformats.org/drawingml/2006/main" marL="2743200" algn="l">
+      <a:lvl7pPr marL="2743200" algn="l">
         <a:buNone/>
         <a:defRPr sz="1800">
           <a:solidFill>
@@ -3713,7 +3750,7 @@
           <a:cs typeface="+mn-lt"/>
         </a:defRPr>
       </a:lvl7pPr>
-      <a:lvl8pPr xmlns:a="http://schemas.openxmlformats.org/drawingml/2006/main" marL="3200400" algn="l">
+      <a:lvl8pPr marL="3200400" algn="l">
         <a:buNone/>
         <a:defRPr sz="1800">
           <a:solidFill>
@@ -3724,7 +3761,7 @@
           <a:cs typeface="+mn-lt"/>
         </a:defRPr>
       </a:lvl8pPr>
-      <a:lvl9pPr xmlns:a="http://schemas.openxmlformats.org/drawingml/2006/main" marL="3657600" algn="l">
+      <a:lvl9pPr marL="3657600" algn="l">
         <a:buNone/>
         <a:defRPr sz="1800">
           <a:solidFill>
@@ -3740,259 +3777,15 @@
 </p:sldMaster>
 </file>
 
-<file path=ppt/slideMasters/theme/theme2.xml><?xml version="1.0" encoding="utf-8"?>
-<a:theme xmlns:a="http://schemas.openxmlformats.org/drawingml/2006/main" name="ChatGPT">
-  <a:themeElements>
-    <a:clrScheme name="ChatGPT">
-      <a:dk1>
-        <a:srgbClr val="000000"/>
-      </a:dk1>
-      <a:lt1>
-        <a:srgbClr val="FFFFFF"/>
-      </a:lt1>
-      <a:dk2>
-        <a:srgbClr val="0E2841"/>
-      </a:dk2>
-      <a:lt2>
-        <a:srgbClr val="E8E8E8"/>
-      </a:lt2>
-      <a:accent1>
-        <a:srgbClr val="156082"/>
-      </a:accent1>
-      <a:accent2>
-        <a:srgbClr val="E97132"/>
-      </a:accent2>
-      <a:accent3>
-        <a:srgbClr val="196B24"/>
-      </a:accent3>
-      <a:accent4>
-        <a:srgbClr val="0F9ED5"/>
-      </a:accent4>
-      <a:accent5>
-        <a:srgbClr val="A02B93"/>
-      </a:accent5>
-      <a:accent6>
-        <a:srgbClr val="4EA72E"/>
-      </a:accent6>
-      <a:hlink>
-        <a:srgbClr val="467886"/>
-      </a:hlink>
-      <a:folHlink>
-        <a:srgbClr val="96607D"/>
-      </a:folHlink>
-    </a:clrScheme>
-    <a:fontScheme name="">
-      <a:majorFont>
-        <a:latin typeface="Aptos"/>
-        <a:ea typeface=""/>
-        <a:cs typeface=""/>
-      </a:majorFont>
-      <a:minorFont>
-        <a:latin typeface="Aptos"/>
-        <a:ea typeface=""/>
-        <a:cs typeface=""/>
-      </a:minorFont>
-    </a:fontScheme>
-    <a:fmtScheme name="ChatGPT">
-      <a:fillStyleLst>
-        <a:solidFill>
-          <a:schemeClr val="phClr"/>
-        </a:solidFill>
-        <a:gradFill>
-          <a:gsLst>
-            <a:gs pos="0">
-              <a:schemeClr val="phClr">
-                <a:tint val="67000"/>
-                <a:lumMod val="110000"/>
-                <a:satMod val="105000"/>
-              </a:schemeClr>
-            </a:gs>
-            <a:gs pos="50000">
-              <a:schemeClr val="phClr">
-                <a:tint val="73000"/>
-                <a:lumMod val="105000"/>
-                <a:satMod val="103000"/>
-              </a:schemeClr>
-            </a:gs>
-            <a:gs pos="100000">
-              <a:schemeClr val="phClr">
-                <a:tint val="81000"/>
-                <a:lumMod val="105000"/>
-                <a:satMod val="109000"/>
-              </a:schemeClr>
-            </a:gs>
-          </a:gsLst>
-          <a:lin ang="5400000" scaled="0"/>
-        </a:gradFill>
-        <a:gradFill>
-          <a:gsLst>
-            <a:gs pos="0">
-              <a:schemeClr val="phClr">
-                <a:tint val="94000"/>
-                <a:lumMod val="102000"/>
-                <a:satMod val="103000"/>
-              </a:schemeClr>
-            </a:gs>
-            <a:gs pos="50000">
-              <a:schemeClr val="phClr">
-                <a:shade val="100000"/>
-                <a:lumMod val="100000"/>
-                <a:satMod val="110000"/>
-              </a:schemeClr>
-            </a:gs>
-            <a:gs pos="100000">
-              <a:schemeClr val="phClr">
-                <a:shade val="78000"/>
-                <a:lumMod val="99000"/>
-                <a:satMod val="120000"/>
-              </a:schemeClr>
-            </a:gs>
-          </a:gsLst>
-          <a:lin ang="5400000" scaled="0"/>
-        </a:gradFill>
-      </a:fillStyleLst>
-      <a:lnStyleLst>
-        <a:ln w="12700">
-          <a:solidFill>
-            <a:schemeClr val="phClr"/>
-          </a:solidFill>
-          <a:prstDash val="solid"/>
-        </a:ln>
-        <a:ln w="19050">
-          <a:solidFill>
-            <a:schemeClr val="phClr"/>
-          </a:solidFill>
-          <a:prstDash val="solid"/>
-        </a:ln>
-        <a:ln w="25400">
-          <a:solidFill>
-            <a:schemeClr val="phClr"/>
-          </a:solidFill>
-          <a:prstDash val="solid"/>
-        </a:ln>
-      </a:lnStyleLst>
-      <a:effectStyleLst>
-        <a:effectStyle>
-          <a:effectLst/>
-        </a:effectStyle>
-        <a:effectStyle>
-          <a:effectLst/>
-        </a:effectStyle>
-        <a:effectStyle>
-          <a:effectLst>
-            <a:outerShdw blurRad="57150" dist="19050" dir="5400000">
-              <a:srgbClr val="000000">
-                <a:alpha val="16000"/>
-              </a:srgbClr>
-            </a:outerShdw>
-          </a:effectLst>
-        </a:effectStyle>
-        <a:effectStyle>
-          <a:effectLst>
-            <a:outerShdw blurRad="19050" dist="9525" dir="5400000">
-              <a:srgbClr val="000000">
-                <a:alpha val="6000"/>
-              </a:srgbClr>
-            </a:outerShdw>
-          </a:effectLst>
-        </a:effectStyle>
-        <a:effectStyle>
-          <a:effectLst>
-            <a:outerShdw blurRad="28575" dist="9525" dir="5400000">
-              <a:srgbClr val="000000">
-                <a:alpha val="8000"/>
-              </a:srgbClr>
-            </a:outerShdw>
-          </a:effectLst>
-        </a:effectStyle>
-        <a:effectStyle>
-          <a:effectLst>
-            <a:outerShdw blurRad="57150" dist="19050" dir="5400000">
-              <a:srgbClr val="000000">
-                <a:alpha val="10000"/>
-              </a:srgbClr>
-            </a:outerShdw>
-          </a:effectLst>
-        </a:effectStyle>
-        <a:effectStyle>
-          <a:effectLst>
-            <a:outerShdw blurRad="114300" dist="38100" dir="5400000">
-              <a:srgbClr val="000000">
-                <a:alpha val="12000"/>
-              </a:srgbClr>
-            </a:outerShdw>
-          </a:effectLst>
-        </a:effectStyle>
-        <a:effectStyle>
-          <a:effectLst>
-            <a:outerShdw blurRad="171450" dist="57150" dir="5400000">
-              <a:srgbClr val="000000">
-                <a:alpha val="16000"/>
-              </a:srgbClr>
-            </a:outerShdw>
-          </a:effectLst>
-        </a:effectStyle>
-        <a:effectStyle>
-          <a:effectLst>
-            <a:outerShdw blurRad="266700" dist="95250" dir="5400000">
-              <a:srgbClr val="000000">
-                <a:alpha val="24000"/>
-              </a:srgbClr>
-            </a:outerShdw>
-          </a:effectLst>
-        </a:effectStyle>
-      </a:effectStyleLst>
-      <a:bgFillStyleLst>
-        <a:solidFill>
-          <a:schemeClr val="phClr"/>
-        </a:solidFill>
-        <a:solidFill>
-          <a:schemeClr val="phClr">
-            <a:tint val="95000"/>
-            <a:satMod val="170000"/>
-          </a:schemeClr>
-        </a:solidFill>
-        <a:gradFill>
-          <a:gsLst>
-            <a:gs pos="0">
-              <a:schemeClr val="phClr">
-                <a:tint val="93000"/>
-                <a:shade val="98000"/>
-                <a:lumMod val="102000"/>
-                <a:satMod val="150000"/>
-              </a:schemeClr>
-            </a:gs>
-            <a:gs pos="50000">
-              <a:schemeClr val="phClr">
-                <a:tint val="98000"/>
-                <a:shade val="90000"/>
-                <a:lumMod val="103000"/>
-                <a:satMod val="130000"/>
-              </a:schemeClr>
-            </a:gs>
-            <a:gs pos="100000">
-              <a:schemeClr val="phClr">
-                <a:shade val="63000"/>
-                <a:satMod val="120000"/>
-              </a:schemeClr>
-            </a:gs>
-          </a:gsLst>
-          <a:lin ang="5400000" scaled="0"/>
-        </a:gradFill>
-      </a:bgFillStyleLst>
-    </a:fmtScheme>
-  </a:themeElements>
-</a:theme>
-</file>
-
 <file path=ppt/slides/slide1.xml><?xml version="1.0" encoding="utf-8"?>
-<p:sld xmlns:p="http://schemas.openxmlformats.org/presentationml/2006/main">
+<p:sld xmlns:a="http://schemas.openxmlformats.org/drawingml/2006/main" xmlns:r="http://schemas.openxmlformats.org/officeDocument/2006/relationships" xmlns:p="http://schemas.openxmlformats.org/presentationml/2006/main">
   <p:cSld>
     <p:bg>
       <p:bgPr>
-        <a:solidFill xmlns:a="http://schemas.openxmlformats.org/drawingml/2006/main">
+        <a:solidFill>
           <a:srgbClr val="101C2B"/>
         </a:solidFill>
+        <a:effectLst/>
       </p:bgPr>
     </p:bg>
     <p:spTree>
@@ -4002,40 +3795,45 @@
         <p:nvPr/>
       </p:nvGrpSpPr>
       <p:grpSpPr>
-        <a:xfrm xmlns:a="http://schemas.openxmlformats.org/drawingml/2006/main"/>
+        <a:xfrm>
+          <a:off x="0" y="0"/>
+          <a:ext cx="0" cy="0"/>
+          <a:chOff x="0" y="0"/>
+          <a:chExt cx="0" cy="0"/>
+        </a:xfrm>
       </p:grpSpPr>
       <p:sp>
         <p:nvSpPr>
-          <p:cNvPr id="6" name="">
-            <a:extLst xmlns:a="http://schemas.openxmlformats.org/drawingml/2006/main">
+          <p:cNvPr id="6" name="Прямоугольник 5">
+            <a:extLst>
               <a:ext uri="{FF2B5EF4-FFF2-40B4-BE49-F238E27FC236}">
                 <a16:creationId xmlns:a16="http://schemas.microsoft.com/office/drawing/2014/main" id="{DF34E126-313C-4BF4-9E06-F47A056FCB41}"/>
               </a:ext>
             </a:extLst>
           </p:cNvPr>
           <p:cNvSpPr>
-            <a:spLocks xmlns:a="http://schemas.openxmlformats.org/drawingml/2006/main" noGrp="1"/>
+            <a:spLocks noGrp="1"/>
           </p:cNvSpPr>
           <p:nvPr/>
         </p:nvSpPr>
         <p:spPr>
-          <a:xfrm xmlns:a="http://schemas.openxmlformats.org/drawingml/2006/main">
+          <a:xfrm>
             <a:off x="647700" y="552450"/>
             <a:ext cx="10858500" cy="876300"/>
           </a:xfrm>
-          <a:prstGeom xmlns:a="http://schemas.openxmlformats.org/drawingml/2006/main" prst="rect">
+          <a:prstGeom prst="rect">
             <a:avLst/>
           </a:prstGeom>
-          <a:noFill xmlns:a="http://schemas.openxmlformats.org/drawingml/2006/main"/>
-          <a:ln xmlns:a="http://schemas.openxmlformats.org/drawingml/2006/main" w="0">
+          <a:noFill/>
+          <a:ln w="0">
             <a:noFill/>
           </a:ln>
         </p:spPr>
         <p:txBody>
-          <a:bodyPr xmlns:a="http://schemas.openxmlformats.org/drawingml/2006/main" lIns="0" tIns="0" rIns="0" bIns="0" anchor="t">
+          <a:bodyPr lIns="0" tIns="0" rIns="0" bIns="0" anchor="t">
             <a:noAutofit/>
           </a:bodyPr>
-          <a:lstStyle xmlns:a="http://schemas.openxmlformats.org/drawingml/2006/main">
+          <a:lstStyle>
             <a:defPPr>
               <a:defRPr sz="3300" b="1">
                 <a:solidFill>
@@ -4137,7 +3935,7 @@
               </a:defRPr>
             </a:lvl9pPr>
           </a:lstStyle>
-          <a:p xmlns:a="http://schemas.openxmlformats.org/drawingml/2006/main">
+          <a:p>
             <a:pPr>
               <a:defRPr sz="3300" b="1">
                 <a:solidFill>
@@ -4164,36 +3962,36 @@
       </p:sp>
       <p:sp>
         <p:nvSpPr>
-          <p:cNvPr id="2" name="">
-            <a:extLst xmlns:a="http://schemas.openxmlformats.org/drawingml/2006/main">
+          <p:cNvPr id="2" name="Прямоугольник 1">
+            <a:extLst>
               <a:ext uri="{FF2B5EF4-FFF2-40B4-BE49-F238E27FC236}">
                 <a16:creationId xmlns:a16="http://schemas.microsoft.com/office/drawing/2014/main" id="{4A6EA7AE-DCDF-481C-8651-0A550F0375E2}"/>
               </a:ext>
             </a:extLst>
           </p:cNvPr>
           <p:cNvSpPr>
-            <a:spLocks xmlns:a="http://schemas.openxmlformats.org/drawingml/2006/main" noGrp="1"/>
+            <a:spLocks noGrp="1"/>
           </p:cNvSpPr>
           <p:nvPr/>
         </p:nvSpPr>
         <p:spPr>
-          <a:xfrm xmlns:a="http://schemas.openxmlformats.org/drawingml/2006/main">
+          <a:xfrm>
             <a:off x="11125200" y="6334125"/>
             <a:ext cx="476250" cy="266700"/>
           </a:xfrm>
-          <a:prstGeom xmlns:a="http://schemas.openxmlformats.org/drawingml/2006/main" prst="rect">
+          <a:prstGeom prst="rect">
             <a:avLst/>
           </a:prstGeom>
-          <a:noFill xmlns:a="http://schemas.openxmlformats.org/drawingml/2006/main"/>
-          <a:ln xmlns:a="http://schemas.openxmlformats.org/drawingml/2006/main" w="0">
+          <a:noFill/>
+          <a:ln w="0">
             <a:noFill/>
           </a:ln>
         </p:spPr>
         <p:txBody>
-          <a:bodyPr xmlns:a="http://schemas.openxmlformats.org/drawingml/2006/main" lIns="0" tIns="0" rIns="0" bIns="0" anchor="t">
+          <a:bodyPr lIns="0" tIns="0" rIns="0" bIns="0" anchor="t">
             <a:noAutofit/>
           </a:bodyPr>
-          <a:lstStyle xmlns:a="http://schemas.openxmlformats.org/drawingml/2006/main">
+          <a:lstStyle>
             <a:defPPr>
               <a:defRPr sz="1350" b="0">
                 <a:solidFill>
@@ -4295,7 +4093,7 @@
               </a:defRPr>
             </a:lvl9pPr>
           </a:lstStyle>
-          <a:p xmlns:a="http://schemas.openxmlformats.org/drawingml/2006/main">
+          <a:p>
             <a:pPr>
               <a:defRPr sz="1350" b="0">
                 <a:solidFill>
@@ -4322,36 +4120,36 @@
       </p:sp>
       <p:sp>
         <p:nvSpPr>
-          <p:cNvPr id="3" name="">
-            <a:extLst xmlns:a="http://schemas.openxmlformats.org/drawingml/2006/main">
+          <p:cNvPr id="3" name="Прямоугольник 2">
+            <a:extLst>
               <a:ext uri="{FF2B5EF4-FFF2-40B4-BE49-F238E27FC236}">
                 <a16:creationId xmlns:a16="http://schemas.microsoft.com/office/drawing/2014/main" id="{752C8C72-7DF0-4D36-93E3-62A1EFF8B06F}"/>
               </a:ext>
             </a:extLst>
           </p:cNvPr>
           <p:cNvSpPr>
-            <a:spLocks xmlns:a="http://schemas.openxmlformats.org/drawingml/2006/main" noGrp="1"/>
+            <a:spLocks noGrp="1"/>
           </p:cNvSpPr>
           <p:nvPr/>
         </p:nvSpPr>
         <p:spPr>
-          <a:xfrm xmlns:a="http://schemas.openxmlformats.org/drawingml/2006/main">
+          <a:xfrm>
             <a:off x="647700" y="1714500"/>
             <a:ext cx="9525000" cy="952500"/>
           </a:xfrm>
-          <a:prstGeom xmlns:a="http://schemas.openxmlformats.org/drawingml/2006/main" prst="rect">
+          <a:prstGeom prst="rect">
             <a:avLst/>
           </a:prstGeom>
-          <a:noFill xmlns:a="http://schemas.openxmlformats.org/drawingml/2006/main"/>
-          <a:ln xmlns:a="http://schemas.openxmlformats.org/drawingml/2006/main" w="0">
+          <a:noFill/>
+          <a:ln w="0">
             <a:noFill/>
           </a:ln>
         </p:spPr>
         <p:txBody>
-          <a:bodyPr xmlns:a="http://schemas.openxmlformats.org/drawingml/2006/main" lIns="0" tIns="0" rIns="0" bIns="0" anchor="t">
+          <a:bodyPr lIns="0" tIns="0" rIns="0" bIns="0" anchor="t">
             <a:noAutofit/>
           </a:bodyPr>
-          <a:lstStyle xmlns:a="http://schemas.openxmlformats.org/drawingml/2006/main">
+          <a:lstStyle>
             <a:defPPr>
               <a:defRPr sz="3900" b="1">
                 <a:solidFill>
@@ -4453,7 +4251,7 @@
               </a:defRPr>
             </a:lvl9pPr>
           </a:lstStyle>
-          <a:p xmlns:a="http://schemas.openxmlformats.org/drawingml/2006/main">
+          <a:p>
             <a:pPr>
               <a:defRPr sz="3900" b="1">
                 <a:solidFill>
@@ -4480,36 +4278,36 @@
       </p:sp>
       <p:sp>
         <p:nvSpPr>
-          <p:cNvPr id="4" name="">
-            <a:extLst xmlns:a="http://schemas.openxmlformats.org/drawingml/2006/main">
+          <p:cNvPr id="4" name="Прямоугольник 3">
+            <a:extLst>
               <a:ext uri="{FF2B5EF4-FFF2-40B4-BE49-F238E27FC236}">
                 <a16:creationId xmlns:a16="http://schemas.microsoft.com/office/drawing/2014/main" id="{BCA9C959-D449-4349-8D78-A1272E1D1AD0}"/>
               </a:ext>
             </a:extLst>
           </p:cNvPr>
           <p:cNvSpPr>
-            <a:spLocks xmlns:a="http://schemas.openxmlformats.org/drawingml/2006/main" noGrp="1"/>
+            <a:spLocks noGrp="1"/>
           </p:cNvSpPr>
           <p:nvPr/>
         </p:nvSpPr>
         <p:spPr>
-          <a:xfrm xmlns:a="http://schemas.openxmlformats.org/drawingml/2006/main">
+          <a:xfrm>
             <a:off x="647700" y="2924175"/>
             <a:ext cx="9525000" cy="762000"/>
           </a:xfrm>
-          <a:prstGeom xmlns:a="http://schemas.openxmlformats.org/drawingml/2006/main" prst="rect">
+          <a:prstGeom prst="rect">
             <a:avLst/>
           </a:prstGeom>
-          <a:noFill xmlns:a="http://schemas.openxmlformats.org/drawingml/2006/main"/>
-          <a:ln xmlns:a="http://schemas.openxmlformats.org/drawingml/2006/main" w="0">
+          <a:noFill/>
+          <a:ln w="0">
             <a:noFill/>
           </a:ln>
         </p:spPr>
         <p:txBody>
-          <a:bodyPr xmlns:a="http://schemas.openxmlformats.org/drawingml/2006/main" lIns="0" tIns="0" rIns="0" bIns="0" anchor="t">
+          <a:bodyPr lIns="0" tIns="0" rIns="0" bIns="0" anchor="t">
             <a:noAutofit/>
           </a:bodyPr>
-          <a:lstStyle xmlns:a="http://schemas.openxmlformats.org/drawingml/2006/main">
+          <a:lstStyle>
             <a:defPPr>
               <a:defRPr sz="2250" b="0">
                 <a:solidFill>
@@ -4611,7 +4409,7 @@
               </a:defRPr>
             </a:lvl9pPr>
           </a:lstStyle>
-          <a:p xmlns:a="http://schemas.openxmlformats.org/drawingml/2006/main">
+          <a:p>
             <a:pPr>
               <a:defRPr sz="2250" b="0">
                 <a:solidFill>
@@ -4638,36 +4436,36 @@
       </p:sp>
       <p:sp>
         <p:nvSpPr>
-          <p:cNvPr id="5" name="">
-            <a:extLst xmlns:a="http://schemas.openxmlformats.org/drawingml/2006/main">
+          <p:cNvPr id="5" name="Прямоугольник 4">
+            <a:extLst>
               <a:ext uri="{FF2B5EF4-FFF2-40B4-BE49-F238E27FC236}">
                 <a16:creationId xmlns:a16="http://schemas.microsoft.com/office/drawing/2014/main" id="{07D948B5-EE45-4328-98E2-2C73CD66B82E}"/>
               </a:ext>
             </a:extLst>
           </p:cNvPr>
           <p:cNvSpPr>
-            <a:spLocks xmlns:a="http://schemas.openxmlformats.org/drawingml/2006/main" noGrp="1"/>
+            <a:spLocks noGrp="1"/>
           </p:cNvSpPr>
           <p:nvPr/>
         </p:nvSpPr>
         <p:spPr>
-          <a:xfrm xmlns:a="http://schemas.openxmlformats.org/drawingml/2006/main">
+          <a:xfrm>
             <a:off x="647700" y="4667250"/>
             <a:ext cx="9525000" cy="952500"/>
           </a:xfrm>
-          <a:prstGeom xmlns:a="http://schemas.openxmlformats.org/drawingml/2006/main" prst="rect">
+          <a:prstGeom prst="rect">
             <a:avLst/>
           </a:prstGeom>
-          <a:noFill xmlns:a="http://schemas.openxmlformats.org/drawingml/2006/main"/>
-          <a:ln xmlns:a="http://schemas.openxmlformats.org/drawingml/2006/main" w="0">
+          <a:noFill/>
+          <a:ln w="0">
             <a:noFill/>
           </a:ln>
         </p:spPr>
         <p:txBody>
-          <a:bodyPr xmlns:a="http://schemas.openxmlformats.org/drawingml/2006/main" lIns="0" tIns="0" rIns="0" bIns="0" anchor="t">
+          <a:bodyPr lIns="0" tIns="0" rIns="0" bIns="0" anchor="t">
             <a:noAutofit/>
           </a:bodyPr>
-          <a:lstStyle xmlns:a="http://schemas.openxmlformats.org/drawingml/2006/main">
+          <a:lstStyle>
             <a:defPPr>
               <a:defRPr sz="2025" b="0">
                 <a:solidFill>
@@ -4769,7 +4567,7 @@
               </a:defRPr>
             </a:lvl9pPr>
           </a:lstStyle>
-          <a:p xmlns:a="http://schemas.openxmlformats.org/drawingml/2006/main">
+          <a:p>
             <a:pPr>
               <a:defRPr sz="2025" b="0">
                 <a:solidFill>
@@ -4792,7 +4590,7 @@
               <a:t>dxlol / @DXlol112</a:t>
             </a:r>
           </a:p>
-          <a:p xmlns:a="http://schemas.openxmlformats.org/drawingml/2006/main">
+          <a:p>
             <a:pPr>
               <a:defRPr sz="2025" b="0">
                 <a:solidFill>
@@ -4824,17 +4622,21 @@
       </p:ext>
     </p:extLst>
   </p:cSld>
+  <p:clrMapOvr>
+    <a:masterClrMapping/>
+  </p:clrMapOvr>
 </p:sld>
 </file>
 
 <file path=ppt/slides/slide2.xml><?xml version="1.0" encoding="utf-8"?>
-<p:sld xmlns:p="http://schemas.openxmlformats.org/presentationml/2006/main">
+<p:sld xmlns:a="http://schemas.openxmlformats.org/drawingml/2006/main" xmlns:r="http://schemas.openxmlformats.org/officeDocument/2006/relationships" xmlns:p="http://schemas.openxmlformats.org/presentationml/2006/main">
   <p:cSld>
     <p:bg>
       <p:bgPr>
-        <a:solidFill xmlns:a="http://schemas.openxmlformats.org/drawingml/2006/main">
+        <a:solidFill>
           <a:srgbClr val="101C2B"/>
         </a:solidFill>
+        <a:effectLst/>
       </p:bgPr>
     </p:bg>
     <p:spTree>
@@ -4844,40 +4646,45 @@
         <p:nvPr/>
       </p:nvGrpSpPr>
       <p:grpSpPr>
-        <a:xfrm xmlns:a="http://schemas.openxmlformats.org/drawingml/2006/main"/>
+        <a:xfrm>
+          <a:off x="0" y="0"/>
+          <a:ext cx="0" cy="0"/>
+          <a:chOff x="0" y="0"/>
+          <a:chExt cx="0" cy="0"/>
+        </a:xfrm>
       </p:grpSpPr>
       <p:sp>
         <p:nvSpPr>
-          <p:cNvPr id="8" name="">
-            <a:extLst xmlns:a="http://schemas.openxmlformats.org/drawingml/2006/main">
+          <p:cNvPr id="8" name="Прямоугольник 7">
+            <a:extLst>
               <a:ext uri="{FF2B5EF4-FFF2-40B4-BE49-F238E27FC236}">
                 <a16:creationId xmlns:a16="http://schemas.microsoft.com/office/drawing/2014/main" id="{8B6F89C9-303E-442E-9F8D-FECDA1946B6C}"/>
               </a:ext>
             </a:extLst>
           </p:cNvPr>
           <p:cNvSpPr>
-            <a:spLocks xmlns:a="http://schemas.openxmlformats.org/drawingml/2006/main" noGrp="1"/>
+            <a:spLocks noGrp="1"/>
           </p:cNvSpPr>
           <p:nvPr/>
         </p:nvSpPr>
         <p:spPr>
-          <a:xfrm xmlns:a="http://schemas.openxmlformats.org/drawingml/2006/main">
+          <a:xfrm>
             <a:off x="647700" y="552450"/>
             <a:ext cx="10858500" cy="876300"/>
           </a:xfrm>
-          <a:prstGeom xmlns:a="http://schemas.openxmlformats.org/drawingml/2006/main" prst="rect">
+          <a:prstGeom prst="rect">
             <a:avLst/>
           </a:prstGeom>
-          <a:noFill xmlns:a="http://schemas.openxmlformats.org/drawingml/2006/main"/>
-          <a:ln xmlns:a="http://schemas.openxmlformats.org/drawingml/2006/main" w="0">
+          <a:noFill/>
+          <a:ln w="0">
             <a:noFill/>
           </a:ln>
         </p:spPr>
         <p:txBody>
-          <a:bodyPr xmlns:a="http://schemas.openxmlformats.org/drawingml/2006/main" lIns="0" tIns="0" rIns="0" bIns="0" anchor="t">
+          <a:bodyPr lIns="0" tIns="0" rIns="0" bIns="0" anchor="t">
             <a:noAutofit/>
           </a:bodyPr>
-          <a:lstStyle xmlns:a="http://schemas.openxmlformats.org/drawingml/2006/main">
+          <a:lstStyle>
             <a:defPPr>
               <a:defRPr sz="3300" b="1">
                 <a:solidFill>
@@ -4979,7 +4786,7 @@
               </a:defRPr>
             </a:lvl9pPr>
           </a:lstStyle>
-          <a:p xmlns:a="http://schemas.openxmlformats.org/drawingml/2006/main">
+          <a:p>
             <a:pPr>
               <a:defRPr sz="3300" b="1">
                 <a:solidFill>
@@ -5006,36 +4813,36 @@
       </p:sp>
       <p:sp>
         <p:nvSpPr>
-          <p:cNvPr id="2" name="">
-            <a:extLst xmlns:a="http://schemas.openxmlformats.org/drawingml/2006/main">
+          <p:cNvPr id="2" name="Прямоугольник 1">
+            <a:extLst>
               <a:ext uri="{FF2B5EF4-FFF2-40B4-BE49-F238E27FC236}">
                 <a16:creationId xmlns:a16="http://schemas.microsoft.com/office/drawing/2014/main" id="{16C64F86-C712-48A9-B682-00881C7498E5}"/>
               </a:ext>
             </a:extLst>
           </p:cNvPr>
           <p:cNvSpPr>
-            <a:spLocks xmlns:a="http://schemas.openxmlformats.org/drawingml/2006/main" noGrp="1"/>
+            <a:spLocks noGrp="1"/>
           </p:cNvSpPr>
           <p:nvPr/>
         </p:nvSpPr>
         <p:spPr>
-          <a:xfrm xmlns:a="http://schemas.openxmlformats.org/drawingml/2006/main">
+          <a:xfrm>
             <a:off x="11125200" y="6334125"/>
             <a:ext cx="476250" cy="266700"/>
           </a:xfrm>
-          <a:prstGeom xmlns:a="http://schemas.openxmlformats.org/drawingml/2006/main" prst="rect">
+          <a:prstGeom prst="rect">
             <a:avLst/>
           </a:prstGeom>
-          <a:noFill xmlns:a="http://schemas.openxmlformats.org/drawingml/2006/main"/>
-          <a:ln xmlns:a="http://schemas.openxmlformats.org/drawingml/2006/main" w="0">
+          <a:noFill/>
+          <a:ln w="0">
             <a:noFill/>
           </a:ln>
         </p:spPr>
         <p:txBody>
-          <a:bodyPr xmlns:a="http://schemas.openxmlformats.org/drawingml/2006/main" lIns="0" tIns="0" rIns="0" bIns="0" anchor="t">
+          <a:bodyPr lIns="0" tIns="0" rIns="0" bIns="0" anchor="t">
             <a:noAutofit/>
           </a:bodyPr>
-          <a:lstStyle xmlns:a="http://schemas.openxmlformats.org/drawingml/2006/main">
+          <a:lstStyle>
             <a:defPPr>
               <a:defRPr sz="1350" b="0">
                 <a:solidFill>
@@ -5137,7 +4944,7 @@
               </a:defRPr>
             </a:lvl9pPr>
           </a:lstStyle>
-          <a:p xmlns:a="http://schemas.openxmlformats.org/drawingml/2006/main">
+          <a:p>
             <a:pPr>
               <a:defRPr sz="1350" b="0">
                 <a:solidFill>
@@ -5164,36 +4971,36 @@
       </p:sp>
       <p:sp>
         <p:nvSpPr>
-          <p:cNvPr id="3" name="">
-            <a:extLst xmlns:a="http://schemas.openxmlformats.org/drawingml/2006/main">
+          <p:cNvPr id="3" name="Прямоугольник 2">
+            <a:extLst>
               <a:ext uri="{FF2B5EF4-FFF2-40B4-BE49-F238E27FC236}">
                 <a16:creationId xmlns:a16="http://schemas.microsoft.com/office/drawing/2014/main" id="{AF94BCDA-E191-49B7-8E1C-B7B322C36D4C}"/>
               </a:ext>
             </a:extLst>
           </p:cNvPr>
           <p:cNvSpPr>
-            <a:spLocks xmlns:a="http://schemas.openxmlformats.org/drawingml/2006/main" noGrp="1"/>
+            <a:spLocks noGrp="1"/>
           </p:cNvSpPr>
           <p:nvPr/>
         </p:nvSpPr>
         <p:spPr>
-          <a:xfrm xmlns:a="http://schemas.openxmlformats.org/drawingml/2006/main">
+          <a:xfrm>
             <a:off x="647700" y="1752600"/>
             <a:ext cx="4762500" cy="476250"/>
           </a:xfrm>
-          <a:prstGeom xmlns:a="http://schemas.openxmlformats.org/drawingml/2006/main" prst="rect">
+          <a:prstGeom prst="rect">
             <a:avLst/>
           </a:prstGeom>
-          <a:noFill xmlns:a="http://schemas.openxmlformats.org/drawingml/2006/main"/>
-          <a:ln xmlns:a="http://schemas.openxmlformats.org/drawingml/2006/main" w="0">
+          <a:noFill/>
+          <a:ln w="0">
             <a:noFill/>
           </a:ln>
         </p:spPr>
         <p:txBody>
-          <a:bodyPr xmlns:a="http://schemas.openxmlformats.org/drawingml/2006/main" lIns="0" tIns="0" rIns="0" bIns="0" anchor="t">
+          <a:bodyPr lIns="0" tIns="0" rIns="0" bIns="0" anchor="t">
             <a:noAutofit/>
           </a:bodyPr>
-          <a:lstStyle xmlns:a="http://schemas.openxmlformats.org/drawingml/2006/main">
+          <a:lstStyle>
             <a:defPPr>
               <a:defRPr sz="2700" b="1">
                 <a:solidFill>
@@ -5295,7 +5102,7 @@
               </a:defRPr>
             </a:lvl9pPr>
           </a:lstStyle>
-          <a:p xmlns:a="http://schemas.openxmlformats.org/drawingml/2006/main">
+          <a:p>
             <a:pPr>
               <a:defRPr sz="2700" b="1">
                 <a:solidFill>
@@ -5322,36 +5129,36 @@
       </p:sp>
       <p:sp>
         <p:nvSpPr>
-          <p:cNvPr id="4" name="">
-            <a:extLst xmlns:a="http://schemas.openxmlformats.org/drawingml/2006/main">
+          <p:cNvPr id="4" name="Прямоугольник 3">
+            <a:extLst>
               <a:ext uri="{FF2B5EF4-FFF2-40B4-BE49-F238E27FC236}">
                 <a16:creationId xmlns:a16="http://schemas.microsoft.com/office/drawing/2014/main" id="{196B3CCC-BA91-4A55-BC3F-E8940337EAEE}"/>
               </a:ext>
             </a:extLst>
           </p:cNvPr>
           <p:cNvSpPr>
-            <a:spLocks xmlns:a="http://schemas.openxmlformats.org/drawingml/2006/main" noGrp="1"/>
+            <a:spLocks noGrp="1"/>
           </p:cNvSpPr>
           <p:nvPr/>
         </p:nvSpPr>
         <p:spPr>
-          <a:xfrm xmlns:a="http://schemas.openxmlformats.org/drawingml/2006/main">
+          <a:xfrm>
             <a:off x="647700" y="2428875"/>
             <a:ext cx="4905375" cy="2333625"/>
           </a:xfrm>
-          <a:prstGeom xmlns:a="http://schemas.openxmlformats.org/drawingml/2006/main" prst="rect">
+          <a:prstGeom prst="rect">
             <a:avLst/>
           </a:prstGeom>
-          <a:noFill xmlns:a="http://schemas.openxmlformats.org/drawingml/2006/main"/>
-          <a:ln xmlns:a="http://schemas.openxmlformats.org/drawingml/2006/main" w="0">
+          <a:noFill/>
+          <a:ln w="0">
             <a:noFill/>
           </a:ln>
         </p:spPr>
         <p:txBody>
-          <a:bodyPr xmlns:a="http://schemas.openxmlformats.org/drawingml/2006/main" lIns="0" tIns="0" rIns="0" bIns="0" anchor="t">
+          <a:bodyPr lIns="0" tIns="0" rIns="0" bIns="0" anchor="t">
             <a:noAutofit/>
           </a:bodyPr>
-          <a:lstStyle xmlns:a="http://schemas.openxmlformats.org/drawingml/2006/main">
+          <a:lstStyle>
             <a:defPPr>
               <a:defRPr sz="2175" b="0">
                 <a:solidFill>
@@ -5453,7 +5260,7 @@
               </a:defRPr>
             </a:lvl9pPr>
           </a:lstStyle>
-          <a:p xmlns:a="http://schemas.openxmlformats.org/drawingml/2006/main">
+          <a:p>
             <a:pPr>
               <a:defRPr sz="2175" b="0">
                 <a:solidFill>
@@ -5476,7 +5283,7 @@
               <a:t>dxlol</a:t>
             </a:r>
           </a:p>
-          <a:p xmlns:a="http://schemas.openxmlformats.org/drawingml/2006/main">
+          <a:p>
             <a:pPr>
               <a:defRPr sz="2175" b="0">
                 <a:solidFill>
@@ -5499,7 +5306,7 @@
               <a:t>Пользователи и группы</a:t>
             </a:r>
           </a:p>
-          <a:p xmlns:a="http://schemas.openxmlformats.org/drawingml/2006/main">
+          <a:p>
             <a:pPr>
               <a:defRPr sz="2175" b="0">
                 <a:solidFill>
@@ -5522,7 +5329,7 @@
               <a:t>Правило sudo</a:t>
             </a:r>
           </a:p>
-          <a:p xmlns:a="http://schemas.openxmlformats.org/drawingml/2006/main">
+          <a:p>
             <a:pPr>
               <a:defRPr sz="2175" b="0">
                 <a:solidFill>
@@ -5549,36 +5356,36 @@
       </p:sp>
       <p:sp>
         <p:nvSpPr>
-          <p:cNvPr id="5" name="">
-            <a:extLst xmlns:a="http://schemas.openxmlformats.org/drawingml/2006/main">
+          <p:cNvPr id="5" name="Прямоугольник 4">
+            <a:extLst>
               <a:ext uri="{FF2B5EF4-FFF2-40B4-BE49-F238E27FC236}">
                 <a16:creationId xmlns:a16="http://schemas.microsoft.com/office/drawing/2014/main" id="{D6EE25A3-3CE7-4540-87A8-CD39B575CCCC}"/>
               </a:ext>
             </a:extLst>
           </p:cNvPr>
           <p:cNvSpPr>
-            <a:spLocks xmlns:a="http://schemas.openxmlformats.org/drawingml/2006/main" noGrp="1"/>
+            <a:spLocks noGrp="1"/>
           </p:cNvSpPr>
           <p:nvPr/>
         </p:nvSpPr>
         <p:spPr>
-          <a:xfrm xmlns:a="http://schemas.openxmlformats.org/drawingml/2006/main">
+          <a:xfrm>
             <a:off x="6429375" y="1752600"/>
             <a:ext cx="4762500" cy="476250"/>
           </a:xfrm>
-          <a:prstGeom xmlns:a="http://schemas.openxmlformats.org/drawingml/2006/main" prst="rect">
+          <a:prstGeom prst="rect">
             <a:avLst/>
           </a:prstGeom>
-          <a:noFill xmlns:a="http://schemas.openxmlformats.org/drawingml/2006/main"/>
-          <a:ln xmlns:a="http://schemas.openxmlformats.org/drawingml/2006/main" w="0">
+          <a:noFill/>
+          <a:ln w="0">
             <a:noFill/>
           </a:ln>
         </p:spPr>
         <p:txBody>
-          <a:bodyPr xmlns:a="http://schemas.openxmlformats.org/drawingml/2006/main" lIns="0" tIns="0" rIns="0" bIns="0" anchor="t">
+          <a:bodyPr lIns="0" tIns="0" rIns="0" bIns="0" anchor="t">
             <a:noAutofit/>
           </a:bodyPr>
-          <a:lstStyle xmlns:a="http://schemas.openxmlformats.org/drawingml/2006/main">
+          <a:lstStyle>
             <a:defPPr>
               <a:defRPr sz="2700" b="1">
                 <a:solidFill>
@@ -5680,7 +5487,7 @@
               </a:defRPr>
             </a:lvl9pPr>
           </a:lstStyle>
-          <a:p xmlns:a="http://schemas.openxmlformats.org/drawingml/2006/main">
+          <a:p>
             <a:pPr>
               <a:defRPr sz="2700" b="1">
                 <a:solidFill>
@@ -5707,36 +5514,36 @@
       </p:sp>
       <p:sp>
         <p:nvSpPr>
-          <p:cNvPr id="6" name="">
-            <a:extLst xmlns:a="http://schemas.openxmlformats.org/drawingml/2006/main">
+          <p:cNvPr id="6" name="Прямоугольник 5">
+            <a:extLst>
               <a:ext uri="{FF2B5EF4-FFF2-40B4-BE49-F238E27FC236}">
                 <a16:creationId xmlns:a16="http://schemas.microsoft.com/office/drawing/2014/main" id="{472E3247-068C-4C00-BBED-1405A532D8EC}"/>
               </a:ext>
             </a:extLst>
           </p:cNvPr>
           <p:cNvSpPr>
-            <a:spLocks xmlns:a="http://schemas.openxmlformats.org/drawingml/2006/main" noGrp="1"/>
+            <a:spLocks noGrp="1"/>
           </p:cNvSpPr>
           <p:nvPr/>
         </p:nvSpPr>
         <p:spPr>
-          <a:xfrm xmlns:a="http://schemas.openxmlformats.org/drawingml/2006/main">
+          <a:xfrm>
             <a:off x="6429375" y="2428875"/>
             <a:ext cx="4905375" cy="2333625"/>
           </a:xfrm>
-          <a:prstGeom xmlns:a="http://schemas.openxmlformats.org/drawingml/2006/main" prst="rect">
+          <a:prstGeom prst="rect">
             <a:avLst/>
           </a:prstGeom>
-          <a:noFill xmlns:a="http://schemas.openxmlformats.org/drawingml/2006/main"/>
-          <a:ln xmlns:a="http://schemas.openxmlformats.org/drawingml/2006/main" w="0">
+          <a:noFill/>
+          <a:ln w="0">
             <a:noFill/>
           </a:ln>
         </p:spPr>
         <p:txBody>
-          <a:bodyPr xmlns:a="http://schemas.openxmlformats.org/drawingml/2006/main" lIns="0" tIns="0" rIns="0" bIns="0" anchor="t">
+          <a:bodyPr lIns="0" tIns="0" rIns="0" bIns="0" anchor="t">
             <a:noAutofit/>
           </a:bodyPr>
-          <a:lstStyle xmlns:a="http://schemas.openxmlformats.org/drawingml/2006/main">
+          <a:lstStyle>
             <a:defPPr>
               <a:defRPr sz="2175" b="0">
                 <a:solidFill>
@@ -5838,7 +5645,7 @@
               </a:defRPr>
             </a:lvl9pPr>
           </a:lstStyle>
-          <a:p xmlns:a="http://schemas.openxmlformats.org/drawingml/2006/main">
+          <a:p>
             <a:pPr>
               <a:defRPr sz="2175" b="0">
                 <a:solidFill>
@@ -5861,7 +5668,7 @@
               <a:t>glebkuznecov</a:t>
             </a:r>
           </a:p>
-          <a:p xmlns:a="http://schemas.openxmlformats.org/drawingml/2006/main">
+          <a:p>
             <a:pPr>
               <a:defRPr sz="2175" b="0">
                 <a:solidFill>
@@ -5884,7 +5691,7 @@
               <a:t>Размещение файлов</a:t>
             </a:r>
           </a:p>
-          <a:p xmlns:a="http://schemas.openxmlformats.org/drawingml/2006/main">
+          <a:p>
             <a:pPr>
               <a:defRPr sz="2175" b="0">
                 <a:solidFill>
@@ -5907,7 +5714,7 @@
               <a:t>Права и ACL</a:t>
             </a:r>
           </a:p>
-          <a:p xmlns:a="http://schemas.openxmlformats.org/drawingml/2006/main">
+          <a:p>
             <a:pPr>
               <a:defRPr sz="2175" b="0">
                 <a:solidFill>
@@ -5928,164 +5735,6 @@
                 <a:cs typeface="Noto Sans Display"/>
               </a:rPr>
               <a:t>Запуск и проверка службы</a:t>
-            </a:r>
-          </a:p>
-        </p:txBody>
-      </p:sp>
-      <p:sp>
-        <p:nvSpPr>
-          <p:cNvPr id="7" name="">
-            <a:extLst xmlns:a="http://schemas.openxmlformats.org/drawingml/2006/main">
-              <a:ext uri="{FF2B5EF4-FFF2-40B4-BE49-F238E27FC236}">
-                <a16:creationId xmlns:a16="http://schemas.microsoft.com/office/drawing/2014/main" id="{A1F8189D-FCF7-4D98-9F6D-3B011B45EB43}"/>
-              </a:ext>
-            </a:extLst>
-          </p:cNvPr>
-          <p:cNvSpPr>
-            <a:spLocks xmlns:a="http://schemas.openxmlformats.org/drawingml/2006/main" noGrp="1"/>
-          </p:cNvSpPr>
-          <p:nvPr/>
-        </p:nvSpPr>
-        <p:spPr>
-          <a:xfrm xmlns:a="http://schemas.openxmlformats.org/drawingml/2006/main">
-            <a:off x="647700" y="5429250"/>
-            <a:ext cx="10382250" cy="619125"/>
-          </a:xfrm>
-          <a:prstGeom xmlns:a="http://schemas.openxmlformats.org/drawingml/2006/main" prst="rect">
-            <a:avLst/>
-          </a:prstGeom>
-          <a:noFill xmlns:a="http://schemas.openxmlformats.org/drawingml/2006/main"/>
-          <a:ln xmlns:a="http://schemas.openxmlformats.org/drawingml/2006/main" w="0">
-            <a:noFill/>
-          </a:ln>
-        </p:spPr>
-        <p:txBody>
-          <a:bodyPr xmlns:a="http://schemas.openxmlformats.org/drawingml/2006/main" lIns="0" tIns="0" rIns="0" bIns="0" anchor="t">
-            <a:noAutofit/>
-          </a:bodyPr>
-          <a:lstStyle xmlns:a="http://schemas.openxmlformats.org/drawingml/2006/main">
-            <a:defPPr>
-              <a:defRPr sz="2100" b="0">
-                <a:solidFill>
-                  <a:srgbClr val="B7C6D4"/>
-                </a:solidFill>
-                <a:latin typeface="Noto Sans Display"/>
-                <a:ea typeface="Noto Sans Display"/>
-                <a:cs typeface="Noto Sans Display"/>
-              </a:defRPr>
-            </a:defPPr>
-            <a:lvl1pPr>
-              <a:defRPr sz="2100" b="0">
-                <a:solidFill>
-                  <a:srgbClr val="B7C6D4"/>
-                </a:solidFill>
-                <a:latin typeface="Noto Sans Display"/>
-                <a:ea typeface="Noto Sans Display"/>
-                <a:cs typeface="Noto Sans Display"/>
-              </a:defRPr>
-            </a:lvl1pPr>
-            <a:lvl2pPr>
-              <a:defRPr sz="2100" b="0">
-                <a:solidFill>
-                  <a:srgbClr val="B7C6D4"/>
-                </a:solidFill>
-                <a:latin typeface="Noto Sans Display"/>
-                <a:ea typeface="Noto Sans Display"/>
-                <a:cs typeface="Noto Sans Display"/>
-              </a:defRPr>
-            </a:lvl2pPr>
-            <a:lvl3pPr>
-              <a:defRPr sz="2100" b="0">
-                <a:solidFill>
-                  <a:srgbClr val="B7C6D4"/>
-                </a:solidFill>
-                <a:latin typeface="Noto Sans Display"/>
-                <a:ea typeface="Noto Sans Display"/>
-                <a:cs typeface="Noto Sans Display"/>
-              </a:defRPr>
-            </a:lvl3pPr>
-            <a:lvl4pPr>
-              <a:defRPr sz="2100" b="0">
-                <a:solidFill>
-                  <a:srgbClr val="B7C6D4"/>
-                </a:solidFill>
-                <a:latin typeface="Noto Sans Display"/>
-                <a:ea typeface="Noto Sans Display"/>
-                <a:cs typeface="Noto Sans Display"/>
-              </a:defRPr>
-            </a:lvl4pPr>
-            <a:lvl5pPr>
-              <a:defRPr sz="2100" b="0">
-                <a:solidFill>
-                  <a:srgbClr val="B7C6D4"/>
-                </a:solidFill>
-                <a:latin typeface="Noto Sans Display"/>
-                <a:ea typeface="Noto Sans Display"/>
-                <a:cs typeface="Noto Sans Display"/>
-              </a:defRPr>
-            </a:lvl5pPr>
-            <a:lvl6pPr>
-              <a:defRPr sz="2100" b="0">
-                <a:solidFill>
-                  <a:srgbClr val="B7C6D4"/>
-                </a:solidFill>
-                <a:latin typeface="Noto Sans Display"/>
-                <a:ea typeface="Noto Sans Display"/>
-                <a:cs typeface="Noto Sans Display"/>
-              </a:defRPr>
-            </a:lvl6pPr>
-            <a:lvl7pPr>
-              <a:defRPr sz="2100" b="0">
-                <a:solidFill>
-                  <a:srgbClr val="B7C6D4"/>
-                </a:solidFill>
-                <a:latin typeface="Noto Sans Display"/>
-                <a:ea typeface="Noto Sans Display"/>
-                <a:cs typeface="Noto Sans Display"/>
-              </a:defRPr>
-            </a:lvl7pPr>
-            <a:lvl8pPr>
-              <a:defRPr sz="2100" b="0">
-                <a:solidFill>
-                  <a:srgbClr val="B7C6D4"/>
-                </a:solidFill>
-                <a:latin typeface="Noto Sans Display"/>
-                <a:ea typeface="Noto Sans Display"/>
-                <a:cs typeface="Noto Sans Display"/>
-              </a:defRPr>
-            </a:lvl8pPr>
-            <a:lvl9pPr>
-              <a:defRPr sz="2100" b="0">
-                <a:solidFill>
-                  <a:srgbClr val="B7C6D4"/>
-                </a:solidFill>
-                <a:latin typeface="Noto Sans Display"/>
-                <a:ea typeface="Noto Sans Display"/>
-                <a:cs typeface="Noto Sans Display"/>
-              </a:defRPr>
-            </a:lvl9pPr>
-          </a:lstStyle>
-          <a:p xmlns:a="http://schemas.openxmlformats.org/drawingml/2006/main">
-            <a:pPr>
-              <a:defRPr sz="2100" b="0">
-                <a:solidFill>
-                  <a:srgbClr val="B7C6D4"/>
-                </a:solidFill>
-                <a:latin typeface="Noto Sans Display"/>
-                <a:ea typeface="Noto Sans Display"/>
-                <a:cs typeface="Noto Sans Display"/>
-              </a:defRPr>
-            </a:pPr>
-            <a:r>
-              <a:rPr sz="2100" b="0">
-                <a:solidFill>
-                  <a:srgbClr val="B7C6D4"/>
-                </a:solidFill>
-                <a:latin typeface="Noto Sans Display"/>
-                <a:ea typeface="Noto Sans Display"/>
-                <a:cs typeface="Noto Sans Display"/>
-              </a:rPr>
-              <a:t>Отдельные ветки, проверка общей сборки и Pull Request в main</a:t>
             </a:r>
           </a:p>
         </p:txBody>
@@ -6097,17 +5746,21 @@
       </p:ext>
     </p:extLst>
   </p:cSld>
+  <p:clrMapOvr>
+    <a:masterClrMapping/>
+  </p:clrMapOvr>
 </p:sld>
 </file>
 
 <file path=ppt/slides/slide3.xml><?xml version="1.0" encoding="utf-8"?>
-<p:sld xmlns:p="http://schemas.openxmlformats.org/presentationml/2006/main">
+<p:sld xmlns:a="http://schemas.openxmlformats.org/drawingml/2006/main" xmlns:r="http://schemas.openxmlformats.org/officeDocument/2006/relationships" xmlns:p="http://schemas.openxmlformats.org/presentationml/2006/main">
   <p:cSld>
     <p:bg>
       <p:bgPr>
-        <a:solidFill xmlns:a="http://schemas.openxmlformats.org/drawingml/2006/main">
+        <a:solidFill>
           <a:srgbClr val="101C2B"/>
         </a:solidFill>
+        <a:effectLst/>
       </p:bgPr>
     </p:bg>
     <p:spTree>
@@ -6117,40 +5770,45 @@
         <p:nvPr/>
       </p:nvGrpSpPr>
       <p:grpSpPr>
-        <a:xfrm xmlns:a="http://schemas.openxmlformats.org/drawingml/2006/main"/>
+        <a:xfrm>
+          <a:off x="0" y="0"/>
+          <a:ext cx="0" cy="0"/>
+          <a:chOff x="0" y="0"/>
+          <a:chExt cx="0" cy="0"/>
+        </a:xfrm>
       </p:grpSpPr>
       <p:sp>
         <p:nvSpPr>
-          <p:cNvPr id="5" name="">
-            <a:extLst xmlns:a="http://schemas.openxmlformats.org/drawingml/2006/main">
+          <p:cNvPr id="5" name="Прямоугольник 4">
+            <a:extLst>
               <a:ext uri="{FF2B5EF4-FFF2-40B4-BE49-F238E27FC236}">
                 <a16:creationId xmlns:a16="http://schemas.microsoft.com/office/drawing/2014/main" id="{C4EFF68A-C080-4570-B977-77D18A26408B}"/>
               </a:ext>
             </a:extLst>
           </p:cNvPr>
           <p:cNvSpPr>
-            <a:spLocks xmlns:a="http://schemas.openxmlformats.org/drawingml/2006/main" noGrp="1"/>
+            <a:spLocks noGrp="1"/>
           </p:cNvSpPr>
           <p:nvPr/>
         </p:nvSpPr>
         <p:spPr>
-          <a:xfrm xmlns:a="http://schemas.openxmlformats.org/drawingml/2006/main">
+          <a:xfrm>
             <a:off x="647700" y="552450"/>
             <a:ext cx="10858500" cy="876300"/>
           </a:xfrm>
-          <a:prstGeom xmlns:a="http://schemas.openxmlformats.org/drawingml/2006/main" prst="rect">
+          <a:prstGeom prst="rect">
             <a:avLst/>
           </a:prstGeom>
-          <a:noFill xmlns:a="http://schemas.openxmlformats.org/drawingml/2006/main"/>
-          <a:ln xmlns:a="http://schemas.openxmlformats.org/drawingml/2006/main" w="0">
+          <a:noFill/>
+          <a:ln w="0">
             <a:noFill/>
           </a:ln>
         </p:spPr>
         <p:txBody>
-          <a:bodyPr xmlns:a="http://schemas.openxmlformats.org/drawingml/2006/main" lIns="0" tIns="0" rIns="0" bIns="0" anchor="t">
+          <a:bodyPr lIns="0" tIns="0" rIns="0" bIns="0" anchor="t">
             <a:noAutofit/>
           </a:bodyPr>
-          <a:lstStyle xmlns:a="http://schemas.openxmlformats.org/drawingml/2006/main">
+          <a:lstStyle>
             <a:defPPr>
               <a:defRPr sz="3300" b="1">
                 <a:solidFill>
@@ -6252,7 +5910,7 @@
               </a:defRPr>
             </a:lvl9pPr>
           </a:lstStyle>
-          <a:p xmlns:a="http://schemas.openxmlformats.org/drawingml/2006/main">
+          <a:p>
             <a:pPr>
               <a:defRPr sz="3300" b="1">
                 <a:solidFill>
@@ -6279,36 +5937,36 @@
       </p:sp>
       <p:sp>
         <p:nvSpPr>
-          <p:cNvPr id="2" name="">
-            <a:extLst xmlns:a="http://schemas.openxmlformats.org/drawingml/2006/main">
+          <p:cNvPr id="2" name="Прямоугольник 1">
+            <a:extLst>
               <a:ext uri="{FF2B5EF4-FFF2-40B4-BE49-F238E27FC236}">
                 <a16:creationId xmlns:a16="http://schemas.microsoft.com/office/drawing/2014/main" id="{1FD607CE-AD7A-4152-BE25-322F470036AF}"/>
               </a:ext>
             </a:extLst>
           </p:cNvPr>
           <p:cNvSpPr>
-            <a:spLocks xmlns:a="http://schemas.openxmlformats.org/drawingml/2006/main" noGrp="1"/>
+            <a:spLocks noGrp="1"/>
           </p:cNvSpPr>
           <p:nvPr/>
         </p:nvSpPr>
         <p:spPr>
-          <a:xfrm xmlns:a="http://schemas.openxmlformats.org/drawingml/2006/main">
+          <a:xfrm>
             <a:off x="11125200" y="6334125"/>
             <a:ext cx="476250" cy="266700"/>
           </a:xfrm>
-          <a:prstGeom xmlns:a="http://schemas.openxmlformats.org/drawingml/2006/main" prst="rect">
+          <a:prstGeom prst="rect">
             <a:avLst/>
           </a:prstGeom>
-          <a:noFill xmlns:a="http://schemas.openxmlformats.org/drawingml/2006/main"/>
-          <a:ln xmlns:a="http://schemas.openxmlformats.org/drawingml/2006/main" w="0">
+          <a:noFill/>
+          <a:ln w="0">
             <a:noFill/>
           </a:ln>
         </p:spPr>
         <p:txBody>
-          <a:bodyPr xmlns:a="http://schemas.openxmlformats.org/drawingml/2006/main" lIns="0" tIns="0" rIns="0" bIns="0" anchor="t">
+          <a:bodyPr lIns="0" tIns="0" rIns="0" bIns="0" anchor="t">
             <a:noAutofit/>
           </a:bodyPr>
-          <a:lstStyle xmlns:a="http://schemas.openxmlformats.org/drawingml/2006/main">
+          <a:lstStyle>
             <a:defPPr>
               <a:defRPr sz="1350" b="0">
                 <a:solidFill>
@@ -6410,7 +6068,7 @@
               </a:defRPr>
             </a:lvl9pPr>
           </a:lstStyle>
-          <a:p xmlns:a="http://schemas.openxmlformats.org/drawingml/2006/main">
+          <a:p>
             <a:pPr>
               <a:defRPr sz="1350" b="0">
                 <a:solidFill>
@@ -6437,8 +6095,8 @@
       </p:sp>
       <p:graphicFrame>
         <p:nvGraphicFramePr>
-          <p:cNvPr id="3" name="">
-            <a:extLst xmlns:a="http://schemas.openxmlformats.org/drawingml/2006/main">
+          <p:cNvPr id="3" name="Таблица 2">
+            <a:extLst>
               <a:ext uri="{FF2B5EF4-FFF2-40B4-BE49-F238E27FC236}">
                 <a16:creationId xmlns:a16="http://schemas.microsoft.com/office/drawing/2014/main" id="{C44BCEEA-2665-41A0-BEF2-4F2CBAC1EFE8}"/>
               </a:ext>
@@ -6448,21 +6106,33 @@
           <p:nvPr/>
         </p:nvGraphicFramePr>
         <p:xfrm>
-          <a:off xmlns:a="http://schemas.openxmlformats.org/drawingml/2006/main" x="647700" y="1666875"/>
-          <a:ext xmlns:a="http://schemas.openxmlformats.org/drawingml/2006/main" cx="10820400" cy="4000500"/>
+          <a:off x="647700" y="1666875"/>
+          <a:ext cx="10820400" cy="4000500"/>
         </p:xfrm>
-        <a:graphic xmlns:a="http://schemas.openxmlformats.org/drawingml/2006/main">
+        <a:graphic>
           <a:graphicData uri="http://schemas.openxmlformats.org/drawingml/2006/table">
             <a:tbl>
               <a:tblPr/>
               <a:tblGrid>
-                <a:gridCol w="4381500"/>
-                <a:gridCol w="6438900"/>
+                <a:gridCol w="4381500">
+                  <a:extLst>
+                    <a:ext uri="{9D8B030D-6E8A-4147-A177-3AD203B41FA5}">
+                      <a16:colId xmlns:a16="http://schemas.microsoft.com/office/drawing/2014/main" val="20000"/>
+                    </a:ext>
+                  </a:extLst>
+                </a:gridCol>
+                <a:gridCol w="6438900">
+                  <a:extLst>
+                    <a:ext uri="{9D8B030D-6E8A-4147-A177-3AD203B41FA5}">
+                      <a16:colId xmlns:a16="http://schemas.microsoft.com/office/drawing/2014/main" val="20001"/>
+                    </a:ext>
+                  </a:extLst>
+                </a:gridCol>
               </a:tblGrid>
               <a:tr h="571500">
                 <a:tc>
                   <a:txBody>
-                    <a:bodyPr lIns="114300" tIns="114300" rIns="114300" bIns="114300"/>
+                    <a:bodyPr/>
                     <a:lstStyle/>
                     <a:p>
                       <a:r>
@@ -6478,7 +6148,7 @@
                       </a:r>
                     </a:p>
                   </a:txBody>
-                  <a:tcPr marL="91440" marR="91440" marT="45720" marB="45720">
+                  <a:tcPr>
                     <a:solidFill>
                       <a:srgbClr val="20364B"/>
                     </a:solidFill>
@@ -6486,7 +6156,7 @@
                 </a:tc>
                 <a:tc>
                   <a:txBody>
-                    <a:bodyPr lIns="114300" tIns="114300" rIns="114300" bIns="114300"/>
+                    <a:bodyPr/>
                     <a:lstStyle/>
                     <a:p>
                       <a:r>
@@ -6502,17 +6172,22 @@
                       </a:r>
                     </a:p>
                   </a:txBody>
-                  <a:tcPr marL="91440" marR="91440" marT="45720" marB="45720">
+                  <a:tcPr>
                     <a:solidFill>
                       <a:srgbClr val="20364B"/>
                     </a:solidFill>
                   </a:tcPr>
                 </a:tc>
+                <a:extLst>
+                  <a:ext uri="{0D108BD9-81ED-4DB2-BD59-A6C34878D82A}">
+                    <a16:rowId xmlns:a16="http://schemas.microsoft.com/office/drawing/2014/main" val="10000"/>
+                  </a:ext>
+                </a:extLst>
               </a:tr>
               <a:tr h="571500">
                 <a:tc>
                   <a:txBody>
-                    <a:bodyPr lIns="114300" tIns="114300" rIns="114300" bIns="114300"/>
+                    <a:bodyPr/>
                     <a:lstStyle/>
                     <a:p>
                       <a:r>
@@ -6528,7 +6203,7 @@
                       </a:r>
                     </a:p>
                   </a:txBody>
-                  <a:tcPr marL="91440" marR="91440" marT="45720" marB="45720">
+                  <a:tcPr>
                     <a:solidFill>
                       <a:srgbClr val="101C2B"/>
                     </a:solidFill>
@@ -6536,7 +6211,7 @@
                 </a:tc>
                 <a:tc>
                   <a:txBody>
-                    <a:bodyPr lIns="114300" tIns="114300" rIns="114300" bIns="114300"/>
+                    <a:bodyPr/>
                     <a:lstStyle/>
                     <a:p>
                       <a:r>
@@ -6552,17 +6227,22 @@
                       </a:r>
                     </a:p>
                   </a:txBody>
-                  <a:tcPr marL="91440" marR="91440" marT="45720" marB="45720">
+                  <a:tcPr>
                     <a:solidFill>
                       <a:srgbClr val="101C2B"/>
                     </a:solidFill>
                   </a:tcPr>
                 </a:tc>
+                <a:extLst>
+                  <a:ext uri="{0D108BD9-81ED-4DB2-BD59-A6C34878D82A}">
+                    <a16:rowId xmlns:a16="http://schemas.microsoft.com/office/drawing/2014/main" val="10001"/>
+                  </a:ext>
+                </a:extLst>
               </a:tr>
               <a:tr h="571500">
                 <a:tc>
                   <a:txBody>
-                    <a:bodyPr lIns="114300" tIns="114300" rIns="114300" bIns="114300"/>
+                    <a:bodyPr/>
                     <a:lstStyle/>
                     <a:p>
                       <a:r>
@@ -6578,7 +6258,7 @@
                       </a:r>
                     </a:p>
                   </a:txBody>
-                  <a:tcPr marL="91440" marR="91440" marT="45720" marB="45720">
+                  <a:tcPr>
                     <a:solidFill>
                       <a:srgbClr val="101C2B"/>
                     </a:solidFill>
@@ -6586,7 +6266,7 @@
                 </a:tc>
                 <a:tc>
                   <a:txBody>
-                    <a:bodyPr lIns="114300" tIns="114300" rIns="114300" bIns="114300"/>
+                    <a:bodyPr/>
                     <a:lstStyle/>
                     <a:p>
                       <a:r>
@@ -6602,17 +6282,22 @@
                       </a:r>
                     </a:p>
                   </a:txBody>
-                  <a:tcPr marL="91440" marR="91440" marT="45720" marB="45720">
+                  <a:tcPr>
                     <a:solidFill>
                       <a:srgbClr val="101C2B"/>
                     </a:solidFill>
                   </a:tcPr>
                 </a:tc>
+                <a:extLst>
+                  <a:ext uri="{0D108BD9-81ED-4DB2-BD59-A6C34878D82A}">
+                    <a16:rowId xmlns:a16="http://schemas.microsoft.com/office/drawing/2014/main" val="10002"/>
+                  </a:ext>
+                </a:extLst>
               </a:tr>
               <a:tr h="571500">
                 <a:tc>
                   <a:txBody>
-                    <a:bodyPr lIns="114300" tIns="114300" rIns="114300" bIns="114300"/>
+                    <a:bodyPr/>
                     <a:lstStyle/>
                     <a:p>
                       <a:r>
@@ -6628,7 +6313,7 @@
                       </a:r>
                     </a:p>
                   </a:txBody>
-                  <a:tcPr marL="91440" marR="91440" marT="45720" marB="45720">
+                  <a:tcPr>
                     <a:solidFill>
                       <a:srgbClr val="101C2B"/>
                     </a:solidFill>
@@ -6636,7 +6321,7 @@
                 </a:tc>
                 <a:tc>
                   <a:txBody>
-                    <a:bodyPr lIns="114300" tIns="114300" rIns="114300" bIns="114300"/>
+                    <a:bodyPr/>
                     <a:lstStyle/>
                     <a:p>
                       <a:r>
@@ -6652,17 +6337,22 @@
                       </a:r>
                     </a:p>
                   </a:txBody>
-                  <a:tcPr marL="91440" marR="91440" marT="45720" marB="45720">
+                  <a:tcPr>
                     <a:solidFill>
                       <a:srgbClr val="101C2B"/>
                     </a:solidFill>
                   </a:tcPr>
                 </a:tc>
+                <a:extLst>
+                  <a:ext uri="{0D108BD9-81ED-4DB2-BD59-A6C34878D82A}">
+                    <a16:rowId xmlns:a16="http://schemas.microsoft.com/office/drawing/2014/main" val="10003"/>
+                  </a:ext>
+                </a:extLst>
               </a:tr>
               <a:tr h="571500">
                 <a:tc>
                   <a:txBody>
-                    <a:bodyPr lIns="114300" tIns="114300" rIns="114300" bIns="114300"/>
+                    <a:bodyPr/>
                     <a:lstStyle/>
                     <a:p>
                       <a:r>
@@ -6678,7 +6368,7 @@
                       </a:r>
                     </a:p>
                   </a:txBody>
-                  <a:tcPr marL="91440" marR="91440" marT="45720" marB="45720">
+                  <a:tcPr>
                     <a:solidFill>
                       <a:srgbClr val="101C2B"/>
                     </a:solidFill>
@@ -6686,7 +6376,7 @@
                 </a:tc>
                 <a:tc>
                   <a:txBody>
-                    <a:bodyPr lIns="114300" tIns="114300" rIns="114300" bIns="114300"/>
+                    <a:bodyPr/>
                     <a:lstStyle/>
                     <a:p>
                       <a:r>
@@ -6702,17 +6392,22 @@
                       </a:r>
                     </a:p>
                   </a:txBody>
-                  <a:tcPr marL="91440" marR="91440" marT="45720" marB="45720">
+                  <a:tcPr>
                     <a:solidFill>
                       <a:srgbClr val="101C2B"/>
                     </a:solidFill>
                   </a:tcPr>
                 </a:tc>
+                <a:extLst>
+                  <a:ext uri="{0D108BD9-81ED-4DB2-BD59-A6C34878D82A}">
+                    <a16:rowId xmlns:a16="http://schemas.microsoft.com/office/drawing/2014/main" val="10004"/>
+                  </a:ext>
+                </a:extLst>
               </a:tr>
               <a:tr h="571500">
                 <a:tc>
                   <a:txBody>
-                    <a:bodyPr lIns="114300" tIns="114300" rIns="114300" bIns="114300"/>
+                    <a:bodyPr/>
                     <a:lstStyle/>
                     <a:p>
                       <a:r>
@@ -6728,7 +6423,7 @@
                       </a:r>
                     </a:p>
                   </a:txBody>
-                  <a:tcPr marL="91440" marR="91440" marT="45720" marB="45720">
+                  <a:tcPr>
                     <a:solidFill>
                       <a:srgbClr val="101C2B"/>
                     </a:solidFill>
@@ -6736,7 +6431,7 @@
                 </a:tc>
                 <a:tc>
                   <a:txBody>
-                    <a:bodyPr lIns="114300" tIns="114300" rIns="114300" bIns="114300"/>
+                    <a:bodyPr/>
                     <a:lstStyle/>
                     <a:p>
                       <a:r>
@@ -6752,17 +6447,22 @@
                       </a:r>
                     </a:p>
                   </a:txBody>
-                  <a:tcPr marL="91440" marR="91440" marT="45720" marB="45720">
+                  <a:tcPr>
                     <a:solidFill>
                       <a:srgbClr val="101C2B"/>
                     </a:solidFill>
                   </a:tcPr>
                 </a:tc>
+                <a:extLst>
+                  <a:ext uri="{0D108BD9-81ED-4DB2-BD59-A6C34878D82A}">
+                    <a16:rowId xmlns:a16="http://schemas.microsoft.com/office/drawing/2014/main" val="10005"/>
+                  </a:ext>
+                </a:extLst>
               </a:tr>
               <a:tr h="571500">
                 <a:tc>
                   <a:txBody>
-                    <a:bodyPr lIns="114300" tIns="114300" rIns="114300" bIns="114300"/>
+                    <a:bodyPr/>
                     <a:lstStyle/>
                     <a:p>
                       <a:r>
@@ -6778,7 +6478,7 @@
                       </a:r>
                     </a:p>
                   </a:txBody>
-                  <a:tcPr marL="91440" marR="91440" marT="45720" marB="45720">
+                  <a:tcPr>
                     <a:solidFill>
                       <a:srgbClr val="101C2B"/>
                     </a:solidFill>
@@ -6786,7 +6486,7 @@
                 </a:tc>
                 <a:tc>
                   <a:txBody>
-                    <a:bodyPr lIns="114300" tIns="114300" rIns="114300" bIns="114300"/>
+                    <a:bodyPr/>
                     <a:lstStyle/>
                     <a:p>
                       <a:r>
@@ -6802,175 +6502,22 @@
                       </a:r>
                     </a:p>
                   </a:txBody>
-                  <a:tcPr marL="91440" marR="91440" marT="45720" marB="45720">
+                  <a:tcPr>
                     <a:solidFill>
                       <a:srgbClr val="101C2B"/>
                     </a:solidFill>
                   </a:tcPr>
                 </a:tc>
+                <a:extLst>
+                  <a:ext uri="{0D108BD9-81ED-4DB2-BD59-A6C34878D82A}">
+                    <a16:rowId xmlns:a16="http://schemas.microsoft.com/office/drawing/2014/main" val="10006"/>
+                  </a:ext>
+                </a:extLst>
               </a:tr>
             </a:tbl>
           </a:graphicData>
         </a:graphic>
       </p:graphicFrame>
-      <p:sp>
-        <p:nvSpPr>
-          <p:cNvPr id="4" name="">
-            <a:extLst xmlns:a="http://schemas.openxmlformats.org/drawingml/2006/main">
-              <a:ext uri="{FF2B5EF4-FFF2-40B4-BE49-F238E27FC236}">
-                <a16:creationId xmlns:a16="http://schemas.microsoft.com/office/drawing/2014/main" id="{3A192D00-BD3B-4C36-AAFA-320873596CCD}"/>
-              </a:ext>
-            </a:extLst>
-          </p:cNvPr>
-          <p:cNvSpPr>
-            <a:spLocks xmlns:a="http://schemas.openxmlformats.org/drawingml/2006/main" noGrp="1"/>
-          </p:cNvSpPr>
-          <p:nvPr/>
-        </p:nvSpPr>
-        <p:spPr>
-          <a:xfrm xmlns:a="http://schemas.openxmlformats.org/drawingml/2006/main">
-            <a:off x="647700" y="5857875"/>
-            <a:ext cx="10477500" cy="428625"/>
-          </a:xfrm>
-          <a:prstGeom xmlns:a="http://schemas.openxmlformats.org/drawingml/2006/main" prst="rect">
-            <a:avLst/>
-          </a:prstGeom>
-          <a:noFill xmlns:a="http://schemas.openxmlformats.org/drawingml/2006/main"/>
-          <a:ln xmlns:a="http://schemas.openxmlformats.org/drawingml/2006/main" w="0">
-            <a:noFill/>
-          </a:ln>
-        </p:spPr>
-        <p:txBody>
-          <a:bodyPr xmlns:a="http://schemas.openxmlformats.org/drawingml/2006/main" lIns="0" tIns="0" rIns="0" bIns="0" anchor="t">
-            <a:noAutofit/>
-          </a:bodyPr>
-          <a:lstStyle xmlns:a="http://schemas.openxmlformats.org/drawingml/2006/main">
-            <a:defPPr>
-              <a:defRPr sz="1875" b="0">
-                <a:solidFill>
-                  <a:srgbClr val="B7C6D4"/>
-                </a:solidFill>
-                <a:latin typeface="Noto Sans Display"/>
-                <a:ea typeface="Noto Sans Display"/>
-                <a:cs typeface="Noto Sans Display"/>
-              </a:defRPr>
-            </a:defPPr>
-            <a:lvl1pPr>
-              <a:defRPr sz="1875" b="0">
-                <a:solidFill>
-                  <a:srgbClr val="B7C6D4"/>
-                </a:solidFill>
-                <a:latin typeface="Noto Sans Display"/>
-                <a:ea typeface="Noto Sans Display"/>
-                <a:cs typeface="Noto Sans Display"/>
-              </a:defRPr>
-            </a:lvl1pPr>
-            <a:lvl2pPr>
-              <a:defRPr sz="1875" b="0">
-                <a:solidFill>
-                  <a:srgbClr val="B7C6D4"/>
-                </a:solidFill>
-                <a:latin typeface="Noto Sans Display"/>
-                <a:ea typeface="Noto Sans Display"/>
-                <a:cs typeface="Noto Sans Display"/>
-              </a:defRPr>
-            </a:lvl2pPr>
-            <a:lvl3pPr>
-              <a:defRPr sz="1875" b="0">
-                <a:solidFill>
-                  <a:srgbClr val="B7C6D4"/>
-                </a:solidFill>
-                <a:latin typeface="Noto Sans Display"/>
-                <a:ea typeface="Noto Sans Display"/>
-                <a:cs typeface="Noto Sans Display"/>
-              </a:defRPr>
-            </a:lvl3pPr>
-            <a:lvl4pPr>
-              <a:defRPr sz="1875" b="0">
-                <a:solidFill>
-                  <a:srgbClr val="B7C6D4"/>
-                </a:solidFill>
-                <a:latin typeface="Noto Sans Display"/>
-                <a:ea typeface="Noto Sans Display"/>
-                <a:cs typeface="Noto Sans Display"/>
-              </a:defRPr>
-            </a:lvl4pPr>
-            <a:lvl5pPr>
-              <a:defRPr sz="1875" b="0">
-                <a:solidFill>
-                  <a:srgbClr val="B7C6D4"/>
-                </a:solidFill>
-                <a:latin typeface="Noto Sans Display"/>
-                <a:ea typeface="Noto Sans Display"/>
-                <a:cs typeface="Noto Sans Display"/>
-              </a:defRPr>
-            </a:lvl5pPr>
-            <a:lvl6pPr>
-              <a:defRPr sz="1875" b="0">
-                <a:solidFill>
-                  <a:srgbClr val="B7C6D4"/>
-                </a:solidFill>
-                <a:latin typeface="Noto Sans Display"/>
-                <a:ea typeface="Noto Sans Display"/>
-                <a:cs typeface="Noto Sans Display"/>
-              </a:defRPr>
-            </a:lvl6pPr>
-            <a:lvl7pPr>
-              <a:defRPr sz="1875" b="0">
-                <a:solidFill>
-                  <a:srgbClr val="B7C6D4"/>
-                </a:solidFill>
-                <a:latin typeface="Noto Sans Display"/>
-                <a:ea typeface="Noto Sans Display"/>
-                <a:cs typeface="Noto Sans Display"/>
-              </a:defRPr>
-            </a:lvl7pPr>
-            <a:lvl8pPr>
-              <a:defRPr sz="1875" b="0">
-                <a:solidFill>
-                  <a:srgbClr val="B7C6D4"/>
-                </a:solidFill>
-                <a:latin typeface="Noto Sans Display"/>
-                <a:ea typeface="Noto Sans Display"/>
-                <a:cs typeface="Noto Sans Display"/>
-              </a:defRPr>
-            </a:lvl8pPr>
-            <a:lvl9pPr>
-              <a:defRPr sz="1875" b="0">
-                <a:solidFill>
-                  <a:srgbClr val="B7C6D4"/>
-                </a:solidFill>
-                <a:latin typeface="Noto Sans Display"/>
-                <a:ea typeface="Noto Sans Display"/>
-                <a:cs typeface="Noto Sans Display"/>
-              </a:defRPr>
-            </a:lvl9pPr>
-          </a:lstStyle>
-          <a:p xmlns:a="http://schemas.openxmlformats.org/drawingml/2006/main">
-            <a:pPr>
-              <a:defRPr sz="1875" b="0">
-                <a:solidFill>
-                  <a:srgbClr val="B7C6D4"/>
-                </a:solidFill>
-                <a:latin typeface="Noto Sans Display"/>
-                <a:ea typeface="Noto Sans Display"/>
-                <a:cs typeface="Noto Sans Display"/>
-              </a:defRPr>
-            </a:pPr>
-            <a:r>
-              <a:rPr sz="1875" b="0">
-                <a:solidFill>
-                  <a:srgbClr val="B7C6D4"/>
-                </a:solidFill>
-                <a:latin typeface="Noto Sans Display"/>
-                <a:ea typeface="Noto Sans Display"/>
-                <a:cs typeface="Noto Sans Display"/>
-              </a:rPr>
-              <a:t>Релиз из /tmp удаляем после успешной установки</a:t>
-            </a:r>
-          </a:p>
-        </p:txBody>
-      </p:sp>
     </p:spTree>
     <p:extLst>
       <p:ext uri="{BB962C8B-B14F-4D97-AF65-F5344CB8AC3E}">
@@ -6978,17 +6525,21 @@
       </p:ext>
     </p:extLst>
   </p:cSld>
+  <p:clrMapOvr>
+    <a:masterClrMapping/>
+  </p:clrMapOvr>
 </p:sld>
 </file>
 
 <file path=ppt/slides/slide4.xml><?xml version="1.0" encoding="utf-8"?>
-<p:sld xmlns:p="http://schemas.openxmlformats.org/presentationml/2006/main">
+<p:sld xmlns:a="http://schemas.openxmlformats.org/drawingml/2006/main" xmlns:r="http://schemas.openxmlformats.org/officeDocument/2006/relationships" xmlns:p="http://schemas.openxmlformats.org/presentationml/2006/main">
   <p:cSld>
     <p:bg>
       <p:bgPr>
-        <a:solidFill xmlns:a="http://schemas.openxmlformats.org/drawingml/2006/main">
+        <a:solidFill>
           <a:srgbClr val="101C2B"/>
         </a:solidFill>
+        <a:effectLst/>
       </p:bgPr>
     </p:bg>
     <p:spTree>
@@ -6998,40 +6549,45 @@
         <p:nvPr/>
       </p:nvGrpSpPr>
       <p:grpSpPr>
-        <a:xfrm xmlns:a="http://schemas.openxmlformats.org/drawingml/2006/main"/>
+        <a:xfrm>
+          <a:off x="0" y="0"/>
+          <a:ext cx="0" cy="0"/>
+          <a:chOff x="0" y="0"/>
+          <a:chExt cx="0" cy="0"/>
+        </a:xfrm>
       </p:grpSpPr>
       <p:sp>
         <p:nvSpPr>
-          <p:cNvPr id="10" name="">
-            <a:extLst xmlns:a="http://schemas.openxmlformats.org/drawingml/2006/main">
+          <p:cNvPr id="10" name="Прямоугольник 9">
+            <a:extLst>
               <a:ext uri="{FF2B5EF4-FFF2-40B4-BE49-F238E27FC236}">
                 <a16:creationId xmlns:a16="http://schemas.microsoft.com/office/drawing/2014/main" id="{B8E65E35-7024-41C2-992E-1D948C11BCC9}"/>
               </a:ext>
             </a:extLst>
           </p:cNvPr>
           <p:cNvSpPr>
-            <a:spLocks xmlns:a="http://schemas.openxmlformats.org/drawingml/2006/main" noGrp="1"/>
+            <a:spLocks noGrp="1"/>
           </p:cNvSpPr>
           <p:nvPr/>
         </p:nvSpPr>
         <p:spPr>
-          <a:xfrm xmlns:a="http://schemas.openxmlformats.org/drawingml/2006/main">
+          <a:xfrm>
             <a:off x="647700" y="552450"/>
             <a:ext cx="10858500" cy="876300"/>
           </a:xfrm>
-          <a:prstGeom xmlns:a="http://schemas.openxmlformats.org/drawingml/2006/main" prst="rect">
+          <a:prstGeom prst="rect">
             <a:avLst/>
           </a:prstGeom>
-          <a:noFill xmlns:a="http://schemas.openxmlformats.org/drawingml/2006/main"/>
-          <a:ln xmlns:a="http://schemas.openxmlformats.org/drawingml/2006/main" w="0">
+          <a:noFill/>
+          <a:ln w="0">
             <a:noFill/>
           </a:ln>
         </p:spPr>
         <p:txBody>
-          <a:bodyPr xmlns:a="http://schemas.openxmlformats.org/drawingml/2006/main" lIns="0" tIns="0" rIns="0" bIns="0" anchor="t">
+          <a:bodyPr lIns="0" tIns="0" rIns="0" bIns="0" anchor="t">
             <a:noAutofit/>
           </a:bodyPr>
-          <a:lstStyle xmlns:a="http://schemas.openxmlformats.org/drawingml/2006/main">
+          <a:lstStyle>
             <a:defPPr>
               <a:defRPr sz="3300" b="1">
                 <a:solidFill>
@@ -7133,7 +6689,7 @@
               </a:defRPr>
             </a:lvl9pPr>
           </a:lstStyle>
-          <a:p xmlns:a="http://schemas.openxmlformats.org/drawingml/2006/main">
+          <a:p>
             <a:pPr>
               <a:defRPr sz="3300" b="1">
                 <a:solidFill>
@@ -7145,7 +6701,7 @@
               </a:defRPr>
             </a:pPr>
             <a:r>
-              <a:rPr sz="3300" b="1">
+              <a:rPr sz="3300" b="1" dirty="0" err="1">
                 <a:solidFill>
                   <a:srgbClr val="F2F5F7"/>
                 </a:solidFill>
@@ -7153,43 +6709,106 @@
                 <a:ea typeface="Noto Sans Display"/>
                 <a:cs typeface="Noto Sans Display"/>
               </a:rPr>
-              <a:t>Доступ по ролям</a:t>
+              <a:t>Доступ</a:t>
             </a:r>
+            <a:r>
+              <a:rPr sz="3300" b="1" dirty="0">
+                <a:solidFill>
+                  <a:srgbClr val="F2F5F7"/>
+                </a:solidFill>
+                <a:latin typeface="Noto Sans Display"/>
+                <a:ea typeface="Noto Sans Display"/>
+                <a:cs typeface="Noto Sans Display"/>
+              </a:rPr>
+              <a:t> </a:t>
+            </a:r>
+            <a:r>
+              <a:rPr sz="3300" b="1" dirty="0" err="1">
+                <a:solidFill>
+                  <a:srgbClr val="F2F5F7"/>
+                </a:solidFill>
+                <a:latin typeface="Noto Sans Display"/>
+                <a:ea typeface="Noto Sans Display"/>
+                <a:cs typeface="Noto Sans Display"/>
+              </a:rPr>
+              <a:t>по</a:t>
+            </a:r>
+            <a:r>
+              <a:rPr sz="3300" b="1" dirty="0">
+                <a:solidFill>
+                  <a:srgbClr val="F2F5F7"/>
+                </a:solidFill>
+                <a:latin typeface="Noto Sans Display"/>
+                <a:ea typeface="Noto Sans Display"/>
+                <a:cs typeface="Noto Sans Display"/>
+              </a:rPr>
+              <a:t> </a:t>
+            </a:r>
+            <a:r>
+              <a:rPr sz="3300" b="1" dirty="0" err="1">
+                <a:solidFill>
+                  <a:srgbClr val="F2F5F7"/>
+                </a:solidFill>
+                <a:latin typeface="Noto Sans Display"/>
+                <a:ea typeface="Noto Sans Display"/>
+                <a:cs typeface="Noto Sans Display"/>
+              </a:rPr>
+              <a:t>ролям</a:t>
+            </a:r>
+            <a:r>
+              <a:rPr lang="ru-RU" sz="3300" b="1" dirty="0">
+                <a:solidFill>
+                  <a:srgbClr val="F2F5F7"/>
+                </a:solidFill>
+                <a:latin typeface="Noto Sans Display"/>
+                <a:ea typeface="Noto Sans Display"/>
+                <a:cs typeface="Noto Sans Display"/>
+              </a:rPr>
+              <a:t>, Часть 1</a:t>
+            </a:r>
+            <a:endParaRPr sz="3300" b="1" dirty="0">
+              <a:solidFill>
+                <a:srgbClr val="F2F5F7"/>
+              </a:solidFill>
+              <a:latin typeface="Noto Sans Display"/>
+              <a:ea typeface="Noto Sans Display"/>
+              <a:cs typeface="Noto Sans Display"/>
+            </a:endParaRPr>
           </a:p>
         </p:txBody>
       </p:sp>
       <p:sp>
         <p:nvSpPr>
-          <p:cNvPr id="2" name="">
-            <a:extLst xmlns:a="http://schemas.openxmlformats.org/drawingml/2006/main">
+          <p:cNvPr id="2" name="Прямоугольник 1">
+            <a:extLst>
               <a:ext uri="{FF2B5EF4-FFF2-40B4-BE49-F238E27FC236}">
                 <a16:creationId xmlns:a16="http://schemas.microsoft.com/office/drawing/2014/main" id="{66722302-2AF9-4DED-B85D-48468A311928}"/>
               </a:ext>
             </a:extLst>
           </p:cNvPr>
           <p:cNvSpPr>
-            <a:spLocks xmlns:a="http://schemas.openxmlformats.org/drawingml/2006/main" noGrp="1"/>
+            <a:spLocks noGrp="1"/>
           </p:cNvSpPr>
           <p:nvPr/>
         </p:nvSpPr>
         <p:spPr>
-          <a:xfrm xmlns:a="http://schemas.openxmlformats.org/drawingml/2006/main">
+          <a:xfrm>
             <a:off x="11125200" y="6334125"/>
             <a:ext cx="476250" cy="266700"/>
           </a:xfrm>
-          <a:prstGeom xmlns:a="http://schemas.openxmlformats.org/drawingml/2006/main" prst="rect">
+          <a:prstGeom prst="rect">
             <a:avLst/>
           </a:prstGeom>
-          <a:noFill xmlns:a="http://schemas.openxmlformats.org/drawingml/2006/main"/>
-          <a:ln xmlns:a="http://schemas.openxmlformats.org/drawingml/2006/main" w="0">
+          <a:noFill/>
+          <a:ln w="0">
             <a:noFill/>
           </a:ln>
         </p:spPr>
         <p:txBody>
-          <a:bodyPr xmlns:a="http://schemas.openxmlformats.org/drawingml/2006/main" lIns="0" tIns="0" rIns="0" bIns="0" anchor="t">
+          <a:bodyPr lIns="0" tIns="0" rIns="0" bIns="0" anchor="t">
             <a:noAutofit/>
           </a:bodyPr>
-          <a:lstStyle xmlns:a="http://schemas.openxmlformats.org/drawingml/2006/main">
+          <a:lstStyle>
             <a:defPPr>
               <a:defRPr sz="1350" b="0">
                 <a:solidFill>
@@ -7291,7 +6910,7 @@
               </a:defRPr>
             </a:lvl9pPr>
           </a:lstStyle>
-          <a:p xmlns:a="http://schemas.openxmlformats.org/drawingml/2006/main">
+          <a:p>
             <a:pPr>
               <a:defRPr sz="1350" b="0">
                 <a:solidFill>
@@ -7318,36 +6937,36 @@
       </p:sp>
       <p:sp>
         <p:nvSpPr>
-          <p:cNvPr id="3" name="">
-            <a:extLst xmlns:a="http://schemas.openxmlformats.org/drawingml/2006/main">
+          <p:cNvPr id="3" name="Прямоугольник 2">
+            <a:extLst>
               <a:ext uri="{FF2B5EF4-FFF2-40B4-BE49-F238E27FC236}">
                 <a16:creationId xmlns:a16="http://schemas.microsoft.com/office/drawing/2014/main" id="{6FB78300-98FF-41DF-9640-3949B8552A89}"/>
               </a:ext>
             </a:extLst>
           </p:cNvPr>
           <p:cNvSpPr>
-            <a:spLocks xmlns:a="http://schemas.openxmlformats.org/drawingml/2006/main" noGrp="1"/>
+            <a:spLocks noGrp="1"/>
           </p:cNvSpPr>
           <p:nvPr/>
         </p:nvSpPr>
         <p:spPr>
-          <a:xfrm xmlns:a="http://schemas.openxmlformats.org/drawingml/2006/main">
-            <a:off x="647700" y="1714500"/>
+          <a:xfrm>
+            <a:off x="647700" y="1428750"/>
             <a:ext cx="3143250" cy="457200"/>
           </a:xfrm>
-          <a:prstGeom xmlns:a="http://schemas.openxmlformats.org/drawingml/2006/main" prst="rect">
+          <a:prstGeom prst="rect">
             <a:avLst/>
           </a:prstGeom>
-          <a:noFill xmlns:a="http://schemas.openxmlformats.org/drawingml/2006/main"/>
-          <a:ln xmlns:a="http://schemas.openxmlformats.org/drawingml/2006/main" w="0">
+          <a:noFill/>
+          <a:ln w="0">
             <a:noFill/>
           </a:ln>
         </p:spPr>
         <p:txBody>
-          <a:bodyPr xmlns:a="http://schemas.openxmlformats.org/drawingml/2006/main" lIns="0" tIns="0" rIns="0" bIns="0" anchor="t">
+          <a:bodyPr lIns="0" tIns="0" rIns="0" bIns="0" anchor="t">
             <a:noAutofit/>
           </a:bodyPr>
-          <a:lstStyle xmlns:a="http://schemas.openxmlformats.org/drawingml/2006/main">
+          <a:lstStyle>
             <a:defPPr>
               <a:defRPr sz="2325" b="1">
                 <a:solidFill>
@@ -7449,7 +7068,7 @@
               </a:defRPr>
             </a:lvl9pPr>
           </a:lstStyle>
-          <a:p xmlns:a="http://schemas.openxmlformats.org/drawingml/2006/main">
+          <a:p>
             <a:pPr>
               <a:defRPr sz="2325" b="1">
                 <a:solidFill>
@@ -7476,36 +7095,36 @@
       </p:sp>
       <p:sp>
         <p:nvSpPr>
-          <p:cNvPr id="4" name="">
-            <a:extLst xmlns:a="http://schemas.openxmlformats.org/drawingml/2006/main">
+          <p:cNvPr id="4" name="Прямоугольник 3">
+            <a:extLst>
               <a:ext uri="{FF2B5EF4-FFF2-40B4-BE49-F238E27FC236}">
                 <a16:creationId xmlns:a16="http://schemas.microsoft.com/office/drawing/2014/main" id="{819F4BDD-53DB-40D0-AE66-933BF44FFC60}"/>
               </a:ext>
             </a:extLst>
           </p:cNvPr>
           <p:cNvSpPr>
-            <a:spLocks xmlns:a="http://schemas.openxmlformats.org/drawingml/2006/main" noGrp="1"/>
+            <a:spLocks noGrp="1"/>
           </p:cNvSpPr>
           <p:nvPr/>
         </p:nvSpPr>
         <p:spPr>
-          <a:xfrm xmlns:a="http://schemas.openxmlformats.org/drawingml/2006/main">
-            <a:off x="4191000" y="1714500"/>
+          <a:xfrm>
+            <a:off x="4191000" y="1428750"/>
             <a:ext cx="7143750" cy="1047750"/>
           </a:xfrm>
-          <a:prstGeom xmlns:a="http://schemas.openxmlformats.org/drawingml/2006/main" prst="rect">
+          <a:prstGeom prst="rect">
             <a:avLst/>
           </a:prstGeom>
-          <a:noFill xmlns:a="http://schemas.openxmlformats.org/drawingml/2006/main"/>
-          <a:ln xmlns:a="http://schemas.openxmlformats.org/drawingml/2006/main" w="0">
+          <a:noFill/>
+          <a:ln w="0">
             <a:noFill/>
           </a:ln>
         </p:spPr>
         <p:txBody>
-          <a:bodyPr xmlns:a="http://schemas.openxmlformats.org/drawingml/2006/main" lIns="0" tIns="0" rIns="0" bIns="0" anchor="t">
+          <a:bodyPr lIns="0" tIns="0" rIns="0" bIns="0" anchor="t">
             <a:noAutofit/>
           </a:bodyPr>
-          <a:lstStyle xmlns:a="http://schemas.openxmlformats.org/drawingml/2006/main">
+          <a:lstStyle>
             <a:defPPr>
               <a:defRPr sz="2175" b="0">
                 <a:solidFill>
@@ -7607,7 +7226,7 @@
               </a:defRPr>
             </a:lvl9pPr>
           </a:lstStyle>
-          <a:p xmlns:a="http://schemas.openxmlformats.org/drawingml/2006/main">
+          <a:p>
             <a:pPr>
               <a:defRPr sz="2175" b="0">
                 <a:solidFill>
@@ -7619,7 +7238,7 @@
               </a:defRPr>
             </a:pPr>
             <a:r>
-              <a:rPr sz="2175" b="0">
+              <a:rPr sz="2175" b="0" dirty="0" err="1">
                 <a:solidFill>
                   <a:srgbClr val="F2F5F7"/>
                 </a:solidFill>
@@ -7627,43 +7246,186 @@
                 <a:ea typeface="Noto Sans Display"/>
                 <a:cs typeface="Noto Sans Display"/>
               </a:rPr>
-              <a:t>Системный пользователь без входа. Читает секреты, работает с БД и журналами.</a:t>
+              <a:t>Системный</a:t>
+            </a:r>
+            <a:r>
+              <a:rPr sz="2175" b="0" dirty="0">
+                <a:solidFill>
+                  <a:srgbClr val="F2F5F7"/>
+                </a:solidFill>
+                <a:latin typeface="Noto Sans Display"/>
+                <a:ea typeface="Noto Sans Display"/>
+                <a:cs typeface="Noto Sans Display"/>
+              </a:rPr>
+              <a:t> </a:t>
+            </a:r>
+            <a:r>
+              <a:rPr sz="2175" b="0" dirty="0" err="1">
+                <a:solidFill>
+                  <a:srgbClr val="F2F5F7"/>
+                </a:solidFill>
+                <a:latin typeface="Noto Sans Display"/>
+                <a:ea typeface="Noto Sans Display"/>
+                <a:cs typeface="Noto Sans Display"/>
+              </a:rPr>
+              <a:t>пользователь</a:t>
+            </a:r>
+            <a:r>
+              <a:rPr sz="2175" b="0" dirty="0">
+                <a:solidFill>
+                  <a:srgbClr val="F2F5F7"/>
+                </a:solidFill>
+                <a:latin typeface="Noto Sans Display"/>
+                <a:ea typeface="Noto Sans Display"/>
+                <a:cs typeface="Noto Sans Display"/>
+              </a:rPr>
+              <a:t> </a:t>
+            </a:r>
+            <a:r>
+              <a:rPr sz="2175" b="0" dirty="0" err="1">
+                <a:solidFill>
+                  <a:srgbClr val="F2F5F7"/>
+                </a:solidFill>
+                <a:latin typeface="Noto Sans Display"/>
+                <a:ea typeface="Noto Sans Display"/>
+                <a:cs typeface="Noto Sans Display"/>
+              </a:rPr>
+              <a:t>без</a:t>
+            </a:r>
+            <a:r>
+              <a:rPr sz="2175" b="0" dirty="0">
+                <a:solidFill>
+                  <a:srgbClr val="F2F5F7"/>
+                </a:solidFill>
+                <a:latin typeface="Noto Sans Display"/>
+                <a:ea typeface="Noto Sans Display"/>
+                <a:cs typeface="Noto Sans Display"/>
+              </a:rPr>
+              <a:t> </a:t>
+            </a:r>
+            <a:r>
+              <a:rPr sz="2175" b="0" dirty="0" err="1">
+                <a:solidFill>
+                  <a:srgbClr val="F2F5F7"/>
+                </a:solidFill>
+                <a:latin typeface="Noto Sans Display"/>
+                <a:ea typeface="Noto Sans Display"/>
+                <a:cs typeface="Noto Sans Display"/>
+              </a:rPr>
+              <a:t>входа</a:t>
+            </a:r>
+            <a:r>
+              <a:rPr sz="2175" b="0" dirty="0">
+                <a:solidFill>
+                  <a:srgbClr val="F2F5F7"/>
+                </a:solidFill>
+                <a:latin typeface="Noto Sans Display"/>
+                <a:ea typeface="Noto Sans Display"/>
+                <a:cs typeface="Noto Sans Display"/>
+              </a:rPr>
+              <a:t>. Читает </a:t>
+            </a:r>
+            <a:r>
+              <a:rPr sz="2175" b="0" dirty="0" err="1">
+                <a:solidFill>
+                  <a:srgbClr val="F2F5F7"/>
+                </a:solidFill>
+                <a:latin typeface="Noto Sans Display"/>
+                <a:ea typeface="Noto Sans Display"/>
+                <a:cs typeface="Noto Sans Display"/>
+              </a:rPr>
+              <a:t>секреты</a:t>
+            </a:r>
+            <a:r>
+              <a:rPr sz="2175" b="0" dirty="0">
+                <a:solidFill>
+                  <a:srgbClr val="F2F5F7"/>
+                </a:solidFill>
+                <a:latin typeface="Noto Sans Display"/>
+                <a:ea typeface="Noto Sans Display"/>
+                <a:cs typeface="Noto Sans Display"/>
+              </a:rPr>
+              <a:t>, </a:t>
+            </a:r>
+            <a:r>
+              <a:rPr sz="2175" b="0" dirty="0" err="1">
+                <a:solidFill>
+                  <a:srgbClr val="F2F5F7"/>
+                </a:solidFill>
+                <a:latin typeface="Noto Sans Display"/>
+                <a:ea typeface="Noto Sans Display"/>
+                <a:cs typeface="Noto Sans Display"/>
+              </a:rPr>
+              <a:t>работает</a:t>
+            </a:r>
+            <a:r>
+              <a:rPr sz="2175" b="0" dirty="0">
+                <a:solidFill>
+                  <a:srgbClr val="F2F5F7"/>
+                </a:solidFill>
+                <a:latin typeface="Noto Sans Display"/>
+                <a:ea typeface="Noto Sans Display"/>
+                <a:cs typeface="Noto Sans Display"/>
+              </a:rPr>
+              <a:t> с БД и </a:t>
+            </a:r>
+            <a:r>
+              <a:rPr sz="2175" b="0" dirty="0" err="1">
+                <a:solidFill>
+                  <a:srgbClr val="F2F5F7"/>
+                </a:solidFill>
+                <a:latin typeface="Noto Sans Display"/>
+                <a:ea typeface="Noto Sans Display"/>
+                <a:cs typeface="Noto Sans Display"/>
+              </a:rPr>
+              <a:t>журналами</a:t>
+            </a:r>
+            <a:r>
+              <a:rPr sz="2175" b="0" dirty="0">
+                <a:solidFill>
+                  <a:srgbClr val="F2F5F7"/>
+                </a:solidFill>
+                <a:latin typeface="Noto Sans Display"/>
+                <a:ea typeface="Noto Sans Display"/>
+                <a:cs typeface="Noto Sans Display"/>
+              </a:rPr>
+              <a:t>.</a:t>
             </a:r>
           </a:p>
         </p:txBody>
       </p:sp>
       <p:sp>
         <p:nvSpPr>
-          <p:cNvPr id="5" name="">
-            <a:extLst xmlns:a="http://schemas.openxmlformats.org/drawingml/2006/main">
+          <p:cNvPr id="5" name="Прямоугольник 4">
+            <a:extLst>
               <a:ext uri="{FF2B5EF4-FFF2-40B4-BE49-F238E27FC236}">
                 <a16:creationId xmlns:a16="http://schemas.microsoft.com/office/drawing/2014/main" id="{964A98DB-E30E-4ECD-812C-DE7D394DE473}"/>
               </a:ext>
             </a:extLst>
           </p:cNvPr>
           <p:cNvSpPr>
-            <a:spLocks xmlns:a="http://schemas.openxmlformats.org/drawingml/2006/main" noGrp="1"/>
+            <a:spLocks noGrp="1"/>
           </p:cNvSpPr>
           <p:nvPr/>
         </p:nvSpPr>
         <p:spPr>
-          <a:xfrm xmlns:a="http://schemas.openxmlformats.org/drawingml/2006/main">
-            <a:off x="647700" y="3095625"/>
+          <a:xfrm>
+            <a:off x="647700" y="2238375"/>
             <a:ext cx="3333750" cy="571500"/>
           </a:xfrm>
-          <a:prstGeom xmlns:a="http://schemas.openxmlformats.org/drawingml/2006/main" prst="rect">
+          <a:prstGeom prst="rect">
             <a:avLst/>
           </a:prstGeom>
-          <a:noFill xmlns:a="http://schemas.openxmlformats.org/drawingml/2006/main"/>
-          <a:ln xmlns:a="http://schemas.openxmlformats.org/drawingml/2006/main" w="0">
+          <a:noFill/>
+          <a:ln w="0">
             <a:noFill/>
           </a:ln>
         </p:spPr>
         <p:txBody>
-          <a:bodyPr xmlns:a="http://schemas.openxmlformats.org/drawingml/2006/main" lIns="0" tIns="0" rIns="0" bIns="0" anchor="t">
+          <a:bodyPr lIns="0" tIns="0" rIns="0" bIns="0" anchor="t">
             <a:noAutofit/>
           </a:bodyPr>
-          <a:lstStyle xmlns:a="http://schemas.openxmlformats.org/drawingml/2006/main">
+          <a:lstStyle>
             <a:defPPr>
               <a:defRPr sz="2325" b="1">
                 <a:solidFill>
@@ -7765,7 +7527,7 @@
               </a:defRPr>
             </a:lvl9pPr>
           </a:lstStyle>
-          <a:p xmlns:a="http://schemas.openxmlformats.org/drawingml/2006/main">
+          <a:p>
             <a:pPr>
               <a:defRPr sz="2325" b="1">
                 <a:solidFill>
@@ -7792,36 +7554,36 @@
       </p:sp>
       <p:sp>
         <p:nvSpPr>
-          <p:cNvPr id="6" name="">
-            <a:extLst xmlns:a="http://schemas.openxmlformats.org/drawingml/2006/main">
+          <p:cNvPr id="6" name="Прямоугольник 5">
+            <a:extLst>
               <a:ext uri="{FF2B5EF4-FFF2-40B4-BE49-F238E27FC236}">
                 <a16:creationId xmlns:a16="http://schemas.microsoft.com/office/drawing/2014/main" id="{EC6E980E-9408-4F52-AA35-5F5138EE3971}"/>
               </a:ext>
             </a:extLst>
           </p:cNvPr>
           <p:cNvSpPr>
-            <a:spLocks xmlns:a="http://schemas.openxmlformats.org/drawingml/2006/main" noGrp="1"/>
+            <a:spLocks noGrp="1"/>
           </p:cNvSpPr>
           <p:nvPr/>
         </p:nvSpPr>
         <p:spPr>
-          <a:xfrm xmlns:a="http://schemas.openxmlformats.org/drawingml/2006/main">
-            <a:off x="4191000" y="3095625"/>
+          <a:xfrm>
+            <a:off x="4191000" y="2238375"/>
             <a:ext cx="7143750" cy="1047750"/>
           </a:xfrm>
-          <a:prstGeom xmlns:a="http://schemas.openxmlformats.org/drawingml/2006/main" prst="rect">
+          <a:prstGeom prst="rect">
             <a:avLst/>
           </a:prstGeom>
-          <a:noFill xmlns:a="http://schemas.openxmlformats.org/drawingml/2006/main"/>
-          <a:ln xmlns:a="http://schemas.openxmlformats.org/drawingml/2006/main" w="0">
+          <a:noFill/>
+          <a:ln w="0">
             <a:noFill/>
           </a:ln>
         </p:spPr>
         <p:txBody>
-          <a:bodyPr xmlns:a="http://schemas.openxmlformats.org/drawingml/2006/main" lIns="0" tIns="0" rIns="0" bIns="0" anchor="t">
+          <a:bodyPr lIns="0" tIns="0" rIns="0" bIns="0" anchor="t">
             <a:noAutofit/>
           </a:bodyPr>
-          <a:lstStyle xmlns:a="http://schemas.openxmlformats.org/drawingml/2006/main">
+          <a:lstStyle>
             <a:defPPr>
               <a:defRPr sz="2175" b="0">
                 <a:solidFill>
@@ -7923,7 +7685,7 @@
               </a:defRPr>
             </a:lvl9pPr>
           </a:lstStyle>
-          <a:p xmlns:a="http://schemas.openxmlformats.org/drawingml/2006/main">
+          <a:p>
             <a:pPr>
               <a:defRPr sz="2175" b="0">
                 <a:solidFill>
@@ -7935,7 +7697,7 @@
               </a:defRPr>
             </a:pPr>
             <a:r>
-              <a:rPr sz="2175" b="0">
+              <a:rPr sz="2175" b="0" dirty="0" err="1">
                 <a:solidFill>
                   <a:srgbClr val="F2F5F7"/>
                 </a:solidFill>
@@ -7943,43 +7705,186 @@
                 <a:ea typeface="Noto Sans Display"/>
                 <a:cs typeface="Noto Sans Display"/>
               </a:rPr>
-              <a:t>Меняют static, читают журналы. Через sudo выполняют только start, stop и status.</a:t>
+              <a:t>Меняют</a:t>
+            </a:r>
+            <a:r>
+              <a:rPr sz="2175" b="0" dirty="0">
+                <a:solidFill>
+                  <a:srgbClr val="F2F5F7"/>
+                </a:solidFill>
+                <a:latin typeface="Noto Sans Display"/>
+                <a:ea typeface="Noto Sans Display"/>
+                <a:cs typeface="Noto Sans Display"/>
+              </a:rPr>
+              <a:t> static, </a:t>
+            </a:r>
+            <a:r>
+              <a:rPr sz="2175" b="0" dirty="0" err="1">
+                <a:solidFill>
+                  <a:srgbClr val="F2F5F7"/>
+                </a:solidFill>
+                <a:latin typeface="Noto Sans Display"/>
+                <a:ea typeface="Noto Sans Display"/>
+                <a:cs typeface="Noto Sans Display"/>
+              </a:rPr>
+              <a:t>читают</a:t>
+            </a:r>
+            <a:r>
+              <a:rPr sz="2175" b="0" dirty="0">
+                <a:solidFill>
+                  <a:srgbClr val="F2F5F7"/>
+                </a:solidFill>
+                <a:latin typeface="Noto Sans Display"/>
+                <a:ea typeface="Noto Sans Display"/>
+                <a:cs typeface="Noto Sans Display"/>
+              </a:rPr>
+              <a:t> </a:t>
+            </a:r>
+            <a:r>
+              <a:rPr sz="2175" b="0" dirty="0" err="1">
+                <a:solidFill>
+                  <a:srgbClr val="F2F5F7"/>
+                </a:solidFill>
+                <a:latin typeface="Noto Sans Display"/>
+                <a:ea typeface="Noto Sans Display"/>
+                <a:cs typeface="Noto Sans Display"/>
+              </a:rPr>
+              <a:t>журналы</a:t>
+            </a:r>
+            <a:r>
+              <a:rPr sz="2175" b="0" dirty="0">
+                <a:solidFill>
+                  <a:srgbClr val="F2F5F7"/>
+                </a:solidFill>
+                <a:latin typeface="Noto Sans Display"/>
+                <a:ea typeface="Noto Sans Display"/>
+                <a:cs typeface="Noto Sans Display"/>
+              </a:rPr>
+              <a:t>. </a:t>
+            </a:r>
+            <a:r>
+              <a:rPr sz="2175" b="0" dirty="0" err="1">
+                <a:solidFill>
+                  <a:srgbClr val="F2F5F7"/>
+                </a:solidFill>
+                <a:latin typeface="Noto Sans Display"/>
+                <a:ea typeface="Noto Sans Display"/>
+                <a:cs typeface="Noto Sans Display"/>
+              </a:rPr>
+              <a:t>Через</a:t>
+            </a:r>
+            <a:r>
+              <a:rPr sz="2175" b="0" dirty="0">
+                <a:solidFill>
+                  <a:srgbClr val="F2F5F7"/>
+                </a:solidFill>
+                <a:latin typeface="Noto Sans Display"/>
+                <a:ea typeface="Noto Sans Display"/>
+                <a:cs typeface="Noto Sans Display"/>
+              </a:rPr>
+              <a:t> </a:t>
+            </a:r>
+            <a:r>
+              <a:rPr sz="2175" b="0" dirty="0" err="1">
+                <a:solidFill>
+                  <a:srgbClr val="F2F5F7"/>
+                </a:solidFill>
+                <a:latin typeface="Noto Sans Display"/>
+                <a:ea typeface="Noto Sans Display"/>
+                <a:cs typeface="Noto Sans Display"/>
+              </a:rPr>
+              <a:t>sudo</a:t>
+            </a:r>
+            <a:r>
+              <a:rPr sz="2175" b="0" dirty="0">
+                <a:solidFill>
+                  <a:srgbClr val="F2F5F7"/>
+                </a:solidFill>
+                <a:latin typeface="Noto Sans Display"/>
+                <a:ea typeface="Noto Sans Display"/>
+                <a:cs typeface="Noto Sans Display"/>
+              </a:rPr>
+              <a:t> </a:t>
+            </a:r>
+            <a:r>
+              <a:rPr sz="2175" b="0" dirty="0" err="1">
+                <a:solidFill>
+                  <a:srgbClr val="F2F5F7"/>
+                </a:solidFill>
+                <a:latin typeface="Noto Sans Display"/>
+                <a:ea typeface="Noto Sans Display"/>
+                <a:cs typeface="Noto Sans Display"/>
+              </a:rPr>
+              <a:t>выполняют</a:t>
+            </a:r>
+            <a:r>
+              <a:rPr sz="2175" b="0" dirty="0">
+                <a:solidFill>
+                  <a:srgbClr val="F2F5F7"/>
+                </a:solidFill>
+                <a:latin typeface="Noto Sans Display"/>
+                <a:ea typeface="Noto Sans Display"/>
+                <a:cs typeface="Noto Sans Display"/>
+              </a:rPr>
+              <a:t> </a:t>
+            </a:r>
+            <a:r>
+              <a:rPr sz="2175" b="0" dirty="0" err="1">
+                <a:solidFill>
+                  <a:srgbClr val="F2F5F7"/>
+                </a:solidFill>
+                <a:latin typeface="Noto Sans Display"/>
+                <a:ea typeface="Noto Sans Display"/>
+                <a:cs typeface="Noto Sans Display"/>
+              </a:rPr>
+              <a:t>только</a:t>
+            </a:r>
+            <a:r>
+              <a:rPr sz="2175" b="0" dirty="0">
+                <a:solidFill>
+                  <a:srgbClr val="F2F5F7"/>
+                </a:solidFill>
+                <a:latin typeface="Noto Sans Display"/>
+                <a:ea typeface="Noto Sans Display"/>
+                <a:cs typeface="Noto Sans Display"/>
+              </a:rPr>
+              <a:t> start, stop и status.</a:t>
             </a:r>
           </a:p>
         </p:txBody>
       </p:sp>
       <p:sp>
         <p:nvSpPr>
-          <p:cNvPr id="7" name="">
-            <a:extLst xmlns:a="http://schemas.openxmlformats.org/drawingml/2006/main">
+          <p:cNvPr id="7" name="Прямоугольник 6">
+            <a:extLst>
               <a:ext uri="{FF2B5EF4-FFF2-40B4-BE49-F238E27FC236}">
                 <a16:creationId xmlns:a16="http://schemas.microsoft.com/office/drawing/2014/main" id="{84DA469F-9FB5-4A3A-8749-4CEC97727419}"/>
               </a:ext>
             </a:extLst>
           </p:cNvPr>
           <p:cNvSpPr>
-            <a:spLocks xmlns:a="http://schemas.openxmlformats.org/drawingml/2006/main" noGrp="1"/>
+            <a:spLocks noGrp="1"/>
           </p:cNvSpPr>
           <p:nvPr/>
         </p:nvSpPr>
         <p:spPr>
-          <a:xfrm xmlns:a="http://schemas.openxmlformats.org/drawingml/2006/main">
-            <a:off x="647700" y="4476750"/>
+          <a:xfrm>
+            <a:off x="647700" y="3143250"/>
             <a:ext cx="3143250" cy="457200"/>
           </a:xfrm>
-          <a:prstGeom xmlns:a="http://schemas.openxmlformats.org/drawingml/2006/main" prst="rect">
+          <a:prstGeom prst="rect">
             <a:avLst/>
           </a:prstGeom>
-          <a:noFill xmlns:a="http://schemas.openxmlformats.org/drawingml/2006/main"/>
-          <a:ln xmlns:a="http://schemas.openxmlformats.org/drawingml/2006/main" w="0">
+          <a:noFill/>
+          <a:ln w="0">
             <a:noFill/>
           </a:ln>
         </p:spPr>
         <p:txBody>
-          <a:bodyPr xmlns:a="http://schemas.openxmlformats.org/drawingml/2006/main" lIns="0" tIns="0" rIns="0" bIns="0" anchor="t">
+          <a:bodyPr lIns="0" tIns="0" rIns="0" bIns="0" anchor="t">
             <a:noAutofit/>
           </a:bodyPr>
-          <a:lstStyle xmlns:a="http://schemas.openxmlformats.org/drawingml/2006/main">
+          <a:lstStyle>
             <a:defPPr>
               <a:defRPr sz="2325" b="1">
                 <a:solidFill>
@@ -8081,7 +7986,7 @@
               </a:defRPr>
             </a:lvl9pPr>
           </a:lstStyle>
-          <a:p xmlns:a="http://schemas.openxmlformats.org/drawingml/2006/main">
+          <a:p>
             <a:pPr>
               <a:defRPr sz="2325" b="1">
                 <a:solidFill>
@@ -8093,7 +7998,7 @@
               </a:defRPr>
             </a:pPr>
             <a:r>
-              <a:rPr sz="2325" b="1">
+              <a:rPr sz="2325" b="1" dirty="0" err="1">
                 <a:solidFill>
                   <a:srgbClr val="5FE0BD"/>
                 </a:solidFill>
@@ -8103,41 +8008,49 @@
               </a:rPr>
               <a:t>smirnova</a:t>
             </a:r>
+            <a:endParaRPr sz="2325" b="1" dirty="0">
+              <a:solidFill>
+                <a:srgbClr val="5FE0BD"/>
+              </a:solidFill>
+              <a:latin typeface="Noto Sans Display"/>
+              <a:ea typeface="Noto Sans Display"/>
+              <a:cs typeface="Noto Sans Display"/>
+            </a:endParaRPr>
           </a:p>
         </p:txBody>
       </p:sp>
       <p:sp>
         <p:nvSpPr>
-          <p:cNvPr id="8" name="">
-            <a:extLst xmlns:a="http://schemas.openxmlformats.org/drawingml/2006/main">
+          <p:cNvPr id="8" name="Прямоугольник 7">
+            <a:extLst>
               <a:ext uri="{FF2B5EF4-FFF2-40B4-BE49-F238E27FC236}">
                 <a16:creationId xmlns:a16="http://schemas.microsoft.com/office/drawing/2014/main" id="{E7D010FD-85AC-4D0F-A6F6-A7EA3DBBB248}"/>
               </a:ext>
             </a:extLst>
           </p:cNvPr>
           <p:cNvSpPr>
-            <a:spLocks xmlns:a="http://schemas.openxmlformats.org/drawingml/2006/main" noGrp="1"/>
+            <a:spLocks noGrp="1"/>
           </p:cNvSpPr>
           <p:nvPr/>
         </p:nvSpPr>
         <p:spPr>
-          <a:xfrm xmlns:a="http://schemas.openxmlformats.org/drawingml/2006/main">
-            <a:off x="4191000" y="4476750"/>
+          <a:xfrm>
+            <a:off x="4191000" y="3143250"/>
             <a:ext cx="7143750" cy="857250"/>
           </a:xfrm>
-          <a:prstGeom xmlns:a="http://schemas.openxmlformats.org/drawingml/2006/main" prst="rect">
+          <a:prstGeom prst="rect">
             <a:avLst/>
           </a:prstGeom>
-          <a:noFill xmlns:a="http://schemas.openxmlformats.org/drawingml/2006/main"/>
-          <a:ln xmlns:a="http://schemas.openxmlformats.org/drawingml/2006/main" w="0">
+          <a:noFill/>
+          <a:ln w="0">
             <a:noFill/>
           </a:ln>
         </p:spPr>
         <p:txBody>
-          <a:bodyPr xmlns:a="http://schemas.openxmlformats.org/drawingml/2006/main" lIns="0" tIns="0" rIns="0" bIns="0" anchor="t">
+          <a:bodyPr lIns="0" tIns="0" rIns="0" bIns="0" anchor="t">
             <a:noAutofit/>
           </a:bodyPr>
-          <a:lstStyle xmlns:a="http://schemas.openxmlformats.org/drawingml/2006/main">
+          <a:lstStyle>
             <a:defPPr>
               <a:defRPr sz="2175" b="0">
                 <a:solidFill>
@@ -8239,7 +8152,7 @@
               </a:defRPr>
             </a:lvl9pPr>
           </a:lstStyle>
-          <a:p xmlns:a="http://schemas.openxmlformats.org/drawingml/2006/main">
+          <a:p>
             <a:pPr>
               <a:defRPr sz="2175" b="0">
                 <a:solidFill>
@@ -8264,164 +8177,36 @@
           </a:p>
         </p:txBody>
       </p:sp>
-      <p:sp>
-        <p:nvSpPr>
-          <p:cNvPr id="9" name="">
-            <a:extLst xmlns:a="http://schemas.openxmlformats.org/drawingml/2006/main">
+      <p:pic>
+        <p:nvPicPr>
+          <p:cNvPr id="12" name="Рисунок 11">
+            <a:extLst>
               <a:ext uri="{FF2B5EF4-FFF2-40B4-BE49-F238E27FC236}">
-                <a16:creationId xmlns:a16="http://schemas.microsoft.com/office/drawing/2014/main" id="{7E5AE959-3295-4F9B-8111-88576C22B7F4}"/>
+                <a16:creationId xmlns:a16="http://schemas.microsoft.com/office/drawing/2014/main" id="{C3C34133-0527-17EE-B673-5E6CAE3A2539}"/>
               </a:ext>
             </a:extLst>
           </p:cNvPr>
-          <p:cNvSpPr>
-            <a:spLocks xmlns:a="http://schemas.openxmlformats.org/drawingml/2006/main" noGrp="1"/>
-          </p:cNvSpPr>
+          <p:cNvPicPr>
+            <a:picLocks noChangeAspect="1"/>
+          </p:cNvPicPr>
           <p:nvPr/>
-        </p:nvSpPr>
+        </p:nvPicPr>
+        <p:blipFill>
+          <a:blip r:embed="rId3"/>
+          <a:stretch>
+            <a:fillRect/>
+          </a:stretch>
+        </p:blipFill>
         <p:spPr>
-          <a:xfrm xmlns:a="http://schemas.openxmlformats.org/drawingml/2006/main">
-            <a:off x="647700" y="5762625"/>
-            <a:ext cx="10763250" cy="428625"/>
+          <a:xfrm>
+            <a:off x="1976284" y="3852386"/>
+            <a:ext cx="7472516" cy="2615089"/>
           </a:xfrm>
-          <a:prstGeom xmlns:a="http://schemas.openxmlformats.org/drawingml/2006/main" prst="rect">
+          <a:prstGeom prst="rect">
             <a:avLst/>
           </a:prstGeom>
-          <a:noFill xmlns:a="http://schemas.openxmlformats.org/drawingml/2006/main"/>
-          <a:ln xmlns:a="http://schemas.openxmlformats.org/drawingml/2006/main" w="0">
-            <a:noFill/>
-          </a:ln>
         </p:spPr>
-        <p:txBody>
-          <a:bodyPr xmlns:a="http://schemas.openxmlformats.org/drawingml/2006/main" lIns="0" tIns="0" rIns="0" bIns="0" anchor="t">
-            <a:noAutofit/>
-          </a:bodyPr>
-          <a:lstStyle xmlns:a="http://schemas.openxmlformats.org/drawingml/2006/main">
-            <a:defPPr>
-              <a:defRPr sz="1950" b="0">
-                <a:solidFill>
-                  <a:srgbClr val="B7C6D4"/>
-                </a:solidFill>
-                <a:latin typeface="Noto Sans Display"/>
-                <a:ea typeface="Noto Sans Display"/>
-                <a:cs typeface="Noto Sans Display"/>
-              </a:defRPr>
-            </a:defPPr>
-            <a:lvl1pPr>
-              <a:defRPr sz="1950" b="0">
-                <a:solidFill>
-                  <a:srgbClr val="B7C6D4"/>
-                </a:solidFill>
-                <a:latin typeface="Noto Sans Display"/>
-                <a:ea typeface="Noto Sans Display"/>
-                <a:cs typeface="Noto Sans Display"/>
-              </a:defRPr>
-            </a:lvl1pPr>
-            <a:lvl2pPr>
-              <a:defRPr sz="1950" b="0">
-                <a:solidFill>
-                  <a:srgbClr val="B7C6D4"/>
-                </a:solidFill>
-                <a:latin typeface="Noto Sans Display"/>
-                <a:ea typeface="Noto Sans Display"/>
-                <a:cs typeface="Noto Sans Display"/>
-              </a:defRPr>
-            </a:lvl2pPr>
-            <a:lvl3pPr>
-              <a:defRPr sz="1950" b="0">
-                <a:solidFill>
-                  <a:srgbClr val="B7C6D4"/>
-                </a:solidFill>
-                <a:latin typeface="Noto Sans Display"/>
-                <a:ea typeface="Noto Sans Display"/>
-                <a:cs typeface="Noto Sans Display"/>
-              </a:defRPr>
-            </a:lvl3pPr>
-            <a:lvl4pPr>
-              <a:defRPr sz="1950" b="0">
-                <a:solidFill>
-                  <a:srgbClr val="B7C6D4"/>
-                </a:solidFill>
-                <a:latin typeface="Noto Sans Display"/>
-                <a:ea typeface="Noto Sans Display"/>
-                <a:cs typeface="Noto Sans Display"/>
-              </a:defRPr>
-            </a:lvl4pPr>
-            <a:lvl5pPr>
-              <a:defRPr sz="1950" b="0">
-                <a:solidFill>
-                  <a:srgbClr val="B7C6D4"/>
-                </a:solidFill>
-                <a:latin typeface="Noto Sans Display"/>
-                <a:ea typeface="Noto Sans Display"/>
-                <a:cs typeface="Noto Sans Display"/>
-              </a:defRPr>
-            </a:lvl5pPr>
-            <a:lvl6pPr>
-              <a:defRPr sz="1950" b="0">
-                <a:solidFill>
-                  <a:srgbClr val="B7C6D4"/>
-                </a:solidFill>
-                <a:latin typeface="Noto Sans Display"/>
-                <a:ea typeface="Noto Sans Display"/>
-                <a:cs typeface="Noto Sans Display"/>
-              </a:defRPr>
-            </a:lvl6pPr>
-            <a:lvl7pPr>
-              <a:defRPr sz="1950" b="0">
-                <a:solidFill>
-                  <a:srgbClr val="B7C6D4"/>
-                </a:solidFill>
-                <a:latin typeface="Noto Sans Display"/>
-                <a:ea typeface="Noto Sans Display"/>
-                <a:cs typeface="Noto Sans Display"/>
-              </a:defRPr>
-            </a:lvl7pPr>
-            <a:lvl8pPr>
-              <a:defRPr sz="1950" b="0">
-                <a:solidFill>
-                  <a:srgbClr val="B7C6D4"/>
-                </a:solidFill>
-                <a:latin typeface="Noto Sans Display"/>
-                <a:ea typeface="Noto Sans Display"/>
-                <a:cs typeface="Noto Sans Display"/>
-              </a:defRPr>
-            </a:lvl8pPr>
-            <a:lvl9pPr>
-              <a:defRPr sz="1950" b="0">
-                <a:solidFill>
-                  <a:srgbClr val="B7C6D4"/>
-                </a:solidFill>
-                <a:latin typeface="Noto Sans Display"/>
-                <a:ea typeface="Noto Sans Display"/>
-                <a:cs typeface="Noto Sans Display"/>
-              </a:defRPr>
-            </a:lvl9pPr>
-          </a:lstStyle>
-          <a:p xmlns:a="http://schemas.openxmlformats.org/drawingml/2006/main">
-            <a:pPr>
-              <a:defRPr sz="1950" b="0">
-                <a:solidFill>
-                  <a:srgbClr val="B7C6D4"/>
-                </a:solidFill>
-                <a:latin typeface="Noto Sans Display"/>
-                <a:ea typeface="Noto Sans Display"/>
-                <a:cs typeface="Noto Sans Display"/>
-              </a:defRPr>
-            </a:pPr>
-            <a:r>
-              <a:rPr sz="1950" b="0">
-                <a:solidFill>
-                  <a:srgbClr val="B7C6D4"/>
-                </a:solidFill>
-                <a:latin typeface="Noto Sans Display"/>
-                <a:ea typeface="Noto Sans Display"/>
-                <a:cs typeface="Noto Sans Display"/>
-              </a:rPr>
-              <a:t>Setgid + default ACL для static. UMASK=0027 для службы.</a:t>
-            </a:r>
-          </a:p>
-        </p:txBody>
-      </p:sp>
+      </p:pic>
     </p:spTree>
     <p:extLst>
       <p:ext uri="{BB962C8B-B14F-4D97-AF65-F5344CB8AC3E}">
@@ -8429,17 +8214,483 @@
       </p:ext>
     </p:extLst>
   </p:cSld>
+  <p:clrMapOvr>
+    <a:masterClrMapping/>
+  </p:clrMapOvr>
 </p:sld>
 </file>
 
 <file path=ppt/slides/slide5.xml><?xml version="1.0" encoding="utf-8"?>
-<p:sld xmlns:p="http://schemas.openxmlformats.org/presentationml/2006/main">
+<p:sld xmlns:a="http://schemas.openxmlformats.org/drawingml/2006/main" xmlns:r="http://schemas.openxmlformats.org/officeDocument/2006/relationships" xmlns:p="http://schemas.openxmlformats.org/presentationml/2006/main">
   <p:cSld>
     <p:bg>
       <p:bgPr>
-        <a:solidFill xmlns:a="http://schemas.openxmlformats.org/drawingml/2006/main">
+        <a:solidFill>
           <a:srgbClr val="101C2B"/>
         </a:solidFill>
+        <a:effectLst/>
+      </p:bgPr>
+    </p:bg>
+    <p:spTree>
+      <p:nvGrpSpPr>
+        <p:cNvPr id="1" name="">
+          <a:extLst>
+            <a:ext uri="{FF2B5EF4-FFF2-40B4-BE49-F238E27FC236}">
+              <a16:creationId xmlns:a16="http://schemas.microsoft.com/office/drawing/2014/main" id="{C44D2CEA-AEFD-C6B8-A623-9BC7D98B5884}"/>
+            </a:ext>
+          </a:extLst>
+        </p:cNvPr>
+        <p:cNvGrpSpPr/>
+        <p:nvPr/>
+      </p:nvGrpSpPr>
+      <p:grpSpPr>
+        <a:xfrm>
+          <a:off x="0" y="0"/>
+          <a:ext cx="0" cy="0"/>
+          <a:chOff x="0" y="0"/>
+          <a:chExt cx="0" cy="0"/>
+        </a:xfrm>
+      </p:grpSpPr>
+      <p:sp>
+        <p:nvSpPr>
+          <p:cNvPr id="10" name="Прямоугольник 9">
+            <a:extLst>
+              <a:ext uri="{FF2B5EF4-FFF2-40B4-BE49-F238E27FC236}">
+                <a16:creationId xmlns:a16="http://schemas.microsoft.com/office/drawing/2014/main" id="{C153C6EE-23AF-5B91-0974-9CBC13537B33}"/>
+              </a:ext>
+            </a:extLst>
+          </p:cNvPr>
+          <p:cNvSpPr>
+            <a:spLocks noGrp="1"/>
+          </p:cNvSpPr>
+          <p:nvPr/>
+        </p:nvSpPr>
+        <p:spPr>
+          <a:xfrm>
+            <a:off x="647700" y="552450"/>
+            <a:ext cx="10858500" cy="876300"/>
+          </a:xfrm>
+          <a:prstGeom prst="rect">
+            <a:avLst/>
+          </a:prstGeom>
+          <a:noFill/>
+          <a:ln w="0">
+            <a:noFill/>
+          </a:ln>
+        </p:spPr>
+        <p:txBody>
+          <a:bodyPr lIns="0" tIns="0" rIns="0" bIns="0" anchor="t">
+            <a:noAutofit/>
+          </a:bodyPr>
+          <a:lstStyle>
+            <a:defPPr>
+              <a:defRPr sz="3300" b="1">
+                <a:solidFill>
+                  <a:srgbClr val="F2F5F7"/>
+                </a:solidFill>
+                <a:latin typeface="Noto Sans Display"/>
+                <a:ea typeface="Noto Sans Display"/>
+                <a:cs typeface="Noto Sans Display"/>
+              </a:defRPr>
+            </a:defPPr>
+            <a:lvl1pPr>
+              <a:defRPr sz="3300" b="1">
+                <a:solidFill>
+                  <a:srgbClr val="F2F5F7"/>
+                </a:solidFill>
+                <a:latin typeface="Noto Sans Display"/>
+                <a:ea typeface="Noto Sans Display"/>
+                <a:cs typeface="Noto Sans Display"/>
+              </a:defRPr>
+            </a:lvl1pPr>
+            <a:lvl2pPr>
+              <a:defRPr sz="3300" b="1">
+                <a:solidFill>
+                  <a:srgbClr val="F2F5F7"/>
+                </a:solidFill>
+                <a:latin typeface="Noto Sans Display"/>
+                <a:ea typeface="Noto Sans Display"/>
+                <a:cs typeface="Noto Sans Display"/>
+              </a:defRPr>
+            </a:lvl2pPr>
+            <a:lvl3pPr>
+              <a:defRPr sz="3300" b="1">
+                <a:solidFill>
+                  <a:srgbClr val="F2F5F7"/>
+                </a:solidFill>
+                <a:latin typeface="Noto Sans Display"/>
+                <a:ea typeface="Noto Sans Display"/>
+                <a:cs typeface="Noto Sans Display"/>
+              </a:defRPr>
+            </a:lvl3pPr>
+            <a:lvl4pPr>
+              <a:defRPr sz="3300" b="1">
+                <a:solidFill>
+                  <a:srgbClr val="F2F5F7"/>
+                </a:solidFill>
+                <a:latin typeface="Noto Sans Display"/>
+                <a:ea typeface="Noto Sans Display"/>
+                <a:cs typeface="Noto Sans Display"/>
+              </a:defRPr>
+            </a:lvl4pPr>
+            <a:lvl5pPr>
+              <a:defRPr sz="3300" b="1">
+                <a:solidFill>
+                  <a:srgbClr val="F2F5F7"/>
+                </a:solidFill>
+                <a:latin typeface="Noto Sans Display"/>
+                <a:ea typeface="Noto Sans Display"/>
+                <a:cs typeface="Noto Sans Display"/>
+              </a:defRPr>
+            </a:lvl5pPr>
+            <a:lvl6pPr>
+              <a:defRPr sz="3300" b="1">
+                <a:solidFill>
+                  <a:srgbClr val="F2F5F7"/>
+                </a:solidFill>
+                <a:latin typeface="Noto Sans Display"/>
+                <a:ea typeface="Noto Sans Display"/>
+                <a:cs typeface="Noto Sans Display"/>
+              </a:defRPr>
+            </a:lvl6pPr>
+            <a:lvl7pPr>
+              <a:defRPr sz="3300" b="1">
+                <a:solidFill>
+                  <a:srgbClr val="F2F5F7"/>
+                </a:solidFill>
+                <a:latin typeface="Noto Sans Display"/>
+                <a:ea typeface="Noto Sans Display"/>
+                <a:cs typeface="Noto Sans Display"/>
+              </a:defRPr>
+            </a:lvl7pPr>
+            <a:lvl8pPr>
+              <a:defRPr sz="3300" b="1">
+                <a:solidFill>
+                  <a:srgbClr val="F2F5F7"/>
+                </a:solidFill>
+                <a:latin typeface="Noto Sans Display"/>
+                <a:ea typeface="Noto Sans Display"/>
+                <a:cs typeface="Noto Sans Display"/>
+              </a:defRPr>
+            </a:lvl8pPr>
+            <a:lvl9pPr>
+              <a:defRPr sz="3300" b="1">
+                <a:solidFill>
+                  <a:srgbClr val="F2F5F7"/>
+                </a:solidFill>
+                <a:latin typeface="Noto Sans Display"/>
+                <a:ea typeface="Noto Sans Display"/>
+                <a:cs typeface="Noto Sans Display"/>
+              </a:defRPr>
+            </a:lvl9pPr>
+          </a:lstStyle>
+          <a:p>
+            <a:pPr>
+              <a:defRPr sz="3300" b="1">
+                <a:solidFill>
+                  <a:srgbClr val="F2F5F7"/>
+                </a:solidFill>
+                <a:latin typeface="Noto Sans Display"/>
+                <a:ea typeface="Noto Sans Display"/>
+                <a:cs typeface="Noto Sans Display"/>
+              </a:defRPr>
+            </a:pPr>
+            <a:r>
+              <a:rPr sz="3300" b="1" dirty="0" err="1">
+                <a:solidFill>
+                  <a:srgbClr val="F2F5F7"/>
+                </a:solidFill>
+                <a:latin typeface="Noto Sans Display"/>
+                <a:ea typeface="Noto Sans Display"/>
+                <a:cs typeface="Noto Sans Display"/>
+              </a:rPr>
+              <a:t>Доступ</a:t>
+            </a:r>
+            <a:r>
+              <a:rPr sz="3300" b="1" dirty="0">
+                <a:solidFill>
+                  <a:srgbClr val="F2F5F7"/>
+                </a:solidFill>
+                <a:latin typeface="Noto Sans Display"/>
+                <a:ea typeface="Noto Sans Display"/>
+                <a:cs typeface="Noto Sans Display"/>
+              </a:rPr>
+              <a:t> </a:t>
+            </a:r>
+            <a:r>
+              <a:rPr sz="3300" b="1" dirty="0" err="1">
+                <a:solidFill>
+                  <a:srgbClr val="F2F5F7"/>
+                </a:solidFill>
+                <a:latin typeface="Noto Sans Display"/>
+                <a:ea typeface="Noto Sans Display"/>
+                <a:cs typeface="Noto Sans Display"/>
+              </a:rPr>
+              <a:t>по</a:t>
+            </a:r>
+            <a:r>
+              <a:rPr sz="3300" b="1" dirty="0">
+                <a:solidFill>
+                  <a:srgbClr val="F2F5F7"/>
+                </a:solidFill>
+                <a:latin typeface="Noto Sans Display"/>
+                <a:ea typeface="Noto Sans Display"/>
+                <a:cs typeface="Noto Sans Display"/>
+              </a:rPr>
+              <a:t> </a:t>
+            </a:r>
+            <a:r>
+              <a:rPr sz="3300" b="1" dirty="0" err="1">
+                <a:solidFill>
+                  <a:srgbClr val="F2F5F7"/>
+                </a:solidFill>
+                <a:latin typeface="Noto Sans Display"/>
+                <a:ea typeface="Noto Sans Display"/>
+                <a:cs typeface="Noto Sans Display"/>
+              </a:rPr>
+              <a:t>ролям</a:t>
+            </a:r>
+            <a:r>
+              <a:rPr lang="ru-RU" sz="3300" b="1" dirty="0">
+                <a:solidFill>
+                  <a:srgbClr val="F2F5F7"/>
+                </a:solidFill>
+                <a:latin typeface="Noto Sans Display"/>
+                <a:ea typeface="Noto Sans Display"/>
+                <a:cs typeface="Noto Sans Display"/>
+              </a:rPr>
+              <a:t>, Часть 2</a:t>
+            </a:r>
+            <a:endParaRPr sz="3300" b="1" dirty="0">
+              <a:solidFill>
+                <a:srgbClr val="F2F5F7"/>
+              </a:solidFill>
+              <a:latin typeface="Noto Sans Display"/>
+              <a:ea typeface="Noto Sans Display"/>
+              <a:cs typeface="Noto Sans Display"/>
+            </a:endParaRPr>
+          </a:p>
+        </p:txBody>
+      </p:sp>
+      <p:pic>
+        <p:nvPicPr>
+          <p:cNvPr id="11" name="Рисунок 10">
+            <a:extLst>
+              <a:ext uri="{FF2B5EF4-FFF2-40B4-BE49-F238E27FC236}">
+                <a16:creationId xmlns:a16="http://schemas.microsoft.com/office/drawing/2014/main" id="{9D7049CE-3C92-342E-D2C8-62804A29F071}"/>
+              </a:ext>
+            </a:extLst>
+          </p:cNvPr>
+          <p:cNvPicPr>
+            <a:picLocks noChangeAspect="1"/>
+          </p:cNvPicPr>
+          <p:nvPr/>
+        </p:nvPicPr>
+        <p:blipFill>
+          <a:blip r:embed="rId3"/>
+          <a:stretch>
+            <a:fillRect/>
+          </a:stretch>
+        </p:blipFill>
+        <p:spPr>
+          <a:xfrm>
+            <a:off x="761258" y="1856754"/>
+            <a:ext cx="10631384" cy="4448796"/>
+          </a:xfrm>
+          <a:prstGeom prst="rect">
+            <a:avLst/>
+          </a:prstGeom>
+        </p:spPr>
+      </p:pic>
+      <p:sp>
+        <p:nvSpPr>
+          <p:cNvPr id="14" name="Прямоугольник 13">
+            <a:extLst>
+              <a:ext uri="{FF2B5EF4-FFF2-40B4-BE49-F238E27FC236}">
+                <a16:creationId xmlns:a16="http://schemas.microsoft.com/office/drawing/2014/main" id="{1018984F-C45F-9365-8DAE-C00DBE0EF0E8}"/>
+              </a:ext>
+            </a:extLst>
+          </p:cNvPr>
+          <p:cNvSpPr>
+            <a:spLocks noGrp="1"/>
+          </p:cNvSpPr>
+          <p:nvPr/>
+        </p:nvSpPr>
+        <p:spPr>
+          <a:xfrm>
+            <a:off x="931606" y="1237938"/>
+            <a:ext cx="7838768" cy="404813"/>
+          </a:xfrm>
+          <a:prstGeom prst="rect">
+            <a:avLst/>
+          </a:prstGeom>
+          <a:noFill/>
+          <a:ln w="0">
+            <a:noFill/>
+          </a:ln>
+        </p:spPr>
+        <p:txBody>
+          <a:bodyPr lIns="0" tIns="0" rIns="0" bIns="0" anchor="t">
+            <a:noAutofit/>
+          </a:bodyPr>
+          <a:lstStyle>
+            <a:defPPr>
+              <a:defRPr sz="2175" b="0">
+                <a:solidFill>
+                  <a:srgbClr val="F2F5F7"/>
+                </a:solidFill>
+                <a:latin typeface="Noto Sans Display"/>
+                <a:ea typeface="Noto Sans Display"/>
+                <a:cs typeface="Noto Sans Display"/>
+              </a:defRPr>
+            </a:defPPr>
+            <a:lvl1pPr>
+              <a:defRPr sz="2175" b="0">
+                <a:solidFill>
+                  <a:srgbClr val="F2F5F7"/>
+                </a:solidFill>
+                <a:latin typeface="Noto Sans Display"/>
+                <a:ea typeface="Noto Sans Display"/>
+                <a:cs typeface="Noto Sans Display"/>
+              </a:defRPr>
+            </a:lvl1pPr>
+            <a:lvl2pPr>
+              <a:defRPr sz="2175" b="0">
+                <a:solidFill>
+                  <a:srgbClr val="F2F5F7"/>
+                </a:solidFill>
+                <a:latin typeface="Noto Sans Display"/>
+                <a:ea typeface="Noto Sans Display"/>
+                <a:cs typeface="Noto Sans Display"/>
+              </a:defRPr>
+            </a:lvl2pPr>
+            <a:lvl3pPr>
+              <a:defRPr sz="2175" b="0">
+                <a:solidFill>
+                  <a:srgbClr val="F2F5F7"/>
+                </a:solidFill>
+                <a:latin typeface="Noto Sans Display"/>
+                <a:ea typeface="Noto Sans Display"/>
+                <a:cs typeface="Noto Sans Display"/>
+              </a:defRPr>
+            </a:lvl3pPr>
+            <a:lvl4pPr>
+              <a:defRPr sz="2175" b="0">
+                <a:solidFill>
+                  <a:srgbClr val="F2F5F7"/>
+                </a:solidFill>
+                <a:latin typeface="Noto Sans Display"/>
+                <a:ea typeface="Noto Sans Display"/>
+                <a:cs typeface="Noto Sans Display"/>
+              </a:defRPr>
+            </a:lvl4pPr>
+            <a:lvl5pPr>
+              <a:defRPr sz="2175" b="0">
+                <a:solidFill>
+                  <a:srgbClr val="F2F5F7"/>
+                </a:solidFill>
+                <a:latin typeface="Noto Sans Display"/>
+                <a:ea typeface="Noto Sans Display"/>
+                <a:cs typeface="Noto Sans Display"/>
+              </a:defRPr>
+            </a:lvl5pPr>
+            <a:lvl6pPr>
+              <a:defRPr sz="2175" b="0">
+                <a:solidFill>
+                  <a:srgbClr val="F2F5F7"/>
+                </a:solidFill>
+                <a:latin typeface="Noto Sans Display"/>
+                <a:ea typeface="Noto Sans Display"/>
+                <a:cs typeface="Noto Sans Display"/>
+              </a:defRPr>
+            </a:lvl6pPr>
+            <a:lvl7pPr>
+              <a:defRPr sz="2175" b="0">
+                <a:solidFill>
+                  <a:srgbClr val="F2F5F7"/>
+                </a:solidFill>
+                <a:latin typeface="Noto Sans Display"/>
+                <a:ea typeface="Noto Sans Display"/>
+                <a:cs typeface="Noto Sans Display"/>
+              </a:defRPr>
+            </a:lvl7pPr>
+            <a:lvl8pPr>
+              <a:defRPr sz="2175" b="0">
+                <a:solidFill>
+                  <a:srgbClr val="F2F5F7"/>
+                </a:solidFill>
+                <a:latin typeface="Noto Sans Display"/>
+                <a:ea typeface="Noto Sans Display"/>
+                <a:cs typeface="Noto Sans Display"/>
+              </a:defRPr>
+            </a:lvl8pPr>
+            <a:lvl9pPr>
+              <a:defRPr sz="2175" b="0">
+                <a:solidFill>
+                  <a:srgbClr val="F2F5F7"/>
+                </a:solidFill>
+                <a:latin typeface="Noto Sans Display"/>
+                <a:ea typeface="Noto Sans Display"/>
+                <a:cs typeface="Noto Sans Display"/>
+              </a:defRPr>
+            </a:lvl9pPr>
+          </a:lstStyle>
+          <a:p>
+            <a:pPr>
+              <a:defRPr sz="2175" b="0">
+                <a:solidFill>
+                  <a:srgbClr val="F2F5F7"/>
+                </a:solidFill>
+                <a:latin typeface="Noto Sans Display"/>
+                <a:ea typeface="Noto Sans Display"/>
+                <a:cs typeface="Noto Sans Display"/>
+              </a:defRPr>
+            </a:pPr>
+            <a:r>
+              <a:rPr lang="ru-RU" dirty="0"/>
+              <a:t>Скрипт </a:t>
+            </a:r>
+            <a:r>
+              <a:rPr lang="en-US" dirty="0"/>
+              <a:t>Bash </a:t>
+            </a:r>
+            <a:r>
+              <a:rPr lang="ru-RU" dirty="0"/>
+              <a:t>для авто выставления прав </a:t>
+            </a:r>
+            <a:endParaRPr sz="2175" b="0" dirty="0">
+              <a:solidFill>
+                <a:srgbClr val="F2F5F7"/>
+              </a:solidFill>
+              <a:latin typeface="Noto Sans Display"/>
+              <a:ea typeface="Noto Sans Display"/>
+              <a:cs typeface="Noto Sans Display"/>
+            </a:endParaRPr>
+          </a:p>
+        </p:txBody>
+      </p:sp>
+    </p:spTree>
+    <p:extLst>
+      <p:ext uri="{BB962C8B-B14F-4D97-AF65-F5344CB8AC3E}">
+        <p14:creationId xmlns:p14="http://schemas.microsoft.com/office/powerpoint/2010/main" val="2670067066"/>
+      </p:ext>
+    </p:extLst>
+  </p:cSld>
+  <p:clrMapOvr>
+    <a:masterClrMapping/>
+  </p:clrMapOvr>
+</p:sld>
+</file>
+
+<file path=ppt/slides/slide6.xml><?xml version="1.0" encoding="utf-8"?>
+<p:sld xmlns:a="http://schemas.openxmlformats.org/drawingml/2006/main" xmlns:r="http://schemas.openxmlformats.org/officeDocument/2006/relationships" xmlns:p="http://schemas.openxmlformats.org/presentationml/2006/main">
+  <p:cSld>
+    <p:bg>
+      <p:bgPr>
+        <a:solidFill>
+          <a:srgbClr val="101C2B"/>
+        </a:solidFill>
+        <a:effectLst/>
       </p:bgPr>
     </p:bg>
     <p:spTree>
@@ -8449,40 +8700,45 @@
         <p:nvPr/>
       </p:nvGrpSpPr>
       <p:grpSpPr>
-        <a:xfrm xmlns:a="http://schemas.openxmlformats.org/drawingml/2006/main"/>
+        <a:xfrm>
+          <a:off x="0" y="0"/>
+          <a:ext cx="0" cy="0"/>
+          <a:chOff x="0" y="0"/>
+          <a:chExt cx="0" cy="0"/>
+        </a:xfrm>
       </p:grpSpPr>
       <p:sp>
         <p:nvSpPr>
-          <p:cNvPr id="9" name="">
-            <a:extLst xmlns:a="http://schemas.openxmlformats.org/drawingml/2006/main">
+          <p:cNvPr id="8" name="Прямоугольник 7">
+            <a:extLst>
               <a:ext uri="{FF2B5EF4-FFF2-40B4-BE49-F238E27FC236}">
-                <a16:creationId xmlns:a16="http://schemas.microsoft.com/office/drawing/2014/main" id="{3E80CB78-88CD-4D01-806A-043D4E69F24B}"/>
+                <a16:creationId xmlns:a16="http://schemas.microsoft.com/office/drawing/2014/main" id="{E7794B3E-1974-4A53-8801-D5AA296EAFD0}"/>
               </a:ext>
             </a:extLst>
           </p:cNvPr>
           <p:cNvSpPr>
-            <a:spLocks xmlns:a="http://schemas.openxmlformats.org/drawingml/2006/main" noGrp="1"/>
+            <a:spLocks noGrp="1"/>
           </p:cNvSpPr>
           <p:nvPr/>
         </p:nvSpPr>
         <p:spPr>
-          <a:xfrm xmlns:a="http://schemas.openxmlformats.org/drawingml/2006/main">
+          <a:xfrm>
             <a:off x="647700" y="552450"/>
             <a:ext cx="10858500" cy="876300"/>
           </a:xfrm>
-          <a:prstGeom xmlns:a="http://schemas.openxmlformats.org/drawingml/2006/main" prst="rect">
+          <a:prstGeom prst="rect">
             <a:avLst/>
           </a:prstGeom>
-          <a:noFill xmlns:a="http://schemas.openxmlformats.org/drawingml/2006/main"/>
-          <a:ln xmlns:a="http://schemas.openxmlformats.org/drawingml/2006/main" w="0">
+          <a:noFill/>
+          <a:ln w="0">
             <a:noFill/>
           </a:ln>
         </p:spPr>
         <p:txBody>
-          <a:bodyPr xmlns:a="http://schemas.openxmlformats.org/drawingml/2006/main" lIns="0" tIns="0" rIns="0" bIns="0" anchor="t">
+          <a:bodyPr lIns="0" tIns="0" rIns="0" bIns="0" anchor="t">
             <a:noAutofit/>
           </a:bodyPr>
-          <a:lstStyle xmlns:a="http://schemas.openxmlformats.org/drawingml/2006/main">
+          <a:lstStyle>
             <a:defPPr>
               <a:defRPr sz="3300" b="1">
                 <a:solidFill>
@@ -8584,7 +8840,7 @@
               </a:defRPr>
             </a:lvl9pPr>
           </a:lstStyle>
-          <a:p xmlns:a="http://schemas.openxmlformats.org/drawingml/2006/main">
+          <a:p>
             <a:pPr>
               <a:defRPr sz="3300" b="1">
                 <a:solidFill>
@@ -8604,43 +8860,43 @@
                 <a:ea typeface="Noto Sans Display"/>
                 <a:cs typeface="Noto Sans Display"/>
               </a:rPr>
-              <a:t>Проблема: группа ещё не создана</a:t>
+              <a:t>Проблема: старая версия ещё работает</a:t>
             </a:r>
           </a:p>
         </p:txBody>
       </p:sp>
       <p:sp>
         <p:nvSpPr>
-          <p:cNvPr id="2" name="">
-            <a:extLst xmlns:a="http://schemas.openxmlformats.org/drawingml/2006/main">
+          <p:cNvPr id="2" name="Прямоугольник 1">
+            <a:extLst>
               <a:ext uri="{FF2B5EF4-FFF2-40B4-BE49-F238E27FC236}">
-                <a16:creationId xmlns:a16="http://schemas.microsoft.com/office/drawing/2014/main" id="{7813B98B-CC78-40CA-83E8-5B00D45CD7A5}"/>
+                <a16:creationId xmlns:a16="http://schemas.microsoft.com/office/drawing/2014/main" id="{2EF919F8-A485-4489-BF05-8C62E26F64F0}"/>
               </a:ext>
             </a:extLst>
           </p:cNvPr>
           <p:cNvSpPr>
-            <a:spLocks xmlns:a="http://schemas.openxmlformats.org/drawingml/2006/main" noGrp="1"/>
+            <a:spLocks noGrp="1"/>
           </p:cNvSpPr>
           <p:nvPr/>
         </p:nvSpPr>
         <p:spPr>
-          <a:xfrm xmlns:a="http://schemas.openxmlformats.org/drawingml/2006/main">
+          <a:xfrm>
             <a:off x="11125200" y="6334125"/>
             <a:ext cx="476250" cy="266700"/>
           </a:xfrm>
-          <a:prstGeom xmlns:a="http://schemas.openxmlformats.org/drawingml/2006/main" prst="rect">
+          <a:prstGeom prst="rect">
             <a:avLst/>
           </a:prstGeom>
-          <a:noFill xmlns:a="http://schemas.openxmlformats.org/drawingml/2006/main"/>
-          <a:ln xmlns:a="http://schemas.openxmlformats.org/drawingml/2006/main" w="0">
+          <a:noFill/>
+          <a:ln w="0">
             <a:noFill/>
           </a:ln>
         </p:spPr>
         <p:txBody>
-          <a:bodyPr xmlns:a="http://schemas.openxmlformats.org/drawingml/2006/main" lIns="0" tIns="0" rIns="0" bIns="0" anchor="t">
+          <a:bodyPr lIns="0" tIns="0" rIns="0" bIns="0" anchor="t">
             <a:noAutofit/>
           </a:bodyPr>
-          <a:lstStyle xmlns:a="http://schemas.openxmlformats.org/drawingml/2006/main">
+          <a:lstStyle>
             <a:defPPr>
               <a:defRPr sz="1350" b="0">
                 <a:solidFill>
@@ -8742,7 +8998,7 @@
               </a:defRPr>
             </a:lvl9pPr>
           </a:lstStyle>
-          <a:p xmlns:a="http://schemas.openxmlformats.org/drawingml/2006/main">
+          <a:p>
             <a:pPr>
               <a:defRPr sz="1350" b="0">
                 <a:solidFill>
@@ -8762,201 +9018,71 @@
                 <a:ea typeface="Noto Sans Display"/>
                 <a:cs typeface="Noto Sans Display"/>
               </a:rPr>
-              <a:t>05</a:t>
+              <a:t>06</a:t>
             </a:r>
           </a:p>
         </p:txBody>
       </p:sp>
+      <p:pic>
+        <p:nvPicPr>
+          <p:cNvPr id="3" name="Рисунок 2">
+            <a:extLst>
+              <a:ext uri="{FF2B5EF4-FFF2-40B4-BE49-F238E27FC236}">
+                <a16:creationId xmlns:a16="http://schemas.microsoft.com/office/drawing/2014/main" id="{873B1675-85FF-40A5-9E50-27AF4D83F7A3}"/>
+              </a:ext>
+            </a:extLst>
+          </p:cNvPr>
+          <p:cNvPicPr>
+            <a:picLocks noChangeAspect="1"/>
+          </p:cNvPicPr>
+          <p:nvPr/>
+        </p:nvPicPr>
+        <p:blipFill>
+          <a:blip r:embed="rId3"/>
+          <a:stretch/>
+        </p:blipFill>
+        <p:spPr>
+          <a:xfrm>
+            <a:off x="647700" y="1657833"/>
+            <a:ext cx="10820400" cy="1808783"/>
+          </a:xfrm>
+          <a:prstGeom prst="rect">
+            <a:avLst/>
+          </a:prstGeom>
+        </p:spPr>
+      </p:pic>
       <p:sp>
         <p:nvSpPr>
-          <p:cNvPr id="3" name="">
-            <a:extLst xmlns:a="http://schemas.openxmlformats.org/drawingml/2006/main">
+          <p:cNvPr id="4" name="Прямоугольник 3">
+            <a:extLst>
               <a:ext uri="{FF2B5EF4-FFF2-40B4-BE49-F238E27FC236}">
-                <a16:creationId xmlns:a16="http://schemas.microsoft.com/office/drawing/2014/main" id="{15C6E94D-4215-4B39-8A6C-5E2BDA0B988F}"/>
+                <a16:creationId xmlns:a16="http://schemas.microsoft.com/office/drawing/2014/main" id="{1C370C35-A6F6-4722-A882-D6A0CA2294A9}"/>
               </a:ext>
             </a:extLst>
           </p:cNvPr>
           <p:cNvSpPr>
-            <a:spLocks xmlns:a="http://schemas.openxmlformats.org/drawingml/2006/main" noGrp="1"/>
+            <a:spLocks noGrp="1"/>
           </p:cNvSpPr>
           <p:nvPr/>
         </p:nvSpPr>
         <p:spPr>
-          <a:xfrm xmlns:a="http://schemas.openxmlformats.org/drawingml/2006/main">
-            <a:off x="647700" y="1714500"/>
-            <a:ext cx="10810875" cy="685800"/>
+          <a:xfrm>
+            <a:off x="647700" y="3857625"/>
+            <a:ext cx="2476500" cy="476250"/>
           </a:xfrm>
-          <a:prstGeom xmlns:a="http://schemas.openxmlformats.org/drawingml/2006/main" prst="rect">
+          <a:prstGeom prst="rect">
             <a:avLst/>
           </a:prstGeom>
-          <a:noFill xmlns:a="http://schemas.openxmlformats.org/drawingml/2006/main"/>
-          <a:ln xmlns:a="http://schemas.openxmlformats.org/drawingml/2006/main" w="0">
+          <a:noFill/>
+          <a:ln w="0">
             <a:noFill/>
           </a:ln>
         </p:spPr>
         <p:txBody>
-          <a:bodyPr xmlns:a="http://schemas.openxmlformats.org/drawingml/2006/main" lIns="0" tIns="0" rIns="0" bIns="0" anchor="t">
+          <a:bodyPr lIns="0" tIns="0" rIns="0" bIns="0" anchor="t">
             <a:noAutofit/>
           </a:bodyPr>
-          <a:lstStyle xmlns:a="http://schemas.openxmlformats.org/drawingml/2006/main">
-            <a:defPPr>
-              <a:defRPr sz="2250" b="0">
-                <a:solidFill>
-                  <a:srgbClr val="FFBD84"/>
-                </a:solidFill>
-                <a:latin typeface="DejaVu Sans Mono"/>
-                <a:ea typeface="DejaVu Sans Mono"/>
-                <a:cs typeface="DejaVu Sans Mono"/>
-              </a:defRPr>
-            </a:defPPr>
-            <a:lvl1pPr>
-              <a:defRPr sz="2250" b="0">
-                <a:solidFill>
-                  <a:srgbClr val="FFBD84"/>
-                </a:solidFill>
-                <a:latin typeface="DejaVu Sans Mono"/>
-                <a:ea typeface="DejaVu Sans Mono"/>
-                <a:cs typeface="DejaVu Sans Mono"/>
-              </a:defRPr>
-            </a:lvl1pPr>
-            <a:lvl2pPr>
-              <a:defRPr sz="2250" b="0">
-                <a:solidFill>
-                  <a:srgbClr val="FFBD84"/>
-                </a:solidFill>
-                <a:latin typeface="DejaVu Sans Mono"/>
-                <a:ea typeface="DejaVu Sans Mono"/>
-                <a:cs typeface="DejaVu Sans Mono"/>
-              </a:defRPr>
-            </a:lvl2pPr>
-            <a:lvl3pPr>
-              <a:defRPr sz="2250" b="0">
-                <a:solidFill>
-                  <a:srgbClr val="FFBD84"/>
-                </a:solidFill>
-                <a:latin typeface="DejaVu Sans Mono"/>
-                <a:ea typeface="DejaVu Sans Mono"/>
-                <a:cs typeface="DejaVu Sans Mono"/>
-              </a:defRPr>
-            </a:lvl3pPr>
-            <a:lvl4pPr>
-              <a:defRPr sz="2250" b="0">
-                <a:solidFill>
-                  <a:srgbClr val="FFBD84"/>
-                </a:solidFill>
-                <a:latin typeface="DejaVu Sans Mono"/>
-                <a:ea typeface="DejaVu Sans Mono"/>
-                <a:cs typeface="DejaVu Sans Mono"/>
-              </a:defRPr>
-            </a:lvl4pPr>
-            <a:lvl5pPr>
-              <a:defRPr sz="2250" b="0">
-                <a:solidFill>
-                  <a:srgbClr val="FFBD84"/>
-                </a:solidFill>
-                <a:latin typeface="DejaVu Sans Mono"/>
-                <a:ea typeface="DejaVu Sans Mono"/>
-                <a:cs typeface="DejaVu Sans Mono"/>
-              </a:defRPr>
-            </a:lvl5pPr>
-            <a:lvl6pPr>
-              <a:defRPr sz="2250" b="0">
-                <a:solidFill>
-                  <a:srgbClr val="FFBD84"/>
-                </a:solidFill>
-                <a:latin typeface="DejaVu Sans Mono"/>
-                <a:ea typeface="DejaVu Sans Mono"/>
-                <a:cs typeface="DejaVu Sans Mono"/>
-              </a:defRPr>
-            </a:lvl6pPr>
-            <a:lvl7pPr>
-              <a:defRPr sz="2250" b="0">
-                <a:solidFill>
-                  <a:srgbClr val="FFBD84"/>
-                </a:solidFill>
-                <a:latin typeface="DejaVu Sans Mono"/>
-                <a:ea typeface="DejaVu Sans Mono"/>
-                <a:cs typeface="DejaVu Sans Mono"/>
-              </a:defRPr>
-            </a:lvl7pPr>
-            <a:lvl8pPr>
-              <a:defRPr sz="2250" b="0">
-                <a:solidFill>
-                  <a:srgbClr val="FFBD84"/>
-                </a:solidFill>
-                <a:latin typeface="DejaVu Sans Mono"/>
-                <a:ea typeface="DejaVu Sans Mono"/>
-                <a:cs typeface="DejaVu Sans Mono"/>
-              </a:defRPr>
-            </a:lvl8pPr>
-            <a:lvl9pPr>
-              <a:defRPr sz="2250" b="0">
-                <a:solidFill>
-                  <a:srgbClr val="FFBD84"/>
-                </a:solidFill>
-                <a:latin typeface="DejaVu Sans Mono"/>
-                <a:ea typeface="DejaVu Sans Mono"/>
-                <a:cs typeface="DejaVu Sans Mono"/>
-              </a:defRPr>
-            </a:lvl9pPr>
-          </a:lstStyle>
-          <a:p xmlns:a="http://schemas.openxmlformats.org/drawingml/2006/main">
-            <a:pPr>
-              <a:defRPr sz="2250" b="0">
-                <a:solidFill>
-                  <a:srgbClr val="FFBD84"/>
-                </a:solidFill>
-                <a:latin typeface="DejaVu Sans Mono"/>
-                <a:ea typeface="DejaVu Sans Mono"/>
-                <a:cs typeface="DejaVu Sans Mono"/>
-              </a:defRPr>
-            </a:pPr>
-            <a:r>
-              <a:rPr sz="2250" b="0">
-                <a:solidFill>
-                  <a:srgbClr val="FFBD84"/>
-                </a:solidFill>
-                <a:latin typeface="DejaVu Sans Mono"/>
-                <a:ea typeface="DejaVu Sans Mono"/>
-                <a:cs typeface="DejaVu Sans Mono"/>
-              </a:rPr>
-              <a:t>install: неверная группа 'helpdesk-dev'</a:t>
-            </a:r>
-          </a:p>
-        </p:txBody>
-      </p:sp>
-      <p:sp>
-        <p:nvSpPr>
-          <p:cNvPr id="4" name="">
-            <a:extLst xmlns:a="http://schemas.openxmlformats.org/drawingml/2006/main">
-              <a:ext uri="{FF2B5EF4-FFF2-40B4-BE49-F238E27FC236}">
-                <a16:creationId xmlns:a16="http://schemas.microsoft.com/office/drawing/2014/main" id="{E7C983E6-B4F6-4F92-98BC-79F6E432870C}"/>
-              </a:ext>
-            </a:extLst>
-          </p:cNvPr>
-          <p:cNvSpPr>
-            <a:spLocks xmlns:a="http://schemas.openxmlformats.org/drawingml/2006/main" noGrp="1"/>
-          </p:cNvSpPr>
-          <p:nvPr/>
-        </p:nvSpPr>
-        <p:spPr>
-          <a:xfrm xmlns:a="http://schemas.openxmlformats.org/drawingml/2006/main">
-            <a:off x="647700" y="2828925"/>
-            <a:ext cx="2476500" cy="476250"/>
-          </a:xfrm>
-          <a:prstGeom xmlns:a="http://schemas.openxmlformats.org/drawingml/2006/main" prst="rect">
-            <a:avLst/>
-          </a:prstGeom>
-          <a:noFill xmlns:a="http://schemas.openxmlformats.org/drawingml/2006/main"/>
-          <a:ln xmlns:a="http://schemas.openxmlformats.org/drawingml/2006/main" w="0">
-            <a:noFill/>
-          </a:ln>
-        </p:spPr>
-        <p:txBody>
-          <a:bodyPr xmlns:a="http://schemas.openxmlformats.org/drawingml/2006/main" lIns="0" tIns="0" rIns="0" bIns="0" anchor="t">
-            <a:noAutofit/>
-          </a:bodyPr>
-          <a:lstStyle xmlns:a="http://schemas.openxmlformats.org/drawingml/2006/main">
+          <a:lstStyle>
             <a:defPPr>
               <a:defRPr sz="2325" b="1">
                 <a:solidFill>
@@ -9058,7 +9184,7 @@
               </a:defRPr>
             </a:lvl9pPr>
           </a:lstStyle>
-          <a:p xmlns:a="http://schemas.openxmlformats.org/drawingml/2006/main">
+          <a:p>
             <a:pPr>
               <a:defRPr sz="2325" b="1">
                 <a:solidFill>
@@ -9085,38 +9211,38 @@
       </p:sp>
       <p:sp>
         <p:nvSpPr>
-          <p:cNvPr id="5" name="">
-            <a:extLst xmlns:a="http://schemas.openxmlformats.org/drawingml/2006/main">
+          <p:cNvPr id="5" name="Прямоугольник 4">
+            <a:extLst>
               <a:ext uri="{FF2B5EF4-FFF2-40B4-BE49-F238E27FC236}">
-                <a16:creationId xmlns:a16="http://schemas.microsoft.com/office/drawing/2014/main" id="{BFE4D50F-4271-46EA-ABBF-AF414CBA04B0}"/>
+                <a16:creationId xmlns:a16="http://schemas.microsoft.com/office/drawing/2014/main" id="{18ECBFAB-E30E-4C29-83C1-AF7E5CB544F0}"/>
               </a:ext>
             </a:extLst>
           </p:cNvPr>
           <p:cNvSpPr>
-            <a:spLocks xmlns:a="http://schemas.openxmlformats.org/drawingml/2006/main" noGrp="1"/>
+            <a:spLocks noGrp="1"/>
           </p:cNvSpPr>
           <p:nvPr/>
         </p:nvSpPr>
         <p:spPr>
-          <a:xfrm xmlns:a="http://schemas.openxmlformats.org/drawingml/2006/main">
-            <a:off x="3429000" y="2828925"/>
-            <a:ext cx="7810500" cy="904875"/>
+          <a:xfrm>
+            <a:off x="3429000" y="3857625"/>
+            <a:ext cx="7810500" cy="809625"/>
           </a:xfrm>
-          <a:prstGeom xmlns:a="http://schemas.openxmlformats.org/drawingml/2006/main" prst="rect">
+          <a:prstGeom prst="rect">
             <a:avLst/>
           </a:prstGeom>
-          <a:noFill xmlns:a="http://schemas.openxmlformats.org/drawingml/2006/main"/>
-          <a:ln xmlns:a="http://schemas.openxmlformats.org/drawingml/2006/main" w="0">
+          <a:noFill/>
+          <a:ln w="0">
             <a:noFill/>
           </a:ln>
         </p:spPr>
         <p:txBody>
-          <a:bodyPr xmlns:a="http://schemas.openxmlformats.org/drawingml/2006/main" lIns="0" tIns="0" rIns="0" bIns="0" anchor="t">
+          <a:bodyPr lIns="0" tIns="0" rIns="0" bIns="0" anchor="t">
             <a:noAutofit/>
           </a:bodyPr>
-          <a:lstStyle xmlns:a="http://schemas.openxmlformats.org/drawingml/2006/main">
+          <a:lstStyle>
             <a:defPPr>
-              <a:defRPr sz="2250" b="0">
+              <a:defRPr sz="2175" b="0">
                 <a:solidFill>
                   <a:srgbClr val="F2F5F7"/>
                 </a:solidFill>
@@ -9126,7 +9252,7 @@
               </a:defRPr>
             </a:defPPr>
             <a:lvl1pPr>
-              <a:defRPr sz="2250" b="0">
+              <a:defRPr sz="2175" b="0">
                 <a:solidFill>
                   <a:srgbClr val="F2F5F7"/>
                 </a:solidFill>
@@ -9136,7 +9262,7 @@
               </a:defRPr>
             </a:lvl1pPr>
             <a:lvl2pPr>
-              <a:defRPr sz="2250" b="0">
+              <a:defRPr sz="2175" b="0">
                 <a:solidFill>
                   <a:srgbClr val="F2F5F7"/>
                 </a:solidFill>
@@ -9146,7 +9272,7 @@
               </a:defRPr>
             </a:lvl2pPr>
             <a:lvl3pPr>
-              <a:defRPr sz="2250" b="0">
+              <a:defRPr sz="2175" b="0">
                 <a:solidFill>
                   <a:srgbClr val="F2F5F7"/>
                 </a:solidFill>
@@ -9156,7 +9282,7 @@
               </a:defRPr>
             </a:lvl3pPr>
             <a:lvl4pPr>
-              <a:defRPr sz="2250" b="0">
+              <a:defRPr sz="2175" b="0">
                 <a:solidFill>
                   <a:srgbClr val="F2F5F7"/>
                 </a:solidFill>
@@ -9166,7 +9292,7 @@
               </a:defRPr>
             </a:lvl4pPr>
             <a:lvl5pPr>
-              <a:defRPr sz="2250" b="0">
+              <a:defRPr sz="2175" b="0">
                 <a:solidFill>
                   <a:srgbClr val="F2F5F7"/>
                 </a:solidFill>
@@ -9176,7 +9302,7 @@
               </a:defRPr>
             </a:lvl5pPr>
             <a:lvl6pPr>
-              <a:defRPr sz="2250" b="0">
+              <a:defRPr sz="2175" b="0">
                 <a:solidFill>
                   <a:srgbClr val="F2F5F7"/>
                 </a:solidFill>
@@ -9186,7 +9312,7 @@
               </a:defRPr>
             </a:lvl6pPr>
             <a:lvl7pPr>
-              <a:defRPr sz="2250" b="0">
+              <a:defRPr sz="2175" b="0">
                 <a:solidFill>
                   <a:srgbClr val="F2F5F7"/>
                 </a:solidFill>
@@ -9196,7 +9322,7 @@
               </a:defRPr>
             </a:lvl7pPr>
             <a:lvl8pPr>
-              <a:defRPr sz="2250" b="0">
+              <a:defRPr sz="2175" b="0">
                 <a:solidFill>
                   <a:srgbClr val="F2F5F7"/>
                 </a:solidFill>
@@ -9206,7 +9332,7 @@
               </a:defRPr>
             </a:lvl8pPr>
             <a:lvl9pPr>
-              <a:defRPr sz="2250" b="0">
+              <a:defRPr sz="2175" b="0">
                 <a:solidFill>
                   <a:srgbClr val="F2F5F7"/>
                 </a:solidFill>
@@ -9216,9 +9342,9 @@
               </a:defRPr>
             </a:lvl9pPr>
           </a:lstStyle>
-          <a:p xmlns:a="http://schemas.openxmlformats.org/drawingml/2006/main">
+          <a:p>
             <a:pPr>
-              <a:defRPr sz="2250" b="0">
+              <a:defRPr sz="2175" b="0">
                 <a:solidFill>
                   <a:srgbClr val="F2F5F7"/>
                 </a:solidFill>
@@ -9228,7 +9354,7 @@
               </a:defRPr>
             </a:pPr>
             <a:r>
-              <a:rPr sz="2250" b="0">
+              <a:rPr sz="2175" b="0" dirty="0" err="1">
                 <a:solidFill>
                   <a:srgbClr val="F2F5F7"/>
                 </a:solidFill>
@@ -9236,43 +9362,142 @@
                 <a:ea typeface="Noto Sans Display"/>
                 <a:cs typeface="Noto Sans Display"/>
               </a:rPr>
-              <a:t>Модуль размещения запустили раньше создания аккаунтов.</a:t>
+              <a:t>Версия</a:t>
+            </a:r>
+            <a:r>
+              <a:rPr sz="2175" b="0" dirty="0">
+                <a:solidFill>
+                  <a:srgbClr val="F2F5F7"/>
+                </a:solidFill>
+                <a:latin typeface="Noto Sans Display"/>
+                <a:ea typeface="Noto Sans Display"/>
+                <a:cs typeface="Noto Sans Display"/>
+              </a:rPr>
+              <a:t> 2.4.1 </a:t>
+            </a:r>
+            <a:r>
+              <a:rPr sz="2175" b="0" dirty="0" err="1">
+                <a:solidFill>
+                  <a:srgbClr val="F2F5F7"/>
+                </a:solidFill>
+                <a:latin typeface="Noto Sans Display"/>
+                <a:ea typeface="Noto Sans Display"/>
+                <a:cs typeface="Noto Sans Display"/>
+              </a:rPr>
+              <a:t>обнаружила</a:t>
+            </a:r>
+            <a:r>
+              <a:rPr sz="2175" b="0" dirty="0">
+                <a:solidFill>
+                  <a:srgbClr val="F2F5F7"/>
+                </a:solidFill>
+                <a:latin typeface="Noto Sans Display"/>
+                <a:ea typeface="Noto Sans Display"/>
+                <a:cs typeface="Noto Sans Display"/>
+              </a:rPr>
+              <a:t> </a:t>
+            </a:r>
+            <a:r>
+              <a:rPr sz="2175" b="0" dirty="0" err="1">
+                <a:solidFill>
+                  <a:srgbClr val="F2F5F7"/>
+                </a:solidFill>
+                <a:latin typeface="Noto Sans Display"/>
+                <a:ea typeface="Noto Sans Display"/>
+                <a:cs typeface="Noto Sans Display"/>
+              </a:rPr>
+              <a:t>процесс</a:t>
+            </a:r>
+            <a:r>
+              <a:rPr sz="2175" b="0" dirty="0">
+                <a:solidFill>
+                  <a:srgbClr val="F2F5F7"/>
+                </a:solidFill>
+                <a:latin typeface="Noto Sans Display"/>
+                <a:ea typeface="Noto Sans Display"/>
+                <a:cs typeface="Noto Sans Display"/>
+              </a:rPr>
+              <a:t> 2.3 и </a:t>
+            </a:r>
+            <a:r>
+              <a:rPr sz="2175" b="0" dirty="0" err="1">
+                <a:solidFill>
+                  <a:srgbClr val="F2F5F7"/>
+                </a:solidFill>
+                <a:latin typeface="Noto Sans Display"/>
+                <a:ea typeface="Noto Sans Display"/>
+                <a:cs typeface="Noto Sans Display"/>
+              </a:rPr>
+              <a:t>отказалась</a:t>
+            </a:r>
+            <a:r>
+              <a:rPr sz="2175" b="0" dirty="0">
+                <a:solidFill>
+                  <a:srgbClr val="F2F5F7"/>
+                </a:solidFill>
+                <a:latin typeface="Noto Sans Display"/>
+                <a:ea typeface="Noto Sans Display"/>
+                <a:cs typeface="Noto Sans Display"/>
+              </a:rPr>
+              <a:t> </a:t>
+            </a:r>
+            <a:r>
+              <a:rPr sz="2175" b="0" dirty="0" err="1">
+                <a:solidFill>
+                  <a:srgbClr val="F2F5F7"/>
+                </a:solidFill>
+                <a:latin typeface="Noto Sans Display"/>
+                <a:ea typeface="Noto Sans Display"/>
+                <a:cs typeface="Noto Sans Display"/>
+              </a:rPr>
+              <a:t>запускаться</a:t>
+            </a:r>
+            <a:r>
+              <a:rPr sz="2175" b="0" dirty="0">
+                <a:solidFill>
+                  <a:srgbClr val="F2F5F7"/>
+                </a:solidFill>
+                <a:latin typeface="Noto Sans Display"/>
+                <a:ea typeface="Noto Sans Display"/>
+                <a:cs typeface="Noto Sans Display"/>
+              </a:rPr>
+              <a:t>.</a:t>
             </a:r>
           </a:p>
         </p:txBody>
       </p:sp>
       <p:sp>
         <p:nvSpPr>
-          <p:cNvPr id="6" name="">
-            <a:extLst xmlns:a="http://schemas.openxmlformats.org/drawingml/2006/main">
+          <p:cNvPr id="6" name="Прямоугольник 5">
+            <a:extLst>
               <a:ext uri="{FF2B5EF4-FFF2-40B4-BE49-F238E27FC236}">
-                <a16:creationId xmlns:a16="http://schemas.microsoft.com/office/drawing/2014/main" id="{544DB005-2ED2-4910-A24C-73AB632DFEF0}"/>
+                <a16:creationId xmlns:a16="http://schemas.microsoft.com/office/drawing/2014/main" id="{ED0561B3-4175-4C84-8A46-3441E607E240}"/>
               </a:ext>
             </a:extLst>
           </p:cNvPr>
           <p:cNvSpPr>
-            <a:spLocks xmlns:a="http://schemas.openxmlformats.org/drawingml/2006/main" noGrp="1"/>
+            <a:spLocks noGrp="1"/>
           </p:cNvSpPr>
           <p:nvPr/>
         </p:nvSpPr>
         <p:spPr>
-          <a:xfrm xmlns:a="http://schemas.openxmlformats.org/drawingml/2006/main">
-            <a:off x="647700" y="4095750"/>
+          <a:xfrm>
+            <a:off x="647700" y="4972050"/>
             <a:ext cx="2476500" cy="476250"/>
           </a:xfrm>
-          <a:prstGeom xmlns:a="http://schemas.openxmlformats.org/drawingml/2006/main" prst="rect">
+          <a:prstGeom prst="rect">
             <a:avLst/>
           </a:prstGeom>
-          <a:noFill xmlns:a="http://schemas.openxmlformats.org/drawingml/2006/main"/>
-          <a:ln xmlns:a="http://schemas.openxmlformats.org/drawingml/2006/main" w="0">
+          <a:noFill/>
+          <a:ln w="0">
             <a:noFill/>
           </a:ln>
         </p:spPr>
         <p:txBody>
-          <a:bodyPr xmlns:a="http://schemas.openxmlformats.org/drawingml/2006/main" lIns="0" tIns="0" rIns="0" bIns="0" anchor="t">
+          <a:bodyPr lIns="0" tIns="0" rIns="0" bIns="0" anchor="t">
             <a:noAutofit/>
           </a:bodyPr>
-          <a:lstStyle xmlns:a="http://schemas.openxmlformats.org/drawingml/2006/main">
+          <a:lstStyle>
             <a:defPPr>
               <a:defRPr sz="2325" b="1">
                 <a:solidFill>
@@ -9374,7 +9599,7 @@
               </a:defRPr>
             </a:lvl9pPr>
           </a:lstStyle>
-          <a:p xmlns:a="http://schemas.openxmlformats.org/drawingml/2006/main">
+          <a:p>
             <a:pPr>
               <a:defRPr sz="2325" b="1">
                 <a:solidFill>
@@ -9401,1199 +9626,36 @@
       </p:sp>
       <p:sp>
         <p:nvSpPr>
-          <p:cNvPr id="7" name="">
-            <a:extLst xmlns:a="http://schemas.openxmlformats.org/drawingml/2006/main">
-              <a:ext uri="{FF2B5EF4-FFF2-40B4-BE49-F238E27FC236}">
-                <a16:creationId xmlns:a16="http://schemas.microsoft.com/office/drawing/2014/main" id="{C5CA8565-3A04-4D4E-ADAD-38D707AAB86E}"/>
-              </a:ext>
-            </a:extLst>
-          </p:cNvPr>
-          <p:cNvSpPr>
-            <a:spLocks xmlns:a="http://schemas.openxmlformats.org/drawingml/2006/main" noGrp="1"/>
-          </p:cNvSpPr>
-          <p:nvPr/>
-        </p:nvSpPr>
-        <p:spPr>
-          <a:xfrm xmlns:a="http://schemas.openxmlformats.org/drawingml/2006/main">
-            <a:off x="3429000" y="4095750"/>
-            <a:ext cx="7810500" cy="1238250"/>
-          </a:xfrm>
-          <a:prstGeom xmlns:a="http://schemas.openxmlformats.org/drawingml/2006/main" prst="rect">
-            <a:avLst/>
-          </a:prstGeom>
-          <a:noFill xmlns:a="http://schemas.openxmlformats.org/drawingml/2006/main"/>
-          <a:ln xmlns:a="http://schemas.openxmlformats.org/drawingml/2006/main" w="0">
-            <a:noFill/>
-          </a:ln>
-        </p:spPr>
-        <p:txBody>
-          <a:bodyPr xmlns:a="http://schemas.openxmlformats.org/drawingml/2006/main" lIns="0" tIns="0" rIns="0" bIns="0" anchor="t">
-            <a:noAutofit/>
-          </a:bodyPr>
-          <a:lstStyle xmlns:a="http://schemas.openxmlformats.org/drawingml/2006/main">
-            <a:defPPr>
-              <a:defRPr sz="2250" b="0">
-                <a:solidFill>
-                  <a:srgbClr val="F2F5F7"/>
-                </a:solidFill>
-                <a:latin typeface="Noto Sans Display"/>
-                <a:ea typeface="Noto Sans Display"/>
-                <a:cs typeface="Noto Sans Display"/>
-              </a:defRPr>
-            </a:defPPr>
-            <a:lvl1pPr>
-              <a:defRPr sz="2250" b="0">
-                <a:solidFill>
-                  <a:srgbClr val="F2F5F7"/>
-                </a:solidFill>
-                <a:latin typeface="Noto Sans Display"/>
-                <a:ea typeface="Noto Sans Display"/>
-                <a:cs typeface="Noto Sans Display"/>
-              </a:defRPr>
-            </a:lvl1pPr>
-            <a:lvl2pPr>
-              <a:defRPr sz="2250" b="0">
-                <a:solidFill>
-                  <a:srgbClr val="F2F5F7"/>
-                </a:solidFill>
-                <a:latin typeface="Noto Sans Display"/>
-                <a:ea typeface="Noto Sans Display"/>
-                <a:cs typeface="Noto Sans Display"/>
-              </a:defRPr>
-            </a:lvl2pPr>
-            <a:lvl3pPr>
-              <a:defRPr sz="2250" b="0">
-                <a:solidFill>
-                  <a:srgbClr val="F2F5F7"/>
-                </a:solidFill>
-                <a:latin typeface="Noto Sans Display"/>
-                <a:ea typeface="Noto Sans Display"/>
-                <a:cs typeface="Noto Sans Display"/>
-              </a:defRPr>
-            </a:lvl3pPr>
-            <a:lvl4pPr>
-              <a:defRPr sz="2250" b="0">
-                <a:solidFill>
-                  <a:srgbClr val="F2F5F7"/>
-                </a:solidFill>
-                <a:latin typeface="Noto Sans Display"/>
-                <a:ea typeface="Noto Sans Display"/>
-                <a:cs typeface="Noto Sans Display"/>
-              </a:defRPr>
-            </a:lvl4pPr>
-            <a:lvl5pPr>
-              <a:defRPr sz="2250" b="0">
-                <a:solidFill>
-                  <a:srgbClr val="F2F5F7"/>
-                </a:solidFill>
-                <a:latin typeface="Noto Sans Display"/>
-                <a:ea typeface="Noto Sans Display"/>
-                <a:cs typeface="Noto Sans Display"/>
-              </a:defRPr>
-            </a:lvl5pPr>
-            <a:lvl6pPr>
-              <a:defRPr sz="2250" b="0">
-                <a:solidFill>
-                  <a:srgbClr val="F2F5F7"/>
-                </a:solidFill>
-                <a:latin typeface="Noto Sans Display"/>
-                <a:ea typeface="Noto Sans Display"/>
-                <a:cs typeface="Noto Sans Display"/>
-              </a:defRPr>
-            </a:lvl6pPr>
-            <a:lvl7pPr>
-              <a:defRPr sz="2250" b="0">
-                <a:solidFill>
-                  <a:srgbClr val="F2F5F7"/>
-                </a:solidFill>
-                <a:latin typeface="Noto Sans Display"/>
-                <a:ea typeface="Noto Sans Display"/>
-                <a:cs typeface="Noto Sans Display"/>
-              </a:defRPr>
-            </a:lvl7pPr>
-            <a:lvl8pPr>
-              <a:defRPr sz="2250" b="0">
-                <a:solidFill>
-                  <a:srgbClr val="F2F5F7"/>
-                </a:solidFill>
-                <a:latin typeface="Noto Sans Display"/>
-                <a:ea typeface="Noto Sans Display"/>
-                <a:cs typeface="Noto Sans Display"/>
-              </a:defRPr>
-            </a:lvl8pPr>
-            <a:lvl9pPr>
-              <a:defRPr sz="2250" b="0">
-                <a:solidFill>
-                  <a:srgbClr val="F2F5F7"/>
-                </a:solidFill>
-                <a:latin typeface="Noto Sans Display"/>
-                <a:ea typeface="Noto Sans Display"/>
-                <a:cs typeface="Noto Sans Display"/>
-              </a:defRPr>
-            </a:lvl9pPr>
-          </a:lstStyle>
-          <a:p xmlns:a="http://schemas.openxmlformats.org/drawingml/2006/main">
-            <a:pPr>
-              <a:defRPr sz="2250" b="0">
-                <a:solidFill>
-                  <a:srgbClr val="F2F5F7"/>
-                </a:solidFill>
-                <a:latin typeface="Noto Sans Display"/>
-                <a:ea typeface="Noto Sans Display"/>
-                <a:cs typeface="Noto Sans Display"/>
-              </a:defRPr>
-            </a:pPr>
-            <a:r>
-              <a:rPr sz="2250" b="0">
-                <a:solidFill>
-                  <a:srgbClr val="F2F5F7"/>
-                </a:solidFill>
-                <a:latin typeface="Noto Sans Display"/>
-                <a:ea typeface="Noto Sans Display"/>
-                <a:cs typeface="Noto Sans Display"/>
-              </a:rPr>
-              <a:t>Сначала 10-accounts.sh, затем 20-layout.sh и 30-access.sh. Проверяем группы через getent.</a:t>
-            </a:r>
-          </a:p>
-        </p:txBody>
-      </p:sp>
-      <p:sp>
-        <p:nvSpPr>
-          <p:cNvPr id="8" name="">
-            <a:extLst xmlns:a="http://schemas.openxmlformats.org/drawingml/2006/main">
-              <a:ext uri="{FF2B5EF4-FFF2-40B4-BE49-F238E27FC236}">
-                <a16:creationId xmlns:a16="http://schemas.microsoft.com/office/drawing/2014/main" id="{529016E4-4AC3-41D6-8201-A37D028DFB28}"/>
-              </a:ext>
-            </a:extLst>
-          </p:cNvPr>
-          <p:cNvSpPr>
-            <a:spLocks xmlns:a="http://schemas.openxmlformats.org/drawingml/2006/main" noGrp="1"/>
-          </p:cNvSpPr>
-          <p:nvPr/>
-        </p:nvSpPr>
-        <p:spPr>
-          <a:xfrm xmlns:a="http://schemas.openxmlformats.org/drawingml/2006/main">
-            <a:off x="647700" y="5762625"/>
-            <a:ext cx="10668000" cy="476250"/>
-          </a:xfrm>
-          <a:prstGeom xmlns:a="http://schemas.openxmlformats.org/drawingml/2006/main" prst="rect">
-            <a:avLst/>
-          </a:prstGeom>
-          <a:noFill xmlns:a="http://schemas.openxmlformats.org/drawingml/2006/main"/>
-          <a:ln xmlns:a="http://schemas.openxmlformats.org/drawingml/2006/main" w="0">
-            <a:noFill/>
-          </a:ln>
-        </p:spPr>
-        <p:txBody>
-          <a:bodyPr xmlns:a="http://schemas.openxmlformats.org/drawingml/2006/main" lIns="0" tIns="0" rIns="0" bIns="0" anchor="t">
-            <a:noAutofit/>
-          </a:bodyPr>
-          <a:lstStyle xmlns:a="http://schemas.openxmlformats.org/drawingml/2006/main">
-            <a:defPPr>
-              <a:defRPr sz="1950" b="0">
-                <a:solidFill>
-                  <a:srgbClr val="B7C6D4"/>
-                </a:solidFill>
-                <a:latin typeface="Noto Sans Display"/>
-                <a:ea typeface="Noto Sans Display"/>
-                <a:cs typeface="Noto Sans Display"/>
-              </a:defRPr>
-            </a:defPPr>
-            <a:lvl1pPr>
-              <a:defRPr sz="1950" b="0">
-                <a:solidFill>
-                  <a:srgbClr val="B7C6D4"/>
-                </a:solidFill>
-                <a:latin typeface="Noto Sans Display"/>
-                <a:ea typeface="Noto Sans Display"/>
-                <a:cs typeface="Noto Sans Display"/>
-              </a:defRPr>
-            </a:lvl1pPr>
-            <a:lvl2pPr>
-              <a:defRPr sz="1950" b="0">
-                <a:solidFill>
-                  <a:srgbClr val="B7C6D4"/>
-                </a:solidFill>
-                <a:latin typeface="Noto Sans Display"/>
-                <a:ea typeface="Noto Sans Display"/>
-                <a:cs typeface="Noto Sans Display"/>
-              </a:defRPr>
-            </a:lvl2pPr>
-            <a:lvl3pPr>
-              <a:defRPr sz="1950" b="0">
-                <a:solidFill>
-                  <a:srgbClr val="B7C6D4"/>
-                </a:solidFill>
-                <a:latin typeface="Noto Sans Display"/>
-                <a:ea typeface="Noto Sans Display"/>
-                <a:cs typeface="Noto Sans Display"/>
-              </a:defRPr>
-            </a:lvl3pPr>
-            <a:lvl4pPr>
-              <a:defRPr sz="1950" b="0">
-                <a:solidFill>
-                  <a:srgbClr val="B7C6D4"/>
-                </a:solidFill>
-                <a:latin typeface="Noto Sans Display"/>
-                <a:ea typeface="Noto Sans Display"/>
-                <a:cs typeface="Noto Sans Display"/>
-              </a:defRPr>
-            </a:lvl4pPr>
-            <a:lvl5pPr>
-              <a:defRPr sz="1950" b="0">
-                <a:solidFill>
-                  <a:srgbClr val="B7C6D4"/>
-                </a:solidFill>
-                <a:latin typeface="Noto Sans Display"/>
-                <a:ea typeface="Noto Sans Display"/>
-                <a:cs typeface="Noto Sans Display"/>
-              </a:defRPr>
-            </a:lvl5pPr>
-            <a:lvl6pPr>
-              <a:defRPr sz="1950" b="0">
-                <a:solidFill>
-                  <a:srgbClr val="B7C6D4"/>
-                </a:solidFill>
-                <a:latin typeface="Noto Sans Display"/>
-                <a:ea typeface="Noto Sans Display"/>
-                <a:cs typeface="Noto Sans Display"/>
-              </a:defRPr>
-            </a:lvl6pPr>
-            <a:lvl7pPr>
-              <a:defRPr sz="1950" b="0">
-                <a:solidFill>
-                  <a:srgbClr val="B7C6D4"/>
-                </a:solidFill>
-                <a:latin typeface="Noto Sans Display"/>
-                <a:ea typeface="Noto Sans Display"/>
-                <a:cs typeface="Noto Sans Display"/>
-              </a:defRPr>
-            </a:lvl7pPr>
-            <a:lvl8pPr>
-              <a:defRPr sz="1950" b="0">
-                <a:solidFill>
-                  <a:srgbClr val="B7C6D4"/>
-                </a:solidFill>
-                <a:latin typeface="Noto Sans Display"/>
-                <a:ea typeface="Noto Sans Display"/>
-                <a:cs typeface="Noto Sans Display"/>
-              </a:defRPr>
-            </a:lvl8pPr>
-            <a:lvl9pPr>
-              <a:defRPr sz="1950" b="0">
-                <a:solidFill>
-                  <a:srgbClr val="B7C6D4"/>
-                </a:solidFill>
-                <a:latin typeface="Noto Sans Display"/>
-                <a:ea typeface="Noto Sans Display"/>
-                <a:cs typeface="Noto Sans Display"/>
-              </a:defRPr>
-            </a:lvl9pPr>
-          </a:lstStyle>
-          <a:p xmlns:a="http://schemas.openxmlformats.org/drawingml/2006/main">
-            <a:pPr>
-              <a:defRPr sz="1950" b="0">
-                <a:solidFill>
-                  <a:srgbClr val="B7C6D4"/>
-                </a:solidFill>
-                <a:latin typeface="Noto Sans Display"/>
-                <a:ea typeface="Noto Sans Display"/>
-                <a:cs typeface="Noto Sans Display"/>
-              </a:defRPr>
-            </a:pPr>
-            <a:r>
-              <a:rPr sz="1950" b="0">
-                <a:solidFill>
-                  <a:srgbClr val="B7C6D4"/>
-                </a:solidFill>
-                <a:latin typeface="Noto Sans Display"/>
-                <a:ea typeface="Noto Sans Display"/>
-                <a:cs typeface="Noto Sans Display"/>
-              </a:rPr>
-              <a:t>Цепочка с &amp;&amp; останавливает выполнение при первой ошибке</a:t>
-            </a:r>
-          </a:p>
-        </p:txBody>
-      </p:sp>
-    </p:spTree>
-    <p:extLst>
-      <p:ext uri="{BB962C8B-B14F-4D97-AF65-F5344CB8AC3E}">
-        <p14:creationId xmlns:p14="http://schemas.microsoft.com/office/powerpoint/2010/main" val="1257361612"/>
-      </p:ext>
-    </p:extLst>
-  </p:cSld>
-</p:sld>
-</file>
-
-<file path=ppt/slides/slide6.xml><?xml version="1.0" encoding="utf-8"?>
-<p:sld xmlns:p="http://schemas.openxmlformats.org/presentationml/2006/main">
-  <p:cSld>
-    <p:bg>
-      <p:bgPr>
-        <a:solidFill xmlns:a="http://schemas.openxmlformats.org/drawingml/2006/main">
-          <a:srgbClr val="101C2B"/>
-        </a:solidFill>
-      </p:bgPr>
-    </p:bg>
-    <p:spTree>
-      <p:nvGrpSpPr>
-        <p:cNvPr id="1" name=""/>
-        <p:cNvGrpSpPr/>
-        <p:nvPr/>
-      </p:nvGrpSpPr>
-      <p:grpSpPr>
-        <a:xfrm xmlns:a="http://schemas.openxmlformats.org/drawingml/2006/main"/>
-      </p:grpSpPr>
-      <p:sp>
-        <p:nvSpPr>
-          <p:cNvPr id="8" name="">
-            <a:extLst xmlns:a="http://schemas.openxmlformats.org/drawingml/2006/main">
-              <a:ext uri="{FF2B5EF4-FFF2-40B4-BE49-F238E27FC236}">
-                <a16:creationId xmlns:a16="http://schemas.microsoft.com/office/drawing/2014/main" id="{E7794B3E-1974-4A53-8801-D5AA296EAFD0}"/>
-              </a:ext>
-            </a:extLst>
-          </p:cNvPr>
-          <p:cNvSpPr>
-            <a:spLocks xmlns:a="http://schemas.openxmlformats.org/drawingml/2006/main" noGrp="1"/>
-          </p:cNvSpPr>
-          <p:nvPr/>
-        </p:nvSpPr>
-        <p:spPr>
-          <a:xfrm xmlns:a="http://schemas.openxmlformats.org/drawingml/2006/main">
-            <a:off x="647700" y="552450"/>
-            <a:ext cx="10858500" cy="876300"/>
-          </a:xfrm>
-          <a:prstGeom xmlns:a="http://schemas.openxmlformats.org/drawingml/2006/main" prst="rect">
-            <a:avLst/>
-          </a:prstGeom>
-          <a:noFill xmlns:a="http://schemas.openxmlformats.org/drawingml/2006/main"/>
-          <a:ln xmlns:a="http://schemas.openxmlformats.org/drawingml/2006/main" w="0">
-            <a:noFill/>
-          </a:ln>
-        </p:spPr>
-        <p:txBody>
-          <a:bodyPr xmlns:a="http://schemas.openxmlformats.org/drawingml/2006/main" lIns="0" tIns="0" rIns="0" bIns="0" anchor="t">
-            <a:noAutofit/>
-          </a:bodyPr>
-          <a:lstStyle xmlns:a="http://schemas.openxmlformats.org/drawingml/2006/main">
-            <a:defPPr>
-              <a:defRPr sz="3300" b="1">
-                <a:solidFill>
-                  <a:srgbClr val="F2F5F7"/>
-                </a:solidFill>
-                <a:latin typeface="Noto Sans Display"/>
-                <a:ea typeface="Noto Sans Display"/>
-                <a:cs typeface="Noto Sans Display"/>
-              </a:defRPr>
-            </a:defPPr>
-            <a:lvl1pPr>
-              <a:defRPr sz="3300" b="1">
-                <a:solidFill>
-                  <a:srgbClr val="F2F5F7"/>
-                </a:solidFill>
-                <a:latin typeface="Noto Sans Display"/>
-                <a:ea typeface="Noto Sans Display"/>
-                <a:cs typeface="Noto Sans Display"/>
-              </a:defRPr>
-            </a:lvl1pPr>
-            <a:lvl2pPr>
-              <a:defRPr sz="3300" b="1">
-                <a:solidFill>
-                  <a:srgbClr val="F2F5F7"/>
-                </a:solidFill>
-                <a:latin typeface="Noto Sans Display"/>
-                <a:ea typeface="Noto Sans Display"/>
-                <a:cs typeface="Noto Sans Display"/>
-              </a:defRPr>
-            </a:lvl2pPr>
-            <a:lvl3pPr>
-              <a:defRPr sz="3300" b="1">
-                <a:solidFill>
-                  <a:srgbClr val="F2F5F7"/>
-                </a:solidFill>
-                <a:latin typeface="Noto Sans Display"/>
-                <a:ea typeface="Noto Sans Display"/>
-                <a:cs typeface="Noto Sans Display"/>
-              </a:defRPr>
-            </a:lvl3pPr>
-            <a:lvl4pPr>
-              <a:defRPr sz="3300" b="1">
-                <a:solidFill>
-                  <a:srgbClr val="F2F5F7"/>
-                </a:solidFill>
-                <a:latin typeface="Noto Sans Display"/>
-                <a:ea typeface="Noto Sans Display"/>
-                <a:cs typeface="Noto Sans Display"/>
-              </a:defRPr>
-            </a:lvl4pPr>
-            <a:lvl5pPr>
-              <a:defRPr sz="3300" b="1">
-                <a:solidFill>
-                  <a:srgbClr val="F2F5F7"/>
-                </a:solidFill>
-                <a:latin typeface="Noto Sans Display"/>
-                <a:ea typeface="Noto Sans Display"/>
-                <a:cs typeface="Noto Sans Display"/>
-              </a:defRPr>
-            </a:lvl5pPr>
-            <a:lvl6pPr>
-              <a:defRPr sz="3300" b="1">
-                <a:solidFill>
-                  <a:srgbClr val="F2F5F7"/>
-                </a:solidFill>
-                <a:latin typeface="Noto Sans Display"/>
-                <a:ea typeface="Noto Sans Display"/>
-                <a:cs typeface="Noto Sans Display"/>
-              </a:defRPr>
-            </a:lvl6pPr>
-            <a:lvl7pPr>
-              <a:defRPr sz="3300" b="1">
-                <a:solidFill>
-                  <a:srgbClr val="F2F5F7"/>
-                </a:solidFill>
-                <a:latin typeface="Noto Sans Display"/>
-                <a:ea typeface="Noto Sans Display"/>
-                <a:cs typeface="Noto Sans Display"/>
-              </a:defRPr>
-            </a:lvl7pPr>
-            <a:lvl8pPr>
-              <a:defRPr sz="3300" b="1">
-                <a:solidFill>
-                  <a:srgbClr val="F2F5F7"/>
-                </a:solidFill>
-                <a:latin typeface="Noto Sans Display"/>
-                <a:ea typeface="Noto Sans Display"/>
-                <a:cs typeface="Noto Sans Display"/>
-              </a:defRPr>
-            </a:lvl8pPr>
-            <a:lvl9pPr>
-              <a:defRPr sz="3300" b="1">
-                <a:solidFill>
-                  <a:srgbClr val="F2F5F7"/>
-                </a:solidFill>
-                <a:latin typeface="Noto Sans Display"/>
-                <a:ea typeface="Noto Sans Display"/>
-                <a:cs typeface="Noto Sans Display"/>
-              </a:defRPr>
-            </a:lvl9pPr>
-          </a:lstStyle>
-          <a:p xmlns:a="http://schemas.openxmlformats.org/drawingml/2006/main">
-            <a:pPr>
-              <a:defRPr sz="3300" b="1">
-                <a:solidFill>
-                  <a:srgbClr val="F2F5F7"/>
-                </a:solidFill>
-                <a:latin typeface="Noto Sans Display"/>
-                <a:ea typeface="Noto Sans Display"/>
-                <a:cs typeface="Noto Sans Display"/>
-              </a:defRPr>
-            </a:pPr>
-            <a:r>
-              <a:rPr sz="3300" b="1">
-                <a:solidFill>
-                  <a:srgbClr val="F2F5F7"/>
-                </a:solidFill>
-                <a:latin typeface="Noto Sans Display"/>
-                <a:ea typeface="Noto Sans Display"/>
-                <a:cs typeface="Noto Sans Display"/>
-              </a:rPr>
-              <a:t>Проблема: старая версия ещё работает</a:t>
-            </a:r>
-          </a:p>
-        </p:txBody>
-      </p:sp>
-      <p:sp>
-        <p:nvSpPr>
-          <p:cNvPr id="2" name="">
-            <a:extLst xmlns:a="http://schemas.openxmlformats.org/drawingml/2006/main">
-              <a:ext uri="{FF2B5EF4-FFF2-40B4-BE49-F238E27FC236}">
-                <a16:creationId xmlns:a16="http://schemas.microsoft.com/office/drawing/2014/main" id="{2EF919F8-A485-4489-BF05-8C62E26F64F0}"/>
-              </a:ext>
-            </a:extLst>
-          </p:cNvPr>
-          <p:cNvSpPr>
-            <a:spLocks xmlns:a="http://schemas.openxmlformats.org/drawingml/2006/main" noGrp="1"/>
-          </p:cNvSpPr>
-          <p:nvPr/>
-        </p:nvSpPr>
-        <p:spPr>
-          <a:xfrm xmlns:a="http://schemas.openxmlformats.org/drawingml/2006/main">
-            <a:off x="11125200" y="6334125"/>
-            <a:ext cx="476250" cy="266700"/>
-          </a:xfrm>
-          <a:prstGeom xmlns:a="http://schemas.openxmlformats.org/drawingml/2006/main" prst="rect">
-            <a:avLst/>
-          </a:prstGeom>
-          <a:noFill xmlns:a="http://schemas.openxmlformats.org/drawingml/2006/main"/>
-          <a:ln xmlns:a="http://schemas.openxmlformats.org/drawingml/2006/main" w="0">
-            <a:noFill/>
-          </a:ln>
-        </p:spPr>
-        <p:txBody>
-          <a:bodyPr xmlns:a="http://schemas.openxmlformats.org/drawingml/2006/main" lIns="0" tIns="0" rIns="0" bIns="0" anchor="t">
-            <a:noAutofit/>
-          </a:bodyPr>
-          <a:lstStyle xmlns:a="http://schemas.openxmlformats.org/drawingml/2006/main">
-            <a:defPPr>
-              <a:defRPr sz="1350" b="0">
-                <a:solidFill>
-                  <a:srgbClr val="B7C6D4"/>
-                </a:solidFill>
-                <a:latin typeface="Noto Sans Display"/>
-                <a:ea typeface="Noto Sans Display"/>
-                <a:cs typeface="Noto Sans Display"/>
-              </a:defRPr>
-            </a:defPPr>
-            <a:lvl1pPr>
-              <a:defRPr sz="1350" b="0">
-                <a:solidFill>
-                  <a:srgbClr val="B7C6D4"/>
-                </a:solidFill>
-                <a:latin typeface="Noto Sans Display"/>
-                <a:ea typeface="Noto Sans Display"/>
-                <a:cs typeface="Noto Sans Display"/>
-              </a:defRPr>
-            </a:lvl1pPr>
-            <a:lvl2pPr>
-              <a:defRPr sz="1350" b="0">
-                <a:solidFill>
-                  <a:srgbClr val="B7C6D4"/>
-                </a:solidFill>
-                <a:latin typeface="Noto Sans Display"/>
-                <a:ea typeface="Noto Sans Display"/>
-                <a:cs typeface="Noto Sans Display"/>
-              </a:defRPr>
-            </a:lvl2pPr>
-            <a:lvl3pPr>
-              <a:defRPr sz="1350" b="0">
-                <a:solidFill>
-                  <a:srgbClr val="B7C6D4"/>
-                </a:solidFill>
-                <a:latin typeface="Noto Sans Display"/>
-                <a:ea typeface="Noto Sans Display"/>
-                <a:cs typeface="Noto Sans Display"/>
-              </a:defRPr>
-            </a:lvl3pPr>
-            <a:lvl4pPr>
-              <a:defRPr sz="1350" b="0">
-                <a:solidFill>
-                  <a:srgbClr val="B7C6D4"/>
-                </a:solidFill>
-                <a:latin typeface="Noto Sans Display"/>
-                <a:ea typeface="Noto Sans Display"/>
-                <a:cs typeface="Noto Sans Display"/>
-              </a:defRPr>
-            </a:lvl4pPr>
-            <a:lvl5pPr>
-              <a:defRPr sz="1350" b="0">
-                <a:solidFill>
-                  <a:srgbClr val="B7C6D4"/>
-                </a:solidFill>
-                <a:latin typeface="Noto Sans Display"/>
-                <a:ea typeface="Noto Sans Display"/>
-                <a:cs typeface="Noto Sans Display"/>
-              </a:defRPr>
-            </a:lvl5pPr>
-            <a:lvl6pPr>
-              <a:defRPr sz="1350" b="0">
-                <a:solidFill>
-                  <a:srgbClr val="B7C6D4"/>
-                </a:solidFill>
-                <a:latin typeface="Noto Sans Display"/>
-                <a:ea typeface="Noto Sans Display"/>
-                <a:cs typeface="Noto Sans Display"/>
-              </a:defRPr>
-            </a:lvl6pPr>
-            <a:lvl7pPr>
-              <a:defRPr sz="1350" b="0">
-                <a:solidFill>
-                  <a:srgbClr val="B7C6D4"/>
-                </a:solidFill>
-                <a:latin typeface="Noto Sans Display"/>
-                <a:ea typeface="Noto Sans Display"/>
-                <a:cs typeface="Noto Sans Display"/>
-              </a:defRPr>
-            </a:lvl7pPr>
-            <a:lvl8pPr>
-              <a:defRPr sz="1350" b="0">
-                <a:solidFill>
-                  <a:srgbClr val="B7C6D4"/>
-                </a:solidFill>
-                <a:latin typeface="Noto Sans Display"/>
-                <a:ea typeface="Noto Sans Display"/>
-                <a:cs typeface="Noto Sans Display"/>
-              </a:defRPr>
-            </a:lvl8pPr>
-            <a:lvl9pPr>
-              <a:defRPr sz="1350" b="0">
-                <a:solidFill>
-                  <a:srgbClr val="B7C6D4"/>
-                </a:solidFill>
-                <a:latin typeface="Noto Sans Display"/>
-                <a:ea typeface="Noto Sans Display"/>
-                <a:cs typeface="Noto Sans Display"/>
-              </a:defRPr>
-            </a:lvl9pPr>
-          </a:lstStyle>
-          <a:p xmlns:a="http://schemas.openxmlformats.org/drawingml/2006/main">
-            <a:pPr>
-              <a:defRPr sz="1350" b="0">
-                <a:solidFill>
-                  <a:srgbClr val="B7C6D4"/>
-                </a:solidFill>
-                <a:latin typeface="Noto Sans Display"/>
-                <a:ea typeface="Noto Sans Display"/>
-                <a:cs typeface="Noto Sans Display"/>
-              </a:defRPr>
-            </a:pPr>
-            <a:r>
-              <a:rPr sz="1350" b="0">
-                <a:solidFill>
-                  <a:srgbClr val="B7C6D4"/>
-                </a:solidFill>
-                <a:latin typeface="Noto Sans Display"/>
-                <a:ea typeface="Noto Sans Display"/>
-                <a:cs typeface="Noto Sans Display"/>
-              </a:rPr>
-              <a:t>06</a:t>
-            </a:r>
-          </a:p>
-        </p:txBody>
-      </p:sp>
-      <p:pic>
-        <p:nvPicPr>
-          <p:cNvPr id="3" name="">
-            <a:extLst xmlns:a="http://schemas.openxmlformats.org/drawingml/2006/main">
-              <a:ext uri="{FF2B5EF4-FFF2-40B4-BE49-F238E27FC236}">
-                <a16:creationId xmlns:a16="http://schemas.microsoft.com/office/drawing/2014/main" id="{873B1675-85FF-40A5-9E50-27AF4D83F7A3}"/>
-              </a:ext>
-            </a:extLst>
-          </p:cNvPr>
-          <p:cNvPicPr>
-            <a:picLocks xmlns:a="http://schemas.openxmlformats.org/drawingml/2006/main" noChangeAspect="1"/>
-          </p:cNvPicPr>
-          <p:nvPr/>
-        </p:nvPicPr>
-        <p:blipFill>
-          <a:blip xmlns:r="http://schemas.openxmlformats.org/officeDocument/2006/relationships" xmlns:a="http://schemas.openxmlformats.org/drawingml/2006/main" r:embed="R7a6bacaa8fb042a3"/>
-          <a:stretch xmlns:a="http://schemas.openxmlformats.org/drawingml/2006/main"/>
-        </p:blipFill>
-        <p:spPr>
-          <a:xfrm xmlns:a="http://schemas.openxmlformats.org/drawingml/2006/main">
-            <a:off x="647700" y="1657833"/>
-            <a:ext cx="10820400" cy="1808783"/>
-          </a:xfrm>
-          <a:prstGeom xmlns:a="http://schemas.openxmlformats.org/drawingml/2006/main" prst="rect">
-            <a:avLst/>
-          </a:prstGeom>
-        </p:spPr>
-      </p:pic>
-      <p:sp>
-        <p:nvSpPr>
-          <p:cNvPr id="4" name="">
-            <a:extLst xmlns:a="http://schemas.openxmlformats.org/drawingml/2006/main">
-              <a:ext uri="{FF2B5EF4-FFF2-40B4-BE49-F238E27FC236}">
-                <a16:creationId xmlns:a16="http://schemas.microsoft.com/office/drawing/2014/main" id="{1C370C35-A6F6-4722-A882-D6A0CA2294A9}"/>
-              </a:ext>
-            </a:extLst>
-          </p:cNvPr>
-          <p:cNvSpPr>
-            <a:spLocks xmlns:a="http://schemas.openxmlformats.org/drawingml/2006/main" noGrp="1"/>
-          </p:cNvSpPr>
-          <p:nvPr/>
-        </p:nvSpPr>
-        <p:spPr>
-          <a:xfrm xmlns:a="http://schemas.openxmlformats.org/drawingml/2006/main">
-            <a:off x="647700" y="3857625"/>
-            <a:ext cx="2476500" cy="476250"/>
-          </a:xfrm>
-          <a:prstGeom xmlns:a="http://schemas.openxmlformats.org/drawingml/2006/main" prst="rect">
-            <a:avLst/>
-          </a:prstGeom>
-          <a:noFill xmlns:a="http://schemas.openxmlformats.org/drawingml/2006/main"/>
-          <a:ln xmlns:a="http://schemas.openxmlformats.org/drawingml/2006/main" w="0">
-            <a:noFill/>
-          </a:ln>
-        </p:spPr>
-        <p:txBody>
-          <a:bodyPr xmlns:a="http://schemas.openxmlformats.org/drawingml/2006/main" lIns="0" tIns="0" rIns="0" bIns="0" anchor="t">
-            <a:noAutofit/>
-          </a:bodyPr>
-          <a:lstStyle xmlns:a="http://schemas.openxmlformats.org/drawingml/2006/main">
-            <a:defPPr>
-              <a:defRPr sz="2325" b="1">
-                <a:solidFill>
-                  <a:srgbClr val="5FE0BD"/>
-                </a:solidFill>
-                <a:latin typeface="Noto Sans Display"/>
-                <a:ea typeface="Noto Sans Display"/>
-                <a:cs typeface="Noto Sans Display"/>
-              </a:defRPr>
-            </a:defPPr>
-            <a:lvl1pPr>
-              <a:defRPr sz="2325" b="1">
-                <a:solidFill>
-                  <a:srgbClr val="5FE0BD"/>
-                </a:solidFill>
-                <a:latin typeface="Noto Sans Display"/>
-                <a:ea typeface="Noto Sans Display"/>
-                <a:cs typeface="Noto Sans Display"/>
-              </a:defRPr>
-            </a:lvl1pPr>
-            <a:lvl2pPr>
-              <a:defRPr sz="2325" b="1">
-                <a:solidFill>
-                  <a:srgbClr val="5FE0BD"/>
-                </a:solidFill>
-                <a:latin typeface="Noto Sans Display"/>
-                <a:ea typeface="Noto Sans Display"/>
-                <a:cs typeface="Noto Sans Display"/>
-              </a:defRPr>
-            </a:lvl2pPr>
-            <a:lvl3pPr>
-              <a:defRPr sz="2325" b="1">
-                <a:solidFill>
-                  <a:srgbClr val="5FE0BD"/>
-                </a:solidFill>
-                <a:latin typeface="Noto Sans Display"/>
-                <a:ea typeface="Noto Sans Display"/>
-                <a:cs typeface="Noto Sans Display"/>
-              </a:defRPr>
-            </a:lvl3pPr>
-            <a:lvl4pPr>
-              <a:defRPr sz="2325" b="1">
-                <a:solidFill>
-                  <a:srgbClr val="5FE0BD"/>
-                </a:solidFill>
-                <a:latin typeface="Noto Sans Display"/>
-                <a:ea typeface="Noto Sans Display"/>
-                <a:cs typeface="Noto Sans Display"/>
-              </a:defRPr>
-            </a:lvl4pPr>
-            <a:lvl5pPr>
-              <a:defRPr sz="2325" b="1">
-                <a:solidFill>
-                  <a:srgbClr val="5FE0BD"/>
-                </a:solidFill>
-                <a:latin typeface="Noto Sans Display"/>
-                <a:ea typeface="Noto Sans Display"/>
-                <a:cs typeface="Noto Sans Display"/>
-              </a:defRPr>
-            </a:lvl5pPr>
-            <a:lvl6pPr>
-              <a:defRPr sz="2325" b="1">
-                <a:solidFill>
-                  <a:srgbClr val="5FE0BD"/>
-                </a:solidFill>
-                <a:latin typeface="Noto Sans Display"/>
-                <a:ea typeface="Noto Sans Display"/>
-                <a:cs typeface="Noto Sans Display"/>
-              </a:defRPr>
-            </a:lvl6pPr>
-            <a:lvl7pPr>
-              <a:defRPr sz="2325" b="1">
-                <a:solidFill>
-                  <a:srgbClr val="5FE0BD"/>
-                </a:solidFill>
-                <a:latin typeface="Noto Sans Display"/>
-                <a:ea typeface="Noto Sans Display"/>
-                <a:cs typeface="Noto Sans Display"/>
-              </a:defRPr>
-            </a:lvl7pPr>
-            <a:lvl8pPr>
-              <a:defRPr sz="2325" b="1">
-                <a:solidFill>
-                  <a:srgbClr val="5FE0BD"/>
-                </a:solidFill>
-                <a:latin typeface="Noto Sans Display"/>
-                <a:ea typeface="Noto Sans Display"/>
-                <a:cs typeface="Noto Sans Display"/>
-              </a:defRPr>
-            </a:lvl8pPr>
-            <a:lvl9pPr>
-              <a:defRPr sz="2325" b="1">
-                <a:solidFill>
-                  <a:srgbClr val="5FE0BD"/>
-                </a:solidFill>
-                <a:latin typeface="Noto Sans Display"/>
-                <a:ea typeface="Noto Sans Display"/>
-                <a:cs typeface="Noto Sans Display"/>
-              </a:defRPr>
-            </a:lvl9pPr>
-          </a:lstStyle>
-          <a:p xmlns:a="http://schemas.openxmlformats.org/drawingml/2006/main">
-            <a:pPr>
-              <a:defRPr sz="2325" b="1">
-                <a:solidFill>
-                  <a:srgbClr val="5FE0BD"/>
-                </a:solidFill>
-                <a:latin typeface="Noto Sans Display"/>
-                <a:ea typeface="Noto Sans Display"/>
-                <a:cs typeface="Noto Sans Display"/>
-              </a:defRPr>
-            </a:pPr>
-            <a:r>
-              <a:rPr sz="2325" b="1">
-                <a:solidFill>
-                  <a:srgbClr val="5FE0BD"/>
-                </a:solidFill>
-                <a:latin typeface="Noto Sans Display"/>
-                <a:ea typeface="Noto Sans Display"/>
-                <a:cs typeface="Noto Sans Display"/>
-              </a:rPr>
-              <a:t>Причина</a:t>
-            </a:r>
-          </a:p>
-        </p:txBody>
-      </p:sp>
-      <p:sp>
-        <p:nvSpPr>
-          <p:cNvPr id="5" name="">
-            <a:extLst xmlns:a="http://schemas.openxmlformats.org/drawingml/2006/main">
-              <a:ext uri="{FF2B5EF4-FFF2-40B4-BE49-F238E27FC236}">
-                <a16:creationId xmlns:a16="http://schemas.microsoft.com/office/drawing/2014/main" id="{18ECBFAB-E30E-4C29-83C1-AF7E5CB544F0}"/>
-              </a:ext>
-            </a:extLst>
-          </p:cNvPr>
-          <p:cNvSpPr>
-            <a:spLocks xmlns:a="http://schemas.openxmlformats.org/drawingml/2006/main" noGrp="1"/>
-          </p:cNvSpPr>
-          <p:nvPr/>
-        </p:nvSpPr>
-        <p:spPr>
-          <a:xfrm xmlns:a="http://schemas.openxmlformats.org/drawingml/2006/main">
-            <a:off x="3429000" y="3857625"/>
-            <a:ext cx="7810500" cy="809625"/>
-          </a:xfrm>
-          <a:prstGeom xmlns:a="http://schemas.openxmlformats.org/drawingml/2006/main" prst="rect">
-            <a:avLst/>
-          </a:prstGeom>
-          <a:noFill xmlns:a="http://schemas.openxmlformats.org/drawingml/2006/main"/>
-          <a:ln xmlns:a="http://schemas.openxmlformats.org/drawingml/2006/main" w="0">
-            <a:noFill/>
-          </a:ln>
-        </p:spPr>
-        <p:txBody>
-          <a:bodyPr xmlns:a="http://schemas.openxmlformats.org/drawingml/2006/main" lIns="0" tIns="0" rIns="0" bIns="0" anchor="t">
-            <a:noAutofit/>
-          </a:bodyPr>
-          <a:lstStyle xmlns:a="http://schemas.openxmlformats.org/drawingml/2006/main">
-            <a:defPPr>
-              <a:defRPr sz="2175" b="0">
-                <a:solidFill>
-                  <a:srgbClr val="F2F5F7"/>
-                </a:solidFill>
-                <a:latin typeface="Noto Sans Display"/>
-                <a:ea typeface="Noto Sans Display"/>
-                <a:cs typeface="Noto Sans Display"/>
-              </a:defRPr>
-            </a:defPPr>
-            <a:lvl1pPr>
-              <a:defRPr sz="2175" b="0">
-                <a:solidFill>
-                  <a:srgbClr val="F2F5F7"/>
-                </a:solidFill>
-                <a:latin typeface="Noto Sans Display"/>
-                <a:ea typeface="Noto Sans Display"/>
-                <a:cs typeface="Noto Sans Display"/>
-              </a:defRPr>
-            </a:lvl1pPr>
-            <a:lvl2pPr>
-              <a:defRPr sz="2175" b="0">
-                <a:solidFill>
-                  <a:srgbClr val="F2F5F7"/>
-                </a:solidFill>
-                <a:latin typeface="Noto Sans Display"/>
-                <a:ea typeface="Noto Sans Display"/>
-                <a:cs typeface="Noto Sans Display"/>
-              </a:defRPr>
-            </a:lvl2pPr>
-            <a:lvl3pPr>
-              <a:defRPr sz="2175" b="0">
-                <a:solidFill>
-                  <a:srgbClr val="F2F5F7"/>
-                </a:solidFill>
-                <a:latin typeface="Noto Sans Display"/>
-                <a:ea typeface="Noto Sans Display"/>
-                <a:cs typeface="Noto Sans Display"/>
-              </a:defRPr>
-            </a:lvl3pPr>
-            <a:lvl4pPr>
-              <a:defRPr sz="2175" b="0">
-                <a:solidFill>
-                  <a:srgbClr val="F2F5F7"/>
-                </a:solidFill>
-                <a:latin typeface="Noto Sans Display"/>
-                <a:ea typeface="Noto Sans Display"/>
-                <a:cs typeface="Noto Sans Display"/>
-              </a:defRPr>
-            </a:lvl4pPr>
-            <a:lvl5pPr>
-              <a:defRPr sz="2175" b="0">
-                <a:solidFill>
-                  <a:srgbClr val="F2F5F7"/>
-                </a:solidFill>
-                <a:latin typeface="Noto Sans Display"/>
-                <a:ea typeface="Noto Sans Display"/>
-                <a:cs typeface="Noto Sans Display"/>
-              </a:defRPr>
-            </a:lvl5pPr>
-            <a:lvl6pPr>
-              <a:defRPr sz="2175" b="0">
-                <a:solidFill>
-                  <a:srgbClr val="F2F5F7"/>
-                </a:solidFill>
-                <a:latin typeface="Noto Sans Display"/>
-                <a:ea typeface="Noto Sans Display"/>
-                <a:cs typeface="Noto Sans Display"/>
-              </a:defRPr>
-            </a:lvl6pPr>
-            <a:lvl7pPr>
-              <a:defRPr sz="2175" b="0">
-                <a:solidFill>
-                  <a:srgbClr val="F2F5F7"/>
-                </a:solidFill>
-                <a:latin typeface="Noto Sans Display"/>
-                <a:ea typeface="Noto Sans Display"/>
-                <a:cs typeface="Noto Sans Display"/>
-              </a:defRPr>
-            </a:lvl7pPr>
-            <a:lvl8pPr>
-              <a:defRPr sz="2175" b="0">
-                <a:solidFill>
-                  <a:srgbClr val="F2F5F7"/>
-                </a:solidFill>
-                <a:latin typeface="Noto Sans Display"/>
-                <a:ea typeface="Noto Sans Display"/>
-                <a:cs typeface="Noto Sans Display"/>
-              </a:defRPr>
-            </a:lvl8pPr>
-            <a:lvl9pPr>
-              <a:defRPr sz="2175" b="0">
-                <a:solidFill>
-                  <a:srgbClr val="F2F5F7"/>
-                </a:solidFill>
-                <a:latin typeface="Noto Sans Display"/>
-                <a:ea typeface="Noto Sans Display"/>
-                <a:cs typeface="Noto Sans Display"/>
-              </a:defRPr>
-            </a:lvl9pPr>
-          </a:lstStyle>
-          <a:p xmlns:a="http://schemas.openxmlformats.org/drawingml/2006/main">
-            <a:pPr>
-              <a:defRPr sz="2175" b="0">
-                <a:solidFill>
-                  <a:srgbClr val="F2F5F7"/>
-                </a:solidFill>
-                <a:latin typeface="Noto Sans Display"/>
-                <a:ea typeface="Noto Sans Display"/>
-                <a:cs typeface="Noto Sans Display"/>
-              </a:defRPr>
-            </a:pPr>
-            <a:r>
-              <a:rPr sz="2175" b="0">
-                <a:solidFill>
-                  <a:srgbClr val="F2F5F7"/>
-                </a:solidFill>
-                <a:latin typeface="Noto Sans Display"/>
-                <a:ea typeface="Noto Sans Display"/>
-                <a:cs typeface="Noto Sans Display"/>
-              </a:rPr>
-              <a:t>Версия 2.4.1 обнаружила процесс 2.3 и отказалась запускаться.</a:t>
-            </a:r>
-          </a:p>
-        </p:txBody>
-      </p:sp>
-      <p:sp>
-        <p:nvSpPr>
-          <p:cNvPr id="6" name="">
-            <a:extLst xmlns:a="http://schemas.openxmlformats.org/drawingml/2006/main">
-              <a:ext uri="{FF2B5EF4-FFF2-40B4-BE49-F238E27FC236}">
-                <a16:creationId xmlns:a16="http://schemas.microsoft.com/office/drawing/2014/main" id="{ED0561B3-4175-4C84-8A46-3441E607E240}"/>
-              </a:ext>
-            </a:extLst>
-          </p:cNvPr>
-          <p:cNvSpPr>
-            <a:spLocks xmlns:a="http://schemas.openxmlformats.org/drawingml/2006/main" noGrp="1"/>
-          </p:cNvSpPr>
-          <p:nvPr/>
-        </p:nvSpPr>
-        <p:spPr>
-          <a:xfrm xmlns:a="http://schemas.openxmlformats.org/drawingml/2006/main">
-            <a:off x="647700" y="4972050"/>
-            <a:ext cx="2476500" cy="476250"/>
-          </a:xfrm>
-          <a:prstGeom xmlns:a="http://schemas.openxmlformats.org/drawingml/2006/main" prst="rect">
-            <a:avLst/>
-          </a:prstGeom>
-          <a:noFill xmlns:a="http://schemas.openxmlformats.org/drawingml/2006/main"/>
-          <a:ln xmlns:a="http://schemas.openxmlformats.org/drawingml/2006/main" w="0">
-            <a:noFill/>
-          </a:ln>
-        </p:spPr>
-        <p:txBody>
-          <a:bodyPr xmlns:a="http://schemas.openxmlformats.org/drawingml/2006/main" lIns="0" tIns="0" rIns="0" bIns="0" anchor="t">
-            <a:noAutofit/>
-          </a:bodyPr>
-          <a:lstStyle xmlns:a="http://schemas.openxmlformats.org/drawingml/2006/main">
-            <a:defPPr>
-              <a:defRPr sz="2325" b="1">
-                <a:solidFill>
-                  <a:srgbClr val="5FE0BD"/>
-                </a:solidFill>
-                <a:latin typeface="Noto Sans Display"/>
-                <a:ea typeface="Noto Sans Display"/>
-                <a:cs typeface="Noto Sans Display"/>
-              </a:defRPr>
-            </a:defPPr>
-            <a:lvl1pPr>
-              <a:defRPr sz="2325" b="1">
-                <a:solidFill>
-                  <a:srgbClr val="5FE0BD"/>
-                </a:solidFill>
-                <a:latin typeface="Noto Sans Display"/>
-                <a:ea typeface="Noto Sans Display"/>
-                <a:cs typeface="Noto Sans Display"/>
-              </a:defRPr>
-            </a:lvl1pPr>
-            <a:lvl2pPr>
-              <a:defRPr sz="2325" b="1">
-                <a:solidFill>
-                  <a:srgbClr val="5FE0BD"/>
-                </a:solidFill>
-                <a:latin typeface="Noto Sans Display"/>
-                <a:ea typeface="Noto Sans Display"/>
-                <a:cs typeface="Noto Sans Display"/>
-              </a:defRPr>
-            </a:lvl2pPr>
-            <a:lvl3pPr>
-              <a:defRPr sz="2325" b="1">
-                <a:solidFill>
-                  <a:srgbClr val="5FE0BD"/>
-                </a:solidFill>
-                <a:latin typeface="Noto Sans Display"/>
-                <a:ea typeface="Noto Sans Display"/>
-                <a:cs typeface="Noto Sans Display"/>
-              </a:defRPr>
-            </a:lvl3pPr>
-            <a:lvl4pPr>
-              <a:defRPr sz="2325" b="1">
-                <a:solidFill>
-                  <a:srgbClr val="5FE0BD"/>
-                </a:solidFill>
-                <a:latin typeface="Noto Sans Display"/>
-                <a:ea typeface="Noto Sans Display"/>
-                <a:cs typeface="Noto Sans Display"/>
-              </a:defRPr>
-            </a:lvl4pPr>
-            <a:lvl5pPr>
-              <a:defRPr sz="2325" b="1">
-                <a:solidFill>
-                  <a:srgbClr val="5FE0BD"/>
-                </a:solidFill>
-                <a:latin typeface="Noto Sans Display"/>
-                <a:ea typeface="Noto Sans Display"/>
-                <a:cs typeface="Noto Sans Display"/>
-              </a:defRPr>
-            </a:lvl5pPr>
-            <a:lvl6pPr>
-              <a:defRPr sz="2325" b="1">
-                <a:solidFill>
-                  <a:srgbClr val="5FE0BD"/>
-                </a:solidFill>
-                <a:latin typeface="Noto Sans Display"/>
-                <a:ea typeface="Noto Sans Display"/>
-                <a:cs typeface="Noto Sans Display"/>
-              </a:defRPr>
-            </a:lvl6pPr>
-            <a:lvl7pPr>
-              <a:defRPr sz="2325" b="1">
-                <a:solidFill>
-                  <a:srgbClr val="5FE0BD"/>
-                </a:solidFill>
-                <a:latin typeface="Noto Sans Display"/>
-                <a:ea typeface="Noto Sans Display"/>
-                <a:cs typeface="Noto Sans Display"/>
-              </a:defRPr>
-            </a:lvl7pPr>
-            <a:lvl8pPr>
-              <a:defRPr sz="2325" b="1">
-                <a:solidFill>
-                  <a:srgbClr val="5FE0BD"/>
-                </a:solidFill>
-                <a:latin typeface="Noto Sans Display"/>
-                <a:ea typeface="Noto Sans Display"/>
-                <a:cs typeface="Noto Sans Display"/>
-              </a:defRPr>
-            </a:lvl8pPr>
-            <a:lvl9pPr>
-              <a:defRPr sz="2325" b="1">
-                <a:solidFill>
-                  <a:srgbClr val="5FE0BD"/>
-                </a:solidFill>
-                <a:latin typeface="Noto Sans Display"/>
-                <a:ea typeface="Noto Sans Display"/>
-                <a:cs typeface="Noto Sans Display"/>
-              </a:defRPr>
-            </a:lvl9pPr>
-          </a:lstStyle>
-          <a:p xmlns:a="http://schemas.openxmlformats.org/drawingml/2006/main">
-            <a:pPr>
-              <a:defRPr sz="2325" b="1">
-                <a:solidFill>
-                  <a:srgbClr val="5FE0BD"/>
-                </a:solidFill>
-                <a:latin typeface="Noto Sans Display"/>
-                <a:ea typeface="Noto Sans Display"/>
-                <a:cs typeface="Noto Sans Display"/>
-              </a:defRPr>
-            </a:pPr>
-            <a:r>
-              <a:rPr sz="2325" b="1">
-                <a:solidFill>
-                  <a:srgbClr val="5FE0BD"/>
-                </a:solidFill>
-                <a:latin typeface="Noto Sans Display"/>
-                <a:ea typeface="Noto Sans Display"/>
-                <a:cs typeface="Noto Sans Display"/>
-              </a:rPr>
-              <a:t>Решение</a:t>
-            </a:r>
-          </a:p>
-        </p:txBody>
-      </p:sp>
-      <p:sp>
-        <p:nvSpPr>
-          <p:cNvPr id="7" name="">
-            <a:extLst xmlns:a="http://schemas.openxmlformats.org/drawingml/2006/main">
+          <p:cNvPr id="7" name="Прямоугольник 6">
+            <a:extLst>
               <a:ext uri="{FF2B5EF4-FFF2-40B4-BE49-F238E27FC236}">
                 <a16:creationId xmlns:a16="http://schemas.microsoft.com/office/drawing/2014/main" id="{B5E5901B-D90F-4400-8F9E-23153A9807A1}"/>
               </a:ext>
             </a:extLst>
           </p:cNvPr>
           <p:cNvSpPr>
-            <a:spLocks xmlns:a="http://schemas.openxmlformats.org/drawingml/2006/main" noGrp="1"/>
+            <a:spLocks noGrp="1"/>
           </p:cNvSpPr>
           <p:nvPr/>
         </p:nvSpPr>
         <p:spPr>
-          <a:xfrm xmlns:a="http://schemas.openxmlformats.org/drawingml/2006/main">
+          <a:xfrm>
             <a:off x="3429000" y="4972050"/>
             <a:ext cx="7810500" cy="1143000"/>
           </a:xfrm>
-          <a:prstGeom xmlns:a="http://schemas.openxmlformats.org/drawingml/2006/main" prst="rect">
+          <a:prstGeom prst="rect">
             <a:avLst/>
           </a:prstGeom>
-          <a:noFill xmlns:a="http://schemas.openxmlformats.org/drawingml/2006/main"/>
-          <a:ln xmlns:a="http://schemas.openxmlformats.org/drawingml/2006/main" w="0">
+          <a:noFill/>
+          <a:ln w="0">
             <a:noFill/>
           </a:ln>
         </p:spPr>
         <p:txBody>
-          <a:bodyPr xmlns:a="http://schemas.openxmlformats.org/drawingml/2006/main" lIns="0" tIns="0" rIns="0" bIns="0" anchor="t">
+          <a:bodyPr lIns="0" tIns="0" rIns="0" bIns="0" anchor="t">
             <a:noAutofit/>
           </a:bodyPr>
-          <a:lstStyle xmlns:a="http://schemas.openxmlformats.org/drawingml/2006/main">
+          <a:lstStyle>
             <a:defPPr>
               <a:defRPr sz="2175" b="0">
                 <a:solidFill>
@@ -10695,7 +9757,7 @@
               </a:defRPr>
             </a:lvl9pPr>
           </a:lstStyle>
-          <a:p xmlns:a="http://schemas.openxmlformats.org/drawingml/2006/main">
+          <a:p>
             <a:pPr>
               <a:defRPr sz="2175" b="0">
                 <a:solidFill>
@@ -10727,17 +9789,21 @@
       </p:ext>
     </p:extLst>
   </p:cSld>
+  <p:clrMapOvr>
+    <a:masterClrMapping/>
+  </p:clrMapOvr>
 </p:sld>
 </file>
 
 <file path=ppt/slides/slide7.xml><?xml version="1.0" encoding="utf-8"?>
-<p:sld xmlns:p="http://schemas.openxmlformats.org/presentationml/2006/main">
+<p:sld xmlns:a="http://schemas.openxmlformats.org/drawingml/2006/main" xmlns:r="http://schemas.openxmlformats.org/officeDocument/2006/relationships" xmlns:p="http://schemas.openxmlformats.org/presentationml/2006/main">
   <p:cSld>
     <p:bg>
       <p:bgPr>
-        <a:solidFill xmlns:a="http://schemas.openxmlformats.org/drawingml/2006/main">
+        <a:solidFill>
           <a:srgbClr val="101C2B"/>
         </a:solidFill>
+        <a:effectLst/>
       </p:bgPr>
     </p:bg>
     <p:spTree>
@@ -10747,40 +9813,45 @@
         <p:nvPr/>
       </p:nvGrpSpPr>
       <p:grpSpPr>
-        <a:xfrm xmlns:a="http://schemas.openxmlformats.org/drawingml/2006/main"/>
+        <a:xfrm>
+          <a:off x="0" y="0"/>
+          <a:ext cx="0" cy="0"/>
+          <a:chOff x="0" y="0"/>
+          <a:chExt cx="0" cy="0"/>
+        </a:xfrm>
       </p:grpSpPr>
       <p:sp>
         <p:nvSpPr>
-          <p:cNvPr id="7" name="">
-            <a:extLst xmlns:a="http://schemas.openxmlformats.org/drawingml/2006/main">
+          <p:cNvPr id="7" name="Прямоугольник 6">
+            <a:extLst>
               <a:ext uri="{FF2B5EF4-FFF2-40B4-BE49-F238E27FC236}">
                 <a16:creationId xmlns:a16="http://schemas.microsoft.com/office/drawing/2014/main" id="{36C6F45B-C0A5-4F5B-BA37-BF5606F456EE}"/>
               </a:ext>
             </a:extLst>
           </p:cNvPr>
           <p:cNvSpPr>
-            <a:spLocks xmlns:a="http://schemas.openxmlformats.org/drawingml/2006/main" noGrp="1"/>
+            <a:spLocks noGrp="1"/>
           </p:cNvSpPr>
           <p:nvPr/>
         </p:nvSpPr>
         <p:spPr>
-          <a:xfrm xmlns:a="http://schemas.openxmlformats.org/drawingml/2006/main">
+          <a:xfrm>
             <a:off x="647700" y="552450"/>
             <a:ext cx="10858500" cy="876300"/>
           </a:xfrm>
-          <a:prstGeom xmlns:a="http://schemas.openxmlformats.org/drawingml/2006/main" prst="rect">
+          <a:prstGeom prst="rect">
             <a:avLst/>
           </a:prstGeom>
-          <a:noFill xmlns:a="http://schemas.openxmlformats.org/drawingml/2006/main"/>
-          <a:ln xmlns:a="http://schemas.openxmlformats.org/drawingml/2006/main" w="0">
+          <a:noFill/>
+          <a:ln w="0">
             <a:noFill/>
           </a:ln>
         </p:spPr>
         <p:txBody>
-          <a:bodyPr xmlns:a="http://schemas.openxmlformats.org/drawingml/2006/main" lIns="0" tIns="0" rIns="0" bIns="0" anchor="t">
+          <a:bodyPr lIns="0" tIns="0" rIns="0" bIns="0" anchor="t">
             <a:noAutofit/>
           </a:bodyPr>
-          <a:lstStyle xmlns:a="http://schemas.openxmlformats.org/drawingml/2006/main">
+          <a:lstStyle>
             <a:defPPr>
               <a:defRPr sz="3300" b="1">
                 <a:solidFill>
@@ -10882,7 +9953,7 @@
               </a:defRPr>
             </a:lvl9pPr>
           </a:lstStyle>
-          <a:p xmlns:a="http://schemas.openxmlformats.org/drawingml/2006/main">
+          <a:p>
             <a:pPr>
               <a:defRPr sz="3300" b="1">
                 <a:solidFill>
@@ -10909,36 +9980,36 @@
       </p:sp>
       <p:sp>
         <p:nvSpPr>
-          <p:cNvPr id="2" name="">
-            <a:extLst xmlns:a="http://schemas.openxmlformats.org/drawingml/2006/main">
+          <p:cNvPr id="2" name="Прямоугольник 1">
+            <a:extLst>
               <a:ext uri="{FF2B5EF4-FFF2-40B4-BE49-F238E27FC236}">
                 <a16:creationId xmlns:a16="http://schemas.microsoft.com/office/drawing/2014/main" id="{57F1888D-3BAD-4B57-9FE1-71A92B85D34F}"/>
               </a:ext>
             </a:extLst>
           </p:cNvPr>
           <p:cNvSpPr>
-            <a:spLocks xmlns:a="http://schemas.openxmlformats.org/drawingml/2006/main" noGrp="1"/>
+            <a:spLocks noGrp="1"/>
           </p:cNvSpPr>
           <p:nvPr/>
         </p:nvSpPr>
         <p:spPr>
-          <a:xfrm xmlns:a="http://schemas.openxmlformats.org/drawingml/2006/main">
+          <a:xfrm>
             <a:off x="11125200" y="6334125"/>
             <a:ext cx="476250" cy="266700"/>
           </a:xfrm>
-          <a:prstGeom xmlns:a="http://schemas.openxmlformats.org/drawingml/2006/main" prst="rect">
+          <a:prstGeom prst="rect">
             <a:avLst/>
           </a:prstGeom>
-          <a:noFill xmlns:a="http://schemas.openxmlformats.org/drawingml/2006/main"/>
-          <a:ln xmlns:a="http://schemas.openxmlformats.org/drawingml/2006/main" w="0">
+          <a:noFill/>
+          <a:ln w="0">
             <a:noFill/>
           </a:ln>
         </p:spPr>
         <p:txBody>
-          <a:bodyPr xmlns:a="http://schemas.openxmlformats.org/drawingml/2006/main" lIns="0" tIns="0" rIns="0" bIns="0" anchor="t">
+          <a:bodyPr lIns="0" tIns="0" rIns="0" bIns="0" anchor="t">
             <a:noAutofit/>
           </a:bodyPr>
-          <a:lstStyle xmlns:a="http://schemas.openxmlformats.org/drawingml/2006/main">
+          <a:lstStyle>
             <a:defPPr>
               <a:defRPr sz="1350" b="0">
                 <a:solidFill>
@@ -11040,7 +10111,7 @@
               </a:defRPr>
             </a:lvl9pPr>
           </a:lstStyle>
-          <a:p xmlns:a="http://schemas.openxmlformats.org/drawingml/2006/main">
+          <a:p>
             <a:pPr>
               <a:defRPr sz="1350" b="0">
                 <a:solidFill>
@@ -11067,36 +10138,36 @@
       </p:sp>
       <p:sp>
         <p:nvSpPr>
-          <p:cNvPr id="3" name="">
-            <a:extLst xmlns:a="http://schemas.openxmlformats.org/drawingml/2006/main">
+          <p:cNvPr id="3" name="Прямоугольник 2">
+            <a:extLst>
               <a:ext uri="{FF2B5EF4-FFF2-40B4-BE49-F238E27FC236}">
                 <a16:creationId xmlns:a16="http://schemas.microsoft.com/office/drawing/2014/main" id="{8E6C3FB3-E22C-48F7-BA7E-0DCE6BCAA468}"/>
               </a:ext>
             </a:extLst>
           </p:cNvPr>
           <p:cNvSpPr>
-            <a:spLocks xmlns:a="http://schemas.openxmlformats.org/drawingml/2006/main" noGrp="1"/>
+            <a:spLocks noGrp="1"/>
           </p:cNvSpPr>
           <p:nvPr/>
         </p:nvSpPr>
         <p:spPr>
-          <a:xfrm xmlns:a="http://schemas.openxmlformats.org/drawingml/2006/main">
+          <a:xfrm>
             <a:off x="647700" y="1714500"/>
             <a:ext cx="10572750" cy="1190625"/>
           </a:xfrm>
-          <a:prstGeom xmlns:a="http://schemas.openxmlformats.org/drawingml/2006/main" prst="rect">
+          <a:prstGeom prst="rect">
             <a:avLst/>
           </a:prstGeom>
-          <a:noFill xmlns:a="http://schemas.openxmlformats.org/drawingml/2006/main"/>
-          <a:ln xmlns:a="http://schemas.openxmlformats.org/drawingml/2006/main" w="0">
+          <a:noFill/>
+          <a:ln w="0">
             <a:noFill/>
           </a:ln>
         </p:spPr>
         <p:txBody>
-          <a:bodyPr xmlns:a="http://schemas.openxmlformats.org/drawingml/2006/main" lIns="0" tIns="0" rIns="0" bIns="0" anchor="t">
+          <a:bodyPr lIns="0" tIns="0" rIns="0" bIns="0" anchor="t">
             <a:noAutofit/>
           </a:bodyPr>
-          <a:lstStyle xmlns:a="http://schemas.openxmlformats.org/drawingml/2006/main">
+          <a:lstStyle>
             <a:defPPr>
               <a:defRPr sz="2250" b="0">
                 <a:solidFill>
@@ -11198,7 +10269,7 @@
               </a:defRPr>
             </a:lvl9pPr>
           </a:lstStyle>
-          <a:p xmlns:a="http://schemas.openxmlformats.org/drawingml/2006/main">
+          <a:p>
             <a:pPr>
               <a:defRPr sz="2250" b="0">
                 <a:solidFill>
@@ -11210,7 +10281,7 @@
               </a:defRPr>
             </a:pPr>
             <a:r>
-              <a:rPr sz="2250" b="0">
+              <a:rPr sz="2250" b="0" dirty="0" err="1">
                 <a:solidFill>
                   <a:srgbClr val="F2F5F7"/>
                 </a:solidFill>
@@ -11218,10 +10289,131 @@
                 <a:ea typeface="Noto Sans Display"/>
                 <a:cs typeface="Noto Sans Display"/>
               </a:rPr>
-              <a:t>visudo передал аргумент -- перед именем файла.</a:t>
+              <a:t>visudo</a:t>
+            </a:r>
+            <a:r>
+              <a:rPr sz="2250" b="0" dirty="0">
+                <a:solidFill>
+                  <a:srgbClr val="F2F5F7"/>
+                </a:solidFill>
+                <a:latin typeface="Noto Sans Display"/>
+                <a:ea typeface="Noto Sans Display"/>
+                <a:cs typeface="Noto Sans Display"/>
+              </a:rPr>
+              <a:t> </a:t>
+            </a:r>
+            <a:r>
+              <a:rPr sz="2250" b="0" dirty="0" err="1">
+                <a:solidFill>
+                  <a:srgbClr val="F2F5F7"/>
+                </a:solidFill>
+                <a:latin typeface="Noto Sans Display"/>
+                <a:ea typeface="Noto Sans Display"/>
+                <a:cs typeface="Noto Sans Display"/>
+              </a:rPr>
+              <a:t>передал</a:t>
+            </a:r>
+            <a:r>
+              <a:rPr sz="2250" b="0" dirty="0">
+                <a:solidFill>
+                  <a:srgbClr val="F2F5F7"/>
+                </a:solidFill>
+                <a:latin typeface="Noto Sans Display"/>
+                <a:ea typeface="Noto Sans Display"/>
+                <a:cs typeface="Noto Sans Display"/>
+              </a:rPr>
+              <a:t> </a:t>
+            </a:r>
+            <a:r>
+              <a:rPr sz="2250" b="0" dirty="0" err="1">
+                <a:solidFill>
+                  <a:srgbClr val="F2F5F7"/>
+                </a:solidFill>
+                <a:latin typeface="Noto Sans Display"/>
+                <a:ea typeface="Noto Sans Display"/>
+                <a:cs typeface="Noto Sans Display"/>
+              </a:rPr>
+              <a:t>аргумент</a:t>
+            </a:r>
+            <a:r>
+              <a:rPr sz="2250" b="0" dirty="0">
+                <a:solidFill>
+                  <a:srgbClr val="F2F5F7"/>
+                </a:solidFill>
+                <a:latin typeface="Noto Sans Display"/>
+                <a:ea typeface="Noto Sans Display"/>
+                <a:cs typeface="Noto Sans Display"/>
+              </a:rPr>
+              <a:t> -- </a:t>
+            </a:r>
+            <a:r>
+              <a:rPr sz="2250" b="0" dirty="0" err="1">
+                <a:solidFill>
+                  <a:srgbClr val="F2F5F7"/>
+                </a:solidFill>
+                <a:latin typeface="Noto Sans Display"/>
+                <a:ea typeface="Noto Sans Display"/>
+                <a:cs typeface="Noto Sans Display"/>
+              </a:rPr>
+              <a:t>перед</a:t>
+            </a:r>
+            <a:r>
+              <a:rPr sz="2250" b="0" dirty="0">
+                <a:solidFill>
+                  <a:srgbClr val="F2F5F7"/>
+                </a:solidFill>
+                <a:latin typeface="Noto Sans Display"/>
+                <a:ea typeface="Noto Sans Display"/>
+                <a:cs typeface="Noto Sans Display"/>
+              </a:rPr>
+              <a:t> </a:t>
+            </a:r>
+            <a:r>
+              <a:rPr sz="2250" b="0" dirty="0" err="1">
+                <a:solidFill>
+                  <a:srgbClr val="F2F5F7"/>
+                </a:solidFill>
+                <a:latin typeface="Noto Sans Display"/>
+                <a:ea typeface="Noto Sans Display"/>
+                <a:cs typeface="Noto Sans Display"/>
+              </a:rPr>
+              <a:t>именем</a:t>
+            </a:r>
+            <a:r>
+              <a:rPr sz="2250" b="0" dirty="0">
+                <a:solidFill>
+                  <a:srgbClr val="F2F5F7"/>
+                </a:solidFill>
+                <a:latin typeface="Noto Sans Display"/>
+                <a:ea typeface="Noto Sans Display"/>
+                <a:cs typeface="Noto Sans Display"/>
+              </a:rPr>
+              <a:t> </a:t>
+            </a:r>
+            <a:r>
+              <a:rPr sz="2250" b="0" dirty="0" err="1">
+                <a:solidFill>
+                  <a:srgbClr val="F2F5F7"/>
+                </a:solidFill>
+                <a:latin typeface="Noto Sans Display"/>
+                <a:ea typeface="Noto Sans Display"/>
+                <a:cs typeface="Noto Sans Display"/>
+              </a:rPr>
+              <a:t>файла</a:t>
+            </a:r>
+            <a:r>
+              <a:rPr sz="2250" b="0" dirty="0">
+                <a:solidFill>
+                  <a:srgbClr val="F2F5F7"/>
+                </a:solidFill>
+                <a:latin typeface="Noto Sans Display"/>
+                <a:ea typeface="Noto Sans Display"/>
+                <a:cs typeface="Noto Sans Display"/>
+              </a:rPr>
+              <a:t>.</a:t>
             </a:r>
           </a:p>
-          <a:p xmlns:a="http://schemas.openxmlformats.org/drawingml/2006/main">
+          <a:p>
             <a:pPr>
               <a:defRPr sz="2250" b="0">
                 <a:solidFill>
@@ -11233,7 +10425,7 @@
               </a:defRPr>
             </a:pPr>
             <a:r>
-              <a:rPr sz="2250" b="0">
+              <a:rPr sz="2250" b="0" dirty="0" err="1">
                 <a:solidFill>
                   <a:srgbClr val="F2F5F7"/>
                 </a:solidFill>
@@ -11241,43 +10433,142 @@
                 <a:ea typeface="Noto Sans Display"/>
                 <a:cs typeface="Noto Sans Display"/>
               </a:rPr>
-              <a:t>Редактор записал правило в файл с именем --.</a:t>
+              <a:t>Редактор</a:t>
+            </a:r>
+            <a:r>
+              <a:rPr sz="2250" b="0" dirty="0">
+                <a:solidFill>
+                  <a:srgbClr val="F2F5F7"/>
+                </a:solidFill>
+                <a:latin typeface="Noto Sans Display"/>
+                <a:ea typeface="Noto Sans Display"/>
+                <a:cs typeface="Noto Sans Display"/>
+              </a:rPr>
+              <a:t> </a:t>
+            </a:r>
+            <a:r>
+              <a:rPr sz="2250" b="0" dirty="0" err="1">
+                <a:solidFill>
+                  <a:srgbClr val="F2F5F7"/>
+                </a:solidFill>
+                <a:latin typeface="Noto Sans Display"/>
+                <a:ea typeface="Noto Sans Display"/>
+                <a:cs typeface="Noto Sans Display"/>
+              </a:rPr>
+              <a:t>записал</a:t>
+            </a:r>
+            <a:r>
+              <a:rPr sz="2250" b="0" dirty="0">
+                <a:solidFill>
+                  <a:srgbClr val="F2F5F7"/>
+                </a:solidFill>
+                <a:latin typeface="Noto Sans Display"/>
+                <a:ea typeface="Noto Sans Display"/>
+                <a:cs typeface="Noto Sans Display"/>
+              </a:rPr>
+              <a:t> </a:t>
+            </a:r>
+            <a:r>
+              <a:rPr sz="2250" b="0" dirty="0" err="1">
+                <a:solidFill>
+                  <a:srgbClr val="F2F5F7"/>
+                </a:solidFill>
+                <a:latin typeface="Noto Sans Display"/>
+                <a:ea typeface="Noto Sans Display"/>
+                <a:cs typeface="Noto Sans Display"/>
+              </a:rPr>
+              <a:t>правило</a:t>
+            </a:r>
+            <a:r>
+              <a:rPr sz="2250" b="0" dirty="0">
+                <a:solidFill>
+                  <a:srgbClr val="F2F5F7"/>
+                </a:solidFill>
+                <a:latin typeface="Noto Sans Display"/>
+                <a:ea typeface="Noto Sans Display"/>
+                <a:cs typeface="Noto Sans Display"/>
+              </a:rPr>
+              <a:t> в </a:t>
+            </a:r>
+            <a:r>
+              <a:rPr sz="2250" b="0" dirty="0" err="1">
+                <a:solidFill>
+                  <a:srgbClr val="F2F5F7"/>
+                </a:solidFill>
+                <a:latin typeface="Noto Sans Display"/>
+                <a:ea typeface="Noto Sans Display"/>
+                <a:cs typeface="Noto Sans Display"/>
+              </a:rPr>
+              <a:t>файл</a:t>
+            </a:r>
+            <a:r>
+              <a:rPr sz="2250" b="0" dirty="0">
+                <a:solidFill>
+                  <a:srgbClr val="F2F5F7"/>
+                </a:solidFill>
+                <a:latin typeface="Noto Sans Display"/>
+                <a:ea typeface="Noto Sans Display"/>
+                <a:cs typeface="Noto Sans Display"/>
+              </a:rPr>
+              <a:t> с </a:t>
+            </a:r>
+            <a:r>
+              <a:rPr sz="2250" b="0" dirty="0" err="1">
+                <a:solidFill>
+                  <a:srgbClr val="F2F5F7"/>
+                </a:solidFill>
+                <a:latin typeface="Noto Sans Display"/>
+                <a:ea typeface="Noto Sans Display"/>
+                <a:cs typeface="Noto Sans Display"/>
+              </a:rPr>
+              <a:t>именем</a:t>
+            </a:r>
+            <a:r>
+              <a:rPr sz="2250" b="0" dirty="0">
+                <a:solidFill>
+                  <a:srgbClr val="F2F5F7"/>
+                </a:solidFill>
+                <a:latin typeface="Noto Sans Display"/>
+                <a:ea typeface="Noto Sans Display"/>
+                <a:cs typeface="Noto Sans Display"/>
+              </a:rPr>
+              <a:t> --.</a:t>
             </a:r>
           </a:p>
         </p:txBody>
       </p:sp>
       <p:sp>
         <p:nvSpPr>
-          <p:cNvPr id="4" name="">
-            <a:extLst xmlns:a="http://schemas.openxmlformats.org/drawingml/2006/main">
+          <p:cNvPr id="4" name="Прямоугольник 3">
+            <a:extLst>
               <a:ext uri="{FF2B5EF4-FFF2-40B4-BE49-F238E27FC236}">
                 <a16:creationId xmlns:a16="http://schemas.microsoft.com/office/drawing/2014/main" id="{96322E38-467F-4AA4-A002-8EFBF25FE746}"/>
               </a:ext>
             </a:extLst>
           </p:cNvPr>
           <p:cNvSpPr>
-            <a:spLocks xmlns:a="http://schemas.openxmlformats.org/drawingml/2006/main" noGrp="1"/>
+            <a:spLocks noGrp="1"/>
           </p:cNvSpPr>
           <p:nvPr/>
         </p:nvSpPr>
         <p:spPr>
-          <a:xfrm xmlns:a="http://schemas.openxmlformats.org/drawingml/2006/main">
+          <a:xfrm>
             <a:off x="647700" y="3238500"/>
             <a:ext cx="10477500" cy="476250"/>
           </a:xfrm>
-          <a:prstGeom xmlns:a="http://schemas.openxmlformats.org/drawingml/2006/main" prst="rect">
+          <a:prstGeom prst="rect">
             <a:avLst/>
           </a:prstGeom>
-          <a:noFill xmlns:a="http://schemas.openxmlformats.org/drawingml/2006/main"/>
-          <a:ln xmlns:a="http://schemas.openxmlformats.org/drawingml/2006/main" w="0">
+          <a:noFill/>
+          <a:ln w="0">
             <a:noFill/>
           </a:ln>
         </p:spPr>
         <p:txBody>
-          <a:bodyPr xmlns:a="http://schemas.openxmlformats.org/drawingml/2006/main" lIns="0" tIns="0" rIns="0" bIns="0" anchor="t">
+          <a:bodyPr lIns="0" tIns="0" rIns="0" bIns="0" anchor="t">
             <a:noAutofit/>
           </a:bodyPr>
-          <a:lstStyle xmlns:a="http://schemas.openxmlformats.org/drawingml/2006/main">
+          <a:lstStyle>
             <a:defPPr>
               <a:defRPr sz="2325" b="1">
                 <a:solidFill>
@@ -11379,7 +10670,7 @@
               </a:defRPr>
             </a:lvl9pPr>
           </a:lstStyle>
-          <a:p xmlns:a="http://schemas.openxmlformats.org/drawingml/2006/main">
+          <a:p>
             <a:pPr>
               <a:defRPr sz="2325" b="1">
                 <a:solidFill>
@@ -11406,36 +10697,36 @@
       </p:sp>
       <p:sp>
         <p:nvSpPr>
-          <p:cNvPr id="5" name="">
-            <a:extLst xmlns:a="http://schemas.openxmlformats.org/drawingml/2006/main">
+          <p:cNvPr id="5" name="Прямоугольник 4">
+            <a:extLst>
               <a:ext uri="{FF2B5EF4-FFF2-40B4-BE49-F238E27FC236}">
                 <a16:creationId xmlns:a16="http://schemas.microsoft.com/office/drawing/2014/main" id="{53F36A44-403C-47C6-9782-7ECC38EB6838}"/>
               </a:ext>
             </a:extLst>
           </p:cNvPr>
           <p:cNvSpPr>
-            <a:spLocks xmlns:a="http://schemas.openxmlformats.org/drawingml/2006/main" noGrp="1"/>
+            <a:spLocks noGrp="1"/>
           </p:cNvSpPr>
           <p:nvPr/>
         </p:nvSpPr>
         <p:spPr>
-          <a:xfrm xmlns:a="http://schemas.openxmlformats.org/drawingml/2006/main">
+          <a:xfrm>
             <a:off x="647700" y="4000500"/>
             <a:ext cx="10810875" cy="619125"/>
           </a:xfrm>
-          <a:prstGeom xmlns:a="http://schemas.openxmlformats.org/drawingml/2006/main" prst="rect">
+          <a:prstGeom prst="rect">
             <a:avLst/>
           </a:prstGeom>
-          <a:noFill xmlns:a="http://schemas.openxmlformats.org/drawingml/2006/main"/>
-          <a:ln xmlns:a="http://schemas.openxmlformats.org/drawingml/2006/main" w="0">
+          <a:noFill/>
+          <a:ln w="0">
             <a:noFill/>
           </a:ln>
         </p:spPr>
         <p:txBody>
-          <a:bodyPr xmlns:a="http://schemas.openxmlformats.org/drawingml/2006/main" lIns="0" tIns="0" rIns="0" bIns="0" anchor="t">
+          <a:bodyPr lIns="0" tIns="0" rIns="0" bIns="0" anchor="t">
             <a:noAutofit/>
           </a:bodyPr>
-          <a:lstStyle xmlns:a="http://schemas.openxmlformats.org/drawingml/2006/main">
+          <a:lstStyle>
             <a:defPPr>
               <a:defRPr sz="2175" b="0">
                 <a:solidFill>
@@ -11537,7 +10828,7 @@
               </a:defRPr>
             </a:lvl9pPr>
           </a:lstStyle>
-          <a:p xmlns:a="http://schemas.openxmlformats.org/drawingml/2006/main">
+          <a:p>
             <a:pPr>
               <a:defRPr sz="2175" b="0">
                 <a:solidFill>
@@ -11564,36 +10855,36 @@
       </p:sp>
       <p:sp>
         <p:nvSpPr>
-          <p:cNvPr id="6" name="">
-            <a:extLst xmlns:a="http://schemas.openxmlformats.org/drawingml/2006/main">
+          <p:cNvPr id="6" name="Прямоугольник 5">
+            <a:extLst>
               <a:ext uri="{FF2B5EF4-FFF2-40B4-BE49-F238E27FC236}">
                 <a16:creationId xmlns:a16="http://schemas.microsoft.com/office/drawing/2014/main" id="{B3AE0EB3-DB0F-4E6B-8972-08B13A8EF65B}"/>
               </a:ext>
             </a:extLst>
           </p:cNvPr>
           <p:cNvSpPr>
-            <a:spLocks xmlns:a="http://schemas.openxmlformats.org/drawingml/2006/main" noGrp="1"/>
+            <a:spLocks noGrp="1"/>
           </p:cNvSpPr>
           <p:nvPr/>
         </p:nvSpPr>
         <p:spPr>
-          <a:xfrm xmlns:a="http://schemas.openxmlformats.org/drawingml/2006/main">
+          <a:xfrm>
             <a:off x="647700" y="5143500"/>
             <a:ext cx="10763250" cy="1000125"/>
           </a:xfrm>
-          <a:prstGeom xmlns:a="http://schemas.openxmlformats.org/drawingml/2006/main" prst="rect">
+          <a:prstGeom prst="rect">
             <a:avLst/>
           </a:prstGeom>
-          <a:noFill xmlns:a="http://schemas.openxmlformats.org/drawingml/2006/main"/>
-          <a:ln xmlns:a="http://schemas.openxmlformats.org/drawingml/2006/main" w="0">
+          <a:noFill/>
+          <a:ln w="0">
             <a:noFill/>
           </a:ln>
         </p:spPr>
         <p:txBody>
-          <a:bodyPr xmlns:a="http://schemas.openxmlformats.org/drawingml/2006/main" lIns="0" tIns="0" rIns="0" bIns="0" anchor="t">
+          <a:bodyPr lIns="0" tIns="0" rIns="0" bIns="0" anchor="t">
             <a:noAutofit/>
           </a:bodyPr>
-          <a:lstStyle xmlns:a="http://schemas.openxmlformats.org/drawingml/2006/main">
+          <a:lstStyle>
             <a:defPPr>
               <a:defRPr sz="2175" b="0">
                 <a:solidFill>
@@ -11695,7 +10986,7 @@
               </a:defRPr>
             </a:lvl9pPr>
           </a:lstStyle>
-          <a:p xmlns:a="http://schemas.openxmlformats.org/drawingml/2006/main">
+          <a:p>
             <a:pPr>
               <a:defRPr sz="2175" b="0">
                 <a:solidFill>
@@ -11718,7 +11009,7 @@
               <a:t>После исправления visudo -c подтвердил корректность правила.</a:t>
             </a:r>
           </a:p>
-          <a:p xmlns:a="http://schemas.openxmlformats.org/drawingml/2006/main">
+          <a:p>
             <a:pPr>
               <a:defRPr sz="2175" b="0">
                 <a:solidFill>
@@ -11750,17 +11041,21 @@
       </p:ext>
     </p:extLst>
   </p:cSld>
+  <p:clrMapOvr>
+    <a:masterClrMapping/>
+  </p:clrMapOvr>
 </p:sld>
 </file>
 
 <file path=ppt/slides/slide8.xml><?xml version="1.0" encoding="utf-8"?>
-<p:sld xmlns:p="http://schemas.openxmlformats.org/presentationml/2006/main">
+<p:sld xmlns:a="http://schemas.openxmlformats.org/drawingml/2006/main" xmlns:r="http://schemas.openxmlformats.org/officeDocument/2006/relationships" xmlns:p="http://schemas.openxmlformats.org/presentationml/2006/main">
   <p:cSld>
     <p:bg>
       <p:bgPr>
-        <a:solidFill xmlns:a="http://schemas.openxmlformats.org/drawingml/2006/main">
+        <a:solidFill>
           <a:srgbClr val="101C2B"/>
         </a:solidFill>
+        <a:effectLst/>
       </p:bgPr>
     </p:bg>
     <p:spTree>
@@ -11770,40 +11065,45 @@
         <p:nvPr/>
       </p:nvGrpSpPr>
       <p:grpSpPr>
-        <a:xfrm xmlns:a="http://schemas.openxmlformats.org/drawingml/2006/main"/>
+        <a:xfrm>
+          <a:off x="0" y="0"/>
+          <a:ext cx="0" cy="0"/>
+          <a:chOff x="0" y="0"/>
+          <a:chExt cx="0" cy="0"/>
+        </a:xfrm>
       </p:grpSpPr>
       <p:sp>
         <p:nvSpPr>
-          <p:cNvPr id="7" name="">
-            <a:extLst xmlns:a="http://schemas.openxmlformats.org/drawingml/2006/main">
+          <p:cNvPr id="7" name="Прямоугольник 6">
+            <a:extLst>
               <a:ext uri="{FF2B5EF4-FFF2-40B4-BE49-F238E27FC236}">
                 <a16:creationId xmlns:a16="http://schemas.microsoft.com/office/drawing/2014/main" id="{D40A1DCF-3165-4C92-9CC7-DC6548BA0BBF}"/>
               </a:ext>
             </a:extLst>
           </p:cNvPr>
           <p:cNvSpPr>
-            <a:spLocks xmlns:a="http://schemas.openxmlformats.org/drawingml/2006/main" noGrp="1"/>
+            <a:spLocks noGrp="1"/>
           </p:cNvSpPr>
           <p:nvPr/>
         </p:nvSpPr>
         <p:spPr>
-          <a:xfrm xmlns:a="http://schemas.openxmlformats.org/drawingml/2006/main">
+          <a:xfrm>
             <a:off x="647700" y="552450"/>
             <a:ext cx="10858500" cy="876300"/>
           </a:xfrm>
-          <a:prstGeom xmlns:a="http://schemas.openxmlformats.org/drawingml/2006/main" prst="rect">
+          <a:prstGeom prst="rect">
             <a:avLst/>
           </a:prstGeom>
-          <a:noFill xmlns:a="http://schemas.openxmlformats.org/drawingml/2006/main"/>
-          <a:ln xmlns:a="http://schemas.openxmlformats.org/drawingml/2006/main" w="0">
+          <a:noFill/>
+          <a:ln w="0">
             <a:noFill/>
           </a:ln>
         </p:spPr>
         <p:txBody>
-          <a:bodyPr xmlns:a="http://schemas.openxmlformats.org/drawingml/2006/main" lIns="0" tIns="0" rIns="0" bIns="0" anchor="t">
+          <a:bodyPr lIns="0" tIns="0" rIns="0" bIns="0" anchor="t">
             <a:noAutofit/>
           </a:bodyPr>
-          <a:lstStyle xmlns:a="http://schemas.openxmlformats.org/drawingml/2006/main">
+          <a:lstStyle>
             <a:defPPr>
               <a:defRPr sz="3300" b="1">
                 <a:solidFill>
@@ -11905,7 +11205,7 @@
               </a:defRPr>
             </a:lvl9pPr>
           </a:lstStyle>
-          <a:p xmlns:a="http://schemas.openxmlformats.org/drawingml/2006/main">
+          <a:p>
             <a:pPr>
               <a:defRPr sz="3300" b="1">
                 <a:solidFill>
@@ -11932,36 +11232,36 @@
       </p:sp>
       <p:sp>
         <p:nvSpPr>
-          <p:cNvPr id="2" name="">
-            <a:extLst xmlns:a="http://schemas.openxmlformats.org/drawingml/2006/main">
+          <p:cNvPr id="2" name="Прямоугольник 1">
+            <a:extLst>
               <a:ext uri="{FF2B5EF4-FFF2-40B4-BE49-F238E27FC236}">
                 <a16:creationId xmlns:a16="http://schemas.microsoft.com/office/drawing/2014/main" id="{B8FA637F-05AB-47C5-8160-C6F7B7BE16C9}"/>
               </a:ext>
             </a:extLst>
           </p:cNvPr>
           <p:cNvSpPr>
-            <a:spLocks xmlns:a="http://schemas.openxmlformats.org/drawingml/2006/main" noGrp="1"/>
+            <a:spLocks noGrp="1"/>
           </p:cNvSpPr>
           <p:nvPr/>
         </p:nvSpPr>
         <p:spPr>
-          <a:xfrm xmlns:a="http://schemas.openxmlformats.org/drawingml/2006/main">
+          <a:xfrm>
             <a:off x="11125200" y="6334125"/>
             <a:ext cx="476250" cy="266700"/>
           </a:xfrm>
-          <a:prstGeom xmlns:a="http://schemas.openxmlformats.org/drawingml/2006/main" prst="rect">
+          <a:prstGeom prst="rect">
             <a:avLst/>
           </a:prstGeom>
-          <a:noFill xmlns:a="http://schemas.openxmlformats.org/drawingml/2006/main"/>
-          <a:ln xmlns:a="http://schemas.openxmlformats.org/drawingml/2006/main" w="0">
+          <a:noFill/>
+          <a:ln w="0">
             <a:noFill/>
           </a:ln>
         </p:spPr>
         <p:txBody>
-          <a:bodyPr xmlns:a="http://schemas.openxmlformats.org/drawingml/2006/main" lIns="0" tIns="0" rIns="0" bIns="0" anchor="t">
+          <a:bodyPr lIns="0" tIns="0" rIns="0" bIns="0" anchor="t">
             <a:noAutofit/>
           </a:bodyPr>
-          <a:lstStyle xmlns:a="http://schemas.openxmlformats.org/drawingml/2006/main">
+          <a:lstStyle>
             <a:defPPr>
               <a:defRPr sz="1350" b="0">
                 <a:solidFill>
@@ -12063,7 +11363,7 @@
               </a:defRPr>
             </a:lvl9pPr>
           </a:lstStyle>
-          <a:p xmlns:a="http://schemas.openxmlformats.org/drawingml/2006/main">
+          <a:p>
             <a:pPr>
               <a:defRPr sz="1350" b="0">
                 <a:solidFill>
@@ -12090,36 +11390,36 @@
       </p:sp>
       <p:sp>
         <p:nvSpPr>
-          <p:cNvPr id="3" name="">
-            <a:extLst xmlns:a="http://schemas.openxmlformats.org/drawingml/2006/main">
+          <p:cNvPr id="3" name="Прямоугольник 2">
+            <a:extLst>
               <a:ext uri="{FF2B5EF4-FFF2-40B4-BE49-F238E27FC236}">
                 <a16:creationId xmlns:a16="http://schemas.microsoft.com/office/drawing/2014/main" id="{5D7FB081-FE59-487E-85C5-E078B36C14FF}"/>
               </a:ext>
             </a:extLst>
           </p:cNvPr>
           <p:cNvSpPr>
-            <a:spLocks xmlns:a="http://schemas.openxmlformats.org/drawingml/2006/main" noGrp="1"/>
+            <a:spLocks noGrp="1"/>
           </p:cNvSpPr>
           <p:nvPr/>
         </p:nvSpPr>
         <p:spPr>
-          <a:xfrm xmlns:a="http://schemas.openxmlformats.org/drawingml/2006/main">
+          <a:xfrm>
             <a:off x="647700" y="1676400"/>
             <a:ext cx="10810875" cy="1047750"/>
           </a:xfrm>
-          <a:prstGeom xmlns:a="http://schemas.openxmlformats.org/drawingml/2006/main" prst="rect">
+          <a:prstGeom prst="rect">
             <a:avLst/>
           </a:prstGeom>
-          <a:noFill xmlns:a="http://schemas.openxmlformats.org/drawingml/2006/main"/>
-          <a:ln xmlns:a="http://schemas.openxmlformats.org/drawingml/2006/main" w="0">
+          <a:noFill/>
+          <a:ln w="0">
             <a:noFill/>
           </a:ln>
         </p:spPr>
         <p:txBody>
-          <a:bodyPr xmlns:a="http://schemas.openxmlformats.org/drawingml/2006/main" lIns="0" tIns="0" rIns="0" bIns="0" anchor="t">
+          <a:bodyPr lIns="0" tIns="0" rIns="0" bIns="0" anchor="t">
             <a:noAutofit/>
           </a:bodyPr>
-          <a:lstStyle xmlns:a="http://schemas.openxmlformats.org/drawingml/2006/main">
+          <a:lstStyle>
             <a:defPPr>
               <a:defRPr sz="2250" b="0">
                 <a:solidFill>
@@ -12221,7 +11521,7 @@
               </a:defRPr>
             </a:lvl9pPr>
           </a:lstStyle>
-          <a:p xmlns:a="http://schemas.openxmlformats.org/drawingml/2006/main">
+          <a:p>
             <a:pPr>
               <a:defRPr sz="2250" b="0">
                 <a:solidFill>
@@ -12244,7 +11544,7 @@
               <a:t>provision.sh выполняет модули в порядке 10, 20, 30, 40, 50.</a:t>
             </a:r>
           </a:p>
-          <a:p xmlns:a="http://schemas.openxmlformats.org/drawingml/2006/main">
+          <a:p>
             <a:pPr>
               <a:defRPr sz="2250" b="0">
                 <a:solidFill>
@@ -12271,36 +11571,36 @@
       </p:sp>
       <p:sp>
         <p:nvSpPr>
-          <p:cNvPr id="4" name="">
-            <a:extLst xmlns:a="http://schemas.openxmlformats.org/drawingml/2006/main">
+          <p:cNvPr id="4" name="Прямоугольник 3">
+            <a:extLst>
               <a:ext uri="{FF2B5EF4-FFF2-40B4-BE49-F238E27FC236}">
                 <a16:creationId xmlns:a16="http://schemas.microsoft.com/office/drawing/2014/main" id="{1C50C5AF-4DE9-42D9-9B44-301F2401087D}"/>
               </a:ext>
             </a:extLst>
           </p:cNvPr>
           <p:cNvSpPr>
-            <a:spLocks xmlns:a="http://schemas.openxmlformats.org/drawingml/2006/main" noGrp="1"/>
+            <a:spLocks noGrp="1"/>
           </p:cNvSpPr>
           <p:nvPr/>
         </p:nvSpPr>
         <p:spPr>
-          <a:xfrm xmlns:a="http://schemas.openxmlformats.org/drawingml/2006/main">
+          <a:xfrm>
             <a:off x="647700" y="3095625"/>
             <a:ext cx="10477500" cy="476250"/>
           </a:xfrm>
-          <a:prstGeom xmlns:a="http://schemas.openxmlformats.org/drawingml/2006/main" prst="rect">
+          <a:prstGeom prst="rect">
             <a:avLst/>
           </a:prstGeom>
-          <a:noFill xmlns:a="http://schemas.openxmlformats.org/drawingml/2006/main"/>
-          <a:ln xmlns:a="http://schemas.openxmlformats.org/drawingml/2006/main" w="0">
+          <a:noFill/>
+          <a:ln w="0">
             <a:noFill/>
           </a:ln>
         </p:spPr>
         <p:txBody>
-          <a:bodyPr xmlns:a="http://schemas.openxmlformats.org/drawingml/2006/main" lIns="0" tIns="0" rIns="0" bIns="0" anchor="t">
+          <a:bodyPr lIns="0" tIns="0" rIns="0" bIns="0" anchor="t">
             <a:noAutofit/>
           </a:bodyPr>
-          <a:lstStyle xmlns:a="http://schemas.openxmlformats.org/drawingml/2006/main">
+          <a:lstStyle>
             <a:defPPr>
               <a:defRPr sz="2325" b="1">
                 <a:solidFill>
@@ -12402,7 +11702,7 @@
               </a:defRPr>
             </a:lvl9pPr>
           </a:lstStyle>
-          <a:p xmlns:a="http://schemas.openxmlformats.org/drawingml/2006/main">
+          <a:p>
             <a:pPr>
               <a:defRPr sz="2325" b="1">
                 <a:solidFill>
@@ -12429,36 +11729,36 @@
       </p:sp>
       <p:sp>
         <p:nvSpPr>
-          <p:cNvPr id="5" name="">
-            <a:extLst xmlns:a="http://schemas.openxmlformats.org/drawingml/2006/main">
+          <p:cNvPr id="5" name="Прямоугольник 4">
+            <a:extLst>
               <a:ext uri="{FF2B5EF4-FFF2-40B4-BE49-F238E27FC236}">
                 <a16:creationId xmlns:a16="http://schemas.microsoft.com/office/drawing/2014/main" id="{78787902-2B63-4C1A-8565-BDF31ABAAE9F}"/>
               </a:ext>
             </a:extLst>
           </p:cNvPr>
           <p:cNvSpPr>
-            <a:spLocks xmlns:a="http://schemas.openxmlformats.org/drawingml/2006/main" noGrp="1"/>
+            <a:spLocks noGrp="1"/>
           </p:cNvSpPr>
           <p:nvPr/>
         </p:nvSpPr>
         <p:spPr>
-          <a:xfrm xmlns:a="http://schemas.openxmlformats.org/drawingml/2006/main">
+          <a:xfrm>
             <a:off x="647700" y="3886200"/>
             <a:ext cx="10820400" cy="1619250"/>
           </a:xfrm>
-          <a:prstGeom xmlns:a="http://schemas.openxmlformats.org/drawingml/2006/main" prst="rect">
+          <a:prstGeom prst="rect">
             <a:avLst/>
           </a:prstGeom>
-          <a:noFill xmlns:a="http://schemas.openxmlformats.org/drawingml/2006/main"/>
-          <a:ln xmlns:a="http://schemas.openxmlformats.org/drawingml/2006/main" w="0">
+          <a:noFill/>
+          <a:ln w="0">
             <a:noFill/>
           </a:ln>
         </p:spPr>
         <p:txBody>
-          <a:bodyPr xmlns:a="http://schemas.openxmlformats.org/drawingml/2006/main" lIns="0" tIns="0" rIns="0" bIns="0" anchor="t">
+          <a:bodyPr lIns="0" tIns="0" rIns="0" bIns="0" anchor="t">
             <a:noAutofit/>
           </a:bodyPr>
-          <a:lstStyle xmlns:a="http://schemas.openxmlformats.org/drawingml/2006/main">
+          <a:lstStyle>
             <a:defPPr>
               <a:defRPr sz="2175" b="0">
                 <a:solidFill>
@@ -12560,7 +11860,7 @@
               </a:defRPr>
             </a:lvl9pPr>
           </a:lstStyle>
-          <a:p xmlns:a="http://schemas.openxmlformats.org/drawingml/2006/main">
+          <a:p>
             <a:pPr>
               <a:defRPr sz="2175" b="0">
                 <a:solidFill>
@@ -12583,7 +11883,7 @@
               <a:t>sudo bash help/helpdesk-stand.sh</a:t>
             </a:r>
           </a:p>
-          <a:p xmlns:a="http://schemas.openxmlformats.org/drawingml/2006/main">
+          <a:p>
             <a:pPr>
               <a:defRPr sz="2175" b="0">
                 <a:solidFill>
@@ -12606,7 +11906,7 @@
               <a:t>sudo bash provision.sh</a:t>
             </a:r>
           </a:p>
-          <a:p xmlns:a="http://schemas.openxmlformats.org/drawingml/2006/main">
+          <a:p>
             <a:pPr>
               <a:defRPr sz="2175" b="0">
                 <a:solidFill>
@@ -12627,164 +11927,6 @@
                 <a:cs typeface="DejaVu Sans Mono"/>
               </a:rPr>
               <a:t>sudo bash help/helpdesk-acceptance.sh</a:t>
-            </a:r>
-          </a:p>
-        </p:txBody>
-      </p:sp>
-      <p:sp>
-        <p:nvSpPr>
-          <p:cNvPr id="6" name="">
-            <a:extLst xmlns:a="http://schemas.openxmlformats.org/drawingml/2006/main">
-              <a:ext uri="{FF2B5EF4-FFF2-40B4-BE49-F238E27FC236}">
-                <a16:creationId xmlns:a16="http://schemas.microsoft.com/office/drawing/2014/main" id="{B470BD34-C95E-42D1-8944-31057AF509F0}"/>
-              </a:ext>
-            </a:extLst>
-          </p:cNvPr>
-          <p:cNvSpPr>
-            <a:spLocks xmlns:a="http://schemas.openxmlformats.org/drawingml/2006/main" noGrp="1"/>
-          </p:cNvSpPr>
-          <p:nvPr/>
-        </p:nvSpPr>
-        <p:spPr>
-          <a:xfrm xmlns:a="http://schemas.openxmlformats.org/drawingml/2006/main">
-            <a:off x="647700" y="5810250"/>
-            <a:ext cx="10668000" cy="409575"/>
-          </a:xfrm>
-          <a:prstGeom xmlns:a="http://schemas.openxmlformats.org/drawingml/2006/main" prst="rect">
-            <a:avLst/>
-          </a:prstGeom>
-          <a:noFill xmlns:a="http://schemas.openxmlformats.org/drawingml/2006/main"/>
-          <a:ln xmlns:a="http://schemas.openxmlformats.org/drawingml/2006/main" w="0">
-            <a:noFill/>
-          </a:ln>
-        </p:spPr>
-        <p:txBody>
-          <a:bodyPr xmlns:a="http://schemas.openxmlformats.org/drawingml/2006/main" lIns="0" tIns="0" rIns="0" bIns="0" anchor="t">
-            <a:noAutofit/>
-          </a:bodyPr>
-          <a:lstStyle xmlns:a="http://schemas.openxmlformats.org/drawingml/2006/main">
-            <a:defPPr>
-              <a:defRPr sz="1875" b="0">
-                <a:solidFill>
-                  <a:srgbClr val="B7C6D4"/>
-                </a:solidFill>
-                <a:latin typeface="Noto Sans Display"/>
-                <a:ea typeface="Noto Sans Display"/>
-                <a:cs typeface="Noto Sans Display"/>
-              </a:defRPr>
-            </a:defPPr>
-            <a:lvl1pPr>
-              <a:defRPr sz="1875" b="0">
-                <a:solidFill>
-                  <a:srgbClr val="B7C6D4"/>
-                </a:solidFill>
-                <a:latin typeface="Noto Sans Display"/>
-                <a:ea typeface="Noto Sans Display"/>
-                <a:cs typeface="Noto Sans Display"/>
-              </a:defRPr>
-            </a:lvl1pPr>
-            <a:lvl2pPr>
-              <a:defRPr sz="1875" b="0">
-                <a:solidFill>
-                  <a:srgbClr val="B7C6D4"/>
-                </a:solidFill>
-                <a:latin typeface="Noto Sans Display"/>
-                <a:ea typeface="Noto Sans Display"/>
-                <a:cs typeface="Noto Sans Display"/>
-              </a:defRPr>
-            </a:lvl2pPr>
-            <a:lvl3pPr>
-              <a:defRPr sz="1875" b="0">
-                <a:solidFill>
-                  <a:srgbClr val="B7C6D4"/>
-                </a:solidFill>
-                <a:latin typeface="Noto Sans Display"/>
-                <a:ea typeface="Noto Sans Display"/>
-                <a:cs typeface="Noto Sans Display"/>
-              </a:defRPr>
-            </a:lvl3pPr>
-            <a:lvl4pPr>
-              <a:defRPr sz="1875" b="0">
-                <a:solidFill>
-                  <a:srgbClr val="B7C6D4"/>
-                </a:solidFill>
-                <a:latin typeface="Noto Sans Display"/>
-                <a:ea typeface="Noto Sans Display"/>
-                <a:cs typeface="Noto Sans Display"/>
-              </a:defRPr>
-            </a:lvl4pPr>
-            <a:lvl5pPr>
-              <a:defRPr sz="1875" b="0">
-                <a:solidFill>
-                  <a:srgbClr val="B7C6D4"/>
-                </a:solidFill>
-                <a:latin typeface="Noto Sans Display"/>
-                <a:ea typeface="Noto Sans Display"/>
-                <a:cs typeface="Noto Sans Display"/>
-              </a:defRPr>
-            </a:lvl5pPr>
-            <a:lvl6pPr>
-              <a:defRPr sz="1875" b="0">
-                <a:solidFill>
-                  <a:srgbClr val="B7C6D4"/>
-                </a:solidFill>
-                <a:latin typeface="Noto Sans Display"/>
-                <a:ea typeface="Noto Sans Display"/>
-                <a:cs typeface="Noto Sans Display"/>
-              </a:defRPr>
-            </a:lvl6pPr>
-            <a:lvl7pPr>
-              <a:defRPr sz="1875" b="0">
-                <a:solidFill>
-                  <a:srgbClr val="B7C6D4"/>
-                </a:solidFill>
-                <a:latin typeface="Noto Sans Display"/>
-                <a:ea typeface="Noto Sans Display"/>
-                <a:cs typeface="Noto Sans Display"/>
-              </a:defRPr>
-            </a:lvl7pPr>
-            <a:lvl8pPr>
-              <a:defRPr sz="1875" b="0">
-                <a:solidFill>
-                  <a:srgbClr val="B7C6D4"/>
-                </a:solidFill>
-                <a:latin typeface="Noto Sans Display"/>
-                <a:ea typeface="Noto Sans Display"/>
-                <a:cs typeface="Noto Sans Display"/>
-              </a:defRPr>
-            </a:lvl8pPr>
-            <a:lvl9pPr>
-              <a:defRPr sz="1875" b="0">
-                <a:solidFill>
-                  <a:srgbClr val="B7C6D4"/>
-                </a:solidFill>
-                <a:latin typeface="Noto Sans Display"/>
-                <a:ea typeface="Noto Sans Display"/>
-                <a:cs typeface="Noto Sans Display"/>
-              </a:defRPr>
-            </a:lvl9pPr>
-          </a:lstStyle>
-          <a:p xmlns:a="http://schemas.openxmlformats.org/drawingml/2006/main">
-            <a:pPr>
-              <a:defRPr sz="1875" b="0">
-                <a:solidFill>
-                  <a:srgbClr val="B7C6D4"/>
-                </a:solidFill>
-                <a:latin typeface="Noto Sans Display"/>
-                <a:ea typeface="Noto Sans Display"/>
-                <a:cs typeface="Noto Sans Display"/>
-              </a:defRPr>
-            </a:pPr>
-            <a:r>
-              <a:rPr sz="1875" b="0">
-                <a:solidFill>
-                  <a:srgbClr val="B7C6D4"/>
-                </a:solidFill>
-                <a:latin typeface="Noto Sans Display"/>
-                <a:ea typeface="Noto Sans Display"/>
-                <a:cs typeface="Noto Sans Display"/>
-              </a:rPr>
-              <a:t>Стенд сбрасывает предыдущую установку helpdesk</a:t>
             </a:r>
           </a:p>
         </p:txBody>
@@ -12796,17 +11938,21 @@
       </p:ext>
     </p:extLst>
   </p:cSld>
+  <p:clrMapOvr>
+    <a:masterClrMapping/>
+  </p:clrMapOvr>
 </p:sld>
 </file>
 
 <file path=ppt/slides/slide9.xml><?xml version="1.0" encoding="utf-8"?>
-<p:sld xmlns:p="http://schemas.openxmlformats.org/presentationml/2006/main">
+<p:sld xmlns:a="http://schemas.openxmlformats.org/drawingml/2006/main" xmlns:r="http://schemas.openxmlformats.org/officeDocument/2006/relationships" xmlns:p="http://schemas.openxmlformats.org/presentationml/2006/main">
   <p:cSld>
     <p:bg>
       <p:bgPr>
-        <a:solidFill xmlns:a="http://schemas.openxmlformats.org/drawingml/2006/main">
+        <a:solidFill>
           <a:srgbClr val="101C2B"/>
         </a:solidFill>
+        <a:effectLst/>
       </p:bgPr>
     </p:bg>
     <p:spTree>
@@ -12816,40 +11962,45 @@
         <p:nvPr/>
       </p:nvGrpSpPr>
       <p:grpSpPr>
-        <a:xfrm xmlns:a="http://schemas.openxmlformats.org/drawingml/2006/main"/>
+        <a:xfrm>
+          <a:off x="0" y="0"/>
+          <a:ext cx="0" cy="0"/>
+          <a:chOff x="0" y="0"/>
+          <a:chExt cx="0" cy="0"/>
+        </a:xfrm>
       </p:grpSpPr>
       <p:sp>
         <p:nvSpPr>
-          <p:cNvPr id="7" name="">
-            <a:extLst xmlns:a="http://schemas.openxmlformats.org/drawingml/2006/main">
+          <p:cNvPr id="7" name="Прямоугольник 6">
+            <a:extLst>
               <a:ext uri="{FF2B5EF4-FFF2-40B4-BE49-F238E27FC236}">
                 <a16:creationId xmlns:a16="http://schemas.microsoft.com/office/drawing/2014/main" id="{EE49447B-69ED-46C3-92A8-F980B840EA68}"/>
               </a:ext>
             </a:extLst>
           </p:cNvPr>
           <p:cNvSpPr>
-            <a:spLocks xmlns:a="http://schemas.openxmlformats.org/drawingml/2006/main" noGrp="1"/>
+            <a:spLocks noGrp="1"/>
           </p:cNvSpPr>
           <p:nvPr/>
         </p:nvSpPr>
         <p:spPr>
-          <a:xfrm xmlns:a="http://schemas.openxmlformats.org/drawingml/2006/main">
+          <a:xfrm>
             <a:off x="647700" y="552450"/>
             <a:ext cx="10858500" cy="876300"/>
           </a:xfrm>
-          <a:prstGeom xmlns:a="http://schemas.openxmlformats.org/drawingml/2006/main" prst="rect">
+          <a:prstGeom prst="rect">
             <a:avLst/>
           </a:prstGeom>
-          <a:noFill xmlns:a="http://schemas.openxmlformats.org/drawingml/2006/main"/>
-          <a:ln xmlns:a="http://schemas.openxmlformats.org/drawingml/2006/main" w="0">
+          <a:noFill/>
+          <a:ln w="0">
             <a:noFill/>
           </a:ln>
         </p:spPr>
         <p:txBody>
-          <a:bodyPr xmlns:a="http://schemas.openxmlformats.org/drawingml/2006/main" lIns="0" tIns="0" rIns="0" bIns="0" anchor="t">
+          <a:bodyPr lIns="0" tIns="0" rIns="0" bIns="0" anchor="t">
             <a:noAutofit/>
           </a:bodyPr>
-          <a:lstStyle xmlns:a="http://schemas.openxmlformats.org/drawingml/2006/main">
+          <a:lstStyle>
             <a:defPPr>
               <a:defRPr sz="3300" b="1">
                 <a:solidFill>
@@ -12951,7 +12102,7 @@
               </a:defRPr>
             </a:lvl9pPr>
           </a:lstStyle>
-          <a:p xmlns:a="http://schemas.openxmlformats.org/drawingml/2006/main">
+          <a:p>
             <a:pPr>
               <a:defRPr sz="3300" b="1">
                 <a:solidFill>
@@ -12978,36 +12129,36 @@
       </p:sp>
       <p:sp>
         <p:nvSpPr>
-          <p:cNvPr id="2" name="">
-            <a:extLst xmlns:a="http://schemas.openxmlformats.org/drawingml/2006/main">
+          <p:cNvPr id="2" name="Прямоугольник 1">
+            <a:extLst>
               <a:ext uri="{FF2B5EF4-FFF2-40B4-BE49-F238E27FC236}">
                 <a16:creationId xmlns:a16="http://schemas.microsoft.com/office/drawing/2014/main" id="{59C58BAB-0732-43F6-B2DB-97CABF1C5831}"/>
               </a:ext>
             </a:extLst>
           </p:cNvPr>
           <p:cNvSpPr>
-            <a:spLocks xmlns:a="http://schemas.openxmlformats.org/drawingml/2006/main" noGrp="1"/>
+            <a:spLocks noGrp="1"/>
           </p:cNvSpPr>
           <p:nvPr/>
         </p:nvSpPr>
         <p:spPr>
-          <a:xfrm xmlns:a="http://schemas.openxmlformats.org/drawingml/2006/main">
+          <a:xfrm>
             <a:off x="11125200" y="6334125"/>
             <a:ext cx="476250" cy="266700"/>
           </a:xfrm>
-          <a:prstGeom xmlns:a="http://schemas.openxmlformats.org/drawingml/2006/main" prst="rect">
+          <a:prstGeom prst="rect">
             <a:avLst/>
           </a:prstGeom>
-          <a:noFill xmlns:a="http://schemas.openxmlformats.org/drawingml/2006/main"/>
-          <a:ln xmlns:a="http://schemas.openxmlformats.org/drawingml/2006/main" w="0">
+          <a:noFill/>
+          <a:ln w="0">
             <a:noFill/>
           </a:ln>
         </p:spPr>
         <p:txBody>
-          <a:bodyPr xmlns:a="http://schemas.openxmlformats.org/drawingml/2006/main" lIns="0" tIns="0" rIns="0" bIns="0" anchor="t">
+          <a:bodyPr lIns="0" tIns="0" rIns="0" bIns="0" anchor="t">
             <a:noAutofit/>
           </a:bodyPr>
-          <a:lstStyle xmlns:a="http://schemas.openxmlformats.org/drawingml/2006/main">
+          <a:lstStyle>
             <a:defPPr>
               <a:defRPr sz="1350" b="0">
                 <a:solidFill>
@@ -13109,7 +12260,7 @@
               </a:defRPr>
             </a:lvl9pPr>
           </a:lstStyle>
-          <a:p xmlns:a="http://schemas.openxmlformats.org/drawingml/2006/main">
+          <a:p>
             <a:pPr>
               <a:defRPr sz="1350" b="0">
                 <a:solidFill>
@@ -13136,36 +12287,36 @@
       </p:sp>
       <p:sp>
         <p:nvSpPr>
-          <p:cNvPr id="3" name="">
-            <a:extLst xmlns:a="http://schemas.openxmlformats.org/drawingml/2006/main">
+          <p:cNvPr id="3" name="Прямоугольник 2">
+            <a:extLst>
               <a:ext uri="{FF2B5EF4-FFF2-40B4-BE49-F238E27FC236}">
                 <a16:creationId xmlns:a16="http://schemas.microsoft.com/office/drawing/2014/main" id="{CF6E4F29-F597-407E-BAE5-9D60BB06CC0F}"/>
               </a:ext>
             </a:extLst>
           </p:cNvPr>
           <p:cNvSpPr>
-            <a:spLocks xmlns:a="http://schemas.openxmlformats.org/drawingml/2006/main" noGrp="1"/>
+            <a:spLocks noGrp="1"/>
           </p:cNvSpPr>
           <p:nvPr/>
         </p:nvSpPr>
         <p:spPr>
-          <a:xfrm xmlns:a="http://schemas.openxmlformats.org/drawingml/2006/main">
+          <a:xfrm>
             <a:off x="647700" y="1790700"/>
             <a:ext cx="4095750" cy="1285875"/>
           </a:xfrm>
-          <a:prstGeom xmlns:a="http://schemas.openxmlformats.org/drawingml/2006/main" prst="rect">
+          <a:prstGeom prst="rect">
             <a:avLst/>
           </a:prstGeom>
-          <a:noFill xmlns:a="http://schemas.openxmlformats.org/drawingml/2006/main"/>
-          <a:ln xmlns:a="http://schemas.openxmlformats.org/drawingml/2006/main" w="0">
+          <a:noFill/>
+          <a:ln w="0">
             <a:noFill/>
           </a:ln>
         </p:spPr>
         <p:txBody>
-          <a:bodyPr xmlns:a="http://schemas.openxmlformats.org/drawingml/2006/main" lIns="0" tIns="0" rIns="0" bIns="0" anchor="t">
+          <a:bodyPr lIns="0" tIns="0" rIns="0" bIns="0" anchor="t">
             <a:noAutofit/>
           </a:bodyPr>
-          <a:lstStyle xmlns:a="http://schemas.openxmlformats.org/drawingml/2006/main">
+          <a:lstStyle>
             <a:defPPr>
               <a:defRPr sz="6600" b="1">
                 <a:solidFill>
@@ -13267,7 +12418,7 @@
               </a:defRPr>
             </a:lvl9pPr>
           </a:lstStyle>
-          <a:p xmlns:a="http://schemas.openxmlformats.org/drawingml/2006/main">
+          <a:p>
             <a:pPr>
               <a:defRPr sz="6600" b="1">
                 <a:solidFill>
@@ -13294,36 +12445,36 @@
       </p:sp>
       <p:sp>
         <p:nvSpPr>
-          <p:cNvPr id="4" name="">
-            <a:extLst xmlns:a="http://schemas.openxmlformats.org/drawingml/2006/main">
+          <p:cNvPr id="4" name="Прямоугольник 3">
+            <a:extLst>
               <a:ext uri="{FF2B5EF4-FFF2-40B4-BE49-F238E27FC236}">
                 <a16:creationId xmlns:a16="http://schemas.microsoft.com/office/drawing/2014/main" id="{3FF3B5E5-C3C6-471D-A187-852EF0BA52DF}"/>
               </a:ext>
             </a:extLst>
           </p:cNvPr>
           <p:cNvSpPr>
-            <a:spLocks xmlns:a="http://schemas.openxmlformats.org/drawingml/2006/main" noGrp="1"/>
+            <a:spLocks noGrp="1"/>
           </p:cNvSpPr>
           <p:nvPr/>
         </p:nvSpPr>
         <p:spPr>
-          <a:xfrm xmlns:a="http://schemas.openxmlformats.org/drawingml/2006/main">
+          <a:xfrm>
             <a:off x="647700" y="3333750"/>
             <a:ext cx="4191000" cy="809625"/>
           </a:xfrm>
-          <a:prstGeom xmlns:a="http://schemas.openxmlformats.org/drawingml/2006/main" prst="rect">
+          <a:prstGeom prst="rect">
             <a:avLst/>
           </a:prstGeom>
-          <a:noFill xmlns:a="http://schemas.openxmlformats.org/drawingml/2006/main"/>
-          <a:ln xmlns:a="http://schemas.openxmlformats.org/drawingml/2006/main" w="0">
+          <a:noFill/>
+          <a:ln w="0">
             <a:noFill/>
           </a:ln>
         </p:spPr>
         <p:txBody>
-          <a:bodyPr xmlns:a="http://schemas.openxmlformats.org/drawingml/2006/main" lIns="0" tIns="0" rIns="0" bIns="0" anchor="t">
+          <a:bodyPr lIns="0" tIns="0" rIns="0" bIns="0" anchor="t">
             <a:noAutofit/>
           </a:bodyPr>
-          <a:lstStyle xmlns:a="http://schemas.openxmlformats.org/drawingml/2006/main">
+          <a:lstStyle>
             <a:defPPr>
               <a:defRPr sz="2400" b="0">
                 <a:solidFill>
@@ -13425,7 +12576,7 @@
               </a:defRPr>
             </a:lvl9pPr>
           </a:lstStyle>
-          <a:p xmlns:a="http://schemas.openxmlformats.org/drawingml/2006/main">
+          <a:p>
             <a:pPr>
               <a:defRPr sz="2400" b="0">
                 <a:solidFill>
@@ -13452,36 +12603,36 @@
       </p:sp>
       <p:sp>
         <p:nvSpPr>
-          <p:cNvPr id="5" name="">
-            <a:extLst xmlns:a="http://schemas.openxmlformats.org/drawingml/2006/main">
+          <p:cNvPr id="5" name="Прямоугольник 4">
+            <a:extLst>
               <a:ext uri="{FF2B5EF4-FFF2-40B4-BE49-F238E27FC236}">
                 <a16:creationId xmlns:a16="http://schemas.microsoft.com/office/drawing/2014/main" id="{F3B66B33-481C-4AB0-8BCB-EF8C89737C8B}"/>
               </a:ext>
             </a:extLst>
           </p:cNvPr>
           <p:cNvSpPr>
-            <a:spLocks xmlns:a="http://schemas.openxmlformats.org/drawingml/2006/main" noGrp="1"/>
+            <a:spLocks noGrp="1"/>
           </p:cNvSpPr>
           <p:nvPr/>
         </p:nvSpPr>
         <p:spPr>
-          <a:xfrm xmlns:a="http://schemas.openxmlformats.org/drawingml/2006/main">
+          <a:xfrm>
             <a:off x="647700" y="4429125"/>
             <a:ext cx="4286250" cy="1619250"/>
           </a:xfrm>
-          <a:prstGeom xmlns:a="http://schemas.openxmlformats.org/drawingml/2006/main" prst="rect">
+          <a:prstGeom prst="rect">
             <a:avLst/>
           </a:prstGeom>
-          <a:noFill xmlns:a="http://schemas.openxmlformats.org/drawingml/2006/main"/>
-          <a:ln xmlns:a="http://schemas.openxmlformats.org/drawingml/2006/main" w="0">
+          <a:noFill/>
+          <a:ln w="0">
             <a:noFill/>
           </a:ln>
         </p:spPr>
         <p:txBody>
-          <a:bodyPr xmlns:a="http://schemas.openxmlformats.org/drawingml/2006/main" lIns="0" tIns="0" rIns="0" bIns="0" anchor="t">
+          <a:bodyPr lIns="0" tIns="0" rIns="0" bIns="0" anchor="t">
             <a:noAutofit/>
           </a:bodyPr>
-          <a:lstStyle xmlns:a="http://schemas.openxmlformats.org/drawingml/2006/main">
+          <a:lstStyle>
             <a:defPPr>
               <a:defRPr sz="2025" b="0">
                 <a:solidFill>
@@ -13583,7 +12734,7 @@
               </a:defRPr>
             </a:lvl9pPr>
           </a:lstStyle>
-          <a:p xmlns:a="http://schemas.openxmlformats.org/drawingml/2006/main">
+          <a:p>
             <a:pPr>
               <a:defRPr sz="2025" b="0">
                 <a:solidFill>
@@ -13606,7 +12757,7 @@
               <a:t>Служба работает от helpdesk.</a:t>
             </a:r>
           </a:p>
-          <a:p xmlns:a="http://schemas.openxmlformats.org/drawingml/2006/main">
+          <a:p>
             <a:pPr>
               <a:defRPr sz="2025" b="0">
                 <a:solidFill>
@@ -13629,7 +12780,7 @@
               <a:t>Права проверили по ролям.</a:t>
             </a:r>
           </a:p>
-          <a:p xmlns:a="http://schemas.openxmlformats.org/drawingml/2006/main">
+          <a:p>
             <a:pPr>
               <a:defRPr sz="2025" b="0">
                 <a:solidFill>
@@ -13652,7 +12803,7 @@
               <a:t>Результаты сохранили</a:t>
             </a:r>
           </a:p>
-          <a:p xmlns:a="http://schemas.openxmlformats.org/drawingml/2006/main">
+          <a:p>
             <a:pPr>
               <a:defRPr sz="2025" b="0">
                 <a:solidFill>
@@ -13679,28 +12830,28 @@
       </p:sp>
       <p:pic>
         <p:nvPicPr>
-          <p:cNvPr id="6" name="">
-            <a:extLst xmlns:a="http://schemas.openxmlformats.org/drawingml/2006/main">
+          <p:cNvPr id="6" name="Рисунок 5">
+            <a:extLst>
               <a:ext uri="{FF2B5EF4-FFF2-40B4-BE49-F238E27FC236}">
                 <a16:creationId xmlns:a16="http://schemas.microsoft.com/office/drawing/2014/main" id="{BE66F4CB-CF02-4C25-BBB1-4D645A183506}"/>
               </a:ext>
             </a:extLst>
           </p:cNvPr>
           <p:cNvPicPr>
-            <a:picLocks xmlns:a="http://schemas.openxmlformats.org/drawingml/2006/main" noChangeAspect="1"/>
+            <a:picLocks noChangeAspect="1"/>
           </p:cNvPicPr>
           <p:nvPr/>
         </p:nvPicPr>
         <p:blipFill>
-          <a:blip xmlns:r="http://schemas.openxmlformats.org/officeDocument/2006/relationships" xmlns:a="http://schemas.openxmlformats.org/drawingml/2006/main" r:embed="R8820f8d768af4f48"/>
-          <a:stretch xmlns:a="http://schemas.openxmlformats.org/drawingml/2006/main"/>
+          <a:blip r:embed="rId3"/>
+          <a:stretch/>
         </p:blipFill>
         <p:spPr>
-          <a:xfrm xmlns:a="http://schemas.openxmlformats.org/drawingml/2006/main">
+          <a:xfrm>
             <a:off x="5314950" y="2064204"/>
             <a:ext cx="6238875" cy="3301091"/>
           </a:xfrm>
-          <a:prstGeom xmlns:a="http://schemas.openxmlformats.org/drawingml/2006/main" prst="rect">
+          <a:prstGeom prst="rect">
             <a:avLst/>
           </a:prstGeom>
         </p:spPr>
@@ -13712,6 +12863,9 @@
       </p:ext>
     </p:extLst>
   </p:cSld>
+  <p:clrMapOvr>
+    <a:masterClrMapping/>
+  </p:clrMapOvr>
 </p:sld>
 </file>
 
@@ -13957,5 +13111,254 @@
       </a:bgFillStyleLst>
     </a:fmtScheme>
   </a:themeElements>
+  <a:objectDefaults/>
+  <a:extraClrSchemeLst/>
+</a:theme>
+</file>
+
+<file path=ppt/theme/theme2.xml><?xml version="1.0" encoding="utf-8"?>
+<a:theme xmlns:a="http://schemas.openxmlformats.org/drawingml/2006/main" name="ChatGPT">
+  <a:themeElements>
+    <a:clrScheme name="ChatGPT">
+      <a:dk1>
+        <a:srgbClr val="000000"/>
+      </a:dk1>
+      <a:lt1>
+        <a:srgbClr val="FFFFFF"/>
+      </a:lt1>
+      <a:dk2>
+        <a:srgbClr val="0E2841"/>
+      </a:dk2>
+      <a:lt2>
+        <a:srgbClr val="E8E8E8"/>
+      </a:lt2>
+      <a:accent1>
+        <a:srgbClr val="156082"/>
+      </a:accent1>
+      <a:accent2>
+        <a:srgbClr val="E97132"/>
+      </a:accent2>
+      <a:accent3>
+        <a:srgbClr val="196B24"/>
+      </a:accent3>
+      <a:accent4>
+        <a:srgbClr val="0F9ED5"/>
+      </a:accent4>
+      <a:accent5>
+        <a:srgbClr val="A02B93"/>
+      </a:accent5>
+      <a:accent6>
+        <a:srgbClr val="4EA72E"/>
+      </a:accent6>
+      <a:hlink>
+        <a:srgbClr val="467886"/>
+      </a:hlink>
+      <a:folHlink>
+        <a:srgbClr val="96607D"/>
+      </a:folHlink>
+    </a:clrScheme>
+    <a:fontScheme name="">
+      <a:majorFont>
+        <a:latin typeface="Aptos"/>
+        <a:ea typeface=""/>
+        <a:cs typeface=""/>
+      </a:majorFont>
+      <a:minorFont>
+        <a:latin typeface="Aptos"/>
+        <a:ea typeface=""/>
+        <a:cs typeface=""/>
+      </a:minorFont>
+    </a:fontScheme>
+    <a:fmtScheme name="ChatGPT">
+      <a:fillStyleLst>
+        <a:solidFill>
+          <a:schemeClr val="phClr"/>
+        </a:solidFill>
+        <a:gradFill>
+          <a:gsLst>
+            <a:gs pos="0">
+              <a:schemeClr val="phClr">
+                <a:tint val="67000"/>
+                <a:lumMod val="110000"/>
+                <a:satMod val="105000"/>
+              </a:schemeClr>
+            </a:gs>
+            <a:gs pos="50000">
+              <a:schemeClr val="phClr">
+                <a:tint val="73000"/>
+                <a:lumMod val="105000"/>
+                <a:satMod val="103000"/>
+              </a:schemeClr>
+            </a:gs>
+            <a:gs pos="100000">
+              <a:schemeClr val="phClr">
+                <a:tint val="81000"/>
+                <a:lumMod val="105000"/>
+                <a:satMod val="109000"/>
+              </a:schemeClr>
+            </a:gs>
+          </a:gsLst>
+          <a:lin ang="5400000" scaled="0"/>
+        </a:gradFill>
+        <a:gradFill>
+          <a:gsLst>
+            <a:gs pos="0">
+              <a:schemeClr val="phClr">
+                <a:tint val="94000"/>
+                <a:lumMod val="102000"/>
+                <a:satMod val="103000"/>
+              </a:schemeClr>
+            </a:gs>
+            <a:gs pos="50000">
+              <a:schemeClr val="phClr">
+                <a:shade val="100000"/>
+                <a:lumMod val="100000"/>
+                <a:satMod val="110000"/>
+              </a:schemeClr>
+            </a:gs>
+            <a:gs pos="100000">
+              <a:schemeClr val="phClr">
+                <a:shade val="78000"/>
+                <a:lumMod val="99000"/>
+                <a:satMod val="120000"/>
+              </a:schemeClr>
+            </a:gs>
+          </a:gsLst>
+          <a:lin ang="5400000" scaled="0"/>
+        </a:gradFill>
+      </a:fillStyleLst>
+      <a:lnStyleLst>
+        <a:ln w="12700">
+          <a:solidFill>
+            <a:schemeClr val="phClr"/>
+          </a:solidFill>
+          <a:prstDash val="solid"/>
+        </a:ln>
+        <a:ln w="19050">
+          <a:solidFill>
+            <a:schemeClr val="phClr"/>
+          </a:solidFill>
+          <a:prstDash val="solid"/>
+        </a:ln>
+        <a:ln w="25400">
+          <a:solidFill>
+            <a:schemeClr val="phClr"/>
+          </a:solidFill>
+          <a:prstDash val="solid"/>
+        </a:ln>
+      </a:lnStyleLst>
+      <a:effectStyleLst>
+        <a:effectStyle>
+          <a:effectLst/>
+        </a:effectStyle>
+        <a:effectStyle>
+          <a:effectLst/>
+        </a:effectStyle>
+        <a:effectStyle>
+          <a:effectLst>
+            <a:outerShdw blurRad="57150" dist="19050" dir="5400000">
+              <a:srgbClr val="000000">
+                <a:alpha val="16000"/>
+              </a:srgbClr>
+            </a:outerShdw>
+          </a:effectLst>
+        </a:effectStyle>
+        <a:effectStyle>
+          <a:effectLst>
+            <a:outerShdw blurRad="19050" dist="9525" dir="5400000">
+              <a:srgbClr val="000000">
+                <a:alpha val="6000"/>
+              </a:srgbClr>
+            </a:outerShdw>
+          </a:effectLst>
+        </a:effectStyle>
+        <a:effectStyle>
+          <a:effectLst>
+            <a:outerShdw blurRad="28575" dist="9525" dir="5400000">
+              <a:srgbClr val="000000">
+                <a:alpha val="8000"/>
+              </a:srgbClr>
+            </a:outerShdw>
+          </a:effectLst>
+        </a:effectStyle>
+        <a:effectStyle>
+          <a:effectLst>
+            <a:outerShdw blurRad="57150" dist="19050" dir="5400000">
+              <a:srgbClr val="000000">
+                <a:alpha val="10000"/>
+              </a:srgbClr>
+            </a:outerShdw>
+          </a:effectLst>
+        </a:effectStyle>
+        <a:effectStyle>
+          <a:effectLst>
+            <a:outerShdw blurRad="114300" dist="38100" dir="5400000">
+              <a:srgbClr val="000000">
+                <a:alpha val="12000"/>
+              </a:srgbClr>
+            </a:outerShdw>
+          </a:effectLst>
+        </a:effectStyle>
+        <a:effectStyle>
+          <a:effectLst>
+            <a:outerShdw blurRad="171450" dist="57150" dir="5400000">
+              <a:srgbClr val="000000">
+                <a:alpha val="16000"/>
+              </a:srgbClr>
+            </a:outerShdw>
+          </a:effectLst>
+        </a:effectStyle>
+        <a:effectStyle>
+          <a:effectLst>
+            <a:outerShdw blurRad="266700" dist="95250" dir="5400000">
+              <a:srgbClr val="000000">
+                <a:alpha val="24000"/>
+              </a:srgbClr>
+            </a:outerShdw>
+          </a:effectLst>
+        </a:effectStyle>
+      </a:effectStyleLst>
+      <a:bgFillStyleLst>
+        <a:solidFill>
+          <a:schemeClr val="phClr"/>
+        </a:solidFill>
+        <a:solidFill>
+          <a:schemeClr val="phClr">
+            <a:tint val="95000"/>
+            <a:satMod val="170000"/>
+          </a:schemeClr>
+        </a:solidFill>
+        <a:gradFill>
+          <a:gsLst>
+            <a:gs pos="0">
+              <a:schemeClr val="phClr">
+                <a:tint val="93000"/>
+                <a:shade val="98000"/>
+                <a:lumMod val="102000"/>
+                <a:satMod val="150000"/>
+              </a:schemeClr>
+            </a:gs>
+            <a:gs pos="50000">
+              <a:schemeClr val="phClr">
+                <a:tint val="98000"/>
+                <a:shade val="90000"/>
+                <a:lumMod val="103000"/>
+                <a:satMod val="130000"/>
+              </a:schemeClr>
+            </a:gs>
+            <a:gs pos="100000">
+              <a:schemeClr val="phClr">
+                <a:shade val="63000"/>
+                <a:satMod val="120000"/>
+              </a:schemeClr>
+            </a:gs>
+          </a:gsLst>
+          <a:lin ang="5400000" scaled="0"/>
+        </a:gradFill>
+      </a:bgFillStyleLst>
+    </a:fmtScheme>
+  </a:themeElements>
+  <a:objectDefaults/>
+  <a:extraClrSchemeLst/>
 </a:theme>
 </file>